--- a/outputs/Red_Sox_Trade_Deadline.pptx
+++ b/outputs/Red_Sox_Trade_Deadline.pptx
@@ -22,8 +22,6 @@
     <p:sldId id="270" r:id="rId21"/>
     <p:sldId id="271" r:id="rId22"/>
     <p:sldId id="272" r:id="rId23"/>
-    <p:sldId id="273" r:id="rId24"/>
-    <p:sldId id="274" r:id="rId25"/>
   </p:sldIdLst>
   <p:sldSz cx="12191695" cy="6858000" type="screen4x3"/>
   <p:notesSz cx="6858000" cy="9144000"/>
@@ -3239,7 +3237,7 @@
                 </a:solidFill>
                 <a:latin typeface="Arial"/>
               </a:rPr>
-              <a:t>Red Sox Trade Deadline,</a:t>
+              <a:t>Red Sox Trade Deadline</a:t>
             </a:r>
           </a:p>
           <a:p>
@@ -3258,7 +3256,7 @@
                 </a:solidFill>
                 <a:latin typeface="Arial"/>
               </a:rPr>
-              <a:t>By the Numbers</a:t>
+              <a:t>Thoughts</a:t>
             </a:r>
           </a:p>
         </p:txBody>
@@ -3300,7 +3298,7 @@
                 </a:solidFill>
                 <a:latin typeface="Arial"/>
               </a:rPr>
-              <a:t>A buy/sell assessment built on live data: playoff odds, a positional audit, overvalue checks, and the trades that fit. 8 days to August 3.</a:t>
+              <a:t>After an incredible push, the Sox are in a position to be buyers before this trade deadline. A breakdown of our new acquisition, Curtis Mead, and what else the Sox need to do for a deep playoff run. 8 days to August 3.</a:t>
             </a:r>
           </a:p>
         </p:txBody>
@@ -4065,7 +4063,7 @@
                 </a:solidFill>
                 <a:latin typeface="Arial"/>
               </a:rPr>
-              <a:t>Career years everywhere. That's a tailwind, not a foundation</a:t>
+              <a:t>Career years everywhere. Could mean regression</a:t>
             </a:r>
           </a:p>
         </p:txBody>
@@ -4177,7 +4175,7 @@
                 </a:solidFill>
                 <a:latin typeface="Arial"/>
               </a:rPr>
-              <a:t>15 quad-A contributors</a:t>
+              <a:t>15 AAAA contributors</a:t>
             </a:r>
           </a:p>
           <a:p>
@@ -4303,7 +4301,7 @@
                 </a:solidFill>
                 <a:latin typeface="Arial"/>
               </a:rPr>
-              <a:t>Most of the returners are beating every season they've ever had; the rookies have no baseline at all.</a:t>
+              <a:t>Most of the vets are beating every season they've ever had; the rookies have no baseline at all.</a:t>
             </a:r>
           </a:p>
         </p:txBody>
@@ -4317,113 +4315,6 @@
         <p:spPr>
           <a:xfrm>
             <a:off x="8001000" y="4005072"/>
-            <a:ext cx="146304" cy="146304"/>
-          </a:xfrm>
-          <a:prstGeom prst="roundRect">
-            <a:avLst>
-              <a:gd name="adj" fmla="val 18000"/>
-            </a:avLst>
-          </a:prstGeom>
-          <a:solidFill>
-            <a:srgbClr val="EAF0F8"/>
-          </a:solidFill>
-          <a:ln>
-            <a:noFill/>
-          </a:ln>
-          <a:effectLst/>
-        </p:spPr>
-        <p:style>
-          <a:lnRef idx="1">
-            <a:schemeClr val="accent1"/>
-          </a:lnRef>
-          <a:fillRef idx="3">
-            <a:schemeClr val="accent1"/>
-          </a:fillRef>
-          <a:effectRef idx="2">
-            <a:schemeClr val="accent1"/>
-          </a:effectRef>
-          <a:fontRef idx="minor">
-            <a:schemeClr val="lt1"/>
-          </a:fontRef>
-        </p:style>
-        <p:txBody>
-          <a:bodyPr rtlCol="0" anchor="ctr"/>
-          <a:lstStyle/>
-          <a:p>
-            <a:pPr algn="ctr"/>
-          </a:p>
-        </p:txBody>
-      </p:sp>
-      <p:sp>
-        <p:nvSpPr>
-          <p:cNvPr id="10" name="TextBox 9"/>
-          <p:cNvSpPr txBox="1"/>
-          <p:nvPr/>
-        </p:nvSpPr>
-        <p:spPr>
-          <a:xfrm>
-            <a:off x="8293608" y="3968496"/>
-            <a:ext cx="3749039" cy="1097280"/>
-          </a:xfrm>
-          <a:prstGeom prst="rect">
-            <a:avLst/>
-          </a:prstGeom>
-          <a:noFill/>
-        </p:spPr>
-        <p:txBody>
-          <a:bodyPr wrap="square" anchor="t" lIns="0" rIns="0" tIns="0" bIns="0">
-            <a:spAutoFit/>
-          </a:bodyPr>
-          <a:lstStyle/>
-          <a:p>
-            <a:pPr algn="l">
-              <a:lnSpc>
-                <a:spcPct val="107000"/>
-              </a:lnSpc>
-              <a:spcAft>
-                <a:spcPts val="200"/>
-              </a:spcAft>
-            </a:pPr>
-            <a:r>
-              <a:rPr sz="1350" b="1" i="0">
-                <a:solidFill>
-                  <a:srgbClr val="EAF0F8"/>
-                </a:solidFill>
-                <a:latin typeface="Arial"/>
-              </a:rPr>
-              <a:t>The process check</a:t>
-            </a:r>
-          </a:p>
-          <a:p>
-            <a:pPr algn="l">
-              <a:lnSpc>
-                <a:spcPct val="107000"/>
-              </a:lnSpc>
-              <a:spcAft>
-                <a:spcPts val="200"/>
-              </a:spcAft>
-            </a:pPr>
-            <a:r>
-              <a:rPr sz="1160" b="0" i="0">
-                <a:solidFill>
-                  <a:srgbClr val="93A0B6"/>
-                </a:solidFill>
-                <a:latin typeface="Arial"/>
-              </a:rPr>
-              <a:t>Results sit within a few points of expected, they're earning it. The risk is track record: careers, not heaters, predict August.</a:t>
-            </a:r>
-          </a:p>
-        </p:txBody>
-      </p:sp>
-      <p:sp>
-        <p:nvSpPr>
-          <p:cNvPr id="11" name="Rounded Rectangle 10"/>
-          <p:cNvSpPr/>
-          <p:nvPr/>
-        </p:nvSpPr>
-        <p:spPr>
-          <a:xfrm>
-            <a:off x="8001000" y="5120640"/>
             <a:ext cx="146304" cy="146304"/>
           </a:xfrm>
           <a:prstGeom prst="roundRect">
@@ -4463,13 +4354,13 @@
       </p:sp>
       <p:sp>
         <p:nvSpPr>
-          <p:cNvPr id="12" name="TextBox 11"/>
-          <p:cNvSpPr txBox="1"/>
-          <p:nvPr/>
-        </p:nvSpPr>
-        <p:spPr>
-          <a:xfrm>
-            <a:off x="8293608" y="5084064"/>
+          <p:cNvPr id="10" name="TextBox 9"/>
+          <p:cNvSpPr txBox="1"/>
+          <p:nvPr/>
+        </p:nvSpPr>
+        <p:spPr>
+          <a:xfrm>
+            <a:off x="8293608" y="3968496"/>
             <a:ext cx="3749039" cy="1097280"/>
           </a:xfrm>
           <a:prstGeom prst="rect">
@@ -4498,7 +4389,7 @@
                 </a:solidFill>
                 <a:latin typeface="Arial"/>
               </a:rPr>
-              <a:t>So buy substance</a:t>
+              <a:t>Buy Buy Buy</a:t>
             </a:r>
           </a:p>
           <a:p>
@@ -4517,14 +4408,14 @@
                 </a:solidFill>
                 <a:latin typeface="Arial"/>
               </a:rPr>
-              <a:t>Replace borrowed production before August returns it: a real reliever over a career-year one, a real bat over a waiver claim on a heater.</a:t>
-            </a:r>
-          </a:p>
-        </p:txBody>
-      </p:sp>
-      <p:sp>
-        <p:nvSpPr>
-          <p:cNvPr id="13" name="TextBox 12"/>
+              <a:t>Pick up a seasoned reliever and a right-handed hitter.</a:t>
+            </a:r>
+          </a:p>
+        </p:txBody>
+      </p:sp>
+      <p:sp>
+        <p:nvSpPr>
+          <p:cNvPr id="11" name="TextBox 10"/>
           <p:cNvSpPr txBox="1"/>
           <p:nvPr/>
         </p:nvSpPr>
@@ -4897,7 +4788,7 @@
                 </a:solidFill>
                 <a:latin typeface="Arial"/>
               </a:rPr>
-              <a:t>Every arm has a guy</a:t>
+              <a:t>Every arm has a guy. Don't mess with that</a:t>
             </a:r>
           </a:p>
           <a:p>
@@ -4916,7 +4807,7 @@
                 </a:solidFill>
                 <a:latin typeface="Arial"/>
               </a:rPr>
-              <a:t>Raw pairings look dramatic (fig. 14), but small samples shrink hard (fig. 15). What survives: settled, deliberate assignments.</a:t>
+              <a:t>Gray / Wong. Bennett / Narvaez. Settled, deliberate assignments across the rotation.</a:t>
             </a:r>
           </a:p>
         </p:txBody>
@@ -4930,113 +4821,6 @@
         <p:spPr>
           <a:xfrm>
             <a:off x="8001000" y="4005072"/>
-            <a:ext cx="146304" cy="146304"/>
-          </a:xfrm>
-          <a:prstGeom prst="roundRect">
-            <a:avLst>
-              <a:gd name="adj" fmla="val 18000"/>
-            </a:avLst>
-          </a:prstGeom>
-          <a:solidFill>
-            <a:srgbClr val="E3B14E"/>
-          </a:solidFill>
-          <a:ln>
-            <a:noFill/>
-          </a:ln>
-          <a:effectLst/>
-        </p:spPr>
-        <p:style>
-          <a:lnRef idx="1">
-            <a:schemeClr val="accent1"/>
-          </a:lnRef>
-          <a:fillRef idx="3">
-            <a:schemeClr val="accent1"/>
-          </a:fillRef>
-          <a:effectRef idx="2">
-            <a:schemeClr val="accent1"/>
-          </a:effectRef>
-          <a:fontRef idx="minor">
-            <a:schemeClr val="lt1"/>
-          </a:fontRef>
-        </p:style>
-        <p:txBody>
-          <a:bodyPr rtlCol="0" anchor="ctr"/>
-          <a:lstStyle/>
-          <a:p>
-            <a:pPr algn="ctr"/>
-          </a:p>
-        </p:txBody>
-      </p:sp>
-      <p:sp>
-        <p:nvSpPr>
-          <p:cNvPr id="10" name="TextBox 9"/>
-          <p:cNvSpPr txBox="1"/>
-          <p:nvPr/>
-        </p:nvSpPr>
-        <p:spPr>
-          <a:xfrm>
-            <a:off x="8293608" y="3968496"/>
-            <a:ext cx="3749039" cy="1097280"/>
-          </a:xfrm>
-          <a:prstGeom prst="rect">
-            <a:avLst/>
-          </a:prstGeom>
-          <a:noFill/>
-        </p:spPr>
-        <p:txBody>
-          <a:bodyPr wrap="square" anchor="t" lIns="0" rIns="0" tIns="0" bIns="0">
-            <a:spAutoFit/>
-          </a:bodyPr>
-          <a:lstStyle/>
-          <a:p>
-            <a:pPr algn="l">
-              <a:lnSpc>
-                <a:spcPct val="107000"/>
-              </a:lnSpc>
-              <a:spcAft>
-                <a:spcPts val="200"/>
-              </a:spcAft>
-            </a:pPr>
-            <a:r>
-              <a:rPr sz="1350" b="1" i="0">
-                <a:solidFill>
-                  <a:srgbClr val="EAF0F8"/>
-                </a:solidFill>
-                <a:latin typeface="Arial"/>
-              </a:rPr>
-              <a:t>The pen is paired too</a:t>
-            </a:r>
-          </a:p>
-          <a:p>
-            <a:pPr algn="l">
-              <a:lnSpc>
-                <a:spcPct val="107000"/>
-              </a:lnSpc>
-              <a:spcAft>
-                <a:spcPts val="200"/>
-              </a:spcAft>
-            </a:pPr>
-            <a:r>
-              <a:rPr sz="1160" b="0" i="0">
-                <a:solidFill>
-                  <a:srgbClr val="93A0B6"/>
-                </a:solidFill>
-                <a:latin typeface="Arial"/>
-              </a:rPr>
-              <a:t>Leverage relievers ride with a settled catcher, these innings aren't assigned at random.</a:t>
-            </a:r>
-          </a:p>
-        </p:txBody>
-      </p:sp>
-      <p:sp>
-        <p:nvSpPr>
-          <p:cNvPr id="11" name="Rounded Rectangle 10"/>
-          <p:cNvSpPr/>
-          <p:nvPr/>
-        </p:nvSpPr>
-        <p:spPr>
-          <a:xfrm>
-            <a:off x="8001000" y="5120640"/>
             <a:ext cx="146304" cy="146304"/>
           </a:xfrm>
           <a:prstGeom prst="roundRect">
@@ -5076,13 +4860,13 @@
       </p:sp>
       <p:sp>
         <p:nvSpPr>
-          <p:cNvPr id="12" name="TextBox 11"/>
-          <p:cNvSpPr txBox="1"/>
-          <p:nvPr/>
-        </p:nvSpPr>
-        <p:spPr>
-          <a:xfrm>
-            <a:off x="8293608" y="5084064"/>
+          <p:cNvPr id="10" name="TextBox 9"/>
+          <p:cNvSpPr txBox="1"/>
+          <p:nvPr/>
+        </p:nvSpPr>
+        <p:spPr>
+          <a:xfrm>
+            <a:off x="8293608" y="3968496"/>
             <a:ext cx="3749039" cy="1097280"/>
           </a:xfrm>
           <a:prstGeom prst="rect">
@@ -5137,7 +4921,7 @@
       </p:sp>
       <p:sp>
         <p:nvSpPr>
-          <p:cNvPr id="13" name="TextBox 12"/>
+          <p:cNvPr id="11" name="TextBox 10"/>
           <p:cNvSpPr txBox="1"/>
           <p:nvPr/>
         </p:nvSpPr>
@@ -5249,7 +5033,7 @@
                 </a:solidFill>
                 <a:latin typeface="Courier New"/>
               </a:rPr>
-              <a:t>// UNDER THE HOOD</a:t>
+              <a:t>// THE MENU</a:t>
             </a:r>
           </a:p>
         </p:txBody>
@@ -5291,56 +5075,34 @@
                 </a:solidFill>
                 <a:latin typeface="Arial"/>
               </a:rPr>
-              <a:t>Two custom models behind the calls</a:t>
-            </a:r>
-          </a:p>
-        </p:txBody>
-      </p:sp>
-      <p:pic>
-        <p:nvPicPr>
-          <p:cNvPr id="4" name="Picture 3" descr="16_speed_model.png"/>
-          <p:cNvPicPr>
-            <a:picLocks noChangeAspect="1"/>
-          </p:cNvPicPr>
-          <p:nvPr/>
-        </p:nvPicPr>
-        <p:blipFill>
-          <a:blip r:embed="rId2"/>
-          <a:stretch>
-            <a:fillRect/>
-          </a:stretch>
-        </p:blipFill>
-        <p:spPr>
-          <a:xfrm>
-            <a:off x="383344" y="1554480"/>
-            <a:ext cx="7280030" cy="4206240"/>
-          </a:xfrm>
-          <a:prstGeom prst="rect">
-            <a:avLst/>
-          </a:prstGeom>
-        </p:spPr>
-      </p:pic>
-      <p:sp>
-        <p:nvSpPr>
-          <p:cNvPr id="5" name="Rounded Rectangle 4"/>
+              <a:t>Three trades that fit, and one walk-away</a:t>
+            </a:r>
+          </a:p>
+        </p:txBody>
+      </p:sp>
+      <p:sp>
+        <p:nvSpPr>
+          <p:cNvPr id="4" name="Rounded Rectangle 3"/>
           <p:cNvSpPr/>
           <p:nvPr/>
         </p:nvSpPr>
         <p:spPr>
           <a:xfrm>
-            <a:off x="8001000" y="1773936"/>
-            <a:ext cx="146304" cy="146304"/>
+            <a:off x="566928" y="1691640"/>
+            <a:ext cx="5358384" cy="1938528"/>
           </a:xfrm>
           <a:prstGeom prst="roundRect">
             <a:avLst>
-              <a:gd name="adj" fmla="val 18000"/>
+              <a:gd name="adj" fmla="val 6000"/>
             </a:avLst>
           </a:prstGeom>
           <a:solidFill>
-            <a:srgbClr val="E8615A"/>
+            <a:srgbClr val="121E33"/>
           </a:solidFill>
-          <a:ln>
-            <a:noFill/>
+          <a:ln w="12700">
+            <a:solidFill>
+              <a:srgbClr val="26334E"/>
+            </a:solidFill>
           </a:ln>
           <a:effectLst/>
         </p:spPr>
@@ -5368,51 +5130,116 @@
       </p:sp>
       <p:sp>
         <p:nvSpPr>
+          <p:cNvPr id="5" name="TextBox 4"/>
+          <p:cNvSpPr txBox="1"/>
+          <p:nvPr/>
+        </p:nvSpPr>
+        <p:spPr>
+          <a:xfrm>
+            <a:off x="822960" y="1856232"/>
+            <a:ext cx="4855464" cy="292608"/>
+          </a:xfrm>
+          <a:prstGeom prst="rect">
+            <a:avLst/>
+          </a:prstGeom>
+          <a:noFill/>
+        </p:spPr>
+        <p:txBody>
+          <a:bodyPr wrap="square" anchor="t" lIns="0" rIns="0" tIns="0" bIns="0">
+            <a:spAutoFit/>
+          </a:bodyPr>
+          <a:lstStyle/>
+          <a:p>
+            <a:pPr algn="l">
+              <a:lnSpc>
+                <a:spcPct val="100000"/>
+              </a:lnSpc>
+              <a:spcAft>
+                <a:spcPts val="0"/>
+              </a:spcAft>
+            </a:pPr>
+            <a:r>
+              <a:rPr sz="1100" b="1" i="0">
+                <a:solidFill>
+                  <a:srgbClr val="58C08D"/>
+                </a:solidFill>
+                <a:latin typeface="Arial"/>
+              </a:rPr>
+              <a:t>1 · THE PEN FIX · DO IT</a:t>
+            </a:r>
+          </a:p>
+        </p:txBody>
+      </p:sp>
+      <p:sp>
+        <p:nvSpPr>
           <p:cNvPr id="6" name="TextBox 5"/>
           <p:cNvSpPr txBox="1"/>
           <p:nvPr/>
         </p:nvSpPr>
         <p:spPr>
           <a:xfrm>
-            <a:off x="8293608" y="1737360"/>
-            <a:ext cx="3749039" cy="1097280"/>
-          </a:xfrm>
-          <a:prstGeom prst="rect">
-            <a:avLst/>
-          </a:prstGeom>
-          <a:noFill/>
-        </p:spPr>
-        <p:txBody>
-          <a:bodyPr wrap="square" anchor="t" lIns="0" rIns="0" tIns="0" bIns="0">
-            <a:spAutoFit/>
-          </a:bodyPr>
-          <a:lstStyle/>
-          <a:p>
-            <a:pPr algn="l">
-              <a:lnSpc>
-                <a:spcPct val="107000"/>
-              </a:lnSpc>
-              <a:spcAft>
-                <a:spcPts val="200"/>
-              </a:spcAft>
-            </a:pPr>
-            <a:r>
-              <a:rPr sz="1350" b="1" i="0">
+            <a:off x="822960" y="2148840"/>
+            <a:ext cx="4855464" cy="365760"/>
+          </a:xfrm>
+          <a:prstGeom prst="rect">
+            <a:avLst/>
+          </a:prstGeom>
+          <a:noFill/>
+        </p:spPr>
+        <p:txBody>
+          <a:bodyPr wrap="square" anchor="t" lIns="0" rIns="0" tIns="0" bIns="0">
+            <a:spAutoFit/>
+          </a:bodyPr>
+          <a:lstStyle/>
+          <a:p>
+            <a:pPr algn="l">
+              <a:lnSpc>
+                <a:spcPct val="100000"/>
+              </a:lnSpc>
+              <a:spcAft>
+                <a:spcPts val="0"/>
+              </a:spcAft>
+            </a:pPr>
+            <a:r>
+              <a:rPr sz="1650" b="1" i="0">
                 <a:solidFill>
                   <a:srgbClr val="EAF0F8"/>
                 </a:solidFill>
                 <a:latin typeface="Arial"/>
               </a:rPr>
-              <a:t>Speed-aware xBABIP / xwOBAcon</a:t>
-            </a:r>
-          </a:p>
-          <a:p>
-            <a:pPr algn="l">
-              <a:lnSpc>
-                <a:spcPct val="107000"/>
-              </a:lnSpc>
-              <a:spcAft>
-                <a:spcPts val="200"/>
+              <a:t>RHP Luke Weaver (NYM)</a:t>
+            </a:r>
+          </a:p>
+        </p:txBody>
+      </p:sp>
+      <p:sp>
+        <p:nvSpPr>
+          <p:cNvPr id="7" name="TextBox 6"/>
+          <p:cNvSpPr txBox="1"/>
+          <p:nvPr/>
+        </p:nvSpPr>
+        <p:spPr>
+          <a:xfrm>
+            <a:off x="822960" y="2560320"/>
+            <a:ext cx="4855464" cy="960120"/>
+          </a:xfrm>
+          <a:prstGeom prst="rect">
+            <a:avLst/>
+          </a:prstGeom>
+          <a:noFill/>
+        </p:spPr>
+        <p:txBody>
+          <a:bodyPr wrap="square" anchor="t" lIns="0" rIns="0" tIns="0" bIns="0">
+            <a:spAutoFit/>
+          </a:bodyPr>
+          <a:lstStyle/>
+          <a:p>
+            <a:pPr algn="l">
+              <a:lnSpc>
+                <a:spcPct val="110000"/>
+              </a:lnSpc>
+              <a:spcAft>
+                <a:spcPts val="400"/>
               </a:spcAft>
             </a:pPr>
             <a:r>
@@ -5422,32 +5249,34 @@
                 </a:solidFill>
                 <a:latin typeface="Arial"/>
               </a:rPr>
-              <a:t>Gradient boosting on 77,928 league batted balls (EV, LA, spray ± sprint speed), 5-fold CV grouped by batter so every residual is out-of-sample.</a:t>
-            </a:r>
-          </a:p>
-        </p:txBody>
-      </p:sp>
-      <p:sp>
-        <p:nvSpPr>
-          <p:cNvPr id="7" name="Rounded Rectangle 6"/>
+              <a:t>For a 45 FV + 40 FV, prospects only, nobody loses a job or an inning. Elite relief year, signed through '27. The highest-probability marginal win on the board.</a:t>
+            </a:r>
+          </a:p>
+        </p:txBody>
+      </p:sp>
+      <p:sp>
+        <p:nvSpPr>
+          <p:cNvPr id="8" name="Rounded Rectangle 7"/>
           <p:cNvSpPr/>
           <p:nvPr/>
         </p:nvSpPr>
         <p:spPr>
           <a:xfrm>
-            <a:off x="8001000" y="2889504"/>
-            <a:ext cx="146304" cy="146304"/>
+            <a:off x="6227064" y="1691640"/>
+            <a:ext cx="5358384" cy="1938528"/>
           </a:xfrm>
           <a:prstGeom prst="roundRect">
             <a:avLst>
-              <a:gd name="adj" fmla="val 18000"/>
+              <a:gd name="adj" fmla="val 6000"/>
             </a:avLst>
           </a:prstGeom>
           <a:solidFill>
-            <a:srgbClr val="EAF0F8"/>
+            <a:srgbClr val="121E33"/>
           </a:solidFill>
-          <a:ln>
-            <a:noFill/>
+          <a:ln w="12700">
+            <a:solidFill>
+              <a:srgbClr val="26334E"/>
+            </a:solidFill>
           </a:ln>
           <a:effectLst/>
         </p:spPr>
@@ -5475,51 +5304,116 @@
       </p:sp>
       <p:sp>
         <p:nvSpPr>
-          <p:cNvPr id="8" name="TextBox 7"/>
-          <p:cNvSpPr txBox="1"/>
-          <p:nvPr/>
-        </p:nvSpPr>
-        <p:spPr>
-          <a:xfrm>
-            <a:off x="8293608" y="2852928"/>
-            <a:ext cx="3749039" cy="1097280"/>
-          </a:xfrm>
-          <a:prstGeom prst="rect">
-            <a:avLst/>
-          </a:prstGeom>
-          <a:noFill/>
-        </p:spPr>
-        <p:txBody>
-          <a:bodyPr wrap="square" anchor="t" lIns="0" rIns="0" tIns="0" bIns="0">
-            <a:spAutoFit/>
-          </a:bodyPr>
-          <a:lstStyle/>
-          <a:p>
-            <a:pPr algn="l">
-              <a:lnSpc>
-                <a:spcPct val="107000"/>
-              </a:lnSpc>
-              <a:spcAft>
-                <a:spcPts val="200"/>
-              </a:spcAft>
-            </a:pPr>
-            <a:r>
-              <a:rPr sz="1350" b="1" i="0">
+          <p:cNvPr id="9" name="TextBox 8"/>
+          <p:cNvSpPr txBox="1"/>
+          <p:nvPr/>
+        </p:nvSpPr>
+        <p:spPr>
+          <a:xfrm>
+            <a:off x="6483096" y="1856232"/>
+            <a:ext cx="4855464" cy="292608"/>
+          </a:xfrm>
+          <a:prstGeom prst="rect">
+            <a:avLst/>
+          </a:prstGeom>
+          <a:noFill/>
+        </p:spPr>
+        <p:txBody>
+          <a:bodyPr wrap="square" anchor="t" lIns="0" rIns="0" tIns="0" bIns="0">
+            <a:spAutoFit/>
+          </a:bodyPr>
+          <a:lstStyle/>
+          <a:p>
+            <a:pPr algn="l">
+              <a:lnSpc>
+                <a:spcPct val="100000"/>
+              </a:lnSpc>
+              <a:spcAft>
+                <a:spcPts val="0"/>
+              </a:spcAft>
+            </a:pPr>
+            <a:r>
+              <a:rPr sz="1100" b="1" i="0">
                 <a:solidFill>
                   <a:srgbClr val="EAF0F8"/>
                 </a:solidFill>
                 <a:latin typeface="Arial"/>
               </a:rPr>
-              <a:t>The blind spot, measured</a:t>
-            </a:r>
-          </a:p>
-          <a:p>
-            <a:pPr algn="l">
-              <a:lnSpc>
-                <a:spcPct val="107000"/>
-              </a:lnSpc>
-              <a:spcAft>
-                <a:spcPts val="200"/>
+              <a:t>2 · THE STABILIZER · IF THE PRICE HOLDS</a:t>
+            </a:r>
+          </a:p>
+        </p:txBody>
+      </p:sp>
+      <p:sp>
+        <p:nvSpPr>
+          <p:cNvPr id="10" name="TextBox 9"/>
+          <p:cNvSpPr txBox="1"/>
+          <p:nvPr/>
+        </p:nvSpPr>
+        <p:spPr>
+          <a:xfrm>
+            <a:off x="6483096" y="2148840"/>
+            <a:ext cx="4855464" cy="365760"/>
+          </a:xfrm>
+          <a:prstGeom prst="rect">
+            <a:avLst/>
+          </a:prstGeom>
+          <a:noFill/>
+        </p:spPr>
+        <p:txBody>
+          <a:bodyPr wrap="square" anchor="t" lIns="0" rIns="0" tIns="0" bIns="0">
+            <a:spAutoFit/>
+          </a:bodyPr>
+          <a:lstStyle/>
+          <a:p>
+            <a:pPr algn="l">
+              <a:lnSpc>
+                <a:spcPct val="100000"/>
+              </a:lnSpc>
+              <a:spcAft>
+                <a:spcPts val="0"/>
+              </a:spcAft>
+            </a:pPr>
+            <a:r>
+              <a:rPr sz="1650" b="1" i="0">
+                <a:solidFill>
+                  <a:srgbClr val="EAF0F8"/>
+                </a:solidFill>
+                <a:latin typeface="Arial"/>
+              </a:rPr>
+              <a:t>2B Luis Arraez (SFG)</a:t>
+            </a:r>
+          </a:p>
+        </p:txBody>
+      </p:sp>
+      <p:sp>
+        <p:nvSpPr>
+          <p:cNvPr id="11" name="TextBox 10"/>
+          <p:cNvSpPr txBox="1"/>
+          <p:nvPr/>
+        </p:nvSpPr>
+        <p:spPr>
+          <a:xfrm>
+            <a:off x="6483096" y="2560320"/>
+            <a:ext cx="4855464" cy="960120"/>
+          </a:xfrm>
+          <a:prstGeom prst="rect">
+            <a:avLst/>
+          </a:prstGeom>
+          <a:noFill/>
+        </p:spPr>
+        <p:txBody>
+          <a:bodyPr wrap="square" anchor="t" lIns="0" rIns="0" tIns="0" bIns="0">
+            <a:spAutoFit/>
+          </a:bodyPr>
+          <a:lstStyle/>
+          <a:p>
+            <a:pPr algn="l">
+              <a:lnSpc>
+                <a:spcPct val="110000"/>
+              </a:lnSpc>
+              <a:spcAft>
+                <a:spcPts val="400"/>
               </a:spcAft>
             </a:pPr>
             <a:r>
@@ -5529,32 +5423,34 @@
                 </a:solidFill>
                 <a:latin typeface="Arial"/>
               </a:rPr>
-              <a:t>Speed-blind xstats under-predict the fastest decile by +20 pts of BABIP. Duran's speed term: +23 pts of wOBA on contact, inside the +5–14 band derived independently.</a:t>
-            </a:r>
-          </a:p>
-        </p:txBody>
-      </p:sp>
-      <p:sp>
-        <p:nvSpPr>
-          <p:cNvPr id="9" name="Rounded Rectangle 8"/>
+              <a:t>For Brayan Bello, the first deal that touches the active roster. Zero prospect cost; Arraez fills a patchwork platoon spot, not a hot regular's.</a:t>
+            </a:r>
+          </a:p>
+        </p:txBody>
+      </p:sp>
+      <p:sp>
+        <p:nvSpPr>
+          <p:cNvPr id="12" name="Rounded Rectangle 11"/>
           <p:cNvSpPr/>
           <p:nvPr/>
         </p:nvSpPr>
         <p:spPr>
           <a:xfrm>
-            <a:off x="8001000" y="4005072"/>
-            <a:ext cx="146304" cy="146304"/>
+            <a:off x="566928" y="3886200"/>
+            <a:ext cx="5358384" cy="1938528"/>
           </a:xfrm>
           <a:prstGeom prst="roundRect">
             <a:avLst>
-              <a:gd name="adj" fmla="val 18000"/>
+              <a:gd name="adj" fmla="val 6000"/>
             </a:avLst>
           </a:prstGeom>
           <a:solidFill>
-            <a:srgbClr val="E3B14E"/>
+            <a:srgbClr val="121E33"/>
           </a:solidFill>
-          <a:ln>
-            <a:noFill/>
+          <a:ln w="12700">
+            <a:solidFill>
+              <a:srgbClr val="26334E"/>
+            </a:solidFill>
           </a:ln>
           <a:effectLst/>
         </p:spPr>
@@ -5582,51 +5478,116 @@
       </p:sp>
       <p:sp>
         <p:nvSpPr>
-          <p:cNvPr id="10" name="TextBox 9"/>
-          <p:cNvSpPr txBox="1"/>
-          <p:nvPr/>
-        </p:nvSpPr>
-        <p:spPr>
-          <a:xfrm>
-            <a:off x="8293608" y="3968496"/>
-            <a:ext cx="3749039" cy="1097280"/>
-          </a:xfrm>
-          <a:prstGeom prst="rect">
-            <a:avLst/>
-          </a:prstGeom>
-          <a:noFill/>
-        </p:spPr>
-        <p:txBody>
-          <a:bodyPr wrap="square" anchor="t" lIns="0" rIns="0" tIns="0" bIns="0">
-            <a:spAutoFit/>
-          </a:bodyPr>
-          <a:lstStyle/>
-          <a:p>
-            <a:pPr algn="l">
-              <a:lnSpc>
-                <a:spcPct val="107000"/>
-              </a:lnSpc>
-              <a:spcAft>
-                <a:spcPts val="200"/>
-              </a:spcAft>
-            </a:pPr>
-            <a:r>
-              <a:rPr sz="1350" b="1" i="0">
+          <p:cNvPr id="13" name="TextBox 12"/>
+          <p:cNvSpPr txBox="1"/>
+          <p:nvPr/>
+        </p:nvSpPr>
+        <p:spPr>
+          <a:xfrm>
+            <a:off x="822960" y="4050791"/>
+            <a:ext cx="4855464" cy="292608"/>
+          </a:xfrm>
+          <a:prstGeom prst="rect">
+            <a:avLst/>
+          </a:prstGeom>
+          <a:noFill/>
+        </p:spPr>
+        <p:txBody>
+          <a:bodyPr wrap="square" anchor="t" lIns="0" rIns="0" tIns="0" bIns="0">
+            <a:spAutoFit/>
+          </a:bodyPr>
+          <a:lstStyle/>
+          <a:p>
+            <a:pPr algn="l">
+              <a:lnSpc>
+                <a:spcPct val="100000"/>
+              </a:lnSpc>
+              <a:spcAft>
+                <a:spcPts val="0"/>
+              </a:spcAft>
+            </a:pPr>
+            <a:r>
+              <a:rPr sz="1100" b="1" i="0">
+                <a:solidFill>
+                  <a:srgbClr val="E8615A"/>
+                </a:solidFill>
+                <a:latin typeface="Arial"/>
+              </a:rPr>
+              <a:t>3 · THE BIG SWING · PROBABLY WAIT</a:t>
+            </a:r>
+          </a:p>
+        </p:txBody>
+      </p:sp>
+      <p:sp>
+        <p:nvSpPr>
+          <p:cNvPr id="14" name="TextBox 13"/>
+          <p:cNvSpPr txBox="1"/>
+          <p:nvPr/>
+        </p:nvSpPr>
+        <p:spPr>
+          <a:xfrm>
+            <a:off x="822960" y="4343400"/>
+            <a:ext cx="4855464" cy="365760"/>
+          </a:xfrm>
+          <a:prstGeom prst="rect">
+            <a:avLst/>
+          </a:prstGeom>
+          <a:noFill/>
+        </p:spPr>
+        <p:txBody>
+          <a:bodyPr wrap="square" anchor="t" lIns="0" rIns="0" tIns="0" bIns="0">
+            <a:spAutoFit/>
+          </a:bodyPr>
+          <a:lstStyle/>
+          <a:p>
+            <a:pPr algn="l">
+              <a:lnSpc>
+                <a:spcPct val="100000"/>
+              </a:lnSpc>
+              <a:spcAft>
+                <a:spcPts val="0"/>
+              </a:spcAft>
+            </a:pPr>
+            <a:r>
+              <a:rPr sz="1650" b="1" i="0">
                 <a:solidFill>
                   <a:srgbClr val="EAF0F8"/>
                 </a:solidFill>
                 <a:latin typeface="Arial"/>
               </a:rPr>
-              <a:t>Adjusted battery model</a:t>
-            </a:r>
-          </a:p>
-          <a:p>
-            <a:pPr algn="l">
-              <a:lnSpc>
-                <a:spcPct val="107000"/>
-              </a:lnSpc>
-              <a:spcAft>
-                <a:spcPts val="200"/>
+              <a:t>SS Zach Neto (LAA)</a:t>
+            </a:r>
+          </a:p>
+        </p:txBody>
+      </p:sp>
+      <p:sp>
+        <p:nvSpPr>
+          <p:cNvPr id="15" name="TextBox 14"/>
+          <p:cNvSpPr txBox="1"/>
+          <p:nvPr/>
+        </p:nvSpPr>
+        <p:spPr>
+          <a:xfrm>
+            <a:off x="822960" y="4754880"/>
+            <a:ext cx="4855464" cy="960120"/>
+          </a:xfrm>
+          <a:prstGeom prst="rect">
+            <a:avLst/>
+          </a:prstGeom>
+          <a:noFill/>
+        </p:spPr>
+        <p:txBody>
+          <a:bodyPr wrap="square" anchor="t" lIns="0" rIns="0" tIns="0" bIns="0">
+            <a:spAutoFit/>
+          </a:bodyPr>
+          <a:lstStyle/>
+          <a:p>
+            <a:pPr algn="l">
+              <a:lnSpc>
+                <a:spcPct val="110000"/>
+              </a:lnSpc>
+              <a:spcAft>
+                <a:spcPts val="400"/>
               </a:spcAft>
             </a:pPr>
             <a:r>
@@ -5636,32 +5597,34 @@
                 </a:solidFill>
                 <a:latin typeface="Arial"/>
               </a:rPr>
-              <a:t>WOWY + fixed-effects OLS (pitcher/opponent/park), cluster-bootstrap CIs, empirical-Bayes shrinkage (fig. 15): raw splits are mostly noise; no significant catcher effect.</a:t>
-            </a:r>
-          </a:p>
-        </p:txBody>
-      </p:sp>
-      <p:sp>
-        <p:nvSpPr>
-          <p:cNvPr id="11" name="Rounded Rectangle 10"/>
+              <a:t>For Tolle + Bennett + a 45 FV: two arms out of a winning rotation midseason. Right for the franchise window, and still there in the winter. Controlled through 2029.</a:t>
+            </a:r>
+          </a:p>
+        </p:txBody>
+      </p:sp>
+      <p:sp>
+        <p:nvSpPr>
+          <p:cNvPr id="16" name="Rounded Rectangle 15"/>
           <p:cNvSpPr/>
           <p:nvPr/>
         </p:nvSpPr>
         <p:spPr>
           <a:xfrm>
-            <a:off x="8001000" y="5120640"/>
-            <a:ext cx="146304" cy="146304"/>
+            <a:off x="6227064" y="3886200"/>
+            <a:ext cx="5358384" cy="1938528"/>
           </a:xfrm>
           <a:prstGeom prst="roundRect">
             <a:avLst>
-              <a:gd name="adj" fmla="val 18000"/>
+              <a:gd name="adj" fmla="val 6000"/>
             </a:avLst>
           </a:prstGeom>
           <a:solidFill>
-            <a:srgbClr val="58C08D"/>
+            <a:srgbClr val="121E33"/>
           </a:solidFill>
-          <a:ln>
-            <a:noFill/>
+          <a:ln w="12700">
+            <a:solidFill>
+              <a:srgbClr val="26334E"/>
+            </a:solidFill>
           </a:ln>
           <a:effectLst/>
         </p:spPr>
@@ -5689,51 +5652,116 @@
       </p:sp>
       <p:sp>
         <p:nvSpPr>
-          <p:cNvPr id="12" name="TextBox 11"/>
-          <p:cNvSpPr txBox="1"/>
-          <p:nvPr/>
-        </p:nvSpPr>
-        <p:spPr>
-          <a:xfrm>
-            <a:off x="8293608" y="5084064"/>
-            <a:ext cx="3749039" cy="1097280"/>
-          </a:xfrm>
-          <a:prstGeom prst="rect">
-            <a:avLst/>
-          </a:prstGeom>
-          <a:noFill/>
-        </p:spPr>
-        <p:txBody>
-          <a:bodyPr wrap="square" anchor="t" lIns="0" rIns="0" tIns="0" bIns="0">
-            <a:spAutoFit/>
-          </a:bodyPr>
-          <a:lstStyle/>
-          <a:p>
-            <a:pPr algn="l">
-              <a:lnSpc>
-                <a:spcPct val="107000"/>
-              </a:lnSpc>
-              <a:spcAft>
-                <a:spcPts val="200"/>
-              </a:spcAft>
-            </a:pPr>
-            <a:r>
-              <a:rPr sz="1350" b="1" i="0">
+          <p:cNvPr id="17" name="TextBox 16"/>
+          <p:cNvSpPr txBox="1"/>
+          <p:nvPr/>
+        </p:nvSpPr>
+        <p:spPr>
+          <a:xfrm>
+            <a:off x="6483096" y="4050791"/>
+            <a:ext cx="4855464" cy="292608"/>
+          </a:xfrm>
+          <a:prstGeom prst="rect">
+            <a:avLst/>
+          </a:prstGeom>
+          <a:noFill/>
+        </p:spPr>
+        <p:txBody>
+          <a:bodyPr wrap="square" anchor="t" lIns="0" rIns="0" tIns="0" bIns="0">
+            <a:spAutoFit/>
+          </a:bodyPr>
+          <a:lstStyle/>
+          <a:p>
+            <a:pPr algn="l">
+              <a:lnSpc>
+                <a:spcPct val="100000"/>
+              </a:lnSpc>
+              <a:spcAft>
+                <a:spcPts val="0"/>
+              </a:spcAft>
+            </a:pPr>
+            <a:r>
+              <a:rPr sz="1100" b="1" i="0">
+                <a:solidFill>
+                  <a:srgbClr val="E3B14E"/>
+                </a:solidFill>
+                <a:latin typeface="Arial"/>
+              </a:rPr>
+              <a:t>✗ · THE WALK-AWAY</a:t>
+            </a:r>
+          </a:p>
+        </p:txBody>
+      </p:sp>
+      <p:sp>
+        <p:nvSpPr>
+          <p:cNvPr id="18" name="TextBox 17"/>
+          <p:cNvSpPr txBox="1"/>
+          <p:nvPr/>
+        </p:nvSpPr>
+        <p:spPr>
+          <a:xfrm>
+            <a:off x="6483096" y="4343400"/>
+            <a:ext cx="4855464" cy="365760"/>
+          </a:xfrm>
+          <a:prstGeom prst="rect">
+            <a:avLst/>
+          </a:prstGeom>
+          <a:noFill/>
+        </p:spPr>
+        <p:txBody>
+          <a:bodyPr wrap="square" anchor="t" lIns="0" rIns="0" tIns="0" bIns="0">
+            <a:spAutoFit/>
+          </a:bodyPr>
+          <a:lstStyle/>
+          <a:p>
+            <a:pPr algn="l">
+              <a:lnSpc>
+                <a:spcPct val="100000"/>
+              </a:lnSpc>
+              <a:spcAft>
+                <a:spcPts val="0"/>
+              </a:spcAft>
+            </a:pPr>
+            <a:r>
+              <a:rPr sz="1650" b="1" i="0">
                 <a:solidFill>
                   <a:srgbClr val="EAF0F8"/>
                 </a:solidFill>
                 <a:latin typeface="Arial"/>
               </a:rPr>
-              <a:t>Why it's credible</a:t>
-            </a:r>
-          </a:p>
-          <a:p>
-            <a:pPr algn="l">
-              <a:lnSpc>
-                <a:spcPct val="107000"/>
-              </a:lnSpc>
-              <a:spcAft>
-                <a:spcPts val="200"/>
+              <a:t>C Shea Langeliers (ATH)</a:t>
+            </a:r>
+          </a:p>
+        </p:txBody>
+      </p:sp>
+      <p:sp>
+        <p:nvSpPr>
+          <p:cNvPr id="19" name="TextBox 18"/>
+          <p:cNvSpPr txBox="1"/>
+          <p:nvPr/>
+        </p:nvSpPr>
+        <p:spPr>
+          <a:xfrm>
+            <a:off x="6483096" y="4754880"/>
+            <a:ext cx="4855464" cy="960120"/>
+          </a:xfrm>
+          <a:prstGeom prst="rect">
+            <a:avLst/>
+          </a:prstGeom>
+          <a:noFill/>
+        </p:spPr>
+        <p:txBody>
+          <a:bodyPr wrap="square" anchor="t" lIns="0" rIns="0" tIns="0" bIns="0">
+            <a:spAutoFit/>
+          </a:bodyPr>
+          <a:lstStyle/>
+          <a:p>
+            <a:pPr algn="l">
+              <a:lnSpc>
+                <a:spcPct val="110000"/>
+              </a:lnSpc>
+              <a:spcAft>
+                <a:spcPts val="400"/>
               </a:spcAft>
             </a:pPr>
             <a:r>
@@ -5743,14 +5771,65 @@
                 </a:solidFill>
                 <a:latin typeface="Arial"/>
               </a:rPr>
-              <a:t>Out-of-sample everywhere, CIs on every headline, and frozen pre-registered predictions graded in October, flattering or not.</a:t>
-            </a:r>
-          </a:p>
-        </p:txBody>
-      </p:sp>
-      <p:sp>
-        <p:nvSpPr>
-          <p:cNvPr id="13" name="TextBox 12"/>
+              <a:t>The value math worked; the battery map is the veto. No August bat is worth resetting eight pitcher-catcher pairings on a staff carrying the season.</a:t>
+            </a:r>
+          </a:p>
+        </p:txBody>
+      </p:sp>
+      <p:sp>
+        <p:nvSpPr>
+          <p:cNvPr id="20" name="TextBox 19"/>
+          <p:cNvSpPr txBox="1"/>
+          <p:nvPr/>
+        </p:nvSpPr>
+        <p:spPr>
+          <a:xfrm>
+            <a:off x="566928" y="5897880"/>
+            <a:ext cx="11064240" cy="457200"/>
+          </a:xfrm>
+          <a:prstGeom prst="rect">
+            <a:avLst/>
+          </a:prstGeom>
+          <a:noFill/>
+        </p:spPr>
+        <p:txBody>
+          <a:bodyPr wrap="square" anchor="t" lIns="0" rIns="0" tIns="0" bIns="0">
+            <a:spAutoFit/>
+          </a:bodyPr>
+          <a:lstStyle/>
+          <a:p>
+            <a:pPr algn="l">
+              <a:lnSpc>
+                <a:spcPct val="100000"/>
+              </a:lnSpc>
+              <a:spcAft>
+                <a:spcPts val="0"/>
+              </a:spcAft>
+            </a:pPr>
+            <a:r>
+              <a:rPr sz="1250" b="1" i="0">
+                <a:solidFill>
+                  <a:srgbClr val="D9E1EF"/>
+                </a:solidFill>
+                <a:latin typeface="Arial"/>
+              </a:rPr>
+              <a:t>A menu, not a plan, Boston can afford about two. </a:t>
+            </a:r>
+            <a:r>
+              <a:rPr sz="1250" b="0" i="0">
+                <a:solidFill>
+                  <a:srgbClr val="93A0B6"/>
+                </a:solidFill>
+                <a:latin typeface="Arial"/>
+              </a:rPr>
+              <a:t>Full value math and verified contracts in the mock-trades memo. Hypotheticals, not reporting.</a:t>
+            </a:r>
+          </a:p>
+        </p:txBody>
+      </p:sp>
+      <p:sp>
+        <p:nvSpPr>
+          <p:cNvPr id="21" name="TextBox 20"/>
           <p:cNvSpPr txBox="1"/>
           <p:nvPr/>
         </p:nvSpPr>
@@ -5862,7 +5941,7 @@
                 </a:solidFill>
                 <a:latin typeface="Courier New"/>
               </a:rPr>
-              <a:t>// THE MENU</a:t>
+              <a:t>// THE REAL TRADE</a:t>
             </a:r>
           </a:p>
         </p:txBody>
@@ -5904,34 +5983,56 @@
                 </a:solidFill>
                 <a:latin typeface="Arial"/>
               </a:rPr>
-              <a:t>Three trades that fit, and one walk-away</a:t>
-            </a:r>
-          </a:p>
-        </p:txBody>
-      </p:sp>
-      <p:sp>
-        <p:nvSpPr>
-          <p:cNvPr id="4" name="Rounded Rectangle 3"/>
+              <a:t>They made one: Mead for Early</a:t>
+            </a:r>
+          </a:p>
+        </p:txBody>
+      </p:sp>
+      <p:pic>
+        <p:nvPicPr>
+          <p:cNvPr id="4" name="Picture 3" descr="18_mead_fit.png"/>
+          <p:cNvPicPr>
+            <a:picLocks noChangeAspect="1"/>
+          </p:cNvPicPr>
+          <p:nvPr/>
+        </p:nvPicPr>
+        <p:blipFill>
+          <a:blip r:embed="rId2"/>
+          <a:stretch>
+            <a:fillRect/>
+          </a:stretch>
+        </p:blipFill>
+        <p:spPr>
+          <a:xfrm>
+            <a:off x="365760" y="1554480"/>
+            <a:ext cx="7315200" cy="3018971"/>
+          </a:xfrm>
+          <a:prstGeom prst="rect">
+            <a:avLst/>
+          </a:prstGeom>
+        </p:spPr>
+      </p:pic>
+      <p:sp>
+        <p:nvSpPr>
+          <p:cNvPr id="5" name="Rounded Rectangle 4"/>
           <p:cNvSpPr/>
           <p:nvPr/>
         </p:nvSpPr>
         <p:spPr>
           <a:xfrm>
-            <a:off x="566928" y="1691640"/>
-            <a:ext cx="5358384" cy="1938528"/>
+            <a:off x="8001000" y="1773936"/>
+            <a:ext cx="146304" cy="146304"/>
           </a:xfrm>
           <a:prstGeom prst="roundRect">
             <a:avLst>
-              <a:gd name="adj" fmla="val 6000"/>
+              <a:gd name="adj" fmla="val 18000"/>
             </a:avLst>
           </a:prstGeom>
           <a:solidFill>
-            <a:srgbClr val="121E33"/>
+            <a:srgbClr val="E8615A"/>
           </a:solidFill>
-          <a:ln w="12700">
-            <a:solidFill>
-              <a:srgbClr val="26334E"/>
-            </a:solidFill>
+          <a:ln>
+            <a:noFill/>
           </a:ln>
           <a:effectLst/>
         </p:spPr>
@@ -5959,116 +6060,51 @@
       </p:sp>
       <p:sp>
         <p:nvSpPr>
-          <p:cNvPr id="5" name="TextBox 4"/>
-          <p:cNvSpPr txBox="1"/>
-          <p:nvPr/>
-        </p:nvSpPr>
-        <p:spPr>
-          <a:xfrm>
-            <a:off x="822960" y="1856232"/>
-            <a:ext cx="4855464" cy="292608"/>
-          </a:xfrm>
-          <a:prstGeom prst="rect">
-            <a:avLst/>
-          </a:prstGeom>
-          <a:noFill/>
-        </p:spPr>
-        <p:txBody>
-          <a:bodyPr wrap="square" anchor="t" lIns="0" rIns="0" tIns="0" bIns="0">
-            <a:spAutoFit/>
-          </a:bodyPr>
-          <a:lstStyle/>
-          <a:p>
-            <a:pPr algn="l">
-              <a:lnSpc>
-                <a:spcPct val="100000"/>
-              </a:lnSpc>
-              <a:spcAft>
-                <a:spcPts val="0"/>
-              </a:spcAft>
-            </a:pPr>
-            <a:r>
-              <a:rPr sz="1100" b="1" i="0">
-                <a:solidFill>
-                  <a:srgbClr val="58C08D"/>
-                </a:solidFill>
-                <a:latin typeface="Arial"/>
-              </a:rPr>
-              <a:t>1 · THE PEN FIX · DO IT</a:t>
-            </a:r>
-          </a:p>
-        </p:txBody>
-      </p:sp>
-      <p:sp>
-        <p:nvSpPr>
           <p:cNvPr id="6" name="TextBox 5"/>
           <p:cNvSpPr txBox="1"/>
           <p:nvPr/>
         </p:nvSpPr>
         <p:spPr>
           <a:xfrm>
-            <a:off x="822960" y="2148840"/>
-            <a:ext cx="4855464" cy="365760"/>
-          </a:xfrm>
-          <a:prstGeom prst="rect">
-            <a:avLst/>
-          </a:prstGeom>
-          <a:noFill/>
-        </p:spPr>
-        <p:txBody>
-          <a:bodyPr wrap="square" anchor="t" lIns="0" rIns="0" tIns="0" bIns="0">
-            <a:spAutoFit/>
-          </a:bodyPr>
-          <a:lstStyle/>
-          <a:p>
-            <a:pPr algn="l">
-              <a:lnSpc>
-                <a:spcPct val="100000"/>
-              </a:lnSpc>
-              <a:spcAft>
-                <a:spcPts val="0"/>
-              </a:spcAft>
-            </a:pPr>
-            <a:r>
-              <a:rPr sz="1650" b="1" i="0">
+            <a:off x="8293608" y="1737360"/>
+            <a:ext cx="3749039" cy="1097280"/>
+          </a:xfrm>
+          <a:prstGeom prst="rect">
+            <a:avLst/>
+          </a:prstGeom>
+          <a:noFill/>
+        </p:spPr>
+        <p:txBody>
+          <a:bodyPr wrap="square" anchor="t" lIns="0" rIns="0" tIns="0" bIns="0">
+            <a:spAutoFit/>
+          </a:bodyPr>
+          <a:lstStyle/>
+          <a:p>
+            <a:pPr algn="l">
+              <a:lnSpc>
+                <a:spcPct val="107000"/>
+              </a:lnSpc>
+              <a:spcAft>
+                <a:spcPts val="200"/>
+              </a:spcAft>
+            </a:pPr>
+            <a:r>
+              <a:rPr sz="1350" b="1" i="0">
                 <a:solidFill>
                   <a:srgbClr val="EAF0F8"/>
                 </a:solidFill>
                 <a:latin typeface="Arial"/>
               </a:rPr>
-              <a:t>RHP Luke Weaver (NYM)</a:t>
-            </a:r>
-          </a:p>
-        </p:txBody>
-      </p:sp>
-      <p:sp>
-        <p:nvSpPr>
-          <p:cNvPr id="7" name="TextBox 6"/>
-          <p:cNvSpPr txBox="1"/>
-          <p:nvPr/>
-        </p:nvSpPr>
-        <p:spPr>
-          <a:xfrm>
-            <a:off x="822960" y="2560320"/>
-            <a:ext cx="4855464" cy="960120"/>
-          </a:xfrm>
-          <a:prstGeom prst="rect">
-            <a:avLst/>
-          </a:prstGeom>
-          <a:noFill/>
-        </p:spPr>
-        <p:txBody>
-          <a:bodyPr wrap="square" anchor="t" lIns="0" rIns="0" tIns="0" bIns="0">
-            <a:spAutoFit/>
-          </a:bodyPr>
-          <a:lstStyle/>
-          <a:p>
-            <a:pPr algn="l">
-              <a:lnSpc>
-                <a:spcPct val="110000"/>
-              </a:lnSpc>
-              <a:spcAft>
-                <a:spcPts val="400"/>
+              <a:t>The deal</a:t>
+            </a:r>
+          </a:p>
+          <a:p>
+            <a:pPr algn="l">
+              <a:lnSpc>
+                <a:spcPct val="107000"/>
+              </a:lnSpc>
+              <a:spcAft>
+                <a:spcPts val="200"/>
               </a:spcAft>
             </a:pPr>
             <a:r>
@@ -6078,34 +6114,32 @@
                 </a:solidFill>
                 <a:latin typeface="Arial"/>
               </a:rPr>
-              <a:t>For a 45 FV + 40 FV, prospects only, nobody loses a job or an inning. Elite relief year, signed through '27. The highest-probability marginal win on the board.</a:t>
-            </a:r>
-          </a:p>
-        </p:txBody>
-      </p:sp>
-      <p:sp>
-        <p:nvSpPr>
-          <p:cNvPr id="8" name="Rounded Rectangle 7"/>
+              <a:t>Curtis Mead (25) from Washington for Connelly Early: one surplus arm for a 134 wRC+ infield bat with years of club control.</a:t>
+            </a:r>
+          </a:p>
+        </p:txBody>
+      </p:sp>
+      <p:sp>
+        <p:nvSpPr>
+          <p:cNvPr id="7" name="Rounded Rectangle 6"/>
           <p:cNvSpPr/>
           <p:nvPr/>
         </p:nvSpPr>
         <p:spPr>
           <a:xfrm>
-            <a:off x="6227064" y="1691640"/>
-            <a:ext cx="5358384" cy="1938528"/>
+            <a:off x="8001000" y="2889504"/>
+            <a:ext cx="146304" cy="146304"/>
           </a:xfrm>
           <a:prstGeom prst="roundRect">
             <a:avLst>
-              <a:gd name="adj" fmla="val 6000"/>
+              <a:gd name="adj" fmla="val 18000"/>
             </a:avLst>
           </a:prstGeom>
           <a:solidFill>
-            <a:srgbClr val="121E33"/>
+            <a:srgbClr val="EAF0F8"/>
           </a:solidFill>
-          <a:ln w="12700">
-            <a:solidFill>
-              <a:srgbClr val="26334E"/>
-            </a:solidFill>
+          <a:ln>
+            <a:noFill/>
           </a:ln>
           <a:effectLst/>
         </p:spPr>
@@ -6133,116 +6167,51 @@
       </p:sp>
       <p:sp>
         <p:nvSpPr>
-          <p:cNvPr id="9" name="TextBox 8"/>
-          <p:cNvSpPr txBox="1"/>
-          <p:nvPr/>
-        </p:nvSpPr>
-        <p:spPr>
-          <a:xfrm>
-            <a:off x="6483096" y="1856232"/>
-            <a:ext cx="4855464" cy="292608"/>
-          </a:xfrm>
-          <a:prstGeom prst="rect">
-            <a:avLst/>
-          </a:prstGeom>
-          <a:noFill/>
-        </p:spPr>
-        <p:txBody>
-          <a:bodyPr wrap="square" anchor="t" lIns="0" rIns="0" tIns="0" bIns="0">
-            <a:spAutoFit/>
-          </a:bodyPr>
-          <a:lstStyle/>
-          <a:p>
-            <a:pPr algn="l">
-              <a:lnSpc>
-                <a:spcPct val="100000"/>
-              </a:lnSpc>
-              <a:spcAft>
-                <a:spcPts val="0"/>
-              </a:spcAft>
-            </a:pPr>
-            <a:r>
-              <a:rPr sz="1100" b="1" i="0">
+          <p:cNvPr id="8" name="TextBox 7"/>
+          <p:cNvSpPr txBox="1"/>
+          <p:nvPr/>
+        </p:nvSpPr>
+        <p:spPr>
+          <a:xfrm>
+            <a:off x="8293608" y="2852928"/>
+            <a:ext cx="3749039" cy="1097280"/>
+          </a:xfrm>
+          <a:prstGeom prst="rect">
+            <a:avLst/>
+          </a:prstGeom>
+          <a:noFill/>
+        </p:spPr>
+        <p:txBody>
+          <a:bodyPr wrap="square" anchor="t" lIns="0" rIns="0" tIns="0" bIns="0">
+            <a:spAutoFit/>
+          </a:bodyPr>
+          <a:lstStyle/>
+          <a:p>
+            <a:pPr algn="l">
+              <a:lnSpc>
+                <a:spcPct val="107000"/>
+              </a:lnSpc>
+              <a:spcAft>
+                <a:spcPts val="200"/>
+              </a:spcAft>
+            </a:pPr>
+            <a:r>
+              <a:rPr sz="1350" b="1" i="0">
                 <a:solidFill>
                   <a:srgbClr val="EAF0F8"/>
                 </a:solidFill>
                 <a:latin typeface="Arial"/>
               </a:rPr>
-              <a:t>2 · THE STABILIZER · IF THE PRICE HOLDS</a:t>
-            </a:r>
-          </a:p>
-        </p:txBody>
-      </p:sp>
-      <p:sp>
-        <p:nvSpPr>
-          <p:cNvPr id="10" name="TextBox 9"/>
-          <p:cNvSpPr txBox="1"/>
-          <p:nvPr/>
-        </p:nvSpPr>
-        <p:spPr>
-          <a:xfrm>
-            <a:off x="6483096" y="2148840"/>
-            <a:ext cx="4855464" cy="365760"/>
-          </a:xfrm>
-          <a:prstGeom prst="rect">
-            <a:avLst/>
-          </a:prstGeom>
-          <a:noFill/>
-        </p:spPr>
-        <p:txBody>
-          <a:bodyPr wrap="square" anchor="t" lIns="0" rIns="0" tIns="0" bIns="0">
-            <a:spAutoFit/>
-          </a:bodyPr>
-          <a:lstStyle/>
-          <a:p>
-            <a:pPr algn="l">
-              <a:lnSpc>
-                <a:spcPct val="100000"/>
-              </a:lnSpc>
-              <a:spcAft>
-                <a:spcPts val="0"/>
-              </a:spcAft>
-            </a:pPr>
-            <a:r>
-              <a:rPr sz="1650" b="1" i="0">
-                <a:solidFill>
-                  <a:srgbClr val="EAF0F8"/>
-                </a:solidFill>
-                <a:latin typeface="Arial"/>
-              </a:rPr>
-              <a:t>2B Luis Arraez (SFG)</a:t>
-            </a:r>
-          </a:p>
-        </p:txBody>
-      </p:sp>
-      <p:sp>
-        <p:nvSpPr>
-          <p:cNvPr id="11" name="TextBox 10"/>
-          <p:cNvSpPr txBox="1"/>
-          <p:nvPr/>
-        </p:nvSpPr>
-        <p:spPr>
-          <a:xfrm>
-            <a:off x="6483096" y="2560320"/>
-            <a:ext cx="4855464" cy="960120"/>
-          </a:xfrm>
-          <a:prstGeom prst="rect">
-            <a:avLst/>
-          </a:prstGeom>
-          <a:noFill/>
-        </p:spPr>
-        <p:txBody>
-          <a:bodyPr wrap="square" anchor="t" lIns="0" rIns="0" tIns="0" bIns="0">
-            <a:spAutoFit/>
-          </a:bodyPr>
-          <a:lstStyle/>
-          <a:p>
-            <a:pPr algn="l">
-              <a:lnSpc>
-                <a:spcPct val="110000"/>
-              </a:lnSpc>
-              <a:spcAft>
-                <a:spcPts val="400"/>
+              <a:t>The Fenway fit</a:t>
+            </a:r>
+          </a:p>
+          <a:p>
+            <a:pPr algn="l">
+              <a:lnSpc>
+                <a:spcPct val="107000"/>
+              </a:lnSpc>
+              <a:spcAft>
+                <a:spcPts val="200"/>
               </a:spcAft>
             </a:pPr>
             <a:r>
@@ -6252,34 +6221,32 @@
                 </a:solidFill>
                 <a:latin typeface="Arial"/>
               </a:rPr>
-              <a:t>For Brayan Bello, the first deal that touches the active roster. Zero prospect cost; Arraez fills a patchwork platoon spot, not a hot regular's.</a:t>
-            </a:r>
-          </a:p>
-        </p:txBody>
-      </p:sp>
-      <p:sp>
-        <p:nvSpPr>
-          <p:cNvPr id="12" name="Rounded Rectangle 11"/>
+              <a:t>23% pull-air rate, 82nd percentile, with a .846 wOBA on pulled air balls. RHB pull-air plays to the Monster.</a:t>
+            </a:r>
+          </a:p>
+        </p:txBody>
+      </p:sp>
+      <p:sp>
+        <p:nvSpPr>
+          <p:cNvPr id="9" name="Rounded Rectangle 8"/>
           <p:cNvSpPr/>
           <p:nvPr/>
         </p:nvSpPr>
         <p:spPr>
           <a:xfrm>
-            <a:off x="566928" y="3886200"/>
-            <a:ext cx="5358384" cy="1938528"/>
+            <a:off x="8001000" y="4005072"/>
+            <a:ext cx="146304" cy="146304"/>
           </a:xfrm>
           <a:prstGeom prst="roundRect">
             <a:avLst>
-              <a:gd name="adj" fmla="val 6000"/>
+              <a:gd name="adj" fmla="val 18000"/>
             </a:avLst>
           </a:prstGeom>
           <a:solidFill>
-            <a:srgbClr val="121E33"/>
+            <a:srgbClr val="E3B14E"/>
           </a:solidFill>
-          <a:ln w="12700">
-            <a:solidFill>
-              <a:srgbClr val="26334E"/>
-            </a:solidFill>
+          <a:ln>
+            <a:noFill/>
           </a:ln>
           <a:effectLst/>
         </p:spPr>
@@ -6307,116 +6274,51 @@
       </p:sp>
       <p:sp>
         <p:nvSpPr>
-          <p:cNvPr id="13" name="TextBox 12"/>
-          <p:cNvSpPr txBox="1"/>
-          <p:nvPr/>
-        </p:nvSpPr>
-        <p:spPr>
-          <a:xfrm>
-            <a:off x="822960" y="4050791"/>
-            <a:ext cx="4855464" cy="292608"/>
-          </a:xfrm>
-          <a:prstGeom prst="rect">
-            <a:avLst/>
-          </a:prstGeom>
-          <a:noFill/>
-        </p:spPr>
-        <p:txBody>
-          <a:bodyPr wrap="square" anchor="t" lIns="0" rIns="0" tIns="0" bIns="0">
-            <a:spAutoFit/>
-          </a:bodyPr>
-          <a:lstStyle/>
-          <a:p>
-            <a:pPr algn="l">
-              <a:lnSpc>
-                <a:spcPct val="100000"/>
-              </a:lnSpc>
-              <a:spcAft>
-                <a:spcPts val="0"/>
-              </a:spcAft>
-            </a:pPr>
-            <a:r>
-              <a:rPr sz="1100" b="1" i="0">
-                <a:solidFill>
-                  <a:srgbClr val="E8615A"/>
-                </a:solidFill>
-                <a:latin typeface="Arial"/>
-              </a:rPr>
-              <a:t>3 · THE BIG SWING · PROBABLY WAIT</a:t>
-            </a:r>
-          </a:p>
-        </p:txBody>
-      </p:sp>
-      <p:sp>
-        <p:nvSpPr>
-          <p:cNvPr id="14" name="TextBox 13"/>
-          <p:cNvSpPr txBox="1"/>
-          <p:nvPr/>
-        </p:nvSpPr>
-        <p:spPr>
-          <a:xfrm>
-            <a:off x="822960" y="4343400"/>
-            <a:ext cx="4855464" cy="365760"/>
-          </a:xfrm>
-          <a:prstGeom prst="rect">
-            <a:avLst/>
-          </a:prstGeom>
-          <a:noFill/>
-        </p:spPr>
-        <p:txBody>
-          <a:bodyPr wrap="square" anchor="t" lIns="0" rIns="0" tIns="0" bIns="0">
-            <a:spAutoFit/>
-          </a:bodyPr>
-          <a:lstStyle/>
-          <a:p>
-            <a:pPr algn="l">
-              <a:lnSpc>
-                <a:spcPct val="100000"/>
-              </a:lnSpc>
-              <a:spcAft>
-                <a:spcPts val="0"/>
-              </a:spcAft>
-            </a:pPr>
-            <a:r>
-              <a:rPr sz="1650" b="1" i="0">
+          <p:cNvPr id="10" name="TextBox 9"/>
+          <p:cNvSpPr txBox="1"/>
+          <p:nvPr/>
+        </p:nvSpPr>
+        <p:spPr>
+          <a:xfrm>
+            <a:off x="8293608" y="3968496"/>
+            <a:ext cx="3749039" cy="1097280"/>
+          </a:xfrm>
+          <a:prstGeom prst="rect">
+            <a:avLst/>
+          </a:prstGeom>
+          <a:noFill/>
+        </p:spPr>
+        <p:txBody>
+          <a:bodyPr wrap="square" anchor="t" lIns="0" rIns="0" tIns="0" bIns="0">
+            <a:spAutoFit/>
+          </a:bodyPr>
+          <a:lstStyle/>
+          <a:p>
+            <a:pPr algn="l">
+              <a:lnSpc>
+                <a:spcPct val="107000"/>
+              </a:lnSpc>
+              <a:spcAft>
+                <a:spcPts val="200"/>
+              </a:spcAft>
+            </a:pPr>
+            <a:r>
+              <a:rPr sz="1350" b="1" i="0">
                 <a:solidFill>
                   <a:srgbClr val="EAF0F8"/>
                 </a:solidFill>
                 <a:latin typeface="Arial"/>
               </a:rPr>
-              <a:t>SS Zach Neto (LAA)</a:t>
-            </a:r>
-          </a:p>
-        </p:txBody>
-      </p:sp>
-      <p:sp>
-        <p:nvSpPr>
-          <p:cNvPr id="15" name="TextBox 14"/>
-          <p:cNvSpPr txBox="1"/>
-          <p:nvPr/>
-        </p:nvSpPr>
-        <p:spPr>
-          <a:xfrm>
-            <a:off x="822960" y="4754880"/>
-            <a:ext cx="4855464" cy="960120"/>
-          </a:xfrm>
-          <a:prstGeom prst="rect">
-            <a:avLst/>
-          </a:prstGeom>
-          <a:noFill/>
-        </p:spPr>
-        <p:txBody>
-          <a:bodyPr wrap="square" anchor="t" lIns="0" rIns="0" tIns="0" bIns="0">
-            <a:spAutoFit/>
-          </a:bodyPr>
-          <a:lstStyle/>
-          <a:p>
-            <a:pPr algn="l">
-              <a:lnSpc>
-                <a:spcPct val="110000"/>
-              </a:lnSpc>
-              <a:spcAft>
-                <a:spcPts val="400"/>
+              <a:t>Earned, mostly</a:t>
+            </a:r>
+          </a:p>
+          <a:p>
+            <a:pPr algn="l">
+              <a:lnSpc>
+                <a:spcPct val="107000"/>
+              </a:lnSpc>
+              <a:spcAft>
+                <a:spcPts val="200"/>
               </a:spcAft>
             </a:pPr>
             <a:r>
@@ -6426,34 +6328,32 @@
                 </a:solidFill>
                 <a:latin typeface="Arial"/>
               </a:rPr>
-              <a:t>For Tolle + Early + a 45 FV: two arms out of a winning rotation midseason. Right for the franchise window, and still there in the winter. Controlled through 2029.</a:t>
-            </a:r>
-          </a:p>
-        </p:txBody>
-      </p:sp>
-      <p:sp>
-        <p:nvSpPr>
-          <p:cNvPr id="16" name="Rounded Rectangle 15"/>
+              <a:t>.376 wOBA against a .359 xwOBA, so the breakout has contact quality behind it. The flag: 488 PA of .617 OPS before this year.</a:t>
+            </a:r>
+          </a:p>
+        </p:txBody>
+      </p:sp>
+      <p:sp>
+        <p:nvSpPr>
+          <p:cNvPr id="11" name="Rounded Rectangle 10"/>
           <p:cNvSpPr/>
           <p:nvPr/>
         </p:nvSpPr>
         <p:spPr>
           <a:xfrm>
-            <a:off x="6227064" y="3886200"/>
-            <a:ext cx="5358384" cy="1938528"/>
+            <a:off x="8001000" y="5120640"/>
+            <a:ext cx="146304" cy="146304"/>
           </a:xfrm>
           <a:prstGeom prst="roundRect">
             <a:avLst>
-              <a:gd name="adj" fmla="val 6000"/>
+              <a:gd name="adj" fmla="val 18000"/>
             </a:avLst>
           </a:prstGeom>
           <a:solidFill>
-            <a:srgbClr val="121E33"/>
+            <a:srgbClr val="58C08D"/>
           </a:solidFill>
-          <a:ln w="12700">
-            <a:solidFill>
-              <a:srgbClr val="26334E"/>
-            </a:solidFill>
+          <a:ln>
+            <a:noFill/>
           </a:ln>
           <a:effectLst/>
         </p:spPr>
@@ -6481,116 +6381,51 @@
       </p:sp>
       <p:sp>
         <p:nvSpPr>
-          <p:cNvPr id="17" name="TextBox 16"/>
-          <p:cNvSpPr txBox="1"/>
-          <p:nvPr/>
-        </p:nvSpPr>
-        <p:spPr>
-          <a:xfrm>
-            <a:off x="6483096" y="4050791"/>
-            <a:ext cx="4855464" cy="292608"/>
-          </a:xfrm>
-          <a:prstGeom prst="rect">
-            <a:avLst/>
-          </a:prstGeom>
-          <a:noFill/>
-        </p:spPr>
-        <p:txBody>
-          <a:bodyPr wrap="square" anchor="t" lIns="0" rIns="0" tIns="0" bIns="0">
-            <a:spAutoFit/>
-          </a:bodyPr>
-          <a:lstStyle/>
-          <a:p>
-            <a:pPr algn="l">
-              <a:lnSpc>
-                <a:spcPct val="100000"/>
-              </a:lnSpc>
-              <a:spcAft>
-                <a:spcPts val="0"/>
-              </a:spcAft>
-            </a:pPr>
-            <a:r>
-              <a:rPr sz="1100" b="1" i="0">
-                <a:solidFill>
-                  <a:srgbClr val="E3B14E"/>
-                </a:solidFill>
-                <a:latin typeface="Arial"/>
-              </a:rPr>
-              <a:t>✗ · THE WALK-AWAY</a:t>
-            </a:r>
-          </a:p>
-        </p:txBody>
-      </p:sp>
-      <p:sp>
-        <p:nvSpPr>
-          <p:cNvPr id="18" name="TextBox 17"/>
-          <p:cNvSpPr txBox="1"/>
-          <p:nvPr/>
-        </p:nvSpPr>
-        <p:spPr>
-          <a:xfrm>
-            <a:off x="6483096" y="4343400"/>
-            <a:ext cx="4855464" cy="365760"/>
-          </a:xfrm>
-          <a:prstGeom prst="rect">
-            <a:avLst/>
-          </a:prstGeom>
-          <a:noFill/>
-        </p:spPr>
-        <p:txBody>
-          <a:bodyPr wrap="square" anchor="t" lIns="0" rIns="0" tIns="0" bIns="0">
-            <a:spAutoFit/>
-          </a:bodyPr>
-          <a:lstStyle/>
-          <a:p>
-            <a:pPr algn="l">
-              <a:lnSpc>
-                <a:spcPct val="100000"/>
-              </a:lnSpc>
-              <a:spcAft>
-                <a:spcPts val="0"/>
-              </a:spcAft>
-            </a:pPr>
-            <a:r>
-              <a:rPr sz="1650" b="1" i="0">
+          <p:cNvPr id="12" name="TextBox 11"/>
+          <p:cNvSpPr txBox="1"/>
+          <p:nvPr/>
+        </p:nvSpPr>
+        <p:spPr>
+          <a:xfrm>
+            <a:off x="8293608" y="5084064"/>
+            <a:ext cx="3749039" cy="1097280"/>
+          </a:xfrm>
+          <a:prstGeom prst="rect">
+            <a:avLst/>
+          </a:prstGeom>
+          <a:noFill/>
+        </p:spPr>
+        <p:txBody>
+          <a:bodyPr wrap="square" anchor="t" lIns="0" rIns="0" tIns="0" bIns="0">
+            <a:spAutoFit/>
+          </a:bodyPr>
+          <a:lstStyle/>
+          <a:p>
+            <a:pPr algn="l">
+              <a:lnSpc>
+                <a:spcPct val="107000"/>
+              </a:lnSpc>
+              <a:spcAft>
+                <a:spcPts val="200"/>
+              </a:spcAft>
+            </a:pPr>
+            <a:r>
+              <a:rPr sz="1350" b="1" i="0">
                 <a:solidFill>
                   <a:srgbClr val="EAF0F8"/>
                 </a:solidFill>
                 <a:latin typeface="Arial"/>
               </a:rPr>
-              <a:t>C Shea Langeliers (ATH)</a:t>
-            </a:r>
-          </a:p>
-        </p:txBody>
-      </p:sp>
-      <p:sp>
-        <p:nvSpPr>
-          <p:cNvPr id="19" name="TextBox 18"/>
-          <p:cNvSpPr txBox="1"/>
-          <p:nvPr/>
-        </p:nvSpPr>
-        <p:spPr>
-          <a:xfrm>
-            <a:off x="6483096" y="4754880"/>
-            <a:ext cx="4855464" cy="960120"/>
-          </a:xfrm>
-          <a:prstGeom prst="rect">
-            <a:avLst/>
-          </a:prstGeom>
-          <a:noFill/>
-        </p:spPr>
-        <p:txBody>
-          <a:bodyPr wrap="square" anchor="t" lIns="0" rIns="0" tIns="0" bIns="0">
-            <a:spAutoFit/>
-          </a:bodyPr>
-          <a:lstStyle/>
-          <a:p>
-            <a:pPr algn="l">
-              <a:lnSpc>
-                <a:spcPct val="110000"/>
-              </a:lnSpc>
-              <a:spcAft>
-                <a:spcPts val="400"/>
+              <a:t>Menu grade</a:t>
+            </a:r>
+          </a:p>
+          <a:p>
+            <a:pPr algn="l">
+              <a:lnSpc>
+                <a:spcPct val="107000"/>
+              </a:lnSpc>
+              <a:spcAft>
+                <a:spcPts val="200"/>
               </a:spcAft>
             </a:pPr>
             <a:r>
@@ -6600,65 +6435,14 @@
                 </a:solidFill>
                 <a:latin typeface="Arial"/>
               </a:rPr>
-              <a:t>The value math worked; the battery map is the veto. No August bat is worth resetting eight pitcher-catcher pairings on a staff carrying the season.</a:t>
-            </a:r>
-          </a:p>
-        </p:txBody>
-      </p:sp>
-      <p:sp>
-        <p:nvSpPr>
-          <p:cNvPr id="20" name="TextBox 19"/>
-          <p:cNvSpPr txBox="1"/>
-          <p:nvPr/>
-        </p:nvSpPr>
-        <p:spPr>
-          <a:xfrm>
-            <a:off x="566928" y="5897880"/>
-            <a:ext cx="11064240" cy="457200"/>
-          </a:xfrm>
-          <a:prstGeom prst="rect">
-            <a:avLst/>
-          </a:prstGeom>
-          <a:noFill/>
-        </p:spPr>
-        <p:txBody>
-          <a:bodyPr wrap="square" anchor="t" lIns="0" rIns="0" tIns="0" bIns="0">
-            <a:spAutoFit/>
-          </a:bodyPr>
-          <a:lstStyle/>
-          <a:p>
-            <a:pPr algn="l">
-              <a:lnSpc>
-                <a:spcPct val="100000"/>
-              </a:lnSpc>
-              <a:spcAft>
-                <a:spcPts val="0"/>
-              </a:spcAft>
-            </a:pPr>
-            <a:r>
-              <a:rPr sz="1250" b="1" i="0">
-                <a:solidFill>
-                  <a:srgbClr val="D9E1EF"/>
-                </a:solidFill>
-                <a:latin typeface="Arial"/>
-              </a:rPr>
-              <a:t>A menu, not a plan, Boston can afford about two. </a:t>
-            </a:r>
-            <a:r>
-              <a:rPr sz="1250" b="0" i="0">
-                <a:solidFill>
-                  <a:srgbClr val="93A0B6"/>
-                </a:solidFill>
-                <a:latin typeface="Arial"/>
-              </a:rPr>
-              <a:t>Full value math and verified contracts in the mock-trades memo. Hypotheticals, not reporting.</a:t>
-            </a:r>
-          </a:p>
-        </p:txBody>
-      </p:sp>
-      <p:sp>
-        <p:nvSpPr>
-          <p:cNvPr id="21" name="TextBox 20"/>
+              <a:t>The big-swing shape at half the price, and the infield hole filled. The pen fix is still open, 8 days left.</a:t>
+            </a:r>
+          </a:p>
+        </p:txBody>
+      </p:sp>
+      <p:sp>
+        <p:nvSpPr>
+          <p:cNvPr id="13" name="TextBox 12"/>
           <p:cNvSpPr txBox="1"/>
           <p:nvPr/>
         </p:nvSpPr>
@@ -6770,7 +6554,7 @@
                 </a:solidFill>
                 <a:latin typeface="Courier New"/>
               </a:rPr>
-              <a:t>// THE REAL TRADE</a:t>
+              <a:t>// THE WINTER PLAN</a:t>
             </a:r>
           </a:p>
         </p:txBody>
@@ -6812,35 +6596,53 @@
                 </a:solidFill>
                 <a:latin typeface="Arial"/>
               </a:rPr>
-              <a:t>They made one: Mead for Early</a:t>
-            </a:r>
-          </a:p>
-        </p:txBody>
-      </p:sp>
-      <p:pic>
-        <p:nvPicPr>
-          <p:cNvPr id="4" name="Picture 3" descr="18_mead_fit.png"/>
-          <p:cNvPicPr>
-            <a:picLocks noChangeAspect="1"/>
-          </p:cNvPicPr>
-          <p:nvPr/>
-        </p:nvPicPr>
-        <p:blipFill>
-          <a:blip r:embed="rId2"/>
-          <a:stretch>
-            <a:fillRect/>
-          </a:stretch>
-        </p:blipFill>
-        <p:spPr>
-          <a:xfrm>
-            <a:off x="383344" y="1554480"/>
-            <a:ext cx="7280030" cy="4206240"/>
-          </a:xfrm>
-          <a:prstGeom prst="rect">
-            <a:avLst/>
-          </a:prstGeom>
-        </p:spPr>
-      </p:pic>
+              <a:t>Spend the pitching surplus on offense</a:t>
+            </a:r>
+          </a:p>
+        </p:txBody>
+      </p:sp>
+      <p:sp>
+        <p:nvSpPr>
+          <p:cNvPr id="4" name="TextBox 3"/>
+          <p:cNvSpPr txBox="1"/>
+          <p:nvPr/>
+        </p:nvSpPr>
+        <p:spPr>
+          <a:xfrm>
+            <a:off x="566928" y="1572768"/>
+            <a:ext cx="11064240" cy="640080"/>
+          </a:xfrm>
+          <a:prstGeom prst="rect">
+            <a:avLst/>
+          </a:prstGeom>
+          <a:noFill/>
+        </p:spPr>
+        <p:txBody>
+          <a:bodyPr wrap="square" anchor="t" lIns="0" rIns="0" tIns="0" bIns="0">
+            <a:spAutoFit/>
+          </a:bodyPr>
+          <a:lstStyle/>
+          <a:p>
+            <a:pPr algn="l">
+              <a:lnSpc>
+                <a:spcPct val="112000"/>
+              </a:lnSpc>
+              <a:spcAft>
+                <a:spcPts val="400"/>
+              </a:spcAft>
+            </a:pPr>
+            <a:r>
+              <a:rPr sz="1450" b="0" i="0">
+                <a:solidFill>
+                  <a:srgbClr val="D9E1EF"/>
+                </a:solidFill>
+                <a:latin typeface="Arial"/>
+              </a:rPr>
+              <a:t>If winter comes and Duran's rebound has shown up, this is what a deal should return. With a top-6 rotation (3.65 ERA) carrying the club, trading bats for arms is backwards, convert the outfield surplus into what's thin:</a:t>
+            </a:r>
+          </a:p>
+        </p:txBody>
+      </p:sp>
       <p:sp>
         <p:nvSpPr>
           <p:cNvPr id="5" name="Rounded Rectangle 4"/>
@@ -6849,8 +6651,56 @@
         </p:nvSpPr>
         <p:spPr>
           <a:xfrm>
-            <a:off x="8001000" y="1773936"/>
-            <a:ext cx="146304" cy="146304"/>
+            <a:off x="566928" y="2468880"/>
+            <a:ext cx="3502152" cy="2514600"/>
+          </a:xfrm>
+          <a:prstGeom prst="roundRect">
+            <a:avLst>
+              <a:gd name="adj" fmla="val 6000"/>
+            </a:avLst>
+          </a:prstGeom>
+          <a:solidFill>
+            <a:srgbClr val="121E33"/>
+          </a:solidFill>
+          <a:ln w="12700">
+            <a:solidFill>
+              <a:srgbClr val="26334E"/>
+            </a:solidFill>
+          </a:ln>
+          <a:effectLst/>
+        </p:spPr>
+        <p:style>
+          <a:lnRef idx="1">
+            <a:schemeClr val="accent1"/>
+          </a:lnRef>
+          <a:fillRef idx="3">
+            <a:schemeClr val="accent1"/>
+          </a:fillRef>
+          <a:effectRef idx="2">
+            <a:schemeClr val="accent1"/>
+          </a:effectRef>
+          <a:fontRef idx="minor">
+            <a:schemeClr val="lt1"/>
+          </a:fontRef>
+        </p:style>
+        <p:txBody>
+          <a:bodyPr rtlCol="0" anchor="ctr"/>
+          <a:lstStyle/>
+          <a:p>
+            <a:pPr algn="ctr"/>
+          </a:p>
+        </p:txBody>
+      </p:sp>
+      <p:sp>
+        <p:nvSpPr>
+          <p:cNvPr id="6" name="Rounded Rectangle 5"/>
+          <p:cNvSpPr/>
+          <p:nvPr/>
+        </p:nvSpPr>
+        <p:spPr>
+          <a:xfrm>
+            <a:off x="841247" y="2724912"/>
+            <a:ext cx="384048" cy="384048"/>
           </a:xfrm>
           <a:prstGeom prst="roundRect">
             <a:avLst>
@@ -6858,7 +6708,7 @@
             </a:avLst>
           </a:prstGeom>
           <a:solidFill>
-            <a:srgbClr val="E8615A"/>
+            <a:srgbClr val="58C08D"/>
           </a:solidFill>
           <a:ln>
             <a:noFill/>
@@ -6880,6 +6730,147 @@
           </a:fontRef>
         </p:style>
         <p:txBody>
+          <a:bodyPr rtlCol="0" anchor="ctr" wrap="none"/>
+          <a:lstStyle/>
+          <a:p>
+            <a:pPr algn="ctr"/>
+            <a:r>
+              <a:rPr sz="1600" b="1">
+                <a:solidFill>
+                  <a:srgbClr val="0B1220"/>
+                </a:solidFill>
+                <a:latin typeface="Courier New"/>
+              </a:rPr>
+              <a:t>1</a:t>
+            </a:r>
+          </a:p>
+        </p:txBody>
+      </p:sp>
+      <p:sp>
+        <p:nvSpPr>
+          <p:cNvPr id="7" name="TextBox 6"/>
+          <p:cNvSpPr txBox="1"/>
+          <p:nvPr/>
+        </p:nvSpPr>
+        <p:spPr>
+          <a:xfrm>
+            <a:off x="841247" y="3310128"/>
+            <a:ext cx="2999232" cy="411480"/>
+          </a:xfrm>
+          <a:prstGeom prst="rect">
+            <a:avLst/>
+          </a:prstGeom>
+          <a:noFill/>
+        </p:spPr>
+        <p:txBody>
+          <a:bodyPr wrap="square" anchor="t" lIns="0" rIns="0" tIns="0" bIns="0">
+            <a:spAutoFit/>
+          </a:bodyPr>
+          <a:lstStyle/>
+          <a:p>
+            <a:pPr algn="l">
+              <a:lnSpc>
+                <a:spcPct val="100000"/>
+              </a:lnSpc>
+              <a:spcAft>
+                <a:spcPts val="0"/>
+              </a:spcAft>
+            </a:pPr>
+            <a:r>
+              <a:rPr sz="1600" b="1" i="0">
+                <a:solidFill>
+                  <a:srgbClr val="EAF0F8"/>
+                </a:solidFill>
+                <a:latin typeface="Arial"/>
+              </a:rPr>
+              <a:t>Controllable bats</a:t>
+            </a:r>
+          </a:p>
+        </p:txBody>
+      </p:sp>
+      <p:sp>
+        <p:nvSpPr>
+          <p:cNvPr id="8" name="TextBox 7"/>
+          <p:cNvSpPr txBox="1"/>
+          <p:nvPr/>
+        </p:nvSpPr>
+        <p:spPr>
+          <a:xfrm>
+            <a:off x="841247" y="3767328"/>
+            <a:ext cx="2999232" cy="1097280"/>
+          </a:xfrm>
+          <a:prstGeom prst="rect">
+            <a:avLst/>
+          </a:prstGeom>
+          <a:noFill/>
+        </p:spPr>
+        <p:txBody>
+          <a:bodyPr wrap="square" anchor="t" lIns="0" rIns="0" tIns="0" bIns="0">
+            <a:spAutoFit/>
+          </a:bodyPr>
+          <a:lstStyle/>
+          <a:p>
+            <a:pPr algn="l">
+              <a:lnSpc>
+                <a:spcPct val="110000"/>
+              </a:lnSpc>
+              <a:spcAft>
+                <a:spcPts val="400"/>
+              </a:spcAft>
+            </a:pPr>
+            <a:r>
+              <a:rPr sz="1280" b="0" i="0">
+                <a:solidFill>
+                  <a:srgbClr val="93A0B6"/>
+                </a:solidFill>
+                <a:latin typeface="Arial"/>
+              </a:rPr>
+              <a:t>Young, cost-controlled position players to fix an inconsistent lineup and lengthen it around the core.</a:t>
+            </a:r>
+          </a:p>
+        </p:txBody>
+      </p:sp>
+      <p:sp>
+        <p:nvSpPr>
+          <p:cNvPr id="9" name="Rounded Rectangle 8"/>
+          <p:cNvSpPr/>
+          <p:nvPr/>
+        </p:nvSpPr>
+        <p:spPr>
+          <a:xfrm>
+            <a:off x="4352544" y="2468880"/>
+            <a:ext cx="3502152" cy="2514600"/>
+          </a:xfrm>
+          <a:prstGeom prst="roundRect">
+            <a:avLst>
+              <a:gd name="adj" fmla="val 6000"/>
+            </a:avLst>
+          </a:prstGeom>
+          <a:solidFill>
+            <a:srgbClr val="121E33"/>
+          </a:solidFill>
+          <a:ln w="12700">
+            <a:solidFill>
+              <a:srgbClr val="26334E"/>
+            </a:solidFill>
+          </a:ln>
+          <a:effectLst/>
+        </p:spPr>
+        <p:style>
+          <a:lnRef idx="1">
+            <a:schemeClr val="accent1"/>
+          </a:lnRef>
+          <a:fillRef idx="3">
+            <a:schemeClr val="accent1"/>
+          </a:fillRef>
+          <a:effectRef idx="2">
+            <a:schemeClr val="accent1"/>
+          </a:effectRef>
+          <a:fontRef idx="minor">
+            <a:schemeClr val="lt1"/>
+          </a:fontRef>
+        </p:style>
+        <p:txBody>
           <a:bodyPr rtlCol="0" anchor="ctr"/>
           <a:lstStyle/>
           <a:p>
@@ -6889,75 +6880,14 @@
       </p:sp>
       <p:sp>
         <p:nvSpPr>
-          <p:cNvPr id="6" name="TextBox 5"/>
-          <p:cNvSpPr txBox="1"/>
-          <p:nvPr/>
-        </p:nvSpPr>
-        <p:spPr>
-          <a:xfrm>
-            <a:off x="8293608" y="1737360"/>
-            <a:ext cx="3749039" cy="1097280"/>
-          </a:xfrm>
-          <a:prstGeom prst="rect">
-            <a:avLst/>
-          </a:prstGeom>
-          <a:noFill/>
-        </p:spPr>
-        <p:txBody>
-          <a:bodyPr wrap="square" anchor="t" lIns="0" rIns="0" tIns="0" bIns="0">
-            <a:spAutoFit/>
-          </a:bodyPr>
-          <a:lstStyle/>
-          <a:p>
-            <a:pPr algn="l">
-              <a:lnSpc>
-                <a:spcPct val="107000"/>
-              </a:lnSpc>
-              <a:spcAft>
-                <a:spcPts val="200"/>
-              </a:spcAft>
-            </a:pPr>
-            <a:r>
-              <a:rPr sz="1350" b="1" i="0">
-                <a:solidFill>
-                  <a:srgbClr val="EAF0F8"/>
-                </a:solidFill>
-                <a:latin typeface="Arial"/>
-              </a:rPr>
-              <a:t>The deal</a:t>
-            </a:r>
-          </a:p>
-          <a:p>
-            <a:pPr algn="l">
-              <a:lnSpc>
-                <a:spcPct val="107000"/>
-              </a:lnSpc>
-              <a:spcAft>
-                <a:spcPts val="200"/>
-              </a:spcAft>
-            </a:pPr>
-            <a:r>
-              <a:rPr sz="1160" b="0" i="0">
-                <a:solidFill>
-                  <a:srgbClr val="93A0B6"/>
-                </a:solidFill>
-                <a:latin typeface="Arial"/>
-              </a:rPr>
-              <a:t>Curtis Mead (25) from Washington for Connelly Early: one surplus arm for a 134 wRC+ infield bat with years of club control.</a:t>
-            </a:r>
-          </a:p>
-        </p:txBody>
-      </p:sp>
-      <p:sp>
-        <p:nvSpPr>
-          <p:cNvPr id="7" name="Rounded Rectangle 6"/>
+          <p:cNvPr id="10" name="Rounded Rectangle 9"/>
           <p:cNvSpPr/>
           <p:nvPr/>
         </p:nvSpPr>
         <p:spPr>
           <a:xfrm>
-            <a:off x="8001000" y="2889504"/>
-            <a:ext cx="146304" cy="146304"/>
+            <a:off x="4626864" y="2724912"/>
+            <a:ext cx="384048" cy="384048"/>
           </a:xfrm>
           <a:prstGeom prst="roundRect">
             <a:avLst>
@@ -6987,6 +6917,147 @@
           </a:fontRef>
         </p:style>
         <p:txBody>
+          <a:bodyPr rtlCol="0" anchor="ctr" wrap="none"/>
+          <a:lstStyle/>
+          <a:p>
+            <a:pPr algn="ctr"/>
+            <a:r>
+              <a:rPr sz="1600" b="1">
+                <a:solidFill>
+                  <a:srgbClr val="0B1220"/>
+                </a:solidFill>
+                <a:latin typeface="Courier New"/>
+              </a:rPr>
+              <a:t>2</a:t>
+            </a:r>
+          </a:p>
+        </p:txBody>
+      </p:sp>
+      <p:sp>
+        <p:nvSpPr>
+          <p:cNvPr id="11" name="TextBox 10"/>
+          <p:cNvSpPr txBox="1"/>
+          <p:nvPr/>
+        </p:nvSpPr>
+        <p:spPr>
+          <a:xfrm>
+            <a:off x="4626864" y="3310128"/>
+            <a:ext cx="2999232" cy="411480"/>
+          </a:xfrm>
+          <a:prstGeom prst="rect">
+            <a:avLst/>
+          </a:prstGeom>
+          <a:noFill/>
+        </p:spPr>
+        <p:txBody>
+          <a:bodyPr wrap="square" anchor="t" lIns="0" rIns="0" tIns="0" bIns="0">
+            <a:spAutoFit/>
+          </a:bodyPr>
+          <a:lstStyle/>
+          <a:p>
+            <a:pPr algn="l">
+              <a:lnSpc>
+                <a:spcPct val="100000"/>
+              </a:lnSpc>
+              <a:spcAft>
+                <a:spcPts val="0"/>
+              </a:spcAft>
+            </a:pPr>
+            <a:r>
+              <a:rPr sz="1600" b="1" i="0">
+                <a:solidFill>
+                  <a:srgbClr val="EAF0F8"/>
+                </a:solidFill>
+                <a:latin typeface="Arial"/>
+              </a:rPr>
+              <a:t>Best talent / upside</a:t>
+            </a:r>
+          </a:p>
+        </p:txBody>
+      </p:sp>
+      <p:sp>
+        <p:nvSpPr>
+          <p:cNvPr id="12" name="TextBox 11"/>
+          <p:cNvSpPr txBox="1"/>
+          <p:nvPr/>
+        </p:nvSpPr>
+        <p:spPr>
+          <a:xfrm>
+            <a:off x="4626864" y="3767328"/>
+            <a:ext cx="2999232" cy="1097280"/>
+          </a:xfrm>
+          <a:prstGeom prst="rect">
+            <a:avLst/>
+          </a:prstGeom>
+          <a:noFill/>
+        </p:spPr>
+        <p:txBody>
+          <a:bodyPr wrap="square" anchor="t" lIns="0" rIns="0" tIns="0" bIns="0">
+            <a:spAutoFit/>
+          </a:bodyPr>
+          <a:lstStyle/>
+          <a:p>
+            <a:pPr algn="l">
+              <a:lnSpc>
+                <a:spcPct val="110000"/>
+              </a:lnSpc>
+              <a:spcAft>
+                <a:spcPts val="400"/>
+              </a:spcAft>
+            </a:pPr>
+            <a:r>
+              <a:rPr sz="1280" b="0" i="0">
+                <a:solidFill>
+                  <a:srgbClr val="93A0B6"/>
+                </a:solidFill>
+                <a:latin typeface="Arial"/>
+              </a:rPr>
+              <a:t>In a retool you take the best player, not the positional patch, prospects and MLB-ready youth over rentals.</a:t>
+            </a:r>
+          </a:p>
+        </p:txBody>
+      </p:sp>
+      <p:sp>
+        <p:nvSpPr>
+          <p:cNvPr id="13" name="Rounded Rectangle 12"/>
+          <p:cNvSpPr/>
+          <p:nvPr/>
+        </p:nvSpPr>
+        <p:spPr>
+          <a:xfrm>
+            <a:off x="8138159" y="2468880"/>
+            <a:ext cx="3502152" cy="2514600"/>
+          </a:xfrm>
+          <a:prstGeom prst="roundRect">
+            <a:avLst>
+              <a:gd name="adj" fmla="val 6000"/>
+            </a:avLst>
+          </a:prstGeom>
+          <a:solidFill>
+            <a:srgbClr val="121E33"/>
+          </a:solidFill>
+          <a:ln w="12700">
+            <a:solidFill>
+              <a:srgbClr val="26334E"/>
+            </a:solidFill>
+          </a:ln>
+          <a:effectLst/>
+        </p:spPr>
+        <p:style>
+          <a:lnRef idx="1">
+            <a:schemeClr val="accent1"/>
+          </a:lnRef>
+          <a:fillRef idx="3">
+            <a:schemeClr val="accent1"/>
+          </a:fillRef>
+          <a:effectRef idx="2">
+            <a:schemeClr val="accent1"/>
+          </a:effectRef>
+          <a:fontRef idx="minor">
+            <a:schemeClr val="lt1"/>
+          </a:fontRef>
+        </p:style>
+        <p:txBody>
           <a:bodyPr rtlCol="0" anchor="ctr"/>
           <a:lstStyle/>
           <a:p>
@@ -6996,75 +7067,14 @@
       </p:sp>
       <p:sp>
         <p:nvSpPr>
-          <p:cNvPr id="8" name="TextBox 7"/>
-          <p:cNvSpPr txBox="1"/>
-          <p:nvPr/>
-        </p:nvSpPr>
-        <p:spPr>
-          <a:xfrm>
-            <a:off x="8293608" y="2852928"/>
-            <a:ext cx="3749039" cy="1097280"/>
-          </a:xfrm>
-          <a:prstGeom prst="rect">
-            <a:avLst/>
-          </a:prstGeom>
-          <a:noFill/>
-        </p:spPr>
-        <p:txBody>
-          <a:bodyPr wrap="square" anchor="t" lIns="0" rIns="0" tIns="0" bIns="0">
-            <a:spAutoFit/>
-          </a:bodyPr>
-          <a:lstStyle/>
-          <a:p>
-            <a:pPr algn="l">
-              <a:lnSpc>
-                <a:spcPct val="107000"/>
-              </a:lnSpc>
-              <a:spcAft>
-                <a:spcPts val="200"/>
-              </a:spcAft>
-            </a:pPr>
-            <a:r>
-              <a:rPr sz="1350" b="1" i="0">
-                <a:solidFill>
-                  <a:srgbClr val="EAF0F8"/>
-                </a:solidFill>
-                <a:latin typeface="Arial"/>
-              </a:rPr>
-              <a:t>The Fenway fit</a:t>
-            </a:r>
-          </a:p>
-          <a:p>
-            <a:pPr algn="l">
-              <a:lnSpc>
-                <a:spcPct val="107000"/>
-              </a:lnSpc>
-              <a:spcAft>
-                <a:spcPts val="200"/>
-              </a:spcAft>
-            </a:pPr>
-            <a:r>
-              <a:rPr sz="1160" b="0" i="0">
-                <a:solidFill>
-                  <a:srgbClr val="93A0B6"/>
-                </a:solidFill>
-                <a:latin typeface="Arial"/>
-              </a:rPr>
-              <a:t>23% pull-air rate, 82nd percentile, with a .846 wOBA on pulled air balls. RHB pull-air plays to the Monster.</a:t>
-            </a:r>
-          </a:p>
-        </p:txBody>
-      </p:sp>
-      <p:sp>
-        <p:nvSpPr>
-          <p:cNvPr id="9" name="Rounded Rectangle 8"/>
+          <p:cNvPr id="14" name="Rounded Rectangle 13"/>
           <p:cNvSpPr/>
           <p:nvPr/>
         </p:nvSpPr>
         <p:spPr>
           <a:xfrm>
-            <a:off x="8001000" y="4005072"/>
-            <a:ext cx="146304" cy="146304"/>
+            <a:off x="8412480" y="2724912"/>
+            <a:ext cx="384048" cy="384048"/>
           </a:xfrm>
           <a:prstGeom prst="roundRect">
             <a:avLst>
@@ -7094,184 +7104,160 @@
           </a:fontRef>
         </p:style>
         <p:txBody>
-          <a:bodyPr rtlCol="0" anchor="ctr"/>
+          <a:bodyPr rtlCol="0" anchor="ctr" wrap="none"/>
           <a:lstStyle/>
           <a:p>
             <a:pPr algn="ctr"/>
-          </a:p>
-        </p:txBody>
-      </p:sp>
-      <p:sp>
-        <p:nvSpPr>
-          <p:cNvPr id="10" name="TextBox 9"/>
-          <p:cNvSpPr txBox="1"/>
-          <p:nvPr/>
-        </p:nvSpPr>
-        <p:spPr>
-          <a:xfrm>
-            <a:off x="8293608" y="3968496"/>
-            <a:ext cx="3749039" cy="1097280"/>
-          </a:xfrm>
-          <a:prstGeom prst="rect">
-            <a:avLst/>
-          </a:prstGeom>
-          <a:noFill/>
-        </p:spPr>
-        <p:txBody>
-          <a:bodyPr wrap="square" anchor="t" lIns="0" rIns="0" tIns="0" bIns="0">
-            <a:spAutoFit/>
-          </a:bodyPr>
-          <a:lstStyle/>
-          <a:p>
-            <a:pPr algn="l">
-              <a:lnSpc>
-                <a:spcPct val="107000"/>
-              </a:lnSpc>
-              <a:spcAft>
-                <a:spcPts val="200"/>
-              </a:spcAft>
-            </a:pPr>
-            <a:r>
-              <a:rPr sz="1350" b="1" i="0">
+            <a:r>
+              <a:rPr sz="1600" b="1">
+                <a:solidFill>
+                  <a:srgbClr val="0B1220"/>
+                </a:solidFill>
+                <a:latin typeface="Courier New"/>
+              </a:rPr>
+              <a:t>3</a:t>
+            </a:r>
+          </a:p>
+        </p:txBody>
+      </p:sp>
+      <p:sp>
+        <p:nvSpPr>
+          <p:cNvPr id="15" name="TextBox 14"/>
+          <p:cNvSpPr txBox="1"/>
+          <p:nvPr/>
+        </p:nvSpPr>
+        <p:spPr>
+          <a:xfrm>
+            <a:off x="8412480" y="3310128"/>
+            <a:ext cx="2999232" cy="411480"/>
+          </a:xfrm>
+          <a:prstGeom prst="rect">
+            <a:avLst/>
+          </a:prstGeom>
+          <a:noFill/>
+        </p:spPr>
+        <p:txBody>
+          <a:bodyPr wrap="square" anchor="t" lIns="0" rIns="0" tIns="0" bIns="0">
+            <a:spAutoFit/>
+          </a:bodyPr>
+          <a:lstStyle/>
+          <a:p>
+            <a:pPr algn="l">
+              <a:lnSpc>
+                <a:spcPct val="100000"/>
+              </a:lnSpc>
+              <a:spcAft>
+                <a:spcPts val="0"/>
+              </a:spcAft>
+            </a:pPr>
+            <a:r>
+              <a:rPr sz="1600" b="1" i="0">
                 <a:solidFill>
                   <a:srgbClr val="EAF0F8"/>
                 </a:solidFill>
                 <a:latin typeface="Arial"/>
               </a:rPr>
-              <a:t>Earned, mostly</a:t>
-            </a:r>
-          </a:p>
-          <a:p>
-            <a:pPr algn="l">
-              <a:lnSpc>
-                <a:spcPct val="107000"/>
-              </a:lnSpc>
-              <a:spcAft>
-                <a:spcPts val="200"/>
-              </a:spcAft>
-            </a:pPr>
-            <a:r>
-              <a:rPr sz="1160" b="0" i="0">
+              <a:t>Salary relief</a:t>
+            </a:r>
+          </a:p>
+        </p:txBody>
+      </p:sp>
+      <p:sp>
+        <p:nvSpPr>
+          <p:cNvPr id="16" name="TextBox 15"/>
+          <p:cNvSpPr txBox="1"/>
+          <p:nvPr/>
+        </p:nvSpPr>
+        <p:spPr>
+          <a:xfrm>
+            <a:off x="8412480" y="3767328"/>
+            <a:ext cx="2999232" cy="1097280"/>
+          </a:xfrm>
+          <a:prstGeom prst="rect">
+            <a:avLst/>
+          </a:prstGeom>
+          <a:noFill/>
+        </p:spPr>
+        <p:txBody>
+          <a:bodyPr wrap="square" anchor="t" lIns="0" rIns="0" tIns="0" bIns="0">
+            <a:spAutoFit/>
+          </a:bodyPr>
+          <a:lstStyle/>
+          <a:p>
+            <a:pPr algn="l">
+              <a:lnSpc>
+                <a:spcPct val="110000"/>
+              </a:lnSpc>
+              <a:spcAft>
+                <a:spcPts val="400"/>
+              </a:spcAft>
+            </a:pPr>
+            <a:r>
+              <a:rPr sz="1280" b="0" i="0">
                 <a:solidFill>
                   <a:srgbClr val="93A0B6"/>
                 </a:solidFill>
                 <a:latin typeface="Arial"/>
               </a:rPr>
-              <a:t>.376 wOBA against a .359 xwOBA, so the breakout has contact quality behind it. The flag: 488 PA of .617 OPS before this year.</a:t>
-            </a:r>
-          </a:p>
-        </p:txBody>
-      </p:sp>
-      <p:sp>
-        <p:nvSpPr>
-          <p:cNvPr id="11" name="Rounded Rectangle 10"/>
-          <p:cNvSpPr/>
-          <p:nvPr/>
-        </p:nvSpPr>
-        <p:spPr>
-          <a:xfrm>
-            <a:off x="8001000" y="5120640"/>
-            <a:ext cx="146304" cy="146304"/>
-          </a:xfrm>
-          <a:prstGeom prst="roundRect">
-            <a:avLst>
-              <a:gd name="adj" fmla="val 18000"/>
-            </a:avLst>
-          </a:prstGeom>
-          <a:solidFill>
-            <a:srgbClr val="58C08D"/>
-          </a:solidFill>
-          <a:ln>
-            <a:noFill/>
-          </a:ln>
-          <a:effectLst/>
-        </p:spPr>
-        <p:style>
-          <a:lnRef idx="1">
-            <a:schemeClr val="accent1"/>
-          </a:lnRef>
-          <a:fillRef idx="3">
-            <a:schemeClr val="accent1"/>
-          </a:fillRef>
-          <a:effectRef idx="2">
-            <a:schemeClr val="accent1"/>
-          </a:effectRef>
-          <a:fontRef idx="minor">
-            <a:schemeClr val="lt1"/>
-          </a:fontRef>
-        </p:style>
-        <p:txBody>
-          <a:bodyPr rtlCol="0" anchor="ctr"/>
-          <a:lstStyle/>
-          <a:p>
-            <a:pPr algn="ctr"/>
-          </a:p>
-        </p:txBody>
-      </p:sp>
-      <p:sp>
-        <p:nvSpPr>
-          <p:cNvPr id="12" name="TextBox 11"/>
-          <p:cNvSpPr txBox="1"/>
-          <p:nvPr/>
-        </p:nvSpPr>
-        <p:spPr>
-          <a:xfrm>
-            <a:off x="8293608" y="5084064"/>
-            <a:ext cx="3749039" cy="1097280"/>
-          </a:xfrm>
-          <a:prstGeom prst="rect">
-            <a:avLst/>
-          </a:prstGeom>
-          <a:noFill/>
-        </p:spPr>
-        <p:txBody>
-          <a:bodyPr wrap="square" anchor="t" lIns="0" rIns="0" tIns="0" bIns="0">
-            <a:spAutoFit/>
-          </a:bodyPr>
-          <a:lstStyle/>
-          <a:p>
-            <a:pPr algn="l">
-              <a:lnSpc>
-                <a:spcPct val="107000"/>
-              </a:lnSpc>
-              <a:spcAft>
-                <a:spcPts val="200"/>
-              </a:spcAft>
-            </a:pPr>
-            <a:r>
-              <a:rPr sz="1350" b="1" i="0">
+              <a:t>Attach Yoshida money where possible; free payroll for the 2027 window.</a:t>
+            </a:r>
+          </a:p>
+        </p:txBody>
+      </p:sp>
+      <p:sp>
+        <p:nvSpPr>
+          <p:cNvPr id="17" name="TextBox 16"/>
+          <p:cNvSpPr txBox="1"/>
+          <p:nvPr/>
+        </p:nvSpPr>
+        <p:spPr>
+          <a:xfrm>
+            <a:off x="566928" y="5257800"/>
+            <a:ext cx="11064240" cy="457200"/>
+          </a:xfrm>
+          <a:prstGeom prst="rect">
+            <a:avLst/>
+          </a:prstGeom>
+          <a:noFill/>
+        </p:spPr>
+        <p:txBody>
+          <a:bodyPr wrap="square" anchor="t" lIns="0" rIns="0" tIns="0" bIns="0">
+            <a:spAutoFit/>
+          </a:bodyPr>
+          <a:lstStyle/>
+          <a:p>
+            <a:pPr algn="l">
+              <a:lnSpc>
+                <a:spcPct val="100000"/>
+              </a:lnSpc>
+              <a:spcAft>
+                <a:spcPts val="0"/>
+              </a:spcAft>
+            </a:pPr>
+            <a:r>
+              <a:rPr sz="1400" b="1" i="1">
                 <a:solidFill>
                   <a:srgbClr val="EAF0F8"/>
                 </a:solidFill>
                 <a:latin typeface="Arial"/>
               </a:rPr>
-              <a:t>Menu grade</a:t>
-            </a:r>
-          </a:p>
-          <a:p>
-            <a:pPr algn="l">
-              <a:lnSpc>
-                <a:spcPct val="107000"/>
-              </a:lnSpc>
-              <a:spcAft>
-                <a:spcPts val="200"/>
-              </a:spcAft>
-            </a:pPr>
-            <a:r>
-              <a:rPr sz="1160" b="0" i="0">
+              <a:t>Keep the arms. Cash the outfield. </a:t>
+            </a:r>
+            <a:r>
+              <a:rPr sz="1400" b="0" i="1">
                 <a:solidFill>
                   <a:srgbClr val="93A0B6"/>
                 </a:solidFill>
                 <a:latin typeface="Arial"/>
               </a:rPr>
-              <a:t>The big-swing shape at half the price, and the infield hole filled. The pen fix is still open, 8 days left.</a:t>
-            </a:r>
-          </a:p>
-        </p:txBody>
-      </p:sp>
-      <p:sp>
-        <p:nvSpPr>
-          <p:cNvPr id="13" name="TextBox 12"/>
+              <a:t>Build the 2027 lineup, don't rent the 2026 one.</a:t>
+            </a:r>
+          </a:p>
+        </p:txBody>
+      </p:sp>
+      <p:sp>
+        <p:nvSpPr>
+          <p:cNvPr id="18" name="TextBox 17"/>
           <p:cNvSpPr txBox="1"/>
           <p:nvPr/>
         </p:nvSpPr>
@@ -7383,7 +7369,7 @@
                 </a:solidFill>
                 <a:latin typeface="Courier New"/>
               </a:rPr>
-              <a:t>// THE WINTER PLAN</a:t>
+              <a:t>// THE SEQUENCE</a:t>
             </a:r>
           </a:p>
         </p:txBody>
@@ -7425,76 +7411,32 @@
                 </a:solidFill>
                 <a:latin typeface="Arial"/>
               </a:rPr>
-              <a:t>Spend the pitching surplus on offense</a:t>
-            </a:r>
-          </a:p>
-        </p:txBody>
-      </p:sp>
-      <p:sp>
-        <p:nvSpPr>
-          <p:cNvPr id="4" name="TextBox 3"/>
-          <p:cNvSpPr txBox="1"/>
-          <p:nvPr/>
-        </p:nvSpPr>
-        <p:spPr>
-          <a:xfrm>
-            <a:off x="566928" y="1572768"/>
-            <a:ext cx="11064240" cy="640080"/>
-          </a:xfrm>
-          <a:prstGeom prst="rect">
-            <a:avLst/>
-          </a:prstGeom>
-          <a:noFill/>
-        </p:spPr>
-        <p:txBody>
-          <a:bodyPr wrap="square" anchor="t" lIns="0" rIns="0" tIns="0" bIns="0">
-            <a:spAutoFit/>
-          </a:bodyPr>
-          <a:lstStyle/>
-          <a:p>
-            <a:pPr algn="l">
-              <a:lnSpc>
-                <a:spcPct val="112000"/>
-              </a:lnSpc>
-              <a:spcAft>
-                <a:spcPts val="400"/>
-              </a:spcAft>
-            </a:pPr>
-            <a:r>
-              <a:rPr sz="1450" b="0" i="0">
-                <a:solidFill>
-                  <a:srgbClr val="D9E1EF"/>
-                </a:solidFill>
-                <a:latin typeface="Arial"/>
-              </a:rPr>
-              <a:t>If winter comes and Duran's rebound has shown up, this is what a deal should return. With a top-6 rotation (3.65 ERA) carrying the club, trading bats for arms is backwards, convert the outfield surplus into what's thin:</a:t>
-            </a:r>
-          </a:p>
-        </p:txBody>
-      </p:sp>
-      <p:sp>
-        <p:nvSpPr>
-          <p:cNvPr id="5" name="Rounded Rectangle 4"/>
+              <a:t>Buy now, decide on Duran in the winter</a:t>
+            </a:r>
+          </a:p>
+        </p:txBody>
+      </p:sp>
+      <p:sp>
+        <p:nvSpPr>
+          <p:cNvPr id="4" name="Rounded Rectangle 3"/>
           <p:cNvSpPr/>
           <p:nvPr/>
         </p:nvSpPr>
         <p:spPr>
           <a:xfrm>
-            <a:off x="566928" y="2468880"/>
-            <a:ext cx="3502152" cy="2514600"/>
+            <a:off x="640080" y="1801368"/>
+            <a:ext cx="457200" cy="457200"/>
           </a:xfrm>
           <a:prstGeom prst="roundRect">
             <a:avLst>
-              <a:gd name="adj" fmla="val 6000"/>
+              <a:gd name="adj" fmla="val 18000"/>
             </a:avLst>
           </a:prstGeom>
           <a:solidFill>
-            <a:srgbClr val="121E33"/>
+            <a:srgbClr val="E8615A"/>
           </a:solidFill>
-          <a:ln w="12700">
-            <a:solidFill>
-              <a:srgbClr val="26334E"/>
-            </a:solidFill>
+          <a:ln>
+            <a:noFill/>
           </a:ln>
           <a:effectLst/>
         </p:spPr>
@@ -7513,10 +7455,80 @@
           </a:fontRef>
         </p:style>
         <p:txBody>
-          <a:bodyPr rtlCol="0" anchor="ctr"/>
+          <a:bodyPr rtlCol="0" anchor="ctr" wrap="none"/>
           <a:lstStyle/>
           <a:p>
             <a:pPr algn="ctr"/>
+            <a:r>
+              <a:rPr sz="1800" b="1">
+                <a:solidFill>
+                  <a:srgbClr val="0B1220"/>
+                </a:solidFill>
+                <a:latin typeface="Courier New"/>
+              </a:rPr>
+              <a:t>1</a:t>
+            </a:r>
+          </a:p>
+        </p:txBody>
+      </p:sp>
+      <p:sp>
+        <p:nvSpPr>
+          <p:cNvPr id="5" name="TextBox 4"/>
+          <p:cNvSpPr txBox="1"/>
+          <p:nvPr/>
+        </p:nvSpPr>
+        <p:spPr>
+          <a:xfrm>
+            <a:off x="1280160" y="1783080"/>
+            <a:ext cx="6126480" cy="1005840"/>
+          </a:xfrm>
+          <a:prstGeom prst="rect">
+            <a:avLst/>
+          </a:prstGeom>
+          <a:noFill/>
+        </p:spPr>
+        <p:txBody>
+          <a:bodyPr wrap="square" anchor="t" lIns="0" rIns="0" tIns="0" bIns="0">
+            <a:spAutoFit/>
+          </a:bodyPr>
+          <a:lstStyle/>
+          <a:p>
+            <a:pPr algn="l">
+              <a:lnSpc>
+                <a:spcPct val="108000"/>
+              </a:lnSpc>
+              <a:spcAft>
+                <a:spcPts val="200"/>
+              </a:spcAft>
+            </a:pPr>
+            <a:r>
+              <a:rPr sz="1700" b="1" i="0">
+                <a:solidFill>
+                  <a:srgbClr val="EAF0F8"/>
+                </a:solidFill>
+                <a:latin typeface="Arial"/>
+              </a:rPr>
+              <a:t>At the deadline: buy targeted</a:t>
+            </a:r>
+          </a:p>
+          <a:p>
+            <a:pPr algn="l">
+              <a:lnSpc>
+                <a:spcPct val="108000"/>
+              </a:lnSpc>
+              <a:spcAft>
+                <a:spcPts val="200"/>
+              </a:spcAft>
+            </a:pPr>
+            <a:r>
+              <a:rPr sz="1350" b="0" i="0">
+                <a:solidFill>
+                  <a:srgbClr val="93A0B6"/>
+                </a:solidFill>
+                <a:latin typeface="Arial"/>
+              </a:rPr>
+              <a:t>A controllable infield bat and a reliever, funded from the pitching surplus. Keep the vets, they're playoff innings now.</a:t>
+            </a:r>
           </a:p>
         </p:txBody>
       </p:sp>
@@ -7528,8 +7540,8 @@
         </p:nvSpPr>
         <p:spPr>
           <a:xfrm>
-            <a:off x="841247" y="2724912"/>
-            <a:ext cx="384048" cy="384048"/>
+            <a:off x="640080" y="2971800"/>
+            <a:ext cx="457200" cy="457200"/>
           </a:xfrm>
           <a:prstGeom prst="roundRect">
             <a:avLst>
@@ -7537,7 +7549,7 @@
             </a:avLst>
           </a:prstGeom>
           <a:solidFill>
-            <a:srgbClr val="58C08D"/>
+            <a:srgbClr val="E8615A"/>
           </a:solidFill>
           <a:ln>
             <a:noFill/>
@@ -7564,13 +7576,13 @@
           <a:p>
             <a:pPr algn="ctr"/>
             <a:r>
-              <a:rPr sz="1600" b="1">
+              <a:rPr sz="1800" b="1">
                 <a:solidFill>
                   <a:srgbClr val="0B1220"/>
                 </a:solidFill>
                 <a:latin typeface="Courier New"/>
               </a:rPr>
-              <a:t>1</a:t>
+              <a:t>2</a:t>
             </a:r>
           </a:p>
         </p:txBody>
@@ -7583,105 +7595,80 @@
         </p:nvSpPr>
         <p:spPr>
           <a:xfrm>
-            <a:off x="841247" y="3310128"/>
-            <a:ext cx="2999232" cy="411480"/>
-          </a:xfrm>
-          <a:prstGeom prst="rect">
-            <a:avLst/>
-          </a:prstGeom>
-          <a:noFill/>
-        </p:spPr>
-        <p:txBody>
-          <a:bodyPr wrap="square" anchor="t" lIns="0" rIns="0" tIns="0" bIns="0">
-            <a:spAutoFit/>
-          </a:bodyPr>
-          <a:lstStyle/>
-          <a:p>
-            <a:pPr algn="l">
-              <a:lnSpc>
-                <a:spcPct val="100000"/>
-              </a:lnSpc>
-              <a:spcAft>
-                <a:spcPts val="0"/>
-              </a:spcAft>
-            </a:pPr>
-            <a:r>
-              <a:rPr sz="1600" b="1" i="0">
+            <a:off x="1280160" y="2953512"/>
+            <a:ext cx="6126480" cy="1005840"/>
+          </a:xfrm>
+          <a:prstGeom prst="rect">
+            <a:avLst/>
+          </a:prstGeom>
+          <a:noFill/>
+        </p:spPr>
+        <p:txBody>
+          <a:bodyPr wrap="square" anchor="t" lIns="0" rIns="0" tIns="0" bIns="0">
+            <a:spAutoFit/>
+          </a:bodyPr>
+          <a:lstStyle/>
+          <a:p>
+            <a:pPr algn="l">
+              <a:lnSpc>
+                <a:spcPct val="108000"/>
+              </a:lnSpc>
+              <a:spcAft>
+                <a:spcPts val="200"/>
+              </a:spcAft>
+            </a:pPr>
+            <a:r>
+              <a:rPr sz="1700" b="1" i="0">
                 <a:solidFill>
                   <a:srgbClr val="EAF0F8"/>
                 </a:solidFill>
                 <a:latin typeface="Arial"/>
               </a:rPr>
-              <a:t>Controllable bats</a:t>
-            </a:r>
-          </a:p>
-        </p:txBody>
-      </p:sp>
-      <p:sp>
-        <p:nvSpPr>
-          <p:cNvPr id="8" name="TextBox 7"/>
-          <p:cNvSpPr txBox="1"/>
-          <p:nvPr/>
-        </p:nvSpPr>
-        <p:spPr>
-          <a:xfrm>
-            <a:off x="841247" y="3767328"/>
-            <a:ext cx="2999232" cy="1097280"/>
-          </a:xfrm>
-          <a:prstGeom prst="rect">
-            <a:avLst/>
-          </a:prstGeom>
-          <a:noFill/>
-        </p:spPr>
-        <p:txBody>
-          <a:bodyPr wrap="square" anchor="t" lIns="0" rIns="0" tIns="0" bIns="0">
-            <a:spAutoFit/>
-          </a:bodyPr>
-          <a:lstStyle/>
-          <a:p>
-            <a:pPr algn="l">
-              <a:lnSpc>
-                <a:spcPct val="110000"/>
-              </a:lnSpc>
-              <a:spcAft>
-                <a:spcPts val="400"/>
-              </a:spcAft>
-            </a:pPr>
-            <a:r>
-              <a:rPr sz="1280" b="0" i="0">
+              <a:t>Hold Duran through August</a:t>
+            </a:r>
+          </a:p>
+          <a:p>
+            <a:pPr algn="l">
+              <a:lnSpc>
+                <a:spcPct val="108000"/>
+              </a:lnSpc>
+              <a:spcAft>
+                <a:spcPts val="200"/>
+              </a:spcAft>
+            </a:pPr>
+            <a:r>
+              <a:rPr sz="1350" b="0" i="0">
                 <a:solidFill>
                   <a:srgbClr val="93A0B6"/>
                 </a:solidFill>
                 <a:latin typeface="Arial"/>
               </a:rPr>
-              <a:t>Young, cost-controlled position players to fix an inconsistent lineup and lengthen it around the core.</a:t>
-            </a:r>
-          </a:p>
-        </p:txBody>
-      </p:sp>
-      <p:sp>
-        <p:nvSpPr>
-          <p:cNvPr id="9" name="Rounded Rectangle 8"/>
+              <a:t>His value is at its nadir and his July contact quality (~.35 xwOBA) is already surging. Selling now cashes the slump.</a:t>
+            </a:r>
+          </a:p>
+        </p:txBody>
+      </p:sp>
+      <p:sp>
+        <p:nvSpPr>
+          <p:cNvPr id="8" name="Rounded Rectangle 7"/>
           <p:cNvSpPr/>
           <p:nvPr/>
         </p:nvSpPr>
         <p:spPr>
           <a:xfrm>
-            <a:off x="4352544" y="2468880"/>
-            <a:ext cx="3502152" cy="2514600"/>
+            <a:off x="640080" y="4142231"/>
+            <a:ext cx="457200" cy="457200"/>
           </a:xfrm>
           <a:prstGeom prst="roundRect">
             <a:avLst>
-              <a:gd name="adj" fmla="val 6000"/>
+              <a:gd name="adj" fmla="val 18000"/>
             </a:avLst>
           </a:prstGeom>
           <a:solidFill>
-            <a:srgbClr val="121E33"/>
+            <a:srgbClr val="E8615A"/>
           </a:solidFill>
-          <a:ln w="12700">
-            <a:solidFill>
-              <a:srgbClr val="26334E"/>
-            </a:solidFill>
+          <a:ln>
+            <a:noFill/>
           </a:ln>
           <a:effectLst/>
         </p:spPr>
@@ -7700,10 +7687,80 @@
           </a:fontRef>
         </p:style>
         <p:txBody>
-          <a:bodyPr rtlCol="0" anchor="ctr"/>
+          <a:bodyPr rtlCol="0" anchor="ctr" wrap="none"/>
           <a:lstStyle/>
           <a:p>
             <a:pPr algn="ctr"/>
+            <a:r>
+              <a:rPr sz="1800" b="1">
+                <a:solidFill>
+                  <a:srgbClr val="0B1220"/>
+                </a:solidFill>
+                <a:latin typeface="Courier New"/>
+              </a:rPr>
+              <a:t>3</a:t>
+            </a:r>
+          </a:p>
+        </p:txBody>
+      </p:sp>
+      <p:sp>
+        <p:nvSpPr>
+          <p:cNvPr id="9" name="TextBox 8"/>
+          <p:cNvSpPr txBox="1"/>
+          <p:nvPr/>
+        </p:nvSpPr>
+        <p:spPr>
+          <a:xfrm>
+            <a:off x="1280160" y="4123944"/>
+            <a:ext cx="6126480" cy="1005840"/>
+          </a:xfrm>
+          <a:prstGeom prst="rect">
+            <a:avLst/>
+          </a:prstGeom>
+          <a:noFill/>
+        </p:spPr>
+        <p:txBody>
+          <a:bodyPr wrap="square" anchor="t" lIns="0" rIns="0" tIns="0" bIns="0">
+            <a:spAutoFit/>
+          </a:bodyPr>
+          <a:lstStyle/>
+          <a:p>
+            <a:pPr algn="l">
+              <a:lnSpc>
+                <a:spcPct val="108000"/>
+              </a:lnSpc>
+              <a:spcAft>
+                <a:spcPts val="200"/>
+              </a:spcAft>
+            </a:pPr>
+            <a:r>
+              <a:rPr sz="1700" b="1" i="0">
+                <a:solidFill>
+                  <a:srgbClr val="EAF0F8"/>
+                </a:solidFill>
+                <a:latin typeface="Arial"/>
+              </a:rPr>
+              <a:t>Winter: re-price, then choose</a:t>
+            </a:r>
+          </a:p>
+          <a:p>
+            <a:pPr algn="l">
+              <a:lnSpc>
+                <a:spcPct val="108000"/>
+              </a:lnSpc>
+              <a:spcAft>
+                <a:spcPts val="200"/>
+              </a:spcAft>
+            </a:pPr>
+            <a:r>
+              <a:rPr sz="1350" b="0" i="0">
+                <a:solidFill>
+                  <a:srgbClr val="93A0B6"/>
+                </a:solidFill>
+                <a:latin typeface="Arial"/>
+              </a:rPr>
+              <a:t>Anthony healthy, jam returns. Rebound confirmed → extend or trade at full price. Erosion persists → sell at market. Either way, the 2027 OF is Anthony / Rafaela / Abreu.</a:t>
+            </a:r>
           </a:p>
         </p:txBody>
       </p:sp>
@@ -7715,16 +7772,16 @@
         </p:nvSpPr>
         <p:spPr>
           <a:xfrm>
-            <a:off x="4626864" y="2724912"/>
-            <a:ext cx="384048" cy="384048"/>
+            <a:off x="7818120" y="1783080"/>
+            <a:ext cx="3794760" cy="3337560"/>
           </a:xfrm>
           <a:prstGeom prst="roundRect">
             <a:avLst>
-              <a:gd name="adj" fmla="val 18000"/>
+              <a:gd name="adj" fmla="val 6000"/>
             </a:avLst>
           </a:prstGeom>
           <a:solidFill>
-            <a:srgbClr val="EAF0F8"/>
+            <a:srgbClr val="1A2740"/>
           </a:solidFill>
           <a:ln>
             <a:noFill/>
@@ -7746,19 +7803,10 @@
           </a:fontRef>
         </p:style>
         <p:txBody>
-          <a:bodyPr rtlCol="0" anchor="ctr" wrap="none"/>
+          <a:bodyPr rtlCol="0" anchor="ctr"/>
           <a:lstStyle/>
           <a:p>
             <a:pPr algn="ctr"/>
-            <a:r>
-              <a:rPr sz="1600" b="1">
-                <a:solidFill>
-                  <a:srgbClr val="0B1220"/>
-                </a:solidFill>
-                <a:latin typeface="Courier New"/>
-              </a:rPr>
-              <a:t>2</a:t>
-            </a:r>
           </a:p>
         </p:txBody>
       </p:sp>
@@ -7770,8 +7818,8 @@
         </p:nvSpPr>
         <p:spPr>
           <a:xfrm>
-            <a:off x="4626864" y="3310128"/>
-            <a:ext cx="2999232" cy="411480"/>
+            <a:off x="8092440" y="2011680"/>
+            <a:ext cx="3291840" cy="365760"/>
           </a:xfrm>
           <a:prstGeom prst="rect">
             <a:avLst/>
@@ -7793,13 +7841,13 @@
               </a:spcAft>
             </a:pPr>
             <a:r>
-              <a:rPr sz="1600" b="1" i="0">
-                <a:solidFill>
-                  <a:srgbClr val="EAF0F8"/>
-                </a:solidFill>
-                <a:latin typeface="Arial"/>
-              </a:rPr>
-              <a:t>Best talent / upside</a:t>
+              <a:rPr sz="1250" b="1" i="0">
+                <a:solidFill>
+                  <a:srgbClr val="C9D2E3"/>
+                </a:solidFill>
+                <a:latin typeface="Arial"/>
+              </a:rPr>
+              <a:t>THE RETURN</a:t>
             </a:r>
           </a:p>
         </p:txBody>
@@ -7812,139 +7860,177 @@
         </p:nvSpPr>
         <p:spPr>
           <a:xfrm>
-            <a:off x="4626864" y="3767328"/>
-            <a:ext cx="2999232" cy="1097280"/>
-          </a:xfrm>
-          <a:prstGeom prst="rect">
-            <a:avLst/>
-          </a:prstGeom>
-          <a:noFill/>
-        </p:spPr>
-        <p:txBody>
-          <a:bodyPr wrap="square" anchor="t" lIns="0" rIns="0" tIns="0" bIns="0">
-            <a:spAutoFit/>
-          </a:bodyPr>
-          <a:lstStyle/>
-          <a:p>
-            <a:pPr algn="l">
-              <a:lnSpc>
-                <a:spcPct val="110000"/>
+            <a:off x="8092440" y="2487168"/>
+            <a:ext cx="3291840" cy="914400"/>
+          </a:xfrm>
+          <a:prstGeom prst="rect">
+            <a:avLst/>
+          </a:prstGeom>
+          <a:noFill/>
+        </p:spPr>
+        <p:txBody>
+          <a:bodyPr wrap="square" anchor="t" lIns="0" rIns="0" tIns="0" bIns="0">
+            <a:spAutoFit/>
+          </a:bodyPr>
+          <a:lstStyle/>
+          <a:p>
+            <a:pPr algn="l">
+              <a:lnSpc>
+                <a:spcPct val="105000"/>
+              </a:lnSpc>
+              <a:spcAft>
+                <a:spcPts val="200"/>
+              </a:spcAft>
+            </a:pPr>
+            <a:r>
+              <a:rPr sz="1300" b="1" i="0">
+                <a:solidFill>
+                  <a:srgbClr val="F0B8BC"/>
+                </a:solidFill>
+                <a:latin typeface="Arial"/>
+              </a:rPr>
+              <a:t>Sell now (nadir)</a:t>
+            </a:r>
+          </a:p>
+          <a:p>
+            <a:pPr algn="l">
+              <a:lnSpc>
+                <a:spcPct val="105000"/>
+              </a:lnSpc>
+              <a:spcAft>
+                <a:spcPts val="200"/>
+              </a:spcAft>
+            </a:pPr>
+            <a:r>
+              <a:rPr sz="1400" b="0" i="0">
+                <a:solidFill>
+                  <a:srgbClr val="F4F7FC"/>
+                </a:solidFill>
+                <a:latin typeface="Arial"/>
+              </a:rPr>
+              <a:t>~$10–15M · a 45-FV bat</a:t>
+            </a:r>
+          </a:p>
+        </p:txBody>
+      </p:sp>
+      <p:sp>
+        <p:nvSpPr>
+          <p:cNvPr id="13" name="TextBox 12"/>
+          <p:cNvSpPr txBox="1"/>
+          <p:nvPr/>
+        </p:nvSpPr>
+        <p:spPr>
+          <a:xfrm>
+            <a:off x="8092440" y="3520440"/>
+            <a:ext cx="3291840" cy="1005840"/>
+          </a:xfrm>
+          <a:prstGeom prst="rect">
+            <a:avLst/>
+          </a:prstGeom>
+          <a:noFill/>
+        </p:spPr>
+        <p:txBody>
+          <a:bodyPr wrap="square" anchor="t" lIns="0" rIns="0" tIns="0" bIns="0">
+            <a:spAutoFit/>
+          </a:bodyPr>
+          <a:lstStyle/>
+          <a:p>
+            <a:pPr algn="l">
+              <a:lnSpc>
+                <a:spcPct val="105000"/>
+              </a:lnSpc>
+              <a:spcAft>
+                <a:spcPts val="200"/>
+              </a:spcAft>
+            </a:pPr>
+            <a:r>
+              <a:rPr sz="1300" b="1" i="0">
+                <a:solidFill>
+                  <a:srgbClr val="A9E5B5"/>
+                </a:solidFill>
+                <a:latin typeface="Arial"/>
+              </a:rPr>
+              <a:t>Sell after rebound</a:t>
+            </a:r>
+          </a:p>
+          <a:p>
+            <a:pPr algn="l">
+              <a:lnSpc>
+                <a:spcPct val="105000"/>
+              </a:lnSpc>
+              <a:spcAft>
+                <a:spcPts val="200"/>
+              </a:spcAft>
+            </a:pPr>
+            <a:r>
+              <a:rPr sz="1400" b="0" i="0">
+                <a:solidFill>
+                  <a:srgbClr val="F4F7FC"/>
+                </a:solidFill>
+                <a:latin typeface="Arial"/>
+              </a:rPr>
+              <a:t>~$28M · a 50-FV, top-100</a:t>
+            </a:r>
+          </a:p>
+          <a:p>
+            <a:pPr algn="l">
+              <a:lnSpc>
+                <a:spcPct val="105000"/>
+              </a:lnSpc>
+              <a:spcAft>
+                <a:spcPts val="200"/>
+              </a:spcAft>
+            </a:pPr>
+            <a:r>
+              <a:rPr sz="1400" b="0" i="0">
+                <a:solidFill>
+                  <a:srgbClr val="F4F7FC"/>
+                </a:solidFill>
+                <a:latin typeface="Arial"/>
+              </a:rPr>
+              <a:t>controllable talent</a:t>
+            </a:r>
+          </a:p>
+        </p:txBody>
+      </p:sp>
+      <p:sp>
+        <p:nvSpPr>
+          <p:cNvPr id="14" name="TextBox 13"/>
+          <p:cNvSpPr txBox="1"/>
+          <p:nvPr/>
+        </p:nvSpPr>
+        <p:spPr>
+          <a:xfrm>
+            <a:off x="8092440" y="4617720"/>
+            <a:ext cx="3291840" cy="457200"/>
+          </a:xfrm>
+          <a:prstGeom prst="rect">
+            <a:avLst/>
+          </a:prstGeom>
+          <a:noFill/>
+        </p:spPr>
+        <p:txBody>
+          <a:bodyPr wrap="square" anchor="t" lIns="0" rIns="0" tIns="0" bIns="0">
+            <a:spAutoFit/>
+          </a:bodyPr>
+          <a:lstStyle/>
+          <a:p>
+            <a:pPr algn="l">
+              <a:lnSpc>
+                <a:spcPct val="105000"/>
               </a:lnSpc>
               <a:spcAft>
                 <a:spcPts val="400"/>
               </a:spcAft>
             </a:pPr>
             <a:r>
-              <a:rPr sz="1280" b="0" i="0">
-                <a:solidFill>
-                  <a:srgbClr val="93A0B6"/>
-                </a:solidFill>
-                <a:latin typeface="Arial"/>
-              </a:rPr>
-              <a:t>In a retool you take the best player, not the positional patch, prospects and MLB-ready youth over rentals.</a:t>
-            </a:r>
-          </a:p>
-        </p:txBody>
-      </p:sp>
-      <p:sp>
-        <p:nvSpPr>
-          <p:cNvPr id="13" name="Rounded Rectangle 12"/>
-          <p:cNvSpPr/>
-          <p:nvPr/>
-        </p:nvSpPr>
-        <p:spPr>
-          <a:xfrm>
-            <a:off x="8138159" y="2468880"/>
-            <a:ext cx="3502152" cy="2514600"/>
-          </a:xfrm>
-          <a:prstGeom prst="roundRect">
-            <a:avLst>
-              <a:gd name="adj" fmla="val 6000"/>
-            </a:avLst>
-          </a:prstGeom>
-          <a:solidFill>
-            <a:srgbClr val="121E33"/>
-          </a:solidFill>
-          <a:ln w="12700">
-            <a:solidFill>
-              <a:srgbClr val="26334E"/>
-            </a:solidFill>
-          </a:ln>
-          <a:effectLst/>
-        </p:spPr>
-        <p:style>
-          <a:lnRef idx="1">
-            <a:schemeClr val="accent1"/>
-          </a:lnRef>
-          <a:fillRef idx="3">
-            <a:schemeClr val="accent1"/>
-          </a:fillRef>
-          <a:effectRef idx="2">
-            <a:schemeClr val="accent1"/>
-          </a:effectRef>
-          <a:fontRef idx="minor">
-            <a:schemeClr val="lt1"/>
-          </a:fontRef>
-        </p:style>
-        <p:txBody>
-          <a:bodyPr rtlCol="0" anchor="ctr"/>
-          <a:lstStyle/>
-          <a:p>
-            <a:pPr algn="ctr"/>
-          </a:p>
-        </p:txBody>
-      </p:sp>
-      <p:sp>
-        <p:nvSpPr>
-          <p:cNvPr id="14" name="Rounded Rectangle 13"/>
-          <p:cNvSpPr/>
-          <p:nvPr/>
-        </p:nvSpPr>
-        <p:spPr>
-          <a:xfrm>
-            <a:off x="8412480" y="2724912"/>
-            <a:ext cx="384048" cy="384048"/>
-          </a:xfrm>
-          <a:prstGeom prst="roundRect">
-            <a:avLst>
-              <a:gd name="adj" fmla="val 18000"/>
-            </a:avLst>
-          </a:prstGeom>
-          <a:solidFill>
-            <a:srgbClr val="E3B14E"/>
-          </a:solidFill>
-          <a:ln>
-            <a:noFill/>
-          </a:ln>
-          <a:effectLst/>
-        </p:spPr>
-        <p:style>
-          <a:lnRef idx="1">
-            <a:schemeClr val="accent1"/>
-          </a:lnRef>
-          <a:fillRef idx="3">
-            <a:schemeClr val="accent1"/>
-          </a:fillRef>
-          <a:effectRef idx="2">
-            <a:schemeClr val="accent1"/>
-          </a:effectRef>
-          <a:fontRef idx="minor">
-            <a:schemeClr val="lt1"/>
-          </a:fontRef>
-        </p:style>
-        <p:txBody>
-          <a:bodyPr rtlCol="0" anchor="ctr" wrap="none"/>
-          <a:lstStyle/>
-          <a:p>
-            <a:pPr algn="ctr"/>
-            <a:r>
-              <a:rPr sz="1600" b="1">
-                <a:solidFill>
-                  <a:srgbClr val="0B1220"/>
-                </a:solidFill>
-                <a:latin typeface="Courier New"/>
-              </a:rPr>
-              <a:t>3</a:t>
+              <a:rPr sz="1150" b="0" i="1">
+                <a:solidFill>
+                  <a:srgbClr val="C9D2E3"/>
+                </a:solidFill>
+                <a:latin typeface="Arial"/>
+              </a:rPr>
+              <a:t>One grade of return = the reason to wait.</a:t>
             </a:r>
           </a:p>
         </p:txBody>
@@ -7952,141 +8038,6 @@
       <p:sp>
         <p:nvSpPr>
           <p:cNvPr id="15" name="TextBox 14"/>
-          <p:cNvSpPr txBox="1"/>
-          <p:nvPr/>
-        </p:nvSpPr>
-        <p:spPr>
-          <a:xfrm>
-            <a:off x="8412480" y="3310128"/>
-            <a:ext cx="2999232" cy="411480"/>
-          </a:xfrm>
-          <a:prstGeom prst="rect">
-            <a:avLst/>
-          </a:prstGeom>
-          <a:noFill/>
-        </p:spPr>
-        <p:txBody>
-          <a:bodyPr wrap="square" anchor="t" lIns="0" rIns="0" tIns="0" bIns="0">
-            <a:spAutoFit/>
-          </a:bodyPr>
-          <a:lstStyle/>
-          <a:p>
-            <a:pPr algn="l">
-              <a:lnSpc>
-                <a:spcPct val="100000"/>
-              </a:lnSpc>
-              <a:spcAft>
-                <a:spcPts val="0"/>
-              </a:spcAft>
-            </a:pPr>
-            <a:r>
-              <a:rPr sz="1600" b="1" i="0">
-                <a:solidFill>
-                  <a:srgbClr val="EAF0F8"/>
-                </a:solidFill>
-                <a:latin typeface="Arial"/>
-              </a:rPr>
-              <a:t>Salary relief</a:t>
-            </a:r>
-          </a:p>
-        </p:txBody>
-      </p:sp>
-      <p:sp>
-        <p:nvSpPr>
-          <p:cNvPr id="16" name="TextBox 15"/>
-          <p:cNvSpPr txBox="1"/>
-          <p:nvPr/>
-        </p:nvSpPr>
-        <p:spPr>
-          <a:xfrm>
-            <a:off x="8412480" y="3767328"/>
-            <a:ext cx="2999232" cy="1097280"/>
-          </a:xfrm>
-          <a:prstGeom prst="rect">
-            <a:avLst/>
-          </a:prstGeom>
-          <a:noFill/>
-        </p:spPr>
-        <p:txBody>
-          <a:bodyPr wrap="square" anchor="t" lIns="0" rIns="0" tIns="0" bIns="0">
-            <a:spAutoFit/>
-          </a:bodyPr>
-          <a:lstStyle/>
-          <a:p>
-            <a:pPr algn="l">
-              <a:lnSpc>
-                <a:spcPct val="110000"/>
-              </a:lnSpc>
-              <a:spcAft>
-                <a:spcPts val="400"/>
-              </a:spcAft>
-            </a:pPr>
-            <a:r>
-              <a:rPr sz="1280" b="0" i="0">
-                <a:solidFill>
-                  <a:srgbClr val="93A0B6"/>
-                </a:solidFill>
-                <a:latin typeface="Arial"/>
-              </a:rPr>
-              <a:t>Attach Yoshida money where possible; free payroll for the 2027 window.</a:t>
-            </a:r>
-          </a:p>
-        </p:txBody>
-      </p:sp>
-      <p:sp>
-        <p:nvSpPr>
-          <p:cNvPr id="17" name="TextBox 16"/>
-          <p:cNvSpPr txBox="1"/>
-          <p:nvPr/>
-        </p:nvSpPr>
-        <p:spPr>
-          <a:xfrm>
-            <a:off x="566928" y="5257800"/>
-            <a:ext cx="11064240" cy="457200"/>
-          </a:xfrm>
-          <a:prstGeom prst="rect">
-            <a:avLst/>
-          </a:prstGeom>
-          <a:noFill/>
-        </p:spPr>
-        <p:txBody>
-          <a:bodyPr wrap="square" anchor="t" lIns="0" rIns="0" tIns="0" bIns="0">
-            <a:spAutoFit/>
-          </a:bodyPr>
-          <a:lstStyle/>
-          <a:p>
-            <a:pPr algn="l">
-              <a:lnSpc>
-                <a:spcPct val="100000"/>
-              </a:lnSpc>
-              <a:spcAft>
-                <a:spcPts val="0"/>
-              </a:spcAft>
-            </a:pPr>
-            <a:r>
-              <a:rPr sz="1400" b="1" i="1">
-                <a:solidFill>
-                  <a:srgbClr val="EAF0F8"/>
-                </a:solidFill>
-                <a:latin typeface="Arial"/>
-              </a:rPr>
-              <a:t>Keep the arms. Cash the outfield. </a:t>
-            </a:r>
-            <a:r>
-              <a:rPr sz="1400" b="0" i="1">
-                <a:solidFill>
-                  <a:srgbClr val="93A0B6"/>
-                </a:solidFill>
-                <a:latin typeface="Arial"/>
-              </a:rPr>
-              <a:t>Build the 2027 lineup, don't rent the 2026 one.</a:t>
-            </a:r>
-          </a:p>
-        </p:txBody>
-      </p:sp>
-      <p:sp>
-        <p:nvSpPr>
-          <p:cNvPr id="18" name="TextBox 17"/>
           <p:cNvSpPr txBox="1"/>
           <p:nvPr/>
         </p:nvSpPr>
@@ -8144,1461 +8095,6 @@
 </file>
 
 <file path=ppt/slides/slide17.xml><?xml version="1.0" encoding="utf-8"?>
-<p:sld xmlns:a="http://schemas.openxmlformats.org/drawingml/2006/main" xmlns:p="http://schemas.openxmlformats.org/presentationml/2006/main" xmlns:r="http://schemas.openxmlformats.org/officeDocument/2006/relationships">
-  <p:cSld>
-    <p:bg>
-      <p:bgPr>
-        <a:solidFill>
-          <a:srgbClr val="0B1220"/>
-        </a:solidFill>
-        <a:effectLst/>
-      </p:bgPr>
-    </p:bg>
-    <p:spTree>
-      <p:nvGrpSpPr>
-        <p:cNvPr id="1" name=""/>
-        <p:cNvGrpSpPr/>
-        <p:nvPr/>
-      </p:nvGrpSpPr>
-      <p:grpSpPr/>
-      <p:sp>
-        <p:nvSpPr>
-          <p:cNvPr id="2" name="TextBox 1"/>
-          <p:cNvSpPr txBox="1"/>
-          <p:nvPr/>
-        </p:nvSpPr>
-        <p:spPr>
-          <a:xfrm>
-            <a:off x="566928" y="384048"/>
-            <a:ext cx="10058400" cy="274320"/>
-          </a:xfrm>
-          <a:prstGeom prst="rect">
-            <a:avLst/>
-          </a:prstGeom>
-          <a:noFill/>
-        </p:spPr>
-        <p:txBody>
-          <a:bodyPr wrap="square" anchor="t" lIns="0" rIns="0" tIns="0" bIns="0">
-            <a:spAutoFit/>
-          </a:bodyPr>
-          <a:lstStyle/>
-          <a:p>
-            <a:pPr algn="l">
-              <a:lnSpc>
-                <a:spcPct val="100000"/>
-              </a:lnSpc>
-              <a:spcAft>
-                <a:spcPts val="0"/>
-              </a:spcAft>
-            </a:pPr>
-            <a:r>
-              <a:rPr sz="1200" b="1" i="0">
-                <a:solidFill>
-                  <a:srgbClr val="E8615A"/>
-                </a:solidFill>
-                <a:latin typeface="Courier New"/>
-              </a:rPr>
-              <a:t>// THE MARKET</a:t>
-            </a:r>
-          </a:p>
-        </p:txBody>
-      </p:sp>
-      <p:sp>
-        <p:nvSpPr>
-          <p:cNvPr id="3" name="TextBox 2"/>
-          <p:cNvSpPr txBox="1"/>
-          <p:nvPr/>
-        </p:nvSpPr>
-        <p:spPr>
-          <a:xfrm>
-            <a:off x="566928" y="658368"/>
-            <a:ext cx="11064240" cy="868680"/>
-          </a:xfrm>
-          <a:prstGeom prst="rect">
-            <a:avLst/>
-          </a:prstGeom>
-          <a:noFill/>
-        </p:spPr>
-        <p:txBody>
-          <a:bodyPr wrap="square" anchor="t" lIns="0" rIns="0" tIns="0" bIns="0">
-            <a:spAutoFit/>
-          </a:bodyPr>
-          <a:lstStyle/>
-          <a:p>
-            <a:pPr algn="l">
-              <a:lnSpc>
-                <a:spcPct val="100000"/>
-              </a:lnSpc>
-              <a:spcAft>
-                <a:spcPts val="0"/>
-              </a:spcAft>
-            </a:pPr>
-            <a:r>
-              <a:rPr sz="3000" b="1" i="0">
-                <a:solidFill>
-                  <a:srgbClr val="EAF0F8"/>
-                </a:solidFill>
-                <a:latin typeface="Arial"/>
-              </a:rPr>
-              <a:t>Who pays: contenders with a hole in the outfield</a:t>
-            </a:r>
-          </a:p>
-        </p:txBody>
-      </p:sp>
-      <p:pic>
-        <p:nvPicPr>
-          <p:cNvPr id="4" name="Picture 3" descr="08_trade_fit_targets.png"/>
-          <p:cNvPicPr>
-            <a:picLocks noChangeAspect="1"/>
-          </p:cNvPicPr>
-          <p:nvPr/>
-        </p:nvPicPr>
-        <p:blipFill>
-          <a:blip r:embed="rId2"/>
-          <a:stretch>
-            <a:fillRect/>
-          </a:stretch>
-        </p:blipFill>
-        <p:spPr>
-          <a:xfrm>
-            <a:off x="757237" y="1463040"/>
-            <a:ext cx="6715125" cy="4297680"/>
-          </a:xfrm>
-          <a:prstGeom prst="rect">
-            <a:avLst/>
-          </a:prstGeom>
-        </p:spPr>
-      </p:pic>
-      <p:sp>
-        <p:nvSpPr>
-          <p:cNvPr id="5" name="TextBox 4"/>
-          <p:cNvSpPr txBox="1"/>
-          <p:nvPr/>
-        </p:nvSpPr>
-        <p:spPr>
-          <a:xfrm>
-            <a:off x="8183879" y="1691640"/>
-            <a:ext cx="3657600" cy="457200"/>
-          </a:xfrm>
-          <a:prstGeom prst="rect">
-            <a:avLst/>
-          </a:prstGeom>
-          <a:noFill/>
-        </p:spPr>
-        <p:txBody>
-          <a:bodyPr wrap="square" anchor="t" lIns="0" rIns="0" tIns="0" bIns="0">
-            <a:spAutoFit/>
-          </a:bodyPr>
-          <a:lstStyle/>
-          <a:p>
-            <a:pPr algn="l">
-              <a:lnSpc>
-                <a:spcPct val="100000"/>
-              </a:lnSpc>
-              <a:spcAft>
-                <a:spcPts val="0"/>
-              </a:spcAft>
-            </a:pPr>
-            <a:r>
-              <a:rPr sz="1500" b="1" i="0">
-                <a:solidFill>
-                  <a:srgbClr val="EAF0F8"/>
-                </a:solidFill>
-                <a:latin typeface="Arial"/>
-              </a:rPr>
-              <a:t>Best-fit buyers</a:t>
-            </a:r>
-          </a:p>
-        </p:txBody>
-      </p:sp>
-      <p:sp>
-        <p:nvSpPr>
-          <p:cNvPr id="6" name="Rounded Rectangle 5"/>
-          <p:cNvSpPr/>
-          <p:nvPr/>
-        </p:nvSpPr>
-        <p:spPr>
-          <a:xfrm>
-            <a:off x="8183879" y="2221991"/>
-            <a:ext cx="128016" cy="128016"/>
-          </a:xfrm>
-          <a:prstGeom prst="roundRect">
-            <a:avLst>
-              <a:gd name="adj" fmla="val 18000"/>
-            </a:avLst>
-          </a:prstGeom>
-          <a:solidFill>
-            <a:srgbClr val="E8615A"/>
-          </a:solidFill>
-          <a:ln>
-            <a:noFill/>
-          </a:ln>
-          <a:effectLst/>
-        </p:spPr>
-        <p:style>
-          <a:lnRef idx="1">
-            <a:schemeClr val="accent1"/>
-          </a:lnRef>
-          <a:fillRef idx="3">
-            <a:schemeClr val="accent1"/>
-          </a:fillRef>
-          <a:effectRef idx="2">
-            <a:schemeClr val="accent1"/>
-          </a:effectRef>
-          <a:fontRef idx="minor">
-            <a:schemeClr val="lt1"/>
-          </a:fontRef>
-        </p:style>
-        <p:txBody>
-          <a:bodyPr rtlCol="0" anchor="ctr"/>
-          <a:lstStyle/>
-          <a:p>
-            <a:pPr algn="ctr"/>
-          </a:p>
-        </p:txBody>
-      </p:sp>
-      <p:sp>
-        <p:nvSpPr>
-          <p:cNvPr id="7" name="TextBox 6"/>
-          <p:cNvSpPr txBox="1"/>
-          <p:nvPr/>
-        </p:nvSpPr>
-        <p:spPr>
-          <a:xfrm>
-            <a:off x="8439911" y="2194560"/>
-            <a:ext cx="3566160" cy="457200"/>
-          </a:xfrm>
-          <a:prstGeom prst="rect">
-            <a:avLst/>
-          </a:prstGeom>
-          <a:noFill/>
-        </p:spPr>
-        <p:txBody>
-          <a:bodyPr wrap="square" anchor="t" lIns="0" rIns="0" tIns="0" bIns="0">
-            <a:spAutoFit/>
-          </a:bodyPr>
-          <a:lstStyle/>
-          <a:p>
-            <a:pPr algn="l">
-              <a:lnSpc>
-                <a:spcPct val="100000"/>
-              </a:lnSpc>
-              <a:spcAft>
-                <a:spcPts val="0"/>
-              </a:spcAft>
-            </a:pPr>
-            <a:r>
-              <a:rPr sz="1400" b="1" i="0">
-                <a:solidFill>
-                  <a:srgbClr val="EAF0F8"/>
-                </a:solidFill>
-                <a:latin typeface="Arial"/>
-              </a:rPr>
-              <a:t>Phillies  </a:t>
-            </a:r>
-            <a:r>
-              <a:rPr sz="1200" b="0" i="0">
-                <a:solidFill>
-                  <a:srgbClr val="93A0B6"/>
-                </a:solidFill>
-                <a:latin typeface="Arial"/>
-              </a:rPr>
-              <a:t>.557, 84 OF wRC+</a:t>
-            </a:r>
-          </a:p>
-        </p:txBody>
-      </p:sp>
-      <p:sp>
-        <p:nvSpPr>
-          <p:cNvPr id="8" name="Rounded Rectangle 7"/>
-          <p:cNvSpPr/>
-          <p:nvPr/>
-        </p:nvSpPr>
-        <p:spPr>
-          <a:xfrm>
-            <a:off x="8183879" y="2788920"/>
-            <a:ext cx="128016" cy="128016"/>
-          </a:xfrm>
-          <a:prstGeom prst="roundRect">
-            <a:avLst>
-              <a:gd name="adj" fmla="val 18000"/>
-            </a:avLst>
-          </a:prstGeom>
-          <a:solidFill>
-            <a:srgbClr val="E8615A"/>
-          </a:solidFill>
-          <a:ln>
-            <a:noFill/>
-          </a:ln>
-          <a:effectLst/>
-        </p:spPr>
-        <p:style>
-          <a:lnRef idx="1">
-            <a:schemeClr val="accent1"/>
-          </a:lnRef>
-          <a:fillRef idx="3">
-            <a:schemeClr val="accent1"/>
-          </a:fillRef>
-          <a:effectRef idx="2">
-            <a:schemeClr val="accent1"/>
-          </a:effectRef>
-          <a:fontRef idx="minor">
-            <a:schemeClr val="lt1"/>
-          </a:fontRef>
-        </p:style>
-        <p:txBody>
-          <a:bodyPr rtlCol="0" anchor="ctr"/>
-          <a:lstStyle/>
-          <a:p>
-            <a:pPr algn="ctr"/>
-          </a:p>
-        </p:txBody>
-      </p:sp>
-      <p:sp>
-        <p:nvSpPr>
-          <p:cNvPr id="9" name="TextBox 8"/>
-          <p:cNvSpPr txBox="1"/>
-          <p:nvPr/>
-        </p:nvSpPr>
-        <p:spPr>
-          <a:xfrm>
-            <a:off x="8439911" y="2761488"/>
-            <a:ext cx="3566160" cy="457200"/>
-          </a:xfrm>
-          <a:prstGeom prst="rect">
-            <a:avLst/>
-          </a:prstGeom>
-          <a:noFill/>
-        </p:spPr>
-        <p:txBody>
-          <a:bodyPr wrap="square" anchor="t" lIns="0" rIns="0" tIns="0" bIns="0">
-            <a:spAutoFit/>
-          </a:bodyPr>
-          <a:lstStyle/>
-          <a:p>
-            <a:pPr algn="l">
-              <a:lnSpc>
-                <a:spcPct val="100000"/>
-              </a:lnSpc>
-              <a:spcAft>
-                <a:spcPts val="0"/>
-              </a:spcAft>
-            </a:pPr>
-            <a:r>
-              <a:rPr sz="1400" b="1" i="0">
-                <a:solidFill>
-                  <a:srgbClr val="EAF0F8"/>
-                </a:solidFill>
-                <a:latin typeface="Arial"/>
-              </a:rPr>
-              <a:t>Rays  </a:t>
-            </a:r>
-            <a:r>
-              <a:rPr sz="1200" b="0" i="0">
-                <a:solidFill>
-                  <a:srgbClr val="93A0B6"/>
-                </a:solidFill>
-                <a:latin typeface="Arial"/>
-              </a:rPr>
-              <a:t>.596, 88 OF wRC+</a:t>
-            </a:r>
-          </a:p>
-        </p:txBody>
-      </p:sp>
-      <p:sp>
-        <p:nvSpPr>
-          <p:cNvPr id="10" name="Rounded Rectangle 9"/>
-          <p:cNvSpPr/>
-          <p:nvPr/>
-        </p:nvSpPr>
-        <p:spPr>
-          <a:xfrm>
-            <a:off x="8183879" y="3355847"/>
-            <a:ext cx="128016" cy="128016"/>
-          </a:xfrm>
-          <a:prstGeom prst="roundRect">
-            <a:avLst>
-              <a:gd name="adj" fmla="val 18000"/>
-            </a:avLst>
-          </a:prstGeom>
-          <a:solidFill>
-            <a:srgbClr val="E8615A"/>
-          </a:solidFill>
-          <a:ln>
-            <a:noFill/>
-          </a:ln>
-          <a:effectLst/>
-        </p:spPr>
-        <p:style>
-          <a:lnRef idx="1">
-            <a:schemeClr val="accent1"/>
-          </a:lnRef>
-          <a:fillRef idx="3">
-            <a:schemeClr val="accent1"/>
-          </a:fillRef>
-          <a:effectRef idx="2">
-            <a:schemeClr val="accent1"/>
-          </a:effectRef>
-          <a:fontRef idx="minor">
-            <a:schemeClr val="lt1"/>
-          </a:fontRef>
-        </p:style>
-        <p:txBody>
-          <a:bodyPr rtlCol="0" anchor="ctr"/>
-          <a:lstStyle/>
-          <a:p>
-            <a:pPr algn="ctr"/>
-          </a:p>
-        </p:txBody>
-      </p:sp>
-      <p:sp>
-        <p:nvSpPr>
-          <p:cNvPr id="11" name="TextBox 10"/>
-          <p:cNvSpPr txBox="1"/>
-          <p:nvPr/>
-        </p:nvSpPr>
-        <p:spPr>
-          <a:xfrm>
-            <a:off x="8439911" y="3328415"/>
-            <a:ext cx="3566160" cy="457200"/>
-          </a:xfrm>
-          <a:prstGeom prst="rect">
-            <a:avLst/>
-          </a:prstGeom>
-          <a:noFill/>
-        </p:spPr>
-        <p:txBody>
-          <a:bodyPr wrap="square" anchor="t" lIns="0" rIns="0" tIns="0" bIns="0">
-            <a:spAutoFit/>
-          </a:bodyPr>
-          <a:lstStyle/>
-          <a:p>
-            <a:pPr algn="l">
-              <a:lnSpc>
-                <a:spcPct val="100000"/>
-              </a:lnSpc>
-              <a:spcAft>
-                <a:spcPts val="0"/>
-              </a:spcAft>
-            </a:pPr>
-            <a:r>
-              <a:rPr sz="1400" b="1" i="0">
-                <a:solidFill>
-                  <a:srgbClr val="EAF0F8"/>
-                </a:solidFill>
-                <a:latin typeface="Arial"/>
-              </a:rPr>
-              <a:t>Cardinals  </a:t>
-            </a:r>
-            <a:r>
-              <a:rPr sz="1200" b="0" i="0">
-                <a:solidFill>
-                  <a:srgbClr val="93A0B6"/>
-                </a:solidFill>
-                <a:latin typeface="Arial"/>
-              </a:rPr>
-              <a:t>.526, OF need</a:t>
-            </a:r>
-          </a:p>
-        </p:txBody>
-      </p:sp>
-      <p:sp>
-        <p:nvSpPr>
-          <p:cNvPr id="12" name="Rounded Rectangle 11"/>
-          <p:cNvSpPr/>
-          <p:nvPr/>
-        </p:nvSpPr>
-        <p:spPr>
-          <a:xfrm>
-            <a:off x="8183879" y="3922776"/>
-            <a:ext cx="128016" cy="128016"/>
-          </a:xfrm>
-          <a:prstGeom prst="roundRect">
-            <a:avLst>
-              <a:gd name="adj" fmla="val 18000"/>
-            </a:avLst>
-          </a:prstGeom>
-          <a:solidFill>
-            <a:srgbClr val="E8615A"/>
-          </a:solidFill>
-          <a:ln>
-            <a:noFill/>
-          </a:ln>
-          <a:effectLst/>
-        </p:spPr>
-        <p:style>
-          <a:lnRef idx="1">
-            <a:schemeClr val="accent1"/>
-          </a:lnRef>
-          <a:fillRef idx="3">
-            <a:schemeClr val="accent1"/>
-          </a:fillRef>
-          <a:effectRef idx="2">
-            <a:schemeClr val="accent1"/>
-          </a:effectRef>
-          <a:fontRef idx="minor">
-            <a:schemeClr val="lt1"/>
-          </a:fontRef>
-        </p:style>
-        <p:txBody>
-          <a:bodyPr rtlCol="0" anchor="ctr"/>
-          <a:lstStyle/>
-          <a:p>
-            <a:pPr algn="ctr"/>
-          </a:p>
-        </p:txBody>
-      </p:sp>
-      <p:sp>
-        <p:nvSpPr>
-          <p:cNvPr id="13" name="TextBox 12"/>
-          <p:cNvSpPr txBox="1"/>
-          <p:nvPr/>
-        </p:nvSpPr>
-        <p:spPr>
-          <a:xfrm>
-            <a:off x="8439911" y="3895344"/>
-            <a:ext cx="3566160" cy="457200"/>
-          </a:xfrm>
-          <a:prstGeom prst="rect">
-            <a:avLst/>
-          </a:prstGeom>
-          <a:noFill/>
-        </p:spPr>
-        <p:txBody>
-          <a:bodyPr wrap="square" anchor="t" lIns="0" rIns="0" tIns="0" bIns="0">
-            <a:spAutoFit/>
-          </a:bodyPr>
-          <a:lstStyle/>
-          <a:p>
-            <a:pPr algn="l">
-              <a:lnSpc>
-                <a:spcPct val="100000"/>
-              </a:lnSpc>
-              <a:spcAft>
-                <a:spcPts val="0"/>
-              </a:spcAft>
-            </a:pPr>
-            <a:r>
-              <a:rPr sz="1400" b="1" i="0">
-                <a:solidFill>
-                  <a:srgbClr val="EAF0F8"/>
-                </a:solidFill>
-                <a:latin typeface="Arial"/>
-              </a:rPr>
-              <a:t>Astros  </a:t>
-            </a:r>
-            <a:r>
-              <a:rPr sz="1200" b="0" i="0">
-                <a:solidFill>
-                  <a:srgbClr val="93A0B6"/>
-                </a:solidFill>
-                <a:latin typeface="Arial"/>
-              </a:rPr>
-              <a:t>fringe, weakest OF</a:t>
-            </a:r>
-          </a:p>
-        </p:txBody>
-      </p:sp>
-      <p:sp>
-        <p:nvSpPr>
-          <p:cNvPr id="14" name="TextBox 13"/>
-          <p:cNvSpPr txBox="1"/>
-          <p:nvPr/>
-        </p:nvSpPr>
-        <p:spPr>
-          <a:xfrm>
-            <a:off x="8183879" y="4709160"/>
-            <a:ext cx="3657600" cy="1005840"/>
-          </a:xfrm>
-          <a:prstGeom prst="rect">
-            <a:avLst/>
-          </a:prstGeom>
-          <a:noFill/>
-        </p:spPr>
-        <p:txBody>
-          <a:bodyPr wrap="square" anchor="t" lIns="0" rIns="0" tIns="0" bIns="0">
-            <a:spAutoFit/>
-          </a:bodyPr>
-          <a:lstStyle/>
-          <a:p>
-            <a:pPr algn="l">
-              <a:lnSpc>
-                <a:spcPct val="112000"/>
-              </a:lnSpc>
-              <a:spcAft>
-                <a:spcPts val="400"/>
-              </a:spcAft>
-            </a:pPr>
-            <a:r>
-              <a:rPr sz="1250" b="0" i="0">
-                <a:solidFill>
-                  <a:srgbClr val="D9E1EF"/>
-                </a:solidFill>
-                <a:latin typeface="Arial"/>
-              </a:rPr>
-              <a:t>Trade a redundant bat to a team that needs one, and take back the </a:t>
-            </a:r>
-            <a:r>
-              <a:rPr sz="1250" b="1" i="0">
-                <a:solidFill>
-                  <a:srgbClr val="58C08D"/>
-                </a:solidFill>
-                <a:latin typeface="Arial"/>
-              </a:rPr>
-              <a:t>hitting/youth</a:t>
-            </a:r>
-            <a:r>
-              <a:rPr sz="1250" b="0" i="0">
-                <a:solidFill>
-                  <a:srgbClr val="D9E1EF"/>
-                </a:solidFill>
-                <a:latin typeface="Arial"/>
-              </a:rPr>
-              <a:t> Boston is short on.</a:t>
-            </a:r>
-          </a:p>
-        </p:txBody>
-      </p:sp>
-      <p:sp>
-        <p:nvSpPr>
-          <p:cNvPr id="15" name="TextBox 14"/>
-          <p:cNvSpPr txBox="1"/>
-          <p:nvPr/>
-        </p:nvSpPr>
-        <p:spPr>
-          <a:xfrm>
-            <a:off x="566928" y="6510528"/>
-            <a:ext cx="11064240" cy="274320"/>
-          </a:xfrm>
-          <a:prstGeom prst="rect">
-            <a:avLst/>
-          </a:prstGeom>
-          <a:noFill/>
-        </p:spPr>
-        <p:txBody>
-          <a:bodyPr wrap="square" anchor="t" lIns="0" rIns="0" tIns="0" bIns="0">
-            <a:spAutoFit/>
-          </a:bodyPr>
-          <a:lstStyle/>
-          <a:p>
-            <a:pPr algn="l">
-              <a:lnSpc>
-                <a:spcPct val="100000"/>
-              </a:lnSpc>
-              <a:spcAft>
-                <a:spcPts val="0"/>
-              </a:spcAft>
-            </a:pPr>
-            <a:r>
-              <a:rPr sz="800" b="1" i="0">
-                <a:solidFill>
-                  <a:srgbClr val="E8615A"/>
-                </a:solidFill>
-                <a:latin typeface="Courier New"/>
-              </a:rPr>
-              <a:t>BOS // OUTFIELD STRATEGY</a:t>
-            </a:r>
-            <a:r>
-              <a:rPr sz="800" b="0" i="0">
-                <a:solidFill>
-                  <a:srgbClr val="5E6B84"/>
-                </a:solidFill>
-                <a:latin typeface="Courier New"/>
-              </a:rPr>
-              <a:t>   STATCAST / FANGRAPHS / MLB STATS API / SPOTRAC · JULY 2026</a:t>
-            </a:r>
-          </a:p>
-        </p:txBody>
-      </p:sp>
-    </p:spTree>
-  </p:cSld>
-  <p:clrMapOvr>
-    <a:masterClrMapping/>
-  </p:clrMapOvr>
-</p:sld>
-</file>
-
-<file path=ppt/slides/slide18.xml><?xml version="1.0" encoding="utf-8"?>
-<p:sld xmlns:a="http://schemas.openxmlformats.org/drawingml/2006/main" xmlns:p="http://schemas.openxmlformats.org/presentationml/2006/main" xmlns:r="http://schemas.openxmlformats.org/officeDocument/2006/relationships">
-  <p:cSld>
-    <p:bg>
-      <p:bgPr>
-        <a:solidFill>
-          <a:srgbClr val="0B1220"/>
-        </a:solidFill>
-        <a:effectLst/>
-      </p:bgPr>
-    </p:bg>
-    <p:spTree>
-      <p:nvGrpSpPr>
-        <p:cNvPr id="1" name=""/>
-        <p:cNvGrpSpPr/>
-        <p:nvPr/>
-      </p:nvGrpSpPr>
-      <p:grpSpPr/>
-      <p:sp>
-        <p:nvSpPr>
-          <p:cNvPr id="2" name="TextBox 1"/>
-          <p:cNvSpPr txBox="1"/>
-          <p:nvPr/>
-        </p:nvSpPr>
-        <p:spPr>
-          <a:xfrm>
-            <a:off x="566928" y="384048"/>
-            <a:ext cx="10058400" cy="274320"/>
-          </a:xfrm>
-          <a:prstGeom prst="rect">
-            <a:avLst/>
-          </a:prstGeom>
-          <a:noFill/>
-        </p:spPr>
-        <p:txBody>
-          <a:bodyPr wrap="square" anchor="t" lIns="0" rIns="0" tIns="0" bIns="0">
-            <a:spAutoFit/>
-          </a:bodyPr>
-          <a:lstStyle/>
-          <a:p>
-            <a:pPr algn="l">
-              <a:lnSpc>
-                <a:spcPct val="100000"/>
-              </a:lnSpc>
-              <a:spcAft>
-                <a:spcPts val="0"/>
-              </a:spcAft>
-            </a:pPr>
-            <a:r>
-              <a:rPr sz="1200" b="1" i="0">
-                <a:solidFill>
-                  <a:srgbClr val="E8615A"/>
-                </a:solidFill>
-                <a:latin typeface="Courier New"/>
-              </a:rPr>
-              <a:t>// THE SEQUENCE</a:t>
-            </a:r>
-          </a:p>
-        </p:txBody>
-      </p:sp>
-      <p:sp>
-        <p:nvSpPr>
-          <p:cNvPr id="3" name="TextBox 2"/>
-          <p:cNvSpPr txBox="1"/>
-          <p:nvPr/>
-        </p:nvSpPr>
-        <p:spPr>
-          <a:xfrm>
-            <a:off x="566928" y="658368"/>
-            <a:ext cx="11064240" cy="868680"/>
-          </a:xfrm>
-          <a:prstGeom prst="rect">
-            <a:avLst/>
-          </a:prstGeom>
-          <a:noFill/>
-        </p:spPr>
-        <p:txBody>
-          <a:bodyPr wrap="square" anchor="t" lIns="0" rIns="0" tIns="0" bIns="0">
-            <a:spAutoFit/>
-          </a:bodyPr>
-          <a:lstStyle/>
-          <a:p>
-            <a:pPr algn="l">
-              <a:lnSpc>
-                <a:spcPct val="100000"/>
-              </a:lnSpc>
-              <a:spcAft>
-                <a:spcPts val="0"/>
-              </a:spcAft>
-            </a:pPr>
-            <a:r>
-              <a:rPr sz="3000" b="1" i="0">
-                <a:solidFill>
-                  <a:srgbClr val="EAF0F8"/>
-                </a:solidFill>
-                <a:latin typeface="Arial"/>
-              </a:rPr>
-              <a:t>Buy now, decide on Duran in the winter</a:t>
-            </a:r>
-          </a:p>
-        </p:txBody>
-      </p:sp>
-      <p:sp>
-        <p:nvSpPr>
-          <p:cNvPr id="4" name="Rounded Rectangle 3"/>
-          <p:cNvSpPr/>
-          <p:nvPr/>
-        </p:nvSpPr>
-        <p:spPr>
-          <a:xfrm>
-            <a:off x="640080" y="1801368"/>
-            <a:ext cx="457200" cy="457200"/>
-          </a:xfrm>
-          <a:prstGeom prst="roundRect">
-            <a:avLst>
-              <a:gd name="adj" fmla="val 18000"/>
-            </a:avLst>
-          </a:prstGeom>
-          <a:solidFill>
-            <a:srgbClr val="E8615A"/>
-          </a:solidFill>
-          <a:ln>
-            <a:noFill/>
-          </a:ln>
-          <a:effectLst/>
-        </p:spPr>
-        <p:style>
-          <a:lnRef idx="1">
-            <a:schemeClr val="accent1"/>
-          </a:lnRef>
-          <a:fillRef idx="3">
-            <a:schemeClr val="accent1"/>
-          </a:fillRef>
-          <a:effectRef idx="2">
-            <a:schemeClr val="accent1"/>
-          </a:effectRef>
-          <a:fontRef idx="minor">
-            <a:schemeClr val="lt1"/>
-          </a:fontRef>
-        </p:style>
-        <p:txBody>
-          <a:bodyPr rtlCol="0" anchor="ctr" wrap="none"/>
-          <a:lstStyle/>
-          <a:p>
-            <a:pPr algn="ctr"/>
-            <a:r>
-              <a:rPr sz="1800" b="1">
-                <a:solidFill>
-                  <a:srgbClr val="0B1220"/>
-                </a:solidFill>
-                <a:latin typeface="Courier New"/>
-              </a:rPr>
-              <a:t>1</a:t>
-            </a:r>
-          </a:p>
-        </p:txBody>
-      </p:sp>
-      <p:sp>
-        <p:nvSpPr>
-          <p:cNvPr id="5" name="TextBox 4"/>
-          <p:cNvSpPr txBox="1"/>
-          <p:nvPr/>
-        </p:nvSpPr>
-        <p:spPr>
-          <a:xfrm>
-            <a:off x="1280160" y="1783080"/>
-            <a:ext cx="6126480" cy="1005840"/>
-          </a:xfrm>
-          <a:prstGeom prst="rect">
-            <a:avLst/>
-          </a:prstGeom>
-          <a:noFill/>
-        </p:spPr>
-        <p:txBody>
-          <a:bodyPr wrap="square" anchor="t" lIns="0" rIns="0" tIns="0" bIns="0">
-            <a:spAutoFit/>
-          </a:bodyPr>
-          <a:lstStyle/>
-          <a:p>
-            <a:pPr algn="l">
-              <a:lnSpc>
-                <a:spcPct val="108000"/>
-              </a:lnSpc>
-              <a:spcAft>
-                <a:spcPts val="200"/>
-              </a:spcAft>
-            </a:pPr>
-            <a:r>
-              <a:rPr sz="1700" b="1" i="0">
-                <a:solidFill>
-                  <a:srgbClr val="EAF0F8"/>
-                </a:solidFill>
-                <a:latin typeface="Arial"/>
-              </a:rPr>
-              <a:t>At the deadline: buy targeted</a:t>
-            </a:r>
-          </a:p>
-          <a:p>
-            <a:pPr algn="l">
-              <a:lnSpc>
-                <a:spcPct val="108000"/>
-              </a:lnSpc>
-              <a:spcAft>
-                <a:spcPts val="200"/>
-              </a:spcAft>
-            </a:pPr>
-            <a:r>
-              <a:rPr sz="1350" b="0" i="0">
-                <a:solidFill>
-                  <a:srgbClr val="93A0B6"/>
-                </a:solidFill>
-                <a:latin typeface="Arial"/>
-              </a:rPr>
-              <a:t>A controllable infield bat and a reliever, funded from the pitching surplus. Keep the vets, they're playoff innings now.</a:t>
-            </a:r>
-          </a:p>
-        </p:txBody>
-      </p:sp>
-      <p:sp>
-        <p:nvSpPr>
-          <p:cNvPr id="6" name="Rounded Rectangle 5"/>
-          <p:cNvSpPr/>
-          <p:nvPr/>
-        </p:nvSpPr>
-        <p:spPr>
-          <a:xfrm>
-            <a:off x="640080" y="2971800"/>
-            <a:ext cx="457200" cy="457200"/>
-          </a:xfrm>
-          <a:prstGeom prst="roundRect">
-            <a:avLst>
-              <a:gd name="adj" fmla="val 18000"/>
-            </a:avLst>
-          </a:prstGeom>
-          <a:solidFill>
-            <a:srgbClr val="E8615A"/>
-          </a:solidFill>
-          <a:ln>
-            <a:noFill/>
-          </a:ln>
-          <a:effectLst/>
-        </p:spPr>
-        <p:style>
-          <a:lnRef idx="1">
-            <a:schemeClr val="accent1"/>
-          </a:lnRef>
-          <a:fillRef idx="3">
-            <a:schemeClr val="accent1"/>
-          </a:fillRef>
-          <a:effectRef idx="2">
-            <a:schemeClr val="accent1"/>
-          </a:effectRef>
-          <a:fontRef idx="minor">
-            <a:schemeClr val="lt1"/>
-          </a:fontRef>
-        </p:style>
-        <p:txBody>
-          <a:bodyPr rtlCol="0" anchor="ctr" wrap="none"/>
-          <a:lstStyle/>
-          <a:p>
-            <a:pPr algn="ctr"/>
-            <a:r>
-              <a:rPr sz="1800" b="1">
-                <a:solidFill>
-                  <a:srgbClr val="0B1220"/>
-                </a:solidFill>
-                <a:latin typeface="Courier New"/>
-              </a:rPr>
-              <a:t>2</a:t>
-            </a:r>
-          </a:p>
-        </p:txBody>
-      </p:sp>
-      <p:sp>
-        <p:nvSpPr>
-          <p:cNvPr id="7" name="TextBox 6"/>
-          <p:cNvSpPr txBox="1"/>
-          <p:nvPr/>
-        </p:nvSpPr>
-        <p:spPr>
-          <a:xfrm>
-            <a:off x="1280160" y="2953512"/>
-            <a:ext cx="6126480" cy="1005840"/>
-          </a:xfrm>
-          <a:prstGeom prst="rect">
-            <a:avLst/>
-          </a:prstGeom>
-          <a:noFill/>
-        </p:spPr>
-        <p:txBody>
-          <a:bodyPr wrap="square" anchor="t" lIns="0" rIns="0" tIns="0" bIns="0">
-            <a:spAutoFit/>
-          </a:bodyPr>
-          <a:lstStyle/>
-          <a:p>
-            <a:pPr algn="l">
-              <a:lnSpc>
-                <a:spcPct val="108000"/>
-              </a:lnSpc>
-              <a:spcAft>
-                <a:spcPts val="200"/>
-              </a:spcAft>
-            </a:pPr>
-            <a:r>
-              <a:rPr sz="1700" b="1" i="0">
-                <a:solidFill>
-                  <a:srgbClr val="EAF0F8"/>
-                </a:solidFill>
-                <a:latin typeface="Arial"/>
-              </a:rPr>
-              <a:t>Hold Duran through August</a:t>
-            </a:r>
-          </a:p>
-          <a:p>
-            <a:pPr algn="l">
-              <a:lnSpc>
-                <a:spcPct val="108000"/>
-              </a:lnSpc>
-              <a:spcAft>
-                <a:spcPts val="200"/>
-              </a:spcAft>
-            </a:pPr>
-            <a:r>
-              <a:rPr sz="1350" b="0" i="0">
-                <a:solidFill>
-                  <a:srgbClr val="93A0B6"/>
-                </a:solidFill>
-                <a:latin typeface="Arial"/>
-              </a:rPr>
-              <a:t>His value is at its nadir and his July contact quality (~.35 xwOBA) is already surging. Selling now cashes the slump.</a:t>
-            </a:r>
-          </a:p>
-        </p:txBody>
-      </p:sp>
-      <p:sp>
-        <p:nvSpPr>
-          <p:cNvPr id="8" name="Rounded Rectangle 7"/>
-          <p:cNvSpPr/>
-          <p:nvPr/>
-        </p:nvSpPr>
-        <p:spPr>
-          <a:xfrm>
-            <a:off x="640080" y="4142231"/>
-            <a:ext cx="457200" cy="457200"/>
-          </a:xfrm>
-          <a:prstGeom prst="roundRect">
-            <a:avLst>
-              <a:gd name="adj" fmla="val 18000"/>
-            </a:avLst>
-          </a:prstGeom>
-          <a:solidFill>
-            <a:srgbClr val="E8615A"/>
-          </a:solidFill>
-          <a:ln>
-            <a:noFill/>
-          </a:ln>
-          <a:effectLst/>
-        </p:spPr>
-        <p:style>
-          <a:lnRef idx="1">
-            <a:schemeClr val="accent1"/>
-          </a:lnRef>
-          <a:fillRef idx="3">
-            <a:schemeClr val="accent1"/>
-          </a:fillRef>
-          <a:effectRef idx="2">
-            <a:schemeClr val="accent1"/>
-          </a:effectRef>
-          <a:fontRef idx="minor">
-            <a:schemeClr val="lt1"/>
-          </a:fontRef>
-        </p:style>
-        <p:txBody>
-          <a:bodyPr rtlCol="0" anchor="ctr" wrap="none"/>
-          <a:lstStyle/>
-          <a:p>
-            <a:pPr algn="ctr"/>
-            <a:r>
-              <a:rPr sz="1800" b="1">
-                <a:solidFill>
-                  <a:srgbClr val="0B1220"/>
-                </a:solidFill>
-                <a:latin typeface="Courier New"/>
-              </a:rPr>
-              <a:t>3</a:t>
-            </a:r>
-          </a:p>
-        </p:txBody>
-      </p:sp>
-      <p:sp>
-        <p:nvSpPr>
-          <p:cNvPr id="9" name="TextBox 8"/>
-          <p:cNvSpPr txBox="1"/>
-          <p:nvPr/>
-        </p:nvSpPr>
-        <p:spPr>
-          <a:xfrm>
-            <a:off x="1280160" y="4123944"/>
-            <a:ext cx="6126480" cy="1005840"/>
-          </a:xfrm>
-          <a:prstGeom prst="rect">
-            <a:avLst/>
-          </a:prstGeom>
-          <a:noFill/>
-        </p:spPr>
-        <p:txBody>
-          <a:bodyPr wrap="square" anchor="t" lIns="0" rIns="0" tIns="0" bIns="0">
-            <a:spAutoFit/>
-          </a:bodyPr>
-          <a:lstStyle/>
-          <a:p>
-            <a:pPr algn="l">
-              <a:lnSpc>
-                <a:spcPct val="108000"/>
-              </a:lnSpc>
-              <a:spcAft>
-                <a:spcPts val="200"/>
-              </a:spcAft>
-            </a:pPr>
-            <a:r>
-              <a:rPr sz="1700" b="1" i="0">
-                <a:solidFill>
-                  <a:srgbClr val="EAF0F8"/>
-                </a:solidFill>
-                <a:latin typeface="Arial"/>
-              </a:rPr>
-              <a:t>Winter: re-price, then choose</a:t>
-            </a:r>
-          </a:p>
-          <a:p>
-            <a:pPr algn="l">
-              <a:lnSpc>
-                <a:spcPct val="108000"/>
-              </a:lnSpc>
-              <a:spcAft>
-                <a:spcPts val="200"/>
-              </a:spcAft>
-            </a:pPr>
-            <a:r>
-              <a:rPr sz="1350" b="0" i="0">
-                <a:solidFill>
-                  <a:srgbClr val="93A0B6"/>
-                </a:solidFill>
-                <a:latin typeface="Arial"/>
-              </a:rPr>
-              <a:t>Anthony healthy, jam returns. Rebound confirmed → extend or trade at full price. Erosion persists → sell at market. Either way, the 2027 OF is Anthony / Rafaela / Abreu.</a:t>
-            </a:r>
-          </a:p>
-        </p:txBody>
-      </p:sp>
-      <p:sp>
-        <p:nvSpPr>
-          <p:cNvPr id="10" name="Rounded Rectangle 9"/>
-          <p:cNvSpPr/>
-          <p:nvPr/>
-        </p:nvSpPr>
-        <p:spPr>
-          <a:xfrm>
-            <a:off x="7818120" y="1783080"/>
-            <a:ext cx="3794760" cy="3337560"/>
-          </a:xfrm>
-          <a:prstGeom prst="roundRect">
-            <a:avLst>
-              <a:gd name="adj" fmla="val 6000"/>
-            </a:avLst>
-          </a:prstGeom>
-          <a:solidFill>
-            <a:srgbClr val="1A2740"/>
-          </a:solidFill>
-          <a:ln>
-            <a:noFill/>
-          </a:ln>
-          <a:effectLst/>
-        </p:spPr>
-        <p:style>
-          <a:lnRef idx="1">
-            <a:schemeClr val="accent1"/>
-          </a:lnRef>
-          <a:fillRef idx="3">
-            <a:schemeClr val="accent1"/>
-          </a:fillRef>
-          <a:effectRef idx="2">
-            <a:schemeClr val="accent1"/>
-          </a:effectRef>
-          <a:fontRef idx="minor">
-            <a:schemeClr val="lt1"/>
-          </a:fontRef>
-        </p:style>
-        <p:txBody>
-          <a:bodyPr rtlCol="0" anchor="ctr"/>
-          <a:lstStyle/>
-          <a:p>
-            <a:pPr algn="ctr"/>
-          </a:p>
-        </p:txBody>
-      </p:sp>
-      <p:sp>
-        <p:nvSpPr>
-          <p:cNvPr id="11" name="TextBox 10"/>
-          <p:cNvSpPr txBox="1"/>
-          <p:nvPr/>
-        </p:nvSpPr>
-        <p:spPr>
-          <a:xfrm>
-            <a:off x="8092440" y="2011680"/>
-            <a:ext cx="3291840" cy="365760"/>
-          </a:xfrm>
-          <a:prstGeom prst="rect">
-            <a:avLst/>
-          </a:prstGeom>
-          <a:noFill/>
-        </p:spPr>
-        <p:txBody>
-          <a:bodyPr wrap="square" anchor="t" lIns="0" rIns="0" tIns="0" bIns="0">
-            <a:spAutoFit/>
-          </a:bodyPr>
-          <a:lstStyle/>
-          <a:p>
-            <a:pPr algn="l">
-              <a:lnSpc>
-                <a:spcPct val="100000"/>
-              </a:lnSpc>
-              <a:spcAft>
-                <a:spcPts val="0"/>
-              </a:spcAft>
-            </a:pPr>
-            <a:r>
-              <a:rPr sz="1250" b="1" i="0">
-                <a:solidFill>
-                  <a:srgbClr val="C9D2E3"/>
-                </a:solidFill>
-                <a:latin typeface="Arial"/>
-              </a:rPr>
-              <a:t>THE RETURN</a:t>
-            </a:r>
-          </a:p>
-        </p:txBody>
-      </p:sp>
-      <p:sp>
-        <p:nvSpPr>
-          <p:cNvPr id="12" name="TextBox 11"/>
-          <p:cNvSpPr txBox="1"/>
-          <p:nvPr/>
-        </p:nvSpPr>
-        <p:spPr>
-          <a:xfrm>
-            <a:off x="8092440" y="2487168"/>
-            <a:ext cx="3291840" cy="914400"/>
-          </a:xfrm>
-          <a:prstGeom prst="rect">
-            <a:avLst/>
-          </a:prstGeom>
-          <a:noFill/>
-        </p:spPr>
-        <p:txBody>
-          <a:bodyPr wrap="square" anchor="t" lIns="0" rIns="0" tIns="0" bIns="0">
-            <a:spAutoFit/>
-          </a:bodyPr>
-          <a:lstStyle/>
-          <a:p>
-            <a:pPr algn="l">
-              <a:lnSpc>
-                <a:spcPct val="105000"/>
-              </a:lnSpc>
-              <a:spcAft>
-                <a:spcPts val="200"/>
-              </a:spcAft>
-            </a:pPr>
-            <a:r>
-              <a:rPr sz="1300" b="1" i="0">
-                <a:solidFill>
-                  <a:srgbClr val="F0B8BC"/>
-                </a:solidFill>
-                <a:latin typeface="Arial"/>
-              </a:rPr>
-              <a:t>Sell now (nadir)</a:t>
-            </a:r>
-          </a:p>
-          <a:p>
-            <a:pPr algn="l">
-              <a:lnSpc>
-                <a:spcPct val="105000"/>
-              </a:lnSpc>
-              <a:spcAft>
-                <a:spcPts val="200"/>
-              </a:spcAft>
-            </a:pPr>
-            <a:r>
-              <a:rPr sz="1400" b="0" i="0">
-                <a:solidFill>
-                  <a:srgbClr val="F4F7FC"/>
-                </a:solidFill>
-                <a:latin typeface="Arial"/>
-              </a:rPr>
-              <a:t>~$10–15M · a 45-FV bat</a:t>
-            </a:r>
-          </a:p>
-        </p:txBody>
-      </p:sp>
-      <p:sp>
-        <p:nvSpPr>
-          <p:cNvPr id="13" name="TextBox 12"/>
-          <p:cNvSpPr txBox="1"/>
-          <p:nvPr/>
-        </p:nvSpPr>
-        <p:spPr>
-          <a:xfrm>
-            <a:off x="8092440" y="3520440"/>
-            <a:ext cx="3291840" cy="1005840"/>
-          </a:xfrm>
-          <a:prstGeom prst="rect">
-            <a:avLst/>
-          </a:prstGeom>
-          <a:noFill/>
-        </p:spPr>
-        <p:txBody>
-          <a:bodyPr wrap="square" anchor="t" lIns="0" rIns="0" tIns="0" bIns="0">
-            <a:spAutoFit/>
-          </a:bodyPr>
-          <a:lstStyle/>
-          <a:p>
-            <a:pPr algn="l">
-              <a:lnSpc>
-                <a:spcPct val="105000"/>
-              </a:lnSpc>
-              <a:spcAft>
-                <a:spcPts val="200"/>
-              </a:spcAft>
-            </a:pPr>
-            <a:r>
-              <a:rPr sz="1300" b="1" i="0">
-                <a:solidFill>
-                  <a:srgbClr val="A9E5B5"/>
-                </a:solidFill>
-                <a:latin typeface="Arial"/>
-              </a:rPr>
-              <a:t>Sell after rebound</a:t>
-            </a:r>
-          </a:p>
-          <a:p>
-            <a:pPr algn="l">
-              <a:lnSpc>
-                <a:spcPct val="105000"/>
-              </a:lnSpc>
-              <a:spcAft>
-                <a:spcPts val="200"/>
-              </a:spcAft>
-            </a:pPr>
-            <a:r>
-              <a:rPr sz="1400" b="0" i="0">
-                <a:solidFill>
-                  <a:srgbClr val="F4F7FC"/>
-                </a:solidFill>
-                <a:latin typeface="Arial"/>
-              </a:rPr>
-              <a:t>~$28M · a 50-FV, top-100</a:t>
-            </a:r>
-          </a:p>
-          <a:p>
-            <a:pPr algn="l">
-              <a:lnSpc>
-                <a:spcPct val="105000"/>
-              </a:lnSpc>
-              <a:spcAft>
-                <a:spcPts val="200"/>
-              </a:spcAft>
-            </a:pPr>
-            <a:r>
-              <a:rPr sz="1400" b="0" i="0">
-                <a:solidFill>
-                  <a:srgbClr val="F4F7FC"/>
-                </a:solidFill>
-                <a:latin typeface="Arial"/>
-              </a:rPr>
-              <a:t>controllable talent</a:t>
-            </a:r>
-          </a:p>
-        </p:txBody>
-      </p:sp>
-      <p:sp>
-        <p:nvSpPr>
-          <p:cNvPr id="14" name="TextBox 13"/>
-          <p:cNvSpPr txBox="1"/>
-          <p:nvPr/>
-        </p:nvSpPr>
-        <p:spPr>
-          <a:xfrm>
-            <a:off x="8092440" y="4617720"/>
-            <a:ext cx="3291840" cy="457200"/>
-          </a:xfrm>
-          <a:prstGeom prst="rect">
-            <a:avLst/>
-          </a:prstGeom>
-          <a:noFill/>
-        </p:spPr>
-        <p:txBody>
-          <a:bodyPr wrap="square" anchor="t" lIns="0" rIns="0" tIns="0" bIns="0">
-            <a:spAutoFit/>
-          </a:bodyPr>
-          <a:lstStyle/>
-          <a:p>
-            <a:pPr algn="l">
-              <a:lnSpc>
-                <a:spcPct val="105000"/>
-              </a:lnSpc>
-              <a:spcAft>
-                <a:spcPts val="400"/>
-              </a:spcAft>
-            </a:pPr>
-            <a:r>
-              <a:rPr sz="1150" b="0" i="1">
-                <a:solidFill>
-                  <a:srgbClr val="C9D2E3"/>
-                </a:solidFill>
-                <a:latin typeface="Arial"/>
-              </a:rPr>
-              <a:t>One grade of return = the reason to wait.</a:t>
-            </a:r>
-          </a:p>
-        </p:txBody>
-      </p:sp>
-      <p:sp>
-        <p:nvSpPr>
-          <p:cNvPr id="15" name="TextBox 14"/>
-          <p:cNvSpPr txBox="1"/>
-          <p:nvPr/>
-        </p:nvSpPr>
-        <p:spPr>
-          <a:xfrm>
-            <a:off x="566928" y="6510528"/>
-            <a:ext cx="11064240" cy="274320"/>
-          </a:xfrm>
-          <a:prstGeom prst="rect">
-            <a:avLst/>
-          </a:prstGeom>
-          <a:noFill/>
-        </p:spPr>
-        <p:txBody>
-          <a:bodyPr wrap="square" anchor="t" lIns="0" rIns="0" tIns="0" bIns="0">
-            <a:spAutoFit/>
-          </a:bodyPr>
-          <a:lstStyle/>
-          <a:p>
-            <a:pPr algn="l">
-              <a:lnSpc>
-                <a:spcPct val="100000"/>
-              </a:lnSpc>
-              <a:spcAft>
-                <a:spcPts val="0"/>
-              </a:spcAft>
-            </a:pPr>
-            <a:r>
-              <a:rPr sz="800" b="1" i="0">
-                <a:solidFill>
-                  <a:srgbClr val="E8615A"/>
-                </a:solidFill>
-                <a:latin typeface="Courier New"/>
-              </a:rPr>
-              <a:t>BOS // OUTFIELD STRATEGY</a:t>
-            </a:r>
-            <a:r>
-              <a:rPr sz="800" b="0" i="0">
-                <a:solidFill>
-                  <a:srgbClr val="5E6B84"/>
-                </a:solidFill>
-                <a:latin typeface="Courier New"/>
-              </a:rPr>
-              <a:t>   STATCAST / FANGRAPHS / MLB STATS API / SPOTRAC · JULY 2026</a:t>
-            </a:r>
-          </a:p>
-        </p:txBody>
-      </p:sp>
-    </p:spTree>
-  </p:cSld>
-  <p:clrMapOvr>
-    <a:masterClrMapping/>
-  </p:clrMapOvr>
-</p:sld>
-</file>
-
-<file path=ppt/slides/slide19.xml><?xml version="1.0" encoding="utf-8"?>
 <p:sld xmlns:a="http://schemas.openxmlformats.org/drawingml/2006/main" xmlns:p="http://schemas.openxmlformats.org/presentationml/2006/main" xmlns:r="http://schemas.openxmlformats.org/officeDocument/2006/relationships">
   <p:cSld>
     <p:bg>
@@ -11034,7 +9530,7 @@
                 </a:solidFill>
                 <a:latin typeface="Arial"/>
               </a:rPr>
-              <a:t>Value at its nadir; his July contact (~.35 xwOBA) is already surging. Re-price in winter.</a:t>
+              <a:t>Duran has had a miserable season, but his underlying numbers are better than they seem. Positive regression candidate. Let him build up his value and flip in the offseason.</a:t>
             </a:r>
           </a:p>
         </p:txBody>
@@ -11141,7 +9637,7 @@
                 </a:solidFill>
                 <a:latin typeface="Arial"/>
               </a:rPr>
-              <a:t>Gray, Chapman, Contreras are playoff innings now. Sell branch reopens only if the gap blows out by Aug 1.</a:t>
+              <a:t>Gray, Chapman, Contreras should not be sold now. Sell branch reopens only if the gap blows out by Aug 1.</a:t>
             </a:r>
           </a:p>
         </p:txBody>
@@ -11229,7 +9725,7 @@
                 </a:solidFill>
                 <a:latin typeface="Arial"/>
               </a:rPr>
-              <a:t>Add small, without disturbing the room</a:t>
+              <a:t>Don't disturb the clubhouse</a:t>
             </a:r>
           </a:p>
           <a:p>
@@ -11248,7 +9744,7 @@
                 </a:solidFill>
                 <a:latin typeface="Arial"/>
               </a:rPr>
-              <a:t>A reliever first, maybe an infield bat, prospects before big-leaguers, empty spots before hot ones. The catcher tandem stays.</a:t>
+              <a:t>Back-end starter, reliever, RHH.</a:t>
             </a:r>
           </a:p>
         </p:txBody>
@@ -11256,48 +9752,6 @@
       <p:sp>
         <p:nvSpPr>
           <p:cNvPr id="11" name="TextBox 10"/>
-          <p:cNvSpPr txBox="1"/>
-          <p:nvPr/>
-        </p:nvSpPr>
-        <p:spPr>
-          <a:xfrm>
-            <a:off x="8001000" y="5779007"/>
-            <a:ext cx="3749039" cy="548640"/>
-          </a:xfrm>
-          <a:prstGeom prst="rect">
-            <a:avLst/>
-          </a:prstGeom>
-          <a:noFill/>
-        </p:spPr>
-        <p:txBody>
-          <a:bodyPr wrap="square" anchor="t" lIns="0" rIns="0" tIns="0" bIns="0">
-            <a:spAutoFit/>
-          </a:bodyPr>
-          <a:lstStyle/>
-          <a:p>
-            <a:pPr algn="l">
-              <a:lnSpc>
-                <a:spcPct val="105000"/>
-              </a:lnSpc>
-              <a:spcAft>
-                <a:spcPts val="400"/>
-              </a:spcAft>
-            </a:pPr>
-            <a:r>
-              <a:rPr sz="1250" b="1" i="1">
-                <a:solidFill>
-                  <a:srgbClr val="E8615A"/>
-                </a:solidFill>
-                <a:latin typeface="Arial"/>
-              </a:rPr>
-              <a:t>The team is its left fielder: process better than results.</a:t>
-            </a:r>
-          </a:p>
-        </p:txBody>
-      </p:sp>
-      <p:sp>
-        <p:nvSpPr>
-          <p:cNvPr id="12" name="TextBox 11"/>
           <p:cNvSpPr txBox="1"/>
           <p:nvPr/>
         </p:nvSpPr>
@@ -11451,7 +9905,7 @@
                 </a:solidFill>
                 <a:latin typeface="Arial"/>
               </a:rPr>
-              <a:t>The young, cheap, controllable core</a:t>
+              <a:t>The young, cheap, controllable outfield core</a:t>
             </a:r>
           </a:p>
         </p:txBody>
@@ -12554,7 +11008,7 @@
                 </a:solidFill>
                 <a:latin typeface="Arial"/>
               </a:rPr>
-              <a:t>The two hard cases: a redundant bat and an underwater contract</a:t>
+              <a:t>The 4th Outfield Spot</a:t>
             </a:r>
           </a:p>
         </p:txBody>
@@ -12880,7 +11334,7 @@
                 </a:solidFill>
                 <a:latin typeface="Arial"/>
               </a:rPr>
-              <a:t>Value at its nadir; xstats say the market under-prices him. Re-price in winter, after the rebound shows (or doesn't).</a:t>
+              <a:t>Duran has had a miserable season, but his underlying numbers are better than they seem. Positive regression candidate. Let him build up his value and flip in the offseason.</a:t>
             </a:r>
           </a:p>
         </p:txBody>
@@ -13206,7 +11660,7 @@
                 </a:solidFill>
                 <a:latin typeface="Arial"/>
               </a:rPr>
-              <a:t>Gonzalez covers the tougher lefties. Absorb the deal, let it expire.</a:t>
+              <a:t>Gonzalez covers the tougher lefties. Platoon the DH spot and let it ride.</a:t>
             </a:r>
           </a:p>
         </p:txBody>
@@ -13214,6 +11668,48 @@
       <p:sp>
         <p:nvSpPr>
           <p:cNvPr id="18" name="TextBox 17"/>
+          <p:cNvSpPr txBox="1"/>
+          <p:nvPr/>
+        </p:nvSpPr>
+        <p:spPr>
+          <a:xfrm>
+            <a:off x="566928" y="5623560"/>
+            <a:ext cx="11064240" cy="457200"/>
+          </a:xfrm>
+          <a:prstGeom prst="rect">
+            <a:avLst/>
+          </a:prstGeom>
+          <a:noFill/>
+        </p:spPr>
+        <p:txBody>
+          <a:bodyPr wrap="square" anchor="t" lIns="0" rIns="0" tIns="0" bIns="0">
+            <a:spAutoFit/>
+          </a:bodyPr>
+          <a:lstStyle/>
+          <a:p>
+            <a:pPr algn="l">
+              <a:lnSpc>
+                <a:spcPct val="105000"/>
+              </a:lnSpc>
+              <a:spcAft>
+                <a:spcPts val="400"/>
+              </a:spcAft>
+            </a:pPr>
+            <a:r>
+              <a:rPr sz="1350" b="1" i="1">
+                <a:solidFill>
+                  <a:srgbClr val="E3B14E"/>
+                </a:solidFill>
+                <a:latin typeface="Arial"/>
+              </a:rPr>
+              <a:t>With Roman's status up in the air, hold both outfielders through this season.</a:t>
+            </a:r>
+          </a:p>
+        </p:txBody>
+      </p:sp>
+      <p:sp>
+        <p:nvSpPr>
+          <p:cNvPr id="19" name="TextBox 18"/>
           <p:cNvSpPr txBox="1"/>
           <p:nvPr/>
         </p:nvSpPr>
@@ -13498,7 +11994,7 @@
                 </a:solidFill>
                 <a:latin typeface="Arial"/>
               </a:rPr>
-              <a:t>BABIP .344 vs xBABIP .333; xwOBA .340 legit. Credit his speed's usual edge over xstats and the true luck is only +5 to +14 pts.</a:t>
+              <a:t>BABIP .344 vs xBABIP .333; xwOBA .340 legit. Legs are still there, and defense is definitely improved.</a:t>
             </a:r>
           </a:p>
         </p:txBody>
@@ -13605,7 +12101,7 @@
                 </a:solidFill>
                 <a:latin typeface="Arial"/>
               </a:rPr>
-              <a:t>wOBA .263 BELOW its .293 xwOBA, 34 to 43 pts under his own norm; BABIP .238 vs .309 expected. Erosion real, luck worse.</a:t>
+              <a:t>wOBA .263 BELOW its .293 xwOBA, 34 to 43 pts under his own norm; BABIP .238 vs .309 expected.</a:t>
             </a:r>
           </a:p>
         </p:txBody>
@@ -13712,7 +12208,7 @@
                 </a:solidFill>
                 <a:latin typeface="Arial"/>
               </a:rPr>
-              <a:t>Career gap +19 home / +19 road: identical, the skill travels. Speed, baserunning and fielding all still plus. No injury.</a:t>
+              <a:t>Speed, baserunning and fielding all still plus. No injury.</a:t>
             </a:r>
           </a:p>
         </p:txBody>
@@ -13861,7 +12357,7 @@
                 </a:solidFill>
                 <a:latin typeface="Arial"/>
               </a:rPr>
-              <a:t>Selling now cashes the slump. Value hinges on the rebound.</a:t>
+              <a:t>Wait for the rebound.</a:t>
             </a:r>
           </a:p>
         </p:txBody>
@@ -14022,7 +12518,7 @@
                 </a:solidFill>
                 <a:latin typeface="Arial"/>
               </a:rPr>
-              <a:t>10,000 simulations: the rebound is likely</a:t>
+              <a:t>The rebound is likely for Duran</a:t>
             </a:r>
           </a:p>
         </p:txBody>
@@ -14665,7 +13161,7 @@
                 </a:solidFill>
                 <a:latin typeface="Arial"/>
               </a:rPr>
-              <a:t>Duran is swinging harder, longer and steeper. That's pressing, not fading.</a:t>
+              <a:t>Duran is swinging harder, longer and steeper than ever.</a:t>
             </a:r>
           </a:p>
         </p:txBody>
@@ -14806,7 +13302,7 @@
                 </a:solidFill>
                 <a:latin typeface="Arial"/>
               </a:rPr>
-              <a:t>Whiffs on a rising bat speed = selling out. The chase leak is velo/offspeed; breaking-ball chase actually improved.</a:t>
+              <a:t>Whiffs on a rising bat speed. Breaking-ball chase actually improved, the problem is on velocity.</a:t>
             </a:r>
           </a:p>
         </p:txBody>

--- a/outputs/Red_Sox_Trade_Deadline.pptx
+++ b/outputs/Red_Sox_Trade_Deadline.pptx
@@ -3471,8 +3471,8 @@
         </p:blipFill>
         <p:spPr>
           <a:xfrm>
-            <a:off x="490118" y="1554480"/>
-            <a:ext cx="7066483" cy="4206240"/>
+            <a:off x="615189" y="1554480"/>
+            <a:ext cx="6816340" cy="4206240"/>
           </a:xfrm>
           <a:prstGeom prst="rect">
             <a:avLst/>
@@ -4085,7 +4085,7 @@
         <p:spPr>
           <a:xfrm>
             <a:off x="365760" y="1600200"/>
-            <a:ext cx="7315200" cy="3593431"/>
+            <a:ext cx="7315200" cy="3546849"/>
           </a:xfrm>
           <a:prstGeom prst="rect">
             <a:avLst/>
@@ -4590,8 +4590,8 @@
         </p:blipFill>
         <p:spPr>
           <a:xfrm>
-            <a:off x="518160" y="1554480"/>
-            <a:ext cx="7010399" cy="4206240"/>
+            <a:off x="365760" y="1554480"/>
+            <a:ext cx="7315200" cy="3556000"/>
           </a:xfrm>
           <a:prstGeom prst="rect">
             <a:avLst/>
@@ -5990,7 +5990,7 @@
       </p:sp>
       <p:pic>
         <p:nvPicPr>
-          <p:cNvPr id="4" name="Picture 3" descr="18_mead_fit.png"/>
+          <p:cNvPr id="4" name="Picture 3" descr="19_mead_fenway.png"/>
           <p:cNvPicPr>
             <a:picLocks noChangeAspect="1"/>
           </p:cNvPicPr>
@@ -6004,8 +6004,8 @@
         </p:blipFill>
         <p:spPr>
           <a:xfrm>
-            <a:off x="365760" y="1554480"/>
-            <a:ext cx="7315200" cy="3018971"/>
+            <a:off x="822640" y="1481328"/>
+            <a:ext cx="6401438" cy="4572000"/>
           </a:xfrm>
           <a:prstGeom prst="rect">
             <a:avLst/>
@@ -9420,8 +9420,8 @@
         </p:blipFill>
         <p:spPr>
           <a:xfrm>
-            <a:off x="616305" y="1554480"/>
-            <a:ext cx="6814108" cy="4206240"/>
+            <a:off x="647113" y="1554480"/>
+            <a:ext cx="6752492" cy="4206240"/>
           </a:xfrm>
           <a:prstGeom prst="rect">
             <a:avLst/>
@@ -11885,7 +11885,7 @@
         <p:spPr>
           <a:xfrm>
             <a:off x="457200" y="1600200"/>
-            <a:ext cx="6309360" cy="3943350"/>
+            <a:ext cx="6309360" cy="3722378"/>
           </a:xfrm>
           <a:prstGeom prst="rect">
             <a:avLst/>
@@ -12540,7 +12540,7 @@
         <p:spPr>
           <a:xfrm>
             <a:off x="365760" y="1554480"/>
-            <a:ext cx="7589520" cy="3274998"/>
+            <a:ext cx="7589520" cy="3254824"/>
           </a:xfrm>
           <a:prstGeom prst="rect">
             <a:avLst/>
@@ -13017,8 +13017,8 @@
         </p:blipFill>
         <p:spPr>
           <a:xfrm>
-            <a:off x="1597621" y="1554480"/>
-            <a:ext cx="8993709" cy="2926080"/>
+            <a:off x="1535538" y="1554480"/>
+            <a:ext cx="9117874" cy="2926080"/>
           </a:xfrm>
           <a:prstGeom prst="rect">
             <a:avLst/>
@@ -13625,8 +13625,8 @@
         </p:blipFill>
         <p:spPr>
           <a:xfrm>
-            <a:off x="2811779" y="1508760"/>
-            <a:ext cx="6583680" cy="4114800"/>
+            <a:off x="2788920" y="1508760"/>
+            <a:ext cx="6629400" cy="3923110"/>
           </a:xfrm>
           <a:prstGeom prst="rect">
             <a:avLst/>

--- a/outputs/Red_Sox_Trade_Deadline.pptx
+++ b/outputs/Red_Sox_Trade_Deadline.pptx
@@ -4323,6 +4323,113 @@
             </a:avLst>
           </a:prstGeom>
           <a:solidFill>
+            <a:srgbClr val="EAF0F8"/>
+          </a:solidFill>
+          <a:ln>
+            <a:noFill/>
+          </a:ln>
+          <a:effectLst/>
+        </p:spPr>
+        <p:style>
+          <a:lnRef idx="1">
+            <a:schemeClr val="accent1"/>
+          </a:lnRef>
+          <a:fillRef idx="3">
+            <a:schemeClr val="accent1"/>
+          </a:fillRef>
+          <a:effectRef idx="2">
+            <a:schemeClr val="accent1"/>
+          </a:effectRef>
+          <a:fontRef idx="minor">
+            <a:schemeClr val="lt1"/>
+          </a:fontRef>
+        </p:style>
+        <p:txBody>
+          <a:bodyPr rtlCol="0" anchor="ctr"/>
+          <a:lstStyle/>
+          <a:p>
+            <a:pPr algn="ctr"/>
+          </a:p>
+        </p:txBody>
+      </p:sp>
+      <p:sp>
+        <p:nvSpPr>
+          <p:cNvPr id="10" name="TextBox 9"/>
+          <p:cNvSpPr txBox="1"/>
+          <p:nvPr/>
+        </p:nvSpPr>
+        <p:spPr>
+          <a:xfrm>
+            <a:off x="8293608" y="3968496"/>
+            <a:ext cx="3749039" cy="1097280"/>
+          </a:xfrm>
+          <a:prstGeom prst="rect">
+            <a:avLst/>
+          </a:prstGeom>
+          <a:noFill/>
+        </p:spPr>
+        <p:txBody>
+          <a:bodyPr wrap="square" anchor="t" lIns="0" rIns="0" tIns="0" bIns="0">
+            <a:spAutoFit/>
+          </a:bodyPr>
+          <a:lstStyle/>
+          <a:p>
+            <a:pPr algn="l">
+              <a:lnSpc>
+                <a:spcPct val="107000"/>
+              </a:lnSpc>
+              <a:spcAft>
+                <a:spcPts val="200"/>
+              </a:spcAft>
+            </a:pPr>
+            <a:r>
+              <a:rPr sz="1350" b="1" i="0">
+                <a:solidFill>
+                  <a:srgbClr val="EAF0F8"/>
+                </a:solidFill>
+                <a:latin typeface="Arial"/>
+              </a:rPr>
+              <a:t>History backs the fade</a:t>
+            </a:r>
+          </a:p>
+          <a:p>
+            <a:pPr algn="l">
+              <a:lnSpc>
+                <a:spcPct val="107000"/>
+              </a:lnSpc>
+              <a:spcAft>
+                <a:spcPts val="200"/>
+              </a:spcAft>
+            </a:pPr>
+            <a:r>
+              <a:rPr sz="1160" b="0" i="0">
+                <a:solidFill>
+                  <a:srgbClr val="93A0B6"/>
+                </a:solidFill>
+                <a:latin typeface="Arial"/>
+              </a:rPr>
+              <a:t>2016-25, 100 hitter and 198 reliever cases like these: the median journeyman kept only 39% of a career-best first half (fig. 20).</a:t>
+            </a:r>
+          </a:p>
+        </p:txBody>
+      </p:sp>
+      <p:sp>
+        <p:nvSpPr>
+          <p:cNvPr id="11" name="Rounded Rectangle 10"/>
+          <p:cNvSpPr/>
+          <p:nvPr/>
+        </p:nvSpPr>
+        <p:spPr>
+          <a:xfrm>
+            <a:off x="8001000" y="5120640"/>
+            <a:ext cx="146304" cy="146304"/>
+          </a:xfrm>
+          <a:prstGeom prst="roundRect">
+            <a:avLst>
+              <a:gd name="adj" fmla="val 18000"/>
+            </a:avLst>
+          </a:prstGeom>
+          <a:solidFill>
             <a:srgbClr val="58C08D"/>
           </a:solidFill>
           <a:ln>
@@ -4354,13 +4461,13 @@
       </p:sp>
       <p:sp>
         <p:nvSpPr>
-          <p:cNvPr id="10" name="TextBox 9"/>
-          <p:cNvSpPr txBox="1"/>
-          <p:nvPr/>
-        </p:nvSpPr>
-        <p:spPr>
-          <a:xfrm>
-            <a:off x="8293608" y="3968496"/>
+          <p:cNvPr id="12" name="TextBox 11"/>
+          <p:cNvSpPr txBox="1"/>
+          <p:nvPr/>
+        </p:nvSpPr>
+        <p:spPr>
+          <a:xfrm>
+            <a:off x="8293608" y="5084064"/>
             <a:ext cx="3749039" cy="1097280"/>
           </a:xfrm>
           <a:prstGeom prst="rect">
@@ -4415,7 +4522,7 @@
       </p:sp>
       <p:sp>
         <p:nvSpPr>
-          <p:cNvPr id="11" name="TextBox 10"/>
+          <p:cNvPr id="13" name="TextBox 12"/>
           <p:cNvSpPr txBox="1"/>
           <p:nvPr/>
         </p:nvSpPr>

--- a/outputs/Red_Sox_Trade_Deadline.pptx
+++ b/outputs/Red_Sox_Trade_Deadline.pptx
@@ -22,6 +22,7 @@
     <p:sldId id="270" r:id="rId21"/>
     <p:sldId id="271" r:id="rId22"/>
     <p:sldId id="272" r:id="rId23"/>
+    <p:sldId id="273" r:id="rId24"/>
   </p:sldIdLst>
   <p:sldSz cx="12191695" cy="6858000" type="screen4x3"/>
   <p:notesSz cx="6858000" cy="9144000"/>
@@ -4634,7 +4635,7 @@
                 </a:solidFill>
                 <a:latin typeface="Courier New"/>
               </a:rPr>
-              <a:t>// THE CHEMISTRY VETO</a:t>
+              <a:t>// THE BASE RATE</a:t>
             </a:r>
           </a:p>
         </p:txBody>
@@ -4676,14 +4677,14 @@
                 </a:solidFill>
                 <a:latin typeface="Arial"/>
               </a:rPr>
-              <a:t>Don't Mess Up The Pitching Staff</a:t>
+              <a:t>Career-year first halves usually give it back</a:t>
             </a:r>
           </a:p>
         </p:txBody>
       </p:sp>
       <p:pic>
         <p:nvPicPr>
-          <p:cNvPr id="4" name="Picture 3" descr="14_battery_map.png"/>
+          <p:cNvPr id="4" name="Picture 3" descr="20_aaaa_backtest.png"/>
           <p:cNvPicPr>
             <a:picLocks noChangeAspect="1"/>
           </p:cNvPicPr>
@@ -4698,7 +4699,7 @@
         <p:spPr>
           <a:xfrm>
             <a:off x="365760" y="1554480"/>
-            <a:ext cx="7315200" cy="3556000"/>
+            <a:ext cx="7315200" cy="2396802"/>
           </a:xfrm>
           <a:prstGeom prst="rect">
             <a:avLst/>
@@ -4788,7 +4789,7 @@
                 </a:solidFill>
                 <a:latin typeface="Arial"/>
               </a:rPr>
-              <a:t>The staff works with both</a:t>
+              <a:t>298 historical cases</a:t>
             </a:r>
           </a:p>
           <a:p>
@@ -4807,7 +4808,7 @@
                 </a:solidFill>
                 <a:latin typeface="Arial"/>
               </a:rPr>
-              <a:t>3.42 RA9 with Wong, 4.20 with Narváez, the run-prevention core of the season.</a:t>
+              <a:t>2016-2025: 100 hitters and 198 relievers with the same profile as Boston's AAAA group: thin track record, age 26+, career-best first half.</a:t>
             </a:r>
           </a:p>
         </p:txBody>
@@ -4895,7 +4896,7 @@
                 </a:solidFill>
                 <a:latin typeface="Arial"/>
               </a:rPr>
-              <a:t>Every arm has a guy. Don't mess with that</a:t>
+              <a:t>Median kept 39%</a:t>
             </a:r>
           </a:p>
           <a:p>
@@ -4914,7 +4915,7 @@
                 </a:solidFill>
                 <a:latin typeface="Arial"/>
               </a:rPr>
-              <a:t>Gray / Wong. Bennett / Narvaez. Settled, deliberate assignments across the rotation.</a:t>
+              <a:t>The typical hitter held only 39% of his surge after July; relievers 37%.</a:t>
             </a:r>
           </a:p>
         </p:txBody>
@@ -4928,6 +4929,113 @@
         <p:spPr>
           <a:xfrm>
             <a:off x="8001000" y="4005072"/>
+            <a:ext cx="146304" cy="146304"/>
+          </a:xfrm>
+          <a:prstGeom prst="roundRect">
+            <a:avLst>
+              <a:gd name="adj" fmla="val 18000"/>
+            </a:avLst>
+          </a:prstGeom>
+          <a:solidFill>
+            <a:srgbClr val="E3B14E"/>
+          </a:solidFill>
+          <a:ln>
+            <a:noFill/>
+          </a:ln>
+          <a:effectLst/>
+        </p:spPr>
+        <p:style>
+          <a:lnRef idx="1">
+            <a:schemeClr val="accent1"/>
+          </a:lnRef>
+          <a:fillRef idx="3">
+            <a:schemeClr val="accent1"/>
+          </a:fillRef>
+          <a:effectRef idx="2">
+            <a:schemeClr val="accent1"/>
+          </a:effectRef>
+          <a:fontRef idx="minor">
+            <a:schemeClr val="lt1"/>
+          </a:fontRef>
+        </p:style>
+        <p:txBody>
+          <a:bodyPr rtlCol="0" anchor="ctr"/>
+          <a:lstStyle/>
+          <a:p>
+            <a:pPr algn="ctr"/>
+          </a:p>
+        </p:txBody>
+      </p:sp>
+      <p:sp>
+        <p:nvSpPr>
+          <p:cNvPr id="10" name="TextBox 9"/>
+          <p:cNvSpPr txBox="1"/>
+          <p:nvPr/>
+        </p:nvSpPr>
+        <p:spPr>
+          <a:xfrm>
+            <a:off x="8293608" y="3968496"/>
+            <a:ext cx="3749039" cy="1097280"/>
+          </a:xfrm>
+          <a:prstGeom prst="rect">
+            <a:avLst/>
+          </a:prstGeom>
+          <a:noFill/>
+        </p:spPr>
+        <p:txBody>
+          <a:bodyPr wrap="square" anchor="t" lIns="0" rIns="0" tIns="0" bIns="0">
+            <a:spAutoFit/>
+          </a:bodyPr>
+          <a:lstStyle/>
+          <a:p>
+            <a:pPr algn="l">
+              <a:lnSpc>
+                <a:spcPct val="107000"/>
+              </a:lnSpc>
+              <a:spcAft>
+                <a:spcPts val="200"/>
+              </a:spcAft>
+            </a:pPr>
+            <a:r>
+              <a:rPr sz="1350" b="1" i="0">
+                <a:solidFill>
+                  <a:srgbClr val="EAF0F8"/>
+                </a:solidFill>
+                <a:latin typeface="Arial"/>
+              </a:rPr>
+              <a:t>A third fell all the way back</a:t>
+            </a:r>
+          </a:p>
+          <a:p>
+            <a:pPr algn="l">
+              <a:lnSpc>
+                <a:spcPct val="107000"/>
+              </a:lnSpc>
+              <a:spcAft>
+                <a:spcPts val="200"/>
+              </a:spcAft>
+            </a:pPr>
+            <a:r>
+              <a:rPr sz="1160" b="0" i="0">
+                <a:solidFill>
+                  <a:srgbClr val="93A0B6"/>
+                </a:solidFill>
+                <a:latin typeface="Arial"/>
+              </a:rPr>
+              <a:t>34% of hitters and 37% of relievers finished the second half at or below their career level.</a:t>
+            </a:r>
+          </a:p>
+        </p:txBody>
+      </p:sp>
+      <p:sp>
+        <p:nvSpPr>
+          <p:cNvPr id="11" name="Rounded Rectangle 10"/>
+          <p:cNvSpPr/>
+          <p:nvPr/>
+        </p:nvSpPr>
+        <p:spPr>
+          <a:xfrm>
+            <a:off x="8001000" y="5120640"/>
             <a:ext cx="146304" cy="146304"/>
           </a:xfrm>
           <a:prstGeom prst="roundRect">
@@ -4967,13 +5075,13 @@
       </p:sp>
       <p:sp>
         <p:nvSpPr>
-          <p:cNvPr id="10" name="TextBox 9"/>
-          <p:cNvSpPr txBox="1"/>
-          <p:nvPr/>
-        </p:nvSpPr>
-        <p:spPr>
-          <a:xfrm>
-            <a:off x="8293608" y="3968496"/>
+          <p:cNvPr id="12" name="TextBox 11"/>
+          <p:cNvSpPr txBox="1"/>
+          <p:nvPr/>
+        </p:nvSpPr>
+        <p:spPr>
+          <a:xfrm>
+            <a:off x="8293608" y="5084064"/>
             <a:ext cx="3749039" cy="1097280"/>
           </a:xfrm>
           <a:prstGeom prst="rect">
@@ -5002,7 +5110,7 @@
                 </a:solidFill>
                 <a:latin typeface="Arial"/>
               </a:rPr>
-              <a:t>So: no catcher trade</a:t>
+              <a:t>So the surge is rented</a:t>
             </a:r>
           </a:p>
           <a:p>
@@ -5021,14 +5129,14 @@
                 </a:solidFill>
                 <a:latin typeface="Arial"/>
               </a:rPr>
-              <a:t>The adjusted model (pitcher/opponent/park controls) finds no significant catcher effect: -31 pts, 95% CI [-84, +21]. Nothing here for a trade to fix.</a:t>
-            </a:r>
-          </a:p>
-        </p:txBody>
-      </p:sp>
-      <p:sp>
-        <p:nvSpPr>
-          <p:cNvPr id="11" name="TextBox 10"/>
+              <a:t>Plan for the median, not the heater: replace borrowed production before August returns it.</a:t>
+            </a:r>
+          </a:p>
+        </p:txBody>
+      </p:sp>
+      <p:sp>
+        <p:nvSpPr>
+          <p:cNvPr id="13" name="TextBox 12"/>
           <p:cNvSpPr txBox="1"/>
           <p:nvPr/>
         </p:nvSpPr>
@@ -5140,7 +5248,7 @@
                 </a:solidFill>
                 <a:latin typeface="Courier New"/>
               </a:rPr>
-              <a:t>// THE MENU</a:t>
+              <a:t>// THE CHEMISTRY VETO</a:t>
             </a:r>
           </a:p>
         </p:txBody>
@@ -5182,34 +5290,56 @@
                 </a:solidFill>
                 <a:latin typeface="Arial"/>
               </a:rPr>
-              <a:t>Three trades that fit, and one walk-away</a:t>
-            </a:r>
-          </a:p>
-        </p:txBody>
-      </p:sp>
-      <p:sp>
-        <p:nvSpPr>
-          <p:cNvPr id="4" name="Rounded Rectangle 3"/>
+              <a:t>Don't Mess Up The Pitching Staff</a:t>
+            </a:r>
+          </a:p>
+        </p:txBody>
+      </p:sp>
+      <p:pic>
+        <p:nvPicPr>
+          <p:cNvPr id="4" name="Picture 3" descr="14_battery_map.png"/>
+          <p:cNvPicPr>
+            <a:picLocks noChangeAspect="1"/>
+          </p:cNvPicPr>
+          <p:nvPr/>
+        </p:nvPicPr>
+        <p:blipFill>
+          <a:blip r:embed="rId2"/>
+          <a:stretch>
+            <a:fillRect/>
+          </a:stretch>
+        </p:blipFill>
+        <p:spPr>
+          <a:xfrm>
+            <a:off x="365760" y="1554480"/>
+            <a:ext cx="7315200" cy="3556000"/>
+          </a:xfrm>
+          <a:prstGeom prst="rect">
+            <a:avLst/>
+          </a:prstGeom>
+        </p:spPr>
+      </p:pic>
+      <p:sp>
+        <p:nvSpPr>
+          <p:cNvPr id="5" name="Rounded Rectangle 4"/>
           <p:cNvSpPr/>
           <p:nvPr/>
         </p:nvSpPr>
         <p:spPr>
           <a:xfrm>
-            <a:off x="566928" y="1691640"/>
-            <a:ext cx="5358384" cy="1938528"/>
+            <a:off x="8001000" y="1773936"/>
+            <a:ext cx="146304" cy="146304"/>
           </a:xfrm>
           <a:prstGeom prst="roundRect">
             <a:avLst>
-              <a:gd name="adj" fmla="val 6000"/>
+              <a:gd name="adj" fmla="val 18000"/>
             </a:avLst>
           </a:prstGeom>
           <a:solidFill>
-            <a:srgbClr val="121E33"/>
+            <a:srgbClr val="E8615A"/>
           </a:solidFill>
-          <a:ln w="12700">
-            <a:solidFill>
-              <a:srgbClr val="26334E"/>
-            </a:solidFill>
+          <a:ln>
+            <a:noFill/>
           </a:ln>
           <a:effectLst/>
         </p:spPr>
@@ -5237,116 +5367,51 @@
       </p:sp>
       <p:sp>
         <p:nvSpPr>
-          <p:cNvPr id="5" name="TextBox 4"/>
-          <p:cNvSpPr txBox="1"/>
-          <p:nvPr/>
-        </p:nvSpPr>
-        <p:spPr>
-          <a:xfrm>
-            <a:off x="822960" y="1856232"/>
-            <a:ext cx="4855464" cy="292608"/>
-          </a:xfrm>
-          <a:prstGeom prst="rect">
-            <a:avLst/>
-          </a:prstGeom>
-          <a:noFill/>
-        </p:spPr>
-        <p:txBody>
-          <a:bodyPr wrap="square" anchor="t" lIns="0" rIns="0" tIns="0" bIns="0">
-            <a:spAutoFit/>
-          </a:bodyPr>
-          <a:lstStyle/>
-          <a:p>
-            <a:pPr algn="l">
-              <a:lnSpc>
-                <a:spcPct val="100000"/>
-              </a:lnSpc>
-              <a:spcAft>
-                <a:spcPts val="0"/>
-              </a:spcAft>
-            </a:pPr>
-            <a:r>
-              <a:rPr sz="1100" b="1" i="0">
-                <a:solidFill>
-                  <a:srgbClr val="58C08D"/>
-                </a:solidFill>
-                <a:latin typeface="Arial"/>
-              </a:rPr>
-              <a:t>1 · THE PEN FIX · DO IT</a:t>
-            </a:r>
-          </a:p>
-        </p:txBody>
-      </p:sp>
-      <p:sp>
-        <p:nvSpPr>
           <p:cNvPr id="6" name="TextBox 5"/>
           <p:cNvSpPr txBox="1"/>
           <p:nvPr/>
         </p:nvSpPr>
         <p:spPr>
           <a:xfrm>
-            <a:off x="822960" y="2148840"/>
-            <a:ext cx="4855464" cy="365760"/>
-          </a:xfrm>
-          <a:prstGeom prst="rect">
-            <a:avLst/>
-          </a:prstGeom>
-          <a:noFill/>
-        </p:spPr>
-        <p:txBody>
-          <a:bodyPr wrap="square" anchor="t" lIns="0" rIns="0" tIns="0" bIns="0">
-            <a:spAutoFit/>
-          </a:bodyPr>
-          <a:lstStyle/>
-          <a:p>
-            <a:pPr algn="l">
-              <a:lnSpc>
-                <a:spcPct val="100000"/>
-              </a:lnSpc>
-              <a:spcAft>
-                <a:spcPts val="0"/>
-              </a:spcAft>
-            </a:pPr>
-            <a:r>
-              <a:rPr sz="1650" b="1" i="0">
+            <a:off x="8293608" y="1737360"/>
+            <a:ext cx="3749039" cy="1097280"/>
+          </a:xfrm>
+          <a:prstGeom prst="rect">
+            <a:avLst/>
+          </a:prstGeom>
+          <a:noFill/>
+        </p:spPr>
+        <p:txBody>
+          <a:bodyPr wrap="square" anchor="t" lIns="0" rIns="0" tIns="0" bIns="0">
+            <a:spAutoFit/>
+          </a:bodyPr>
+          <a:lstStyle/>
+          <a:p>
+            <a:pPr algn="l">
+              <a:lnSpc>
+                <a:spcPct val="107000"/>
+              </a:lnSpc>
+              <a:spcAft>
+                <a:spcPts val="200"/>
+              </a:spcAft>
+            </a:pPr>
+            <a:r>
+              <a:rPr sz="1350" b="1" i="0">
                 <a:solidFill>
                   <a:srgbClr val="EAF0F8"/>
                 </a:solidFill>
                 <a:latin typeface="Arial"/>
               </a:rPr>
-              <a:t>RHP Luke Weaver (NYM)</a:t>
-            </a:r>
-          </a:p>
-        </p:txBody>
-      </p:sp>
-      <p:sp>
-        <p:nvSpPr>
-          <p:cNvPr id="7" name="TextBox 6"/>
-          <p:cNvSpPr txBox="1"/>
-          <p:nvPr/>
-        </p:nvSpPr>
-        <p:spPr>
-          <a:xfrm>
-            <a:off x="822960" y="2560320"/>
-            <a:ext cx="4855464" cy="960120"/>
-          </a:xfrm>
-          <a:prstGeom prst="rect">
-            <a:avLst/>
-          </a:prstGeom>
-          <a:noFill/>
-        </p:spPr>
-        <p:txBody>
-          <a:bodyPr wrap="square" anchor="t" lIns="0" rIns="0" tIns="0" bIns="0">
-            <a:spAutoFit/>
-          </a:bodyPr>
-          <a:lstStyle/>
-          <a:p>
-            <a:pPr algn="l">
-              <a:lnSpc>
-                <a:spcPct val="110000"/>
-              </a:lnSpc>
-              <a:spcAft>
-                <a:spcPts val="400"/>
+              <a:t>The staff works with both</a:t>
+            </a:r>
+          </a:p>
+          <a:p>
+            <a:pPr algn="l">
+              <a:lnSpc>
+                <a:spcPct val="107000"/>
+              </a:lnSpc>
+              <a:spcAft>
+                <a:spcPts val="200"/>
               </a:spcAft>
             </a:pPr>
             <a:r>
@@ -5356,34 +5421,32 @@
                 </a:solidFill>
                 <a:latin typeface="Arial"/>
               </a:rPr>
-              <a:t>For a 45 FV + 40 FV, prospects only, nobody loses a job or an inning. Elite relief year, signed through '27. The highest-probability marginal win on the board.</a:t>
-            </a:r>
-          </a:p>
-        </p:txBody>
-      </p:sp>
-      <p:sp>
-        <p:nvSpPr>
-          <p:cNvPr id="8" name="Rounded Rectangle 7"/>
+              <a:t>3.42 RA9 with Wong, 4.20 with Narváez, the run-prevention core of the season.</a:t>
+            </a:r>
+          </a:p>
+        </p:txBody>
+      </p:sp>
+      <p:sp>
+        <p:nvSpPr>
+          <p:cNvPr id="7" name="Rounded Rectangle 6"/>
           <p:cNvSpPr/>
           <p:nvPr/>
         </p:nvSpPr>
         <p:spPr>
           <a:xfrm>
-            <a:off x="6227064" y="1691640"/>
-            <a:ext cx="5358384" cy="1938528"/>
+            <a:off x="8001000" y="2889504"/>
+            <a:ext cx="146304" cy="146304"/>
           </a:xfrm>
           <a:prstGeom prst="roundRect">
             <a:avLst>
-              <a:gd name="adj" fmla="val 6000"/>
+              <a:gd name="adj" fmla="val 18000"/>
             </a:avLst>
           </a:prstGeom>
           <a:solidFill>
-            <a:srgbClr val="121E33"/>
+            <a:srgbClr val="EAF0F8"/>
           </a:solidFill>
-          <a:ln w="12700">
-            <a:solidFill>
-              <a:srgbClr val="26334E"/>
-            </a:solidFill>
+          <a:ln>
+            <a:noFill/>
           </a:ln>
           <a:effectLst/>
         </p:spPr>
@@ -5411,116 +5474,51 @@
       </p:sp>
       <p:sp>
         <p:nvSpPr>
-          <p:cNvPr id="9" name="TextBox 8"/>
-          <p:cNvSpPr txBox="1"/>
-          <p:nvPr/>
-        </p:nvSpPr>
-        <p:spPr>
-          <a:xfrm>
-            <a:off x="6483096" y="1856232"/>
-            <a:ext cx="4855464" cy="292608"/>
-          </a:xfrm>
-          <a:prstGeom prst="rect">
-            <a:avLst/>
-          </a:prstGeom>
-          <a:noFill/>
-        </p:spPr>
-        <p:txBody>
-          <a:bodyPr wrap="square" anchor="t" lIns="0" rIns="0" tIns="0" bIns="0">
-            <a:spAutoFit/>
-          </a:bodyPr>
-          <a:lstStyle/>
-          <a:p>
-            <a:pPr algn="l">
-              <a:lnSpc>
-                <a:spcPct val="100000"/>
-              </a:lnSpc>
-              <a:spcAft>
-                <a:spcPts val="0"/>
-              </a:spcAft>
-            </a:pPr>
-            <a:r>
-              <a:rPr sz="1100" b="1" i="0">
+          <p:cNvPr id="8" name="TextBox 7"/>
+          <p:cNvSpPr txBox="1"/>
+          <p:nvPr/>
+        </p:nvSpPr>
+        <p:spPr>
+          <a:xfrm>
+            <a:off x="8293608" y="2852928"/>
+            <a:ext cx="3749039" cy="1097280"/>
+          </a:xfrm>
+          <a:prstGeom prst="rect">
+            <a:avLst/>
+          </a:prstGeom>
+          <a:noFill/>
+        </p:spPr>
+        <p:txBody>
+          <a:bodyPr wrap="square" anchor="t" lIns="0" rIns="0" tIns="0" bIns="0">
+            <a:spAutoFit/>
+          </a:bodyPr>
+          <a:lstStyle/>
+          <a:p>
+            <a:pPr algn="l">
+              <a:lnSpc>
+                <a:spcPct val="107000"/>
+              </a:lnSpc>
+              <a:spcAft>
+                <a:spcPts val="200"/>
+              </a:spcAft>
+            </a:pPr>
+            <a:r>
+              <a:rPr sz="1350" b="1" i="0">
                 <a:solidFill>
                   <a:srgbClr val="EAF0F8"/>
                 </a:solidFill>
                 <a:latin typeface="Arial"/>
               </a:rPr>
-              <a:t>2 · THE STABILIZER · IF THE PRICE HOLDS</a:t>
-            </a:r>
-          </a:p>
-        </p:txBody>
-      </p:sp>
-      <p:sp>
-        <p:nvSpPr>
-          <p:cNvPr id="10" name="TextBox 9"/>
-          <p:cNvSpPr txBox="1"/>
-          <p:nvPr/>
-        </p:nvSpPr>
-        <p:spPr>
-          <a:xfrm>
-            <a:off x="6483096" y="2148840"/>
-            <a:ext cx="4855464" cy="365760"/>
-          </a:xfrm>
-          <a:prstGeom prst="rect">
-            <a:avLst/>
-          </a:prstGeom>
-          <a:noFill/>
-        </p:spPr>
-        <p:txBody>
-          <a:bodyPr wrap="square" anchor="t" lIns="0" rIns="0" tIns="0" bIns="0">
-            <a:spAutoFit/>
-          </a:bodyPr>
-          <a:lstStyle/>
-          <a:p>
-            <a:pPr algn="l">
-              <a:lnSpc>
-                <a:spcPct val="100000"/>
-              </a:lnSpc>
-              <a:spcAft>
-                <a:spcPts val="0"/>
-              </a:spcAft>
-            </a:pPr>
-            <a:r>
-              <a:rPr sz="1650" b="1" i="0">
-                <a:solidFill>
-                  <a:srgbClr val="EAF0F8"/>
-                </a:solidFill>
-                <a:latin typeface="Arial"/>
-              </a:rPr>
-              <a:t>2B Luis Arraez (SFG)</a:t>
-            </a:r>
-          </a:p>
-        </p:txBody>
-      </p:sp>
-      <p:sp>
-        <p:nvSpPr>
-          <p:cNvPr id="11" name="TextBox 10"/>
-          <p:cNvSpPr txBox="1"/>
-          <p:nvPr/>
-        </p:nvSpPr>
-        <p:spPr>
-          <a:xfrm>
-            <a:off x="6483096" y="2560320"/>
-            <a:ext cx="4855464" cy="960120"/>
-          </a:xfrm>
-          <a:prstGeom prst="rect">
-            <a:avLst/>
-          </a:prstGeom>
-          <a:noFill/>
-        </p:spPr>
-        <p:txBody>
-          <a:bodyPr wrap="square" anchor="t" lIns="0" rIns="0" tIns="0" bIns="0">
-            <a:spAutoFit/>
-          </a:bodyPr>
-          <a:lstStyle/>
-          <a:p>
-            <a:pPr algn="l">
-              <a:lnSpc>
-                <a:spcPct val="110000"/>
-              </a:lnSpc>
-              <a:spcAft>
-                <a:spcPts val="400"/>
+              <a:t>Every arm has a guy. Don't mess with that</a:t>
+            </a:r>
+          </a:p>
+          <a:p>
+            <a:pPr algn="l">
+              <a:lnSpc>
+                <a:spcPct val="107000"/>
+              </a:lnSpc>
+              <a:spcAft>
+                <a:spcPts val="200"/>
               </a:spcAft>
             </a:pPr>
             <a:r>
@@ -5530,34 +5528,32 @@
                 </a:solidFill>
                 <a:latin typeface="Arial"/>
               </a:rPr>
-              <a:t>For Brayan Bello, the first deal that touches the active roster. Zero prospect cost; Arraez fills a patchwork platoon spot, not a hot regular's.</a:t>
-            </a:r>
-          </a:p>
-        </p:txBody>
-      </p:sp>
-      <p:sp>
-        <p:nvSpPr>
-          <p:cNvPr id="12" name="Rounded Rectangle 11"/>
+              <a:t>Gray / Wong. Bennett / Narvaez. Settled, deliberate assignments across the rotation.</a:t>
+            </a:r>
+          </a:p>
+        </p:txBody>
+      </p:sp>
+      <p:sp>
+        <p:nvSpPr>
+          <p:cNvPr id="9" name="Rounded Rectangle 8"/>
           <p:cNvSpPr/>
           <p:nvPr/>
         </p:nvSpPr>
         <p:spPr>
           <a:xfrm>
-            <a:off x="566928" y="3886200"/>
-            <a:ext cx="5358384" cy="1938528"/>
+            <a:off x="8001000" y="4005072"/>
+            <a:ext cx="146304" cy="146304"/>
           </a:xfrm>
           <a:prstGeom prst="roundRect">
             <a:avLst>
-              <a:gd name="adj" fmla="val 6000"/>
+              <a:gd name="adj" fmla="val 18000"/>
             </a:avLst>
           </a:prstGeom>
           <a:solidFill>
-            <a:srgbClr val="121E33"/>
+            <a:srgbClr val="58C08D"/>
           </a:solidFill>
-          <a:ln w="12700">
-            <a:solidFill>
-              <a:srgbClr val="26334E"/>
-            </a:solidFill>
+          <a:ln>
+            <a:noFill/>
           </a:ln>
           <a:effectLst/>
         </p:spPr>
@@ -5585,116 +5581,51 @@
       </p:sp>
       <p:sp>
         <p:nvSpPr>
-          <p:cNvPr id="13" name="TextBox 12"/>
-          <p:cNvSpPr txBox="1"/>
-          <p:nvPr/>
-        </p:nvSpPr>
-        <p:spPr>
-          <a:xfrm>
-            <a:off x="822960" y="4050791"/>
-            <a:ext cx="4855464" cy="292608"/>
-          </a:xfrm>
-          <a:prstGeom prst="rect">
-            <a:avLst/>
-          </a:prstGeom>
-          <a:noFill/>
-        </p:spPr>
-        <p:txBody>
-          <a:bodyPr wrap="square" anchor="t" lIns="0" rIns="0" tIns="0" bIns="0">
-            <a:spAutoFit/>
-          </a:bodyPr>
-          <a:lstStyle/>
-          <a:p>
-            <a:pPr algn="l">
-              <a:lnSpc>
-                <a:spcPct val="100000"/>
-              </a:lnSpc>
-              <a:spcAft>
-                <a:spcPts val="0"/>
-              </a:spcAft>
-            </a:pPr>
-            <a:r>
-              <a:rPr sz="1100" b="1" i="0">
-                <a:solidFill>
-                  <a:srgbClr val="E8615A"/>
-                </a:solidFill>
-                <a:latin typeface="Arial"/>
-              </a:rPr>
-              <a:t>3 · THE BIG SWING · PROBABLY WAIT</a:t>
-            </a:r>
-          </a:p>
-        </p:txBody>
-      </p:sp>
-      <p:sp>
-        <p:nvSpPr>
-          <p:cNvPr id="14" name="TextBox 13"/>
-          <p:cNvSpPr txBox="1"/>
-          <p:nvPr/>
-        </p:nvSpPr>
-        <p:spPr>
-          <a:xfrm>
-            <a:off x="822960" y="4343400"/>
-            <a:ext cx="4855464" cy="365760"/>
-          </a:xfrm>
-          <a:prstGeom prst="rect">
-            <a:avLst/>
-          </a:prstGeom>
-          <a:noFill/>
-        </p:spPr>
-        <p:txBody>
-          <a:bodyPr wrap="square" anchor="t" lIns="0" rIns="0" tIns="0" bIns="0">
-            <a:spAutoFit/>
-          </a:bodyPr>
-          <a:lstStyle/>
-          <a:p>
-            <a:pPr algn="l">
-              <a:lnSpc>
-                <a:spcPct val="100000"/>
-              </a:lnSpc>
-              <a:spcAft>
-                <a:spcPts val="0"/>
-              </a:spcAft>
-            </a:pPr>
-            <a:r>
-              <a:rPr sz="1650" b="1" i="0">
+          <p:cNvPr id="10" name="TextBox 9"/>
+          <p:cNvSpPr txBox="1"/>
+          <p:nvPr/>
+        </p:nvSpPr>
+        <p:spPr>
+          <a:xfrm>
+            <a:off x="8293608" y="3968496"/>
+            <a:ext cx="3749039" cy="1097280"/>
+          </a:xfrm>
+          <a:prstGeom prst="rect">
+            <a:avLst/>
+          </a:prstGeom>
+          <a:noFill/>
+        </p:spPr>
+        <p:txBody>
+          <a:bodyPr wrap="square" anchor="t" lIns="0" rIns="0" tIns="0" bIns="0">
+            <a:spAutoFit/>
+          </a:bodyPr>
+          <a:lstStyle/>
+          <a:p>
+            <a:pPr algn="l">
+              <a:lnSpc>
+                <a:spcPct val="107000"/>
+              </a:lnSpc>
+              <a:spcAft>
+                <a:spcPts val="200"/>
+              </a:spcAft>
+            </a:pPr>
+            <a:r>
+              <a:rPr sz="1350" b="1" i="0">
                 <a:solidFill>
                   <a:srgbClr val="EAF0F8"/>
                 </a:solidFill>
                 <a:latin typeface="Arial"/>
               </a:rPr>
-              <a:t>SS Zach Neto (LAA)</a:t>
-            </a:r>
-          </a:p>
-        </p:txBody>
-      </p:sp>
-      <p:sp>
-        <p:nvSpPr>
-          <p:cNvPr id="15" name="TextBox 14"/>
-          <p:cNvSpPr txBox="1"/>
-          <p:nvPr/>
-        </p:nvSpPr>
-        <p:spPr>
-          <a:xfrm>
-            <a:off x="822960" y="4754880"/>
-            <a:ext cx="4855464" cy="960120"/>
-          </a:xfrm>
-          <a:prstGeom prst="rect">
-            <a:avLst/>
-          </a:prstGeom>
-          <a:noFill/>
-        </p:spPr>
-        <p:txBody>
-          <a:bodyPr wrap="square" anchor="t" lIns="0" rIns="0" tIns="0" bIns="0">
-            <a:spAutoFit/>
-          </a:bodyPr>
-          <a:lstStyle/>
-          <a:p>
-            <a:pPr algn="l">
-              <a:lnSpc>
-                <a:spcPct val="110000"/>
-              </a:lnSpc>
-              <a:spcAft>
-                <a:spcPts val="400"/>
+              <a:t>So: no catcher trade</a:t>
+            </a:r>
+          </a:p>
+          <a:p>
+            <a:pPr algn="l">
+              <a:lnSpc>
+                <a:spcPct val="107000"/>
+              </a:lnSpc>
+              <a:spcAft>
+                <a:spcPts val="200"/>
               </a:spcAft>
             </a:pPr>
             <a:r>
@@ -5704,239 +5635,14 @@
                 </a:solidFill>
                 <a:latin typeface="Arial"/>
               </a:rPr>
-              <a:t>For Tolle + Bennett + a 45 FV: two arms out of a winning rotation midseason. Right for the franchise window, and still there in the winter. Controlled through 2029.</a:t>
-            </a:r>
-          </a:p>
-        </p:txBody>
-      </p:sp>
-      <p:sp>
-        <p:nvSpPr>
-          <p:cNvPr id="16" name="Rounded Rectangle 15"/>
-          <p:cNvSpPr/>
-          <p:nvPr/>
-        </p:nvSpPr>
-        <p:spPr>
-          <a:xfrm>
-            <a:off x="6227064" y="3886200"/>
-            <a:ext cx="5358384" cy="1938528"/>
-          </a:xfrm>
-          <a:prstGeom prst="roundRect">
-            <a:avLst>
-              <a:gd name="adj" fmla="val 6000"/>
-            </a:avLst>
-          </a:prstGeom>
-          <a:solidFill>
-            <a:srgbClr val="121E33"/>
-          </a:solidFill>
-          <a:ln w="12700">
-            <a:solidFill>
-              <a:srgbClr val="26334E"/>
-            </a:solidFill>
-          </a:ln>
-          <a:effectLst/>
-        </p:spPr>
-        <p:style>
-          <a:lnRef idx="1">
-            <a:schemeClr val="accent1"/>
-          </a:lnRef>
-          <a:fillRef idx="3">
-            <a:schemeClr val="accent1"/>
-          </a:fillRef>
-          <a:effectRef idx="2">
-            <a:schemeClr val="accent1"/>
-          </a:effectRef>
-          <a:fontRef idx="minor">
-            <a:schemeClr val="lt1"/>
-          </a:fontRef>
-        </p:style>
-        <p:txBody>
-          <a:bodyPr rtlCol="0" anchor="ctr"/>
-          <a:lstStyle/>
-          <a:p>
-            <a:pPr algn="ctr"/>
-          </a:p>
-        </p:txBody>
-      </p:sp>
-      <p:sp>
-        <p:nvSpPr>
-          <p:cNvPr id="17" name="TextBox 16"/>
-          <p:cNvSpPr txBox="1"/>
-          <p:nvPr/>
-        </p:nvSpPr>
-        <p:spPr>
-          <a:xfrm>
-            <a:off x="6483096" y="4050791"/>
-            <a:ext cx="4855464" cy="292608"/>
-          </a:xfrm>
-          <a:prstGeom prst="rect">
-            <a:avLst/>
-          </a:prstGeom>
-          <a:noFill/>
-        </p:spPr>
-        <p:txBody>
-          <a:bodyPr wrap="square" anchor="t" lIns="0" rIns="0" tIns="0" bIns="0">
-            <a:spAutoFit/>
-          </a:bodyPr>
-          <a:lstStyle/>
-          <a:p>
-            <a:pPr algn="l">
-              <a:lnSpc>
-                <a:spcPct val="100000"/>
-              </a:lnSpc>
-              <a:spcAft>
-                <a:spcPts val="0"/>
-              </a:spcAft>
-            </a:pPr>
-            <a:r>
-              <a:rPr sz="1100" b="1" i="0">
-                <a:solidFill>
-                  <a:srgbClr val="E3B14E"/>
-                </a:solidFill>
-                <a:latin typeface="Arial"/>
-              </a:rPr>
-              <a:t>✗ · THE WALK-AWAY</a:t>
-            </a:r>
-          </a:p>
-        </p:txBody>
-      </p:sp>
-      <p:sp>
-        <p:nvSpPr>
-          <p:cNvPr id="18" name="TextBox 17"/>
-          <p:cNvSpPr txBox="1"/>
-          <p:nvPr/>
-        </p:nvSpPr>
-        <p:spPr>
-          <a:xfrm>
-            <a:off x="6483096" y="4343400"/>
-            <a:ext cx="4855464" cy="365760"/>
-          </a:xfrm>
-          <a:prstGeom prst="rect">
-            <a:avLst/>
-          </a:prstGeom>
-          <a:noFill/>
-        </p:spPr>
-        <p:txBody>
-          <a:bodyPr wrap="square" anchor="t" lIns="0" rIns="0" tIns="0" bIns="0">
-            <a:spAutoFit/>
-          </a:bodyPr>
-          <a:lstStyle/>
-          <a:p>
-            <a:pPr algn="l">
-              <a:lnSpc>
-                <a:spcPct val="100000"/>
-              </a:lnSpc>
-              <a:spcAft>
-                <a:spcPts val="0"/>
-              </a:spcAft>
-            </a:pPr>
-            <a:r>
-              <a:rPr sz="1650" b="1" i="0">
-                <a:solidFill>
-                  <a:srgbClr val="EAF0F8"/>
-                </a:solidFill>
-                <a:latin typeface="Arial"/>
-              </a:rPr>
-              <a:t>C Shea Langeliers (ATH)</a:t>
-            </a:r>
-          </a:p>
-        </p:txBody>
-      </p:sp>
-      <p:sp>
-        <p:nvSpPr>
-          <p:cNvPr id="19" name="TextBox 18"/>
-          <p:cNvSpPr txBox="1"/>
-          <p:nvPr/>
-        </p:nvSpPr>
-        <p:spPr>
-          <a:xfrm>
-            <a:off x="6483096" y="4754880"/>
-            <a:ext cx="4855464" cy="960120"/>
-          </a:xfrm>
-          <a:prstGeom prst="rect">
-            <a:avLst/>
-          </a:prstGeom>
-          <a:noFill/>
-        </p:spPr>
-        <p:txBody>
-          <a:bodyPr wrap="square" anchor="t" lIns="0" rIns="0" tIns="0" bIns="0">
-            <a:spAutoFit/>
-          </a:bodyPr>
-          <a:lstStyle/>
-          <a:p>
-            <a:pPr algn="l">
-              <a:lnSpc>
-                <a:spcPct val="110000"/>
-              </a:lnSpc>
-              <a:spcAft>
-                <a:spcPts val="400"/>
-              </a:spcAft>
-            </a:pPr>
-            <a:r>
-              <a:rPr sz="1160" b="0" i="0">
-                <a:solidFill>
-                  <a:srgbClr val="93A0B6"/>
-                </a:solidFill>
-                <a:latin typeface="Arial"/>
-              </a:rPr>
-              <a:t>The value math worked; the battery map is the veto. No August bat is worth resetting eight pitcher-catcher pairings on a staff carrying the season.</a:t>
-            </a:r>
-          </a:p>
-        </p:txBody>
-      </p:sp>
-      <p:sp>
-        <p:nvSpPr>
-          <p:cNvPr id="20" name="TextBox 19"/>
-          <p:cNvSpPr txBox="1"/>
-          <p:nvPr/>
-        </p:nvSpPr>
-        <p:spPr>
-          <a:xfrm>
-            <a:off x="566928" y="5897880"/>
-            <a:ext cx="11064240" cy="457200"/>
-          </a:xfrm>
-          <a:prstGeom prst="rect">
-            <a:avLst/>
-          </a:prstGeom>
-          <a:noFill/>
-        </p:spPr>
-        <p:txBody>
-          <a:bodyPr wrap="square" anchor="t" lIns="0" rIns="0" tIns="0" bIns="0">
-            <a:spAutoFit/>
-          </a:bodyPr>
-          <a:lstStyle/>
-          <a:p>
-            <a:pPr algn="l">
-              <a:lnSpc>
-                <a:spcPct val="100000"/>
-              </a:lnSpc>
-              <a:spcAft>
-                <a:spcPts val="0"/>
-              </a:spcAft>
-            </a:pPr>
-            <a:r>
-              <a:rPr sz="1250" b="1" i="0">
-                <a:solidFill>
-                  <a:srgbClr val="D9E1EF"/>
-                </a:solidFill>
-                <a:latin typeface="Arial"/>
-              </a:rPr>
-              <a:t>A menu, not a plan, Boston can afford about two. </a:t>
-            </a:r>
-            <a:r>
-              <a:rPr sz="1250" b="0" i="0">
-                <a:solidFill>
-                  <a:srgbClr val="93A0B6"/>
-                </a:solidFill>
-                <a:latin typeface="Arial"/>
-              </a:rPr>
-              <a:t>Full value math and verified contracts in the mock-trades memo. Hypotheticals, not reporting.</a:t>
-            </a:r>
-          </a:p>
-        </p:txBody>
-      </p:sp>
-      <p:sp>
-        <p:nvSpPr>
-          <p:cNvPr id="21" name="TextBox 20"/>
+              <a:t>The adjusted model (pitcher/opponent/park controls) finds no significant catcher effect: -31 pts, 95% CI [-84, +21]. Nothing here for a trade to fix.</a:t>
+            </a:r>
+          </a:p>
+        </p:txBody>
+      </p:sp>
+      <p:sp>
+        <p:nvSpPr>
+          <p:cNvPr id="11" name="TextBox 10"/>
           <p:cNvSpPr txBox="1"/>
           <p:nvPr/>
         </p:nvSpPr>
@@ -6048,7 +5754,7 @@
                 </a:solidFill>
                 <a:latin typeface="Courier New"/>
               </a:rPr>
-              <a:t>// THE REAL TRADE</a:t>
+              <a:t>// THE MENU</a:t>
             </a:r>
           </a:p>
         </p:txBody>
@@ -6090,56 +5796,34 @@
                 </a:solidFill>
                 <a:latin typeface="Arial"/>
               </a:rPr>
-              <a:t>They made one: Mead for Early</a:t>
-            </a:r>
-          </a:p>
-        </p:txBody>
-      </p:sp>
-      <p:pic>
-        <p:nvPicPr>
-          <p:cNvPr id="4" name="Picture 3" descr="19_mead_fenway.png"/>
-          <p:cNvPicPr>
-            <a:picLocks noChangeAspect="1"/>
-          </p:cNvPicPr>
-          <p:nvPr/>
-        </p:nvPicPr>
-        <p:blipFill>
-          <a:blip r:embed="rId2"/>
-          <a:stretch>
-            <a:fillRect/>
-          </a:stretch>
-        </p:blipFill>
-        <p:spPr>
-          <a:xfrm>
-            <a:off x="822640" y="1481328"/>
-            <a:ext cx="6401438" cy="4572000"/>
-          </a:xfrm>
-          <a:prstGeom prst="rect">
-            <a:avLst/>
-          </a:prstGeom>
-        </p:spPr>
-      </p:pic>
-      <p:sp>
-        <p:nvSpPr>
-          <p:cNvPr id="5" name="Rounded Rectangle 4"/>
+              <a:t>Three trades that fit, and one walk-away</a:t>
+            </a:r>
+          </a:p>
+        </p:txBody>
+      </p:sp>
+      <p:sp>
+        <p:nvSpPr>
+          <p:cNvPr id="4" name="Rounded Rectangle 3"/>
           <p:cNvSpPr/>
           <p:nvPr/>
         </p:nvSpPr>
         <p:spPr>
           <a:xfrm>
-            <a:off x="8001000" y="1773936"/>
-            <a:ext cx="146304" cy="146304"/>
+            <a:off x="566928" y="1691640"/>
+            <a:ext cx="5358384" cy="1938528"/>
           </a:xfrm>
           <a:prstGeom prst="roundRect">
             <a:avLst>
-              <a:gd name="adj" fmla="val 18000"/>
+              <a:gd name="adj" fmla="val 6000"/>
             </a:avLst>
           </a:prstGeom>
           <a:solidFill>
-            <a:srgbClr val="E8615A"/>
+            <a:srgbClr val="121E33"/>
           </a:solidFill>
-          <a:ln>
-            <a:noFill/>
+          <a:ln w="12700">
+            <a:solidFill>
+              <a:srgbClr val="26334E"/>
+            </a:solidFill>
           </a:ln>
           <a:effectLst/>
         </p:spPr>
@@ -6167,51 +5851,116 @@
       </p:sp>
       <p:sp>
         <p:nvSpPr>
+          <p:cNvPr id="5" name="TextBox 4"/>
+          <p:cNvSpPr txBox="1"/>
+          <p:nvPr/>
+        </p:nvSpPr>
+        <p:spPr>
+          <a:xfrm>
+            <a:off x="822960" y="1856232"/>
+            <a:ext cx="4855464" cy="292608"/>
+          </a:xfrm>
+          <a:prstGeom prst="rect">
+            <a:avLst/>
+          </a:prstGeom>
+          <a:noFill/>
+        </p:spPr>
+        <p:txBody>
+          <a:bodyPr wrap="square" anchor="t" lIns="0" rIns="0" tIns="0" bIns="0">
+            <a:spAutoFit/>
+          </a:bodyPr>
+          <a:lstStyle/>
+          <a:p>
+            <a:pPr algn="l">
+              <a:lnSpc>
+                <a:spcPct val="100000"/>
+              </a:lnSpc>
+              <a:spcAft>
+                <a:spcPts val="0"/>
+              </a:spcAft>
+            </a:pPr>
+            <a:r>
+              <a:rPr sz="1100" b="1" i="0">
+                <a:solidFill>
+                  <a:srgbClr val="58C08D"/>
+                </a:solidFill>
+                <a:latin typeface="Arial"/>
+              </a:rPr>
+              <a:t>1 · THE PEN FIX · DO IT</a:t>
+            </a:r>
+          </a:p>
+        </p:txBody>
+      </p:sp>
+      <p:sp>
+        <p:nvSpPr>
           <p:cNvPr id="6" name="TextBox 5"/>
           <p:cNvSpPr txBox="1"/>
           <p:nvPr/>
         </p:nvSpPr>
         <p:spPr>
           <a:xfrm>
-            <a:off x="8293608" y="1737360"/>
-            <a:ext cx="3749039" cy="1097280"/>
-          </a:xfrm>
-          <a:prstGeom prst="rect">
-            <a:avLst/>
-          </a:prstGeom>
-          <a:noFill/>
-        </p:spPr>
-        <p:txBody>
-          <a:bodyPr wrap="square" anchor="t" lIns="0" rIns="0" tIns="0" bIns="0">
-            <a:spAutoFit/>
-          </a:bodyPr>
-          <a:lstStyle/>
-          <a:p>
-            <a:pPr algn="l">
-              <a:lnSpc>
-                <a:spcPct val="107000"/>
-              </a:lnSpc>
-              <a:spcAft>
-                <a:spcPts val="200"/>
-              </a:spcAft>
-            </a:pPr>
-            <a:r>
-              <a:rPr sz="1350" b="1" i="0">
+            <a:off x="822960" y="2148840"/>
+            <a:ext cx="4855464" cy="365760"/>
+          </a:xfrm>
+          <a:prstGeom prst="rect">
+            <a:avLst/>
+          </a:prstGeom>
+          <a:noFill/>
+        </p:spPr>
+        <p:txBody>
+          <a:bodyPr wrap="square" anchor="t" lIns="0" rIns="0" tIns="0" bIns="0">
+            <a:spAutoFit/>
+          </a:bodyPr>
+          <a:lstStyle/>
+          <a:p>
+            <a:pPr algn="l">
+              <a:lnSpc>
+                <a:spcPct val="100000"/>
+              </a:lnSpc>
+              <a:spcAft>
+                <a:spcPts val="0"/>
+              </a:spcAft>
+            </a:pPr>
+            <a:r>
+              <a:rPr sz="1650" b="1" i="0">
                 <a:solidFill>
                   <a:srgbClr val="EAF0F8"/>
                 </a:solidFill>
                 <a:latin typeface="Arial"/>
               </a:rPr>
-              <a:t>The deal</a:t>
-            </a:r>
-          </a:p>
-          <a:p>
-            <a:pPr algn="l">
-              <a:lnSpc>
-                <a:spcPct val="107000"/>
-              </a:lnSpc>
-              <a:spcAft>
-                <a:spcPts val="200"/>
+              <a:t>RHP Luke Weaver (NYM)</a:t>
+            </a:r>
+          </a:p>
+        </p:txBody>
+      </p:sp>
+      <p:sp>
+        <p:nvSpPr>
+          <p:cNvPr id="7" name="TextBox 6"/>
+          <p:cNvSpPr txBox="1"/>
+          <p:nvPr/>
+        </p:nvSpPr>
+        <p:spPr>
+          <a:xfrm>
+            <a:off x="822960" y="2560320"/>
+            <a:ext cx="4855464" cy="960120"/>
+          </a:xfrm>
+          <a:prstGeom prst="rect">
+            <a:avLst/>
+          </a:prstGeom>
+          <a:noFill/>
+        </p:spPr>
+        <p:txBody>
+          <a:bodyPr wrap="square" anchor="t" lIns="0" rIns="0" tIns="0" bIns="0">
+            <a:spAutoFit/>
+          </a:bodyPr>
+          <a:lstStyle/>
+          <a:p>
+            <a:pPr algn="l">
+              <a:lnSpc>
+                <a:spcPct val="110000"/>
+              </a:lnSpc>
+              <a:spcAft>
+                <a:spcPts val="400"/>
               </a:spcAft>
             </a:pPr>
             <a:r>
@@ -6221,32 +5970,34 @@
                 </a:solidFill>
                 <a:latin typeface="Arial"/>
               </a:rPr>
-              <a:t>Curtis Mead (25) from Washington for Connelly Early: one surplus arm for a 134 wRC+ infield bat with years of club control.</a:t>
-            </a:r>
-          </a:p>
-        </p:txBody>
-      </p:sp>
-      <p:sp>
-        <p:nvSpPr>
-          <p:cNvPr id="7" name="Rounded Rectangle 6"/>
+              <a:t>For a 45 FV + 40 FV, prospects only, nobody loses a job or an inning. Elite relief year, signed through '27. The highest-probability marginal win on the board.</a:t>
+            </a:r>
+          </a:p>
+        </p:txBody>
+      </p:sp>
+      <p:sp>
+        <p:nvSpPr>
+          <p:cNvPr id="8" name="Rounded Rectangle 7"/>
           <p:cNvSpPr/>
           <p:nvPr/>
         </p:nvSpPr>
         <p:spPr>
           <a:xfrm>
-            <a:off x="8001000" y="2889504"/>
-            <a:ext cx="146304" cy="146304"/>
+            <a:off x="6227064" y="1691640"/>
+            <a:ext cx="5358384" cy="1938528"/>
           </a:xfrm>
           <a:prstGeom prst="roundRect">
             <a:avLst>
-              <a:gd name="adj" fmla="val 18000"/>
+              <a:gd name="adj" fmla="val 6000"/>
             </a:avLst>
           </a:prstGeom>
           <a:solidFill>
-            <a:srgbClr val="EAF0F8"/>
+            <a:srgbClr val="121E33"/>
           </a:solidFill>
-          <a:ln>
-            <a:noFill/>
+          <a:ln w="12700">
+            <a:solidFill>
+              <a:srgbClr val="26334E"/>
+            </a:solidFill>
           </a:ln>
           <a:effectLst/>
         </p:spPr>
@@ -6274,51 +6025,116 @@
       </p:sp>
       <p:sp>
         <p:nvSpPr>
-          <p:cNvPr id="8" name="TextBox 7"/>
-          <p:cNvSpPr txBox="1"/>
-          <p:nvPr/>
-        </p:nvSpPr>
-        <p:spPr>
-          <a:xfrm>
-            <a:off x="8293608" y="2852928"/>
-            <a:ext cx="3749039" cy="1097280"/>
-          </a:xfrm>
-          <a:prstGeom prst="rect">
-            <a:avLst/>
-          </a:prstGeom>
-          <a:noFill/>
-        </p:spPr>
-        <p:txBody>
-          <a:bodyPr wrap="square" anchor="t" lIns="0" rIns="0" tIns="0" bIns="0">
-            <a:spAutoFit/>
-          </a:bodyPr>
-          <a:lstStyle/>
-          <a:p>
-            <a:pPr algn="l">
-              <a:lnSpc>
-                <a:spcPct val="107000"/>
-              </a:lnSpc>
-              <a:spcAft>
-                <a:spcPts val="200"/>
-              </a:spcAft>
-            </a:pPr>
-            <a:r>
-              <a:rPr sz="1350" b="1" i="0">
+          <p:cNvPr id="9" name="TextBox 8"/>
+          <p:cNvSpPr txBox="1"/>
+          <p:nvPr/>
+        </p:nvSpPr>
+        <p:spPr>
+          <a:xfrm>
+            <a:off x="6483096" y="1856232"/>
+            <a:ext cx="4855464" cy="292608"/>
+          </a:xfrm>
+          <a:prstGeom prst="rect">
+            <a:avLst/>
+          </a:prstGeom>
+          <a:noFill/>
+        </p:spPr>
+        <p:txBody>
+          <a:bodyPr wrap="square" anchor="t" lIns="0" rIns="0" tIns="0" bIns="0">
+            <a:spAutoFit/>
+          </a:bodyPr>
+          <a:lstStyle/>
+          <a:p>
+            <a:pPr algn="l">
+              <a:lnSpc>
+                <a:spcPct val="100000"/>
+              </a:lnSpc>
+              <a:spcAft>
+                <a:spcPts val="0"/>
+              </a:spcAft>
+            </a:pPr>
+            <a:r>
+              <a:rPr sz="1100" b="1" i="0">
                 <a:solidFill>
                   <a:srgbClr val="EAF0F8"/>
                 </a:solidFill>
                 <a:latin typeface="Arial"/>
               </a:rPr>
-              <a:t>The Fenway fit</a:t>
-            </a:r>
-          </a:p>
-          <a:p>
-            <a:pPr algn="l">
-              <a:lnSpc>
-                <a:spcPct val="107000"/>
-              </a:lnSpc>
-              <a:spcAft>
-                <a:spcPts val="200"/>
+              <a:t>2 · THE STABILIZER · IF THE PRICE HOLDS</a:t>
+            </a:r>
+          </a:p>
+        </p:txBody>
+      </p:sp>
+      <p:sp>
+        <p:nvSpPr>
+          <p:cNvPr id="10" name="TextBox 9"/>
+          <p:cNvSpPr txBox="1"/>
+          <p:nvPr/>
+        </p:nvSpPr>
+        <p:spPr>
+          <a:xfrm>
+            <a:off x="6483096" y="2148840"/>
+            <a:ext cx="4855464" cy="365760"/>
+          </a:xfrm>
+          <a:prstGeom prst="rect">
+            <a:avLst/>
+          </a:prstGeom>
+          <a:noFill/>
+        </p:spPr>
+        <p:txBody>
+          <a:bodyPr wrap="square" anchor="t" lIns="0" rIns="0" tIns="0" bIns="0">
+            <a:spAutoFit/>
+          </a:bodyPr>
+          <a:lstStyle/>
+          <a:p>
+            <a:pPr algn="l">
+              <a:lnSpc>
+                <a:spcPct val="100000"/>
+              </a:lnSpc>
+              <a:spcAft>
+                <a:spcPts val="0"/>
+              </a:spcAft>
+            </a:pPr>
+            <a:r>
+              <a:rPr sz="1650" b="1" i="0">
+                <a:solidFill>
+                  <a:srgbClr val="EAF0F8"/>
+                </a:solidFill>
+                <a:latin typeface="Arial"/>
+              </a:rPr>
+              <a:t>2B Luis Arraez (SFG)</a:t>
+            </a:r>
+          </a:p>
+        </p:txBody>
+      </p:sp>
+      <p:sp>
+        <p:nvSpPr>
+          <p:cNvPr id="11" name="TextBox 10"/>
+          <p:cNvSpPr txBox="1"/>
+          <p:nvPr/>
+        </p:nvSpPr>
+        <p:spPr>
+          <a:xfrm>
+            <a:off x="6483096" y="2560320"/>
+            <a:ext cx="4855464" cy="960120"/>
+          </a:xfrm>
+          <a:prstGeom prst="rect">
+            <a:avLst/>
+          </a:prstGeom>
+          <a:noFill/>
+        </p:spPr>
+        <p:txBody>
+          <a:bodyPr wrap="square" anchor="t" lIns="0" rIns="0" tIns="0" bIns="0">
+            <a:spAutoFit/>
+          </a:bodyPr>
+          <a:lstStyle/>
+          <a:p>
+            <a:pPr algn="l">
+              <a:lnSpc>
+                <a:spcPct val="110000"/>
+              </a:lnSpc>
+              <a:spcAft>
+                <a:spcPts val="400"/>
               </a:spcAft>
             </a:pPr>
             <a:r>
@@ -6328,32 +6144,34 @@
                 </a:solidFill>
                 <a:latin typeface="Arial"/>
               </a:rPr>
-              <a:t>23% pull-air rate, 82nd percentile, with a .846 wOBA on pulled air balls. RHB pull-air plays to the Monster.</a:t>
-            </a:r>
-          </a:p>
-        </p:txBody>
-      </p:sp>
-      <p:sp>
-        <p:nvSpPr>
-          <p:cNvPr id="9" name="Rounded Rectangle 8"/>
+              <a:t>For Brayan Bello, the first deal that touches the active roster. Zero prospect cost; Arraez fills a patchwork platoon spot, not a hot regular's.</a:t>
+            </a:r>
+          </a:p>
+        </p:txBody>
+      </p:sp>
+      <p:sp>
+        <p:nvSpPr>
+          <p:cNvPr id="12" name="Rounded Rectangle 11"/>
           <p:cNvSpPr/>
           <p:nvPr/>
         </p:nvSpPr>
         <p:spPr>
           <a:xfrm>
-            <a:off x="8001000" y="4005072"/>
-            <a:ext cx="146304" cy="146304"/>
+            <a:off x="566928" y="3886200"/>
+            <a:ext cx="5358384" cy="1938528"/>
           </a:xfrm>
           <a:prstGeom prst="roundRect">
             <a:avLst>
-              <a:gd name="adj" fmla="val 18000"/>
+              <a:gd name="adj" fmla="val 6000"/>
             </a:avLst>
           </a:prstGeom>
           <a:solidFill>
-            <a:srgbClr val="E3B14E"/>
+            <a:srgbClr val="121E33"/>
           </a:solidFill>
-          <a:ln>
-            <a:noFill/>
+          <a:ln w="12700">
+            <a:solidFill>
+              <a:srgbClr val="26334E"/>
+            </a:solidFill>
           </a:ln>
           <a:effectLst/>
         </p:spPr>
@@ -6381,51 +6199,116 @@
       </p:sp>
       <p:sp>
         <p:nvSpPr>
-          <p:cNvPr id="10" name="TextBox 9"/>
-          <p:cNvSpPr txBox="1"/>
-          <p:nvPr/>
-        </p:nvSpPr>
-        <p:spPr>
-          <a:xfrm>
-            <a:off x="8293608" y="3968496"/>
-            <a:ext cx="3749039" cy="1097280"/>
-          </a:xfrm>
-          <a:prstGeom prst="rect">
-            <a:avLst/>
-          </a:prstGeom>
-          <a:noFill/>
-        </p:spPr>
-        <p:txBody>
-          <a:bodyPr wrap="square" anchor="t" lIns="0" rIns="0" tIns="0" bIns="0">
-            <a:spAutoFit/>
-          </a:bodyPr>
-          <a:lstStyle/>
-          <a:p>
-            <a:pPr algn="l">
-              <a:lnSpc>
-                <a:spcPct val="107000"/>
-              </a:lnSpc>
-              <a:spcAft>
-                <a:spcPts val="200"/>
-              </a:spcAft>
-            </a:pPr>
-            <a:r>
-              <a:rPr sz="1350" b="1" i="0">
+          <p:cNvPr id="13" name="TextBox 12"/>
+          <p:cNvSpPr txBox="1"/>
+          <p:nvPr/>
+        </p:nvSpPr>
+        <p:spPr>
+          <a:xfrm>
+            <a:off x="822960" y="4050791"/>
+            <a:ext cx="4855464" cy="292608"/>
+          </a:xfrm>
+          <a:prstGeom prst="rect">
+            <a:avLst/>
+          </a:prstGeom>
+          <a:noFill/>
+        </p:spPr>
+        <p:txBody>
+          <a:bodyPr wrap="square" anchor="t" lIns="0" rIns="0" tIns="0" bIns="0">
+            <a:spAutoFit/>
+          </a:bodyPr>
+          <a:lstStyle/>
+          <a:p>
+            <a:pPr algn="l">
+              <a:lnSpc>
+                <a:spcPct val="100000"/>
+              </a:lnSpc>
+              <a:spcAft>
+                <a:spcPts val="0"/>
+              </a:spcAft>
+            </a:pPr>
+            <a:r>
+              <a:rPr sz="1100" b="1" i="0">
+                <a:solidFill>
+                  <a:srgbClr val="E8615A"/>
+                </a:solidFill>
+                <a:latin typeface="Arial"/>
+              </a:rPr>
+              <a:t>3 · THE BIG SWING · PROBABLY WAIT</a:t>
+            </a:r>
+          </a:p>
+        </p:txBody>
+      </p:sp>
+      <p:sp>
+        <p:nvSpPr>
+          <p:cNvPr id="14" name="TextBox 13"/>
+          <p:cNvSpPr txBox="1"/>
+          <p:nvPr/>
+        </p:nvSpPr>
+        <p:spPr>
+          <a:xfrm>
+            <a:off x="822960" y="4343400"/>
+            <a:ext cx="4855464" cy="365760"/>
+          </a:xfrm>
+          <a:prstGeom prst="rect">
+            <a:avLst/>
+          </a:prstGeom>
+          <a:noFill/>
+        </p:spPr>
+        <p:txBody>
+          <a:bodyPr wrap="square" anchor="t" lIns="0" rIns="0" tIns="0" bIns="0">
+            <a:spAutoFit/>
+          </a:bodyPr>
+          <a:lstStyle/>
+          <a:p>
+            <a:pPr algn="l">
+              <a:lnSpc>
+                <a:spcPct val="100000"/>
+              </a:lnSpc>
+              <a:spcAft>
+                <a:spcPts val="0"/>
+              </a:spcAft>
+            </a:pPr>
+            <a:r>
+              <a:rPr sz="1650" b="1" i="0">
                 <a:solidFill>
                   <a:srgbClr val="EAF0F8"/>
                 </a:solidFill>
                 <a:latin typeface="Arial"/>
               </a:rPr>
-              <a:t>Earned, mostly</a:t>
-            </a:r>
-          </a:p>
-          <a:p>
-            <a:pPr algn="l">
-              <a:lnSpc>
-                <a:spcPct val="107000"/>
-              </a:lnSpc>
-              <a:spcAft>
-                <a:spcPts val="200"/>
+              <a:t>SS Zach Neto (LAA)</a:t>
+            </a:r>
+          </a:p>
+        </p:txBody>
+      </p:sp>
+      <p:sp>
+        <p:nvSpPr>
+          <p:cNvPr id="15" name="TextBox 14"/>
+          <p:cNvSpPr txBox="1"/>
+          <p:nvPr/>
+        </p:nvSpPr>
+        <p:spPr>
+          <a:xfrm>
+            <a:off x="822960" y="4754880"/>
+            <a:ext cx="4855464" cy="960120"/>
+          </a:xfrm>
+          <a:prstGeom prst="rect">
+            <a:avLst/>
+          </a:prstGeom>
+          <a:noFill/>
+        </p:spPr>
+        <p:txBody>
+          <a:bodyPr wrap="square" anchor="t" lIns="0" rIns="0" tIns="0" bIns="0">
+            <a:spAutoFit/>
+          </a:bodyPr>
+          <a:lstStyle/>
+          <a:p>
+            <a:pPr algn="l">
+              <a:lnSpc>
+                <a:spcPct val="110000"/>
+              </a:lnSpc>
+              <a:spcAft>
+                <a:spcPts val="400"/>
               </a:spcAft>
             </a:pPr>
             <a:r>
@@ -6435,32 +6318,34 @@
                 </a:solidFill>
                 <a:latin typeface="Arial"/>
               </a:rPr>
-              <a:t>.376 wOBA against a .359 xwOBA, so the breakout has contact quality behind it. The flag: 488 PA of .617 OPS before this year.</a:t>
-            </a:r>
-          </a:p>
-        </p:txBody>
-      </p:sp>
-      <p:sp>
-        <p:nvSpPr>
-          <p:cNvPr id="11" name="Rounded Rectangle 10"/>
+              <a:t>For Tolle + Bennett + a 45 FV: two arms out of a winning rotation midseason. Right for the franchise window, and still there in the winter. Controlled through 2029.</a:t>
+            </a:r>
+          </a:p>
+        </p:txBody>
+      </p:sp>
+      <p:sp>
+        <p:nvSpPr>
+          <p:cNvPr id="16" name="Rounded Rectangle 15"/>
           <p:cNvSpPr/>
           <p:nvPr/>
         </p:nvSpPr>
         <p:spPr>
           <a:xfrm>
-            <a:off x="8001000" y="5120640"/>
-            <a:ext cx="146304" cy="146304"/>
+            <a:off x="6227064" y="3886200"/>
+            <a:ext cx="5358384" cy="1938528"/>
           </a:xfrm>
           <a:prstGeom prst="roundRect">
             <a:avLst>
-              <a:gd name="adj" fmla="val 18000"/>
+              <a:gd name="adj" fmla="val 6000"/>
             </a:avLst>
           </a:prstGeom>
           <a:solidFill>
-            <a:srgbClr val="58C08D"/>
+            <a:srgbClr val="121E33"/>
           </a:solidFill>
-          <a:ln>
-            <a:noFill/>
+          <a:ln w="12700">
+            <a:solidFill>
+              <a:srgbClr val="26334E"/>
+            </a:solidFill>
           </a:ln>
           <a:effectLst/>
         </p:spPr>
@@ -6488,51 +6373,116 @@
       </p:sp>
       <p:sp>
         <p:nvSpPr>
-          <p:cNvPr id="12" name="TextBox 11"/>
-          <p:cNvSpPr txBox="1"/>
-          <p:nvPr/>
-        </p:nvSpPr>
-        <p:spPr>
-          <a:xfrm>
-            <a:off x="8293608" y="5084064"/>
-            <a:ext cx="3749039" cy="1097280"/>
-          </a:xfrm>
-          <a:prstGeom prst="rect">
-            <a:avLst/>
-          </a:prstGeom>
-          <a:noFill/>
-        </p:spPr>
-        <p:txBody>
-          <a:bodyPr wrap="square" anchor="t" lIns="0" rIns="0" tIns="0" bIns="0">
-            <a:spAutoFit/>
-          </a:bodyPr>
-          <a:lstStyle/>
-          <a:p>
-            <a:pPr algn="l">
-              <a:lnSpc>
-                <a:spcPct val="107000"/>
-              </a:lnSpc>
-              <a:spcAft>
-                <a:spcPts val="200"/>
-              </a:spcAft>
-            </a:pPr>
-            <a:r>
-              <a:rPr sz="1350" b="1" i="0">
+          <p:cNvPr id="17" name="TextBox 16"/>
+          <p:cNvSpPr txBox="1"/>
+          <p:nvPr/>
+        </p:nvSpPr>
+        <p:spPr>
+          <a:xfrm>
+            <a:off x="6483096" y="4050791"/>
+            <a:ext cx="4855464" cy="292608"/>
+          </a:xfrm>
+          <a:prstGeom prst="rect">
+            <a:avLst/>
+          </a:prstGeom>
+          <a:noFill/>
+        </p:spPr>
+        <p:txBody>
+          <a:bodyPr wrap="square" anchor="t" lIns="0" rIns="0" tIns="0" bIns="0">
+            <a:spAutoFit/>
+          </a:bodyPr>
+          <a:lstStyle/>
+          <a:p>
+            <a:pPr algn="l">
+              <a:lnSpc>
+                <a:spcPct val="100000"/>
+              </a:lnSpc>
+              <a:spcAft>
+                <a:spcPts val="0"/>
+              </a:spcAft>
+            </a:pPr>
+            <a:r>
+              <a:rPr sz="1100" b="1" i="0">
+                <a:solidFill>
+                  <a:srgbClr val="E3B14E"/>
+                </a:solidFill>
+                <a:latin typeface="Arial"/>
+              </a:rPr>
+              <a:t>✗ · THE WALK-AWAY</a:t>
+            </a:r>
+          </a:p>
+        </p:txBody>
+      </p:sp>
+      <p:sp>
+        <p:nvSpPr>
+          <p:cNvPr id="18" name="TextBox 17"/>
+          <p:cNvSpPr txBox="1"/>
+          <p:nvPr/>
+        </p:nvSpPr>
+        <p:spPr>
+          <a:xfrm>
+            <a:off x="6483096" y="4343400"/>
+            <a:ext cx="4855464" cy="365760"/>
+          </a:xfrm>
+          <a:prstGeom prst="rect">
+            <a:avLst/>
+          </a:prstGeom>
+          <a:noFill/>
+        </p:spPr>
+        <p:txBody>
+          <a:bodyPr wrap="square" anchor="t" lIns="0" rIns="0" tIns="0" bIns="0">
+            <a:spAutoFit/>
+          </a:bodyPr>
+          <a:lstStyle/>
+          <a:p>
+            <a:pPr algn="l">
+              <a:lnSpc>
+                <a:spcPct val="100000"/>
+              </a:lnSpc>
+              <a:spcAft>
+                <a:spcPts val="0"/>
+              </a:spcAft>
+            </a:pPr>
+            <a:r>
+              <a:rPr sz="1650" b="1" i="0">
                 <a:solidFill>
                   <a:srgbClr val="EAF0F8"/>
                 </a:solidFill>
                 <a:latin typeface="Arial"/>
               </a:rPr>
-              <a:t>Menu grade</a:t>
-            </a:r>
-          </a:p>
-          <a:p>
-            <a:pPr algn="l">
-              <a:lnSpc>
-                <a:spcPct val="107000"/>
-              </a:lnSpc>
-              <a:spcAft>
-                <a:spcPts val="200"/>
+              <a:t>C Shea Langeliers (ATH)</a:t>
+            </a:r>
+          </a:p>
+        </p:txBody>
+      </p:sp>
+      <p:sp>
+        <p:nvSpPr>
+          <p:cNvPr id="19" name="TextBox 18"/>
+          <p:cNvSpPr txBox="1"/>
+          <p:nvPr/>
+        </p:nvSpPr>
+        <p:spPr>
+          <a:xfrm>
+            <a:off x="6483096" y="4754880"/>
+            <a:ext cx="4855464" cy="960120"/>
+          </a:xfrm>
+          <a:prstGeom prst="rect">
+            <a:avLst/>
+          </a:prstGeom>
+          <a:noFill/>
+        </p:spPr>
+        <p:txBody>
+          <a:bodyPr wrap="square" anchor="t" lIns="0" rIns="0" tIns="0" bIns="0">
+            <a:spAutoFit/>
+          </a:bodyPr>
+          <a:lstStyle/>
+          <a:p>
+            <a:pPr algn="l">
+              <a:lnSpc>
+                <a:spcPct val="110000"/>
+              </a:lnSpc>
+              <a:spcAft>
+                <a:spcPts val="400"/>
               </a:spcAft>
             </a:pPr>
             <a:r>
@@ -6542,14 +6492,65 @@
                 </a:solidFill>
                 <a:latin typeface="Arial"/>
               </a:rPr>
-              <a:t>The big-swing shape at half the price, and the infield hole filled. The pen fix is still open, 8 days left.</a:t>
-            </a:r>
-          </a:p>
-        </p:txBody>
-      </p:sp>
-      <p:sp>
-        <p:nvSpPr>
-          <p:cNvPr id="13" name="TextBox 12"/>
+              <a:t>The value math worked; the battery map is the veto. No August bat is worth resetting eight pitcher-catcher pairings on a staff carrying the season.</a:t>
+            </a:r>
+          </a:p>
+        </p:txBody>
+      </p:sp>
+      <p:sp>
+        <p:nvSpPr>
+          <p:cNvPr id="20" name="TextBox 19"/>
+          <p:cNvSpPr txBox="1"/>
+          <p:nvPr/>
+        </p:nvSpPr>
+        <p:spPr>
+          <a:xfrm>
+            <a:off x="566928" y="5897880"/>
+            <a:ext cx="11064240" cy="457200"/>
+          </a:xfrm>
+          <a:prstGeom prst="rect">
+            <a:avLst/>
+          </a:prstGeom>
+          <a:noFill/>
+        </p:spPr>
+        <p:txBody>
+          <a:bodyPr wrap="square" anchor="t" lIns="0" rIns="0" tIns="0" bIns="0">
+            <a:spAutoFit/>
+          </a:bodyPr>
+          <a:lstStyle/>
+          <a:p>
+            <a:pPr algn="l">
+              <a:lnSpc>
+                <a:spcPct val="100000"/>
+              </a:lnSpc>
+              <a:spcAft>
+                <a:spcPts val="0"/>
+              </a:spcAft>
+            </a:pPr>
+            <a:r>
+              <a:rPr sz="1250" b="1" i="0">
+                <a:solidFill>
+                  <a:srgbClr val="D9E1EF"/>
+                </a:solidFill>
+                <a:latin typeface="Arial"/>
+              </a:rPr>
+              <a:t>A menu, not a plan, Boston can afford about two. </a:t>
+            </a:r>
+            <a:r>
+              <a:rPr sz="1250" b="0" i="0">
+                <a:solidFill>
+                  <a:srgbClr val="93A0B6"/>
+                </a:solidFill>
+                <a:latin typeface="Arial"/>
+              </a:rPr>
+              <a:t>Full value math and verified contracts in the mock-trades memo. Hypotheticals, not reporting.</a:t>
+            </a:r>
+          </a:p>
+        </p:txBody>
+      </p:sp>
+      <p:sp>
+        <p:nvSpPr>
+          <p:cNvPr id="21" name="TextBox 20"/>
           <p:cNvSpPr txBox="1"/>
           <p:nvPr/>
         </p:nvSpPr>
@@ -6661,7 +6662,7 @@
                 </a:solidFill>
                 <a:latin typeface="Courier New"/>
               </a:rPr>
-              <a:t>// THE WINTER PLAN</a:t>
+              <a:t>// THE REAL TRADE</a:t>
             </a:r>
           </a:p>
         </p:txBody>
@@ -6703,53 +6704,35 @@
                 </a:solidFill>
                 <a:latin typeface="Arial"/>
               </a:rPr>
-              <a:t>Spend the pitching surplus on offense</a:t>
-            </a:r>
-          </a:p>
-        </p:txBody>
-      </p:sp>
-      <p:sp>
-        <p:nvSpPr>
-          <p:cNvPr id="4" name="TextBox 3"/>
-          <p:cNvSpPr txBox="1"/>
-          <p:nvPr/>
-        </p:nvSpPr>
-        <p:spPr>
-          <a:xfrm>
-            <a:off x="566928" y="1572768"/>
-            <a:ext cx="11064240" cy="640080"/>
-          </a:xfrm>
-          <a:prstGeom prst="rect">
-            <a:avLst/>
-          </a:prstGeom>
-          <a:noFill/>
-        </p:spPr>
-        <p:txBody>
-          <a:bodyPr wrap="square" anchor="t" lIns="0" rIns="0" tIns="0" bIns="0">
-            <a:spAutoFit/>
-          </a:bodyPr>
-          <a:lstStyle/>
-          <a:p>
-            <a:pPr algn="l">
-              <a:lnSpc>
-                <a:spcPct val="112000"/>
-              </a:lnSpc>
-              <a:spcAft>
-                <a:spcPts val="400"/>
-              </a:spcAft>
-            </a:pPr>
-            <a:r>
-              <a:rPr sz="1450" b="0" i="0">
-                <a:solidFill>
-                  <a:srgbClr val="D9E1EF"/>
-                </a:solidFill>
-                <a:latin typeface="Arial"/>
-              </a:rPr>
-              <a:t>If winter comes and Duran's rebound has shown up, this is what a deal should return. With a top-6 rotation (3.65 ERA) carrying the club, trading bats for arms is backwards, convert the outfield surplus into what's thin:</a:t>
-            </a:r>
-          </a:p>
-        </p:txBody>
-      </p:sp>
+              <a:t>They made one: Mead for Early</a:t>
+            </a:r>
+          </a:p>
+        </p:txBody>
+      </p:sp>
+      <p:pic>
+        <p:nvPicPr>
+          <p:cNvPr id="4" name="Picture 3" descr="19_mead_fenway.png"/>
+          <p:cNvPicPr>
+            <a:picLocks noChangeAspect="1"/>
+          </p:cNvPicPr>
+          <p:nvPr/>
+        </p:nvPicPr>
+        <p:blipFill>
+          <a:blip r:embed="rId2"/>
+          <a:stretch>
+            <a:fillRect/>
+          </a:stretch>
+        </p:blipFill>
+        <p:spPr>
+          <a:xfrm>
+            <a:off x="822640" y="1481328"/>
+            <a:ext cx="6401438" cy="4572000"/>
+          </a:xfrm>
+          <a:prstGeom prst="rect">
+            <a:avLst/>
+          </a:prstGeom>
+        </p:spPr>
+      </p:pic>
       <p:sp>
         <p:nvSpPr>
           <p:cNvPr id="5" name="Rounded Rectangle 4"/>
@@ -6758,21 +6741,19 @@
         </p:nvSpPr>
         <p:spPr>
           <a:xfrm>
-            <a:off x="566928" y="2468880"/>
-            <a:ext cx="3502152" cy="2514600"/>
+            <a:off x="8001000" y="1773936"/>
+            <a:ext cx="146304" cy="146304"/>
           </a:xfrm>
           <a:prstGeom prst="roundRect">
             <a:avLst>
-              <a:gd name="adj" fmla="val 6000"/>
+              <a:gd name="adj" fmla="val 18000"/>
             </a:avLst>
           </a:prstGeom>
           <a:solidFill>
-            <a:srgbClr val="121E33"/>
+            <a:srgbClr val="E8615A"/>
           </a:solidFill>
-          <a:ln w="12700">
-            <a:solidFill>
-              <a:srgbClr val="26334E"/>
-            </a:solidFill>
+          <a:ln>
+            <a:noFill/>
           </a:ln>
           <a:effectLst/>
         </p:spPr>
@@ -6800,14 +6781,289 @@
       </p:sp>
       <p:sp>
         <p:nvSpPr>
-          <p:cNvPr id="6" name="Rounded Rectangle 5"/>
+          <p:cNvPr id="6" name="TextBox 5"/>
+          <p:cNvSpPr txBox="1"/>
+          <p:nvPr/>
+        </p:nvSpPr>
+        <p:spPr>
+          <a:xfrm>
+            <a:off x="8293608" y="1737360"/>
+            <a:ext cx="3749039" cy="1097280"/>
+          </a:xfrm>
+          <a:prstGeom prst="rect">
+            <a:avLst/>
+          </a:prstGeom>
+          <a:noFill/>
+        </p:spPr>
+        <p:txBody>
+          <a:bodyPr wrap="square" anchor="t" lIns="0" rIns="0" tIns="0" bIns="0">
+            <a:spAutoFit/>
+          </a:bodyPr>
+          <a:lstStyle/>
+          <a:p>
+            <a:pPr algn="l">
+              <a:lnSpc>
+                <a:spcPct val="107000"/>
+              </a:lnSpc>
+              <a:spcAft>
+                <a:spcPts val="200"/>
+              </a:spcAft>
+            </a:pPr>
+            <a:r>
+              <a:rPr sz="1350" b="1" i="0">
+                <a:solidFill>
+                  <a:srgbClr val="EAF0F8"/>
+                </a:solidFill>
+                <a:latin typeface="Arial"/>
+              </a:rPr>
+              <a:t>The deal</a:t>
+            </a:r>
+          </a:p>
+          <a:p>
+            <a:pPr algn="l">
+              <a:lnSpc>
+                <a:spcPct val="107000"/>
+              </a:lnSpc>
+              <a:spcAft>
+                <a:spcPts val="200"/>
+              </a:spcAft>
+            </a:pPr>
+            <a:r>
+              <a:rPr sz="1160" b="0" i="0">
+                <a:solidFill>
+                  <a:srgbClr val="93A0B6"/>
+                </a:solidFill>
+                <a:latin typeface="Arial"/>
+              </a:rPr>
+              <a:t>Curtis Mead (25) from Washington for Connelly Early: one surplus arm for a 134 wRC+ infield bat with years of club control.</a:t>
+            </a:r>
+          </a:p>
+        </p:txBody>
+      </p:sp>
+      <p:sp>
+        <p:nvSpPr>
+          <p:cNvPr id="7" name="Rounded Rectangle 6"/>
           <p:cNvSpPr/>
           <p:nvPr/>
         </p:nvSpPr>
         <p:spPr>
           <a:xfrm>
-            <a:off x="841247" y="2724912"/>
-            <a:ext cx="384048" cy="384048"/>
+            <a:off x="8001000" y="2889504"/>
+            <a:ext cx="146304" cy="146304"/>
+          </a:xfrm>
+          <a:prstGeom prst="roundRect">
+            <a:avLst>
+              <a:gd name="adj" fmla="val 18000"/>
+            </a:avLst>
+          </a:prstGeom>
+          <a:solidFill>
+            <a:srgbClr val="EAF0F8"/>
+          </a:solidFill>
+          <a:ln>
+            <a:noFill/>
+          </a:ln>
+          <a:effectLst/>
+        </p:spPr>
+        <p:style>
+          <a:lnRef idx="1">
+            <a:schemeClr val="accent1"/>
+          </a:lnRef>
+          <a:fillRef idx="3">
+            <a:schemeClr val="accent1"/>
+          </a:fillRef>
+          <a:effectRef idx="2">
+            <a:schemeClr val="accent1"/>
+          </a:effectRef>
+          <a:fontRef idx="minor">
+            <a:schemeClr val="lt1"/>
+          </a:fontRef>
+        </p:style>
+        <p:txBody>
+          <a:bodyPr rtlCol="0" anchor="ctr"/>
+          <a:lstStyle/>
+          <a:p>
+            <a:pPr algn="ctr"/>
+          </a:p>
+        </p:txBody>
+      </p:sp>
+      <p:sp>
+        <p:nvSpPr>
+          <p:cNvPr id="8" name="TextBox 7"/>
+          <p:cNvSpPr txBox="1"/>
+          <p:nvPr/>
+        </p:nvSpPr>
+        <p:spPr>
+          <a:xfrm>
+            <a:off x="8293608" y="2852928"/>
+            <a:ext cx="3749039" cy="1097280"/>
+          </a:xfrm>
+          <a:prstGeom prst="rect">
+            <a:avLst/>
+          </a:prstGeom>
+          <a:noFill/>
+        </p:spPr>
+        <p:txBody>
+          <a:bodyPr wrap="square" anchor="t" lIns="0" rIns="0" tIns="0" bIns="0">
+            <a:spAutoFit/>
+          </a:bodyPr>
+          <a:lstStyle/>
+          <a:p>
+            <a:pPr algn="l">
+              <a:lnSpc>
+                <a:spcPct val="107000"/>
+              </a:lnSpc>
+              <a:spcAft>
+                <a:spcPts val="200"/>
+              </a:spcAft>
+            </a:pPr>
+            <a:r>
+              <a:rPr sz="1350" b="1" i="0">
+                <a:solidFill>
+                  <a:srgbClr val="EAF0F8"/>
+                </a:solidFill>
+                <a:latin typeface="Arial"/>
+              </a:rPr>
+              <a:t>The Fenway fit</a:t>
+            </a:r>
+          </a:p>
+          <a:p>
+            <a:pPr algn="l">
+              <a:lnSpc>
+                <a:spcPct val="107000"/>
+              </a:lnSpc>
+              <a:spcAft>
+                <a:spcPts val="200"/>
+              </a:spcAft>
+            </a:pPr>
+            <a:r>
+              <a:rPr sz="1160" b="0" i="0">
+                <a:solidFill>
+                  <a:srgbClr val="93A0B6"/>
+                </a:solidFill>
+                <a:latin typeface="Arial"/>
+              </a:rPr>
+              <a:t>23% pull-air rate, 82nd percentile, with a .846 wOBA on pulled air balls. RHB pull-air plays to the Monster.</a:t>
+            </a:r>
+          </a:p>
+        </p:txBody>
+      </p:sp>
+      <p:sp>
+        <p:nvSpPr>
+          <p:cNvPr id="9" name="Rounded Rectangle 8"/>
+          <p:cNvSpPr/>
+          <p:nvPr/>
+        </p:nvSpPr>
+        <p:spPr>
+          <a:xfrm>
+            <a:off x="8001000" y="4005072"/>
+            <a:ext cx="146304" cy="146304"/>
+          </a:xfrm>
+          <a:prstGeom prst="roundRect">
+            <a:avLst>
+              <a:gd name="adj" fmla="val 18000"/>
+            </a:avLst>
+          </a:prstGeom>
+          <a:solidFill>
+            <a:srgbClr val="E3B14E"/>
+          </a:solidFill>
+          <a:ln>
+            <a:noFill/>
+          </a:ln>
+          <a:effectLst/>
+        </p:spPr>
+        <p:style>
+          <a:lnRef idx="1">
+            <a:schemeClr val="accent1"/>
+          </a:lnRef>
+          <a:fillRef idx="3">
+            <a:schemeClr val="accent1"/>
+          </a:fillRef>
+          <a:effectRef idx="2">
+            <a:schemeClr val="accent1"/>
+          </a:effectRef>
+          <a:fontRef idx="minor">
+            <a:schemeClr val="lt1"/>
+          </a:fontRef>
+        </p:style>
+        <p:txBody>
+          <a:bodyPr rtlCol="0" anchor="ctr"/>
+          <a:lstStyle/>
+          <a:p>
+            <a:pPr algn="ctr"/>
+          </a:p>
+        </p:txBody>
+      </p:sp>
+      <p:sp>
+        <p:nvSpPr>
+          <p:cNvPr id="10" name="TextBox 9"/>
+          <p:cNvSpPr txBox="1"/>
+          <p:nvPr/>
+        </p:nvSpPr>
+        <p:spPr>
+          <a:xfrm>
+            <a:off x="8293608" y="3968496"/>
+            <a:ext cx="3749039" cy="1097280"/>
+          </a:xfrm>
+          <a:prstGeom prst="rect">
+            <a:avLst/>
+          </a:prstGeom>
+          <a:noFill/>
+        </p:spPr>
+        <p:txBody>
+          <a:bodyPr wrap="square" anchor="t" lIns="0" rIns="0" tIns="0" bIns="0">
+            <a:spAutoFit/>
+          </a:bodyPr>
+          <a:lstStyle/>
+          <a:p>
+            <a:pPr algn="l">
+              <a:lnSpc>
+                <a:spcPct val="107000"/>
+              </a:lnSpc>
+              <a:spcAft>
+                <a:spcPts val="200"/>
+              </a:spcAft>
+            </a:pPr>
+            <a:r>
+              <a:rPr sz="1350" b="1" i="0">
+                <a:solidFill>
+                  <a:srgbClr val="EAF0F8"/>
+                </a:solidFill>
+                <a:latin typeface="Arial"/>
+              </a:rPr>
+              <a:t>Earned, mostly</a:t>
+            </a:r>
+          </a:p>
+          <a:p>
+            <a:pPr algn="l">
+              <a:lnSpc>
+                <a:spcPct val="107000"/>
+              </a:lnSpc>
+              <a:spcAft>
+                <a:spcPts val="200"/>
+              </a:spcAft>
+            </a:pPr>
+            <a:r>
+              <a:rPr sz="1160" b="0" i="0">
+                <a:solidFill>
+                  <a:srgbClr val="93A0B6"/>
+                </a:solidFill>
+                <a:latin typeface="Arial"/>
+              </a:rPr>
+              <a:t>.376 wOBA against a .359 xwOBA, so the breakout has contact quality behind it. The flag: 488 PA of .617 OPS before this year.</a:t>
+            </a:r>
+          </a:p>
+        </p:txBody>
+      </p:sp>
+      <p:sp>
+        <p:nvSpPr>
+          <p:cNvPr id="11" name="Rounded Rectangle 10"/>
+          <p:cNvSpPr/>
+          <p:nvPr/>
+        </p:nvSpPr>
+        <p:spPr>
+          <a:xfrm>
+            <a:off x="8001000" y="5120640"/>
+            <a:ext cx="146304" cy="146304"/>
           </a:xfrm>
           <a:prstGeom prst="roundRect">
             <a:avLst>
@@ -6837,534 +7093,77 @@
           </a:fontRef>
         </p:style>
         <p:txBody>
-          <a:bodyPr rtlCol="0" anchor="ctr" wrap="none"/>
+          <a:bodyPr rtlCol="0" anchor="ctr"/>
           <a:lstStyle/>
           <a:p>
             <a:pPr algn="ctr"/>
-            <a:r>
-              <a:rPr sz="1600" b="1">
-                <a:solidFill>
-                  <a:srgbClr val="0B1220"/>
-                </a:solidFill>
-                <a:latin typeface="Courier New"/>
-              </a:rPr>
-              <a:t>1</a:t>
-            </a:r>
-          </a:p>
-        </p:txBody>
-      </p:sp>
-      <p:sp>
-        <p:nvSpPr>
-          <p:cNvPr id="7" name="TextBox 6"/>
-          <p:cNvSpPr txBox="1"/>
-          <p:nvPr/>
-        </p:nvSpPr>
-        <p:spPr>
-          <a:xfrm>
-            <a:off x="841247" y="3310128"/>
-            <a:ext cx="2999232" cy="411480"/>
-          </a:xfrm>
-          <a:prstGeom prst="rect">
-            <a:avLst/>
-          </a:prstGeom>
-          <a:noFill/>
-        </p:spPr>
-        <p:txBody>
-          <a:bodyPr wrap="square" anchor="t" lIns="0" rIns="0" tIns="0" bIns="0">
-            <a:spAutoFit/>
-          </a:bodyPr>
-          <a:lstStyle/>
-          <a:p>
-            <a:pPr algn="l">
-              <a:lnSpc>
-                <a:spcPct val="100000"/>
-              </a:lnSpc>
-              <a:spcAft>
-                <a:spcPts val="0"/>
-              </a:spcAft>
-            </a:pPr>
-            <a:r>
-              <a:rPr sz="1600" b="1" i="0">
+          </a:p>
+        </p:txBody>
+      </p:sp>
+      <p:sp>
+        <p:nvSpPr>
+          <p:cNvPr id="12" name="TextBox 11"/>
+          <p:cNvSpPr txBox="1"/>
+          <p:nvPr/>
+        </p:nvSpPr>
+        <p:spPr>
+          <a:xfrm>
+            <a:off x="8293608" y="5084064"/>
+            <a:ext cx="3749039" cy="1097280"/>
+          </a:xfrm>
+          <a:prstGeom prst="rect">
+            <a:avLst/>
+          </a:prstGeom>
+          <a:noFill/>
+        </p:spPr>
+        <p:txBody>
+          <a:bodyPr wrap="square" anchor="t" lIns="0" rIns="0" tIns="0" bIns="0">
+            <a:spAutoFit/>
+          </a:bodyPr>
+          <a:lstStyle/>
+          <a:p>
+            <a:pPr algn="l">
+              <a:lnSpc>
+                <a:spcPct val="107000"/>
+              </a:lnSpc>
+              <a:spcAft>
+                <a:spcPts val="200"/>
+              </a:spcAft>
+            </a:pPr>
+            <a:r>
+              <a:rPr sz="1350" b="1" i="0">
                 <a:solidFill>
                   <a:srgbClr val="EAF0F8"/>
                 </a:solidFill>
                 <a:latin typeface="Arial"/>
               </a:rPr>
-              <a:t>Controllable bats</a:t>
-            </a:r>
-          </a:p>
-        </p:txBody>
-      </p:sp>
-      <p:sp>
-        <p:nvSpPr>
-          <p:cNvPr id="8" name="TextBox 7"/>
-          <p:cNvSpPr txBox="1"/>
-          <p:nvPr/>
-        </p:nvSpPr>
-        <p:spPr>
-          <a:xfrm>
-            <a:off x="841247" y="3767328"/>
-            <a:ext cx="2999232" cy="1097280"/>
-          </a:xfrm>
-          <a:prstGeom prst="rect">
-            <a:avLst/>
-          </a:prstGeom>
-          <a:noFill/>
-        </p:spPr>
-        <p:txBody>
-          <a:bodyPr wrap="square" anchor="t" lIns="0" rIns="0" tIns="0" bIns="0">
-            <a:spAutoFit/>
-          </a:bodyPr>
-          <a:lstStyle/>
-          <a:p>
-            <a:pPr algn="l">
-              <a:lnSpc>
-                <a:spcPct val="110000"/>
-              </a:lnSpc>
-              <a:spcAft>
-                <a:spcPts val="400"/>
-              </a:spcAft>
-            </a:pPr>
-            <a:r>
-              <a:rPr sz="1280" b="0" i="0">
+              <a:t>Menu grade</a:t>
+            </a:r>
+          </a:p>
+          <a:p>
+            <a:pPr algn="l">
+              <a:lnSpc>
+                <a:spcPct val="107000"/>
+              </a:lnSpc>
+              <a:spcAft>
+                <a:spcPts val="200"/>
+              </a:spcAft>
+            </a:pPr>
+            <a:r>
+              <a:rPr sz="1160" b="0" i="0">
                 <a:solidFill>
                   <a:srgbClr val="93A0B6"/>
                 </a:solidFill>
                 <a:latin typeface="Arial"/>
               </a:rPr>
-              <a:t>Young, cost-controlled position players to fix an inconsistent lineup and lengthen it around the core.</a:t>
-            </a:r>
-          </a:p>
-        </p:txBody>
-      </p:sp>
-      <p:sp>
-        <p:nvSpPr>
-          <p:cNvPr id="9" name="Rounded Rectangle 8"/>
-          <p:cNvSpPr/>
-          <p:nvPr/>
-        </p:nvSpPr>
-        <p:spPr>
-          <a:xfrm>
-            <a:off x="4352544" y="2468880"/>
-            <a:ext cx="3502152" cy="2514600"/>
-          </a:xfrm>
-          <a:prstGeom prst="roundRect">
-            <a:avLst>
-              <a:gd name="adj" fmla="val 6000"/>
-            </a:avLst>
-          </a:prstGeom>
-          <a:solidFill>
-            <a:srgbClr val="121E33"/>
-          </a:solidFill>
-          <a:ln w="12700">
-            <a:solidFill>
-              <a:srgbClr val="26334E"/>
-            </a:solidFill>
-          </a:ln>
-          <a:effectLst/>
-        </p:spPr>
-        <p:style>
-          <a:lnRef idx="1">
-            <a:schemeClr val="accent1"/>
-          </a:lnRef>
-          <a:fillRef idx="3">
-            <a:schemeClr val="accent1"/>
-          </a:fillRef>
-          <a:effectRef idx="2">
-            <a:schemeClr val="accent1"/>
-          </a:effectRef>
-          <a:fontRef idx="minor">
-            <a:schemeClr val="lt1"/>
-          </a:fontRef>
-        </p:style>
-        <p:txBody>
-          <a:bodyPr rtlCol="0" anchor="ctr"/>
-          <a:lstStyle/>
-          <a:p>
-            <a:pPr algn="ctr"/>
-          </a:p>
-        </p:txBody>
-      </p:sp>
-      <p:sp>
-        <p:nvSpPr>
-          <p:cNvPr id="10" name="Rounded Rectangle 9"/>
-          <p:cNvSpPr/>
-          <p:nvPr/>
-        </p:nvSpPr>
-        <p:spPr>
-          <a:xfrm>
-            <a:off x="4626864" y="2724912"/>
-            <a:ext cx="384048" cy="384048"/>
-          </a:xfrm>
-          <a:prstGeom prst="roundRect">
-            <a:avLst>
-              <a:gd name="adj" fmla="val 18000"/>
-            </a:avLst>
-          </a:prstGeom>
-          <a:solidFill>
-            <a:srgbClr val="EAF0F8"/>
-          </a:solidFill>
-          <a:ln>
-            <a:noFill/>
-          </a:ln>
-          <a:effectLst/>
-        </p:spPr>
-        <p:style>
-          <a:lnRef idx="1">
-            <a:schemeClr val="accent1"/>
-          </a:lnRef>
-          <a:fillRef idx="3">
-            <a:schemeClr val="accent1"/>
-          </a:fillRef>
-          <a:effectRef idx="2">
-            <a:schemeClr val="accent1"/>
-          </a:effectRef>
-          <a:fontRef idx="minor">
-            <a:schemeClr val="lt1"/>
-          </a:fontRef>
-        </p:style>
-        <p:txBody>
-          <a:bodyPr rtlCol="0" anchor="ctr" wrap="none"/>
-          <a:lstStyle/>
-          <a:p>
-            <a:pPr algn="ctr"/>
-            <a:r>
-              <a:rPr sz="1600" b="1">
-                <a:solidFill>
-                  <a:srgbClr val="0B1220"/>
-                </a:solidFill>
-                <a:latin typeface="Courier New"/>
-              </a:rPr>
-              <a:t>2</a:t>
-            </a:r>
-          </a:p>
-        </p:txBody>
-      </p:sp>
-      <p:sp>
-        <p:nvSpPr>
-          <p:cNvPr id="11" name="TextBox 10"/>
-          <p:cNvSpPr txBox="1"/>
-          <p:nvPr/>
-        </p:nvSpPr>
-        <p:spPr>
-          <a:xfrm>
-            <a:off x="4626864" y="3310128"/>
-            <a:ext cx="2999232" cy="411480"/>
-          </a:xfrm>
-          <a:prstGeom prst="rect">
-            <a:avLst/>
-          </a:prstGeom>
-          <a:noFill/>
-        </p:spPr>
-        <p:txBody>
-          <a:bodyPr wrap="square" anchor="t" lIns="0" rIns="0" tIns="0" bIns="0">
-            <a:spAutoFit/>
-          </a:bodyPr>
-          <a:lstStyle/>
-          <a:p>
-            <a:pPr algn="l">
-              <a:lnSpc>
-                <a:spcPct val="100000"/>
-              </a:lnSpc>
-              <a:spcAft>
-                <a:spcPts val="0"/>
-              </a:spcAft>
-            </a:pPr>
-            <a:r>
-              <a:rPr sz="1600" b="1" i="0">
-                <a:solidFill>
-                  <a:srgbClr val="EAF0F8"/>
-                </a:solidFill>
-                <a:latin typeface="Arial"/>
-              </a:rPr>
-              <a:t>Best talent / upside</a:t>
-            </a:r>
-          </a:p>
-        </p:txBody>
-      </p:sp>
-      <p:sp>
-        <p:nvSpPr>
-          <p:cNvPr id="12" name="TextBox 11"/>
-          <p:cNvSpPr txBox="1"/>
-          <p:nvPr/>
-        </p:nvSpPr>
-        <p:spPr>
-          <a:xfrm>
-            <a:off x="4626864" y="3767328"/>
-            <a:ext cx="2999232" cy="1097280"/>
-          </a:xfrm>
-          <a:prstGeom prst="rect">
-            <a:avLst/>
-          </a:prstGeom>
-          <a:noFill/>
-        </p:spPr>
-        <p:txBody>
-          <a:bodyPr wrap="square" anchor="t" lIns="0" rIns="0" tIns="0" bIns="0">
-            <a:spAutoFit/>
-          </a:bodyPr>
-          <a:lstStyle/>
-          <a:p>
-            <a:pPr algn="l">
-              <a:lnSpc>
-                <a:spcPct val="110000"/>
-              </a:lnSpc>
-              <a:spcAft>
-                <a:spcPts val="400"/>
-              </a:spcAft>
-            </a:pPr>
-            <a:r>
-              <a:rPr sz="1280" b="0" i="0">
-                <a:solidFill>
-                  <a:srgbClr val="93A0B6"/>
-                </a:solidFill>
-                <a:latin typeface="Arial"/>
-              </a:rPr>
-              <a:t>In a retool you take the best player, not the positional patch, prospects and MLB-ready youth over rentals.</a:t>
-            </a:r>
-          </a:p>
-        </p:txBody>
-      </p:sp>
-      <p:sp>
-        <p:nvSpPr>
-          <p:cNvPr id="13" name="Rounded Rectangle 12"/>
-          <p:cNvSpPr/>
-          <p:nvPr/>
-        </p:nvSpPr>
-        <p:spPr>
-          <a:xfrm>
-            <a:off x="8138159" y="2468880"/>
-            <a:ext cx="3502152" cy="2514600"/>
-          </a:xfrm>
-          <a:prstGeom prst="roundRect">
-            <a:avLst>
-              <a:gd name="adj" fmla="val 6000"/>
-            </a:avLst>
-          </a:prstGeom>
-          <a:solidFill>
-            <a:srgbClr val="121E33"/>
-          </a:solidFill>
-          <a:ln w="12700">
-            <a:solidFill>
-              <a:srgbClr val="26334E"/>
-            </a:solidFill>
-          </a:ln>
-          <a:effectLst/>
-        </p:spPr>
-        <p:style>
-          <a:lnRef idx="1">
-            <a:schemeClr val="accent1"/>
-          </a:lnRef>
-          <a:fillRef idx="3">
-            <a:schemeClr val="accent1"/>
-          </a:fillRef>
-          <a:effectRef idx="2">
-            <a:schemeClr val="accent1"/>
-          </a:effectRef>
-          <a:fontRef idx="minor">
-            <a:schemeClr val="lt1"/>
-          </a:fontRef>
-        </p:style>
-        <p:txBody>
-          <a:bodyPr rtlCol="0" anchor="ctr"/>
-          <a:lstStyle/>
-          <a:p>
-            <a:pPr algn="ctr"/>
-          </a:p>
-        </p:txBody>
-      </p:sp>
-      <p:sp>
-        <p:nvSpPr>
-          <p:cNvPr id="14" name="Rounded Rectangle 13"/>
-          <p:cNvSpPr/>
-          <p:nvPr/>
-        </p:nvSpPr>
-        <p:spPr>
-          <a:xfrm>
-            <a:off x="8412480" y="2724912"/>
-            <a:ext cx="384048" cy="384048"/>
-          </a:xfrm>
-          <a:prstGeom prst="roundRect">
-            <a:avLst>
-              <a:gd name="adj" fmla="val 18000"/>
-            </a:avLst>
-          </a:prstGeom>
-          <a:solidFill>
-            <a:srgbClr val="E3B14E"/>
-          </a:solidFill>
-          <a:ln>
-            <a:noFill/>
-          </a:ln>
-          <a:effectLst/>
-        </p:spPr>
-        <p:style>
-          <a:lnRef idx="1">
-            <a:schemeClr val="accent1"/>
-          </a:lnRef>
-          <a:fillRef idx="3">
-            <a:schemeClr val="accent1"/>
-          </a:fillRef>
-          <a:effectRef idx="2">
-            <a:schemeClr val="accent1"/>
-          </a:effectRef>
-          <a:fontRef idx="minor">
-            <a:schemeClr val="lt1"/>
-          </a:fontRef>
-        </p:style>
-        <p:txBody>
-          <a:bodyPr rtlCol="0" anchor="ctr" wrap="none"/>
-          <a:lstStyle/>
-          <a:p>
-            <a:pPr algn="ctr"/>
-            <a:r>
-              <a:rPr sz="1600" b="1">
-                <a:solidFill>
-                  <a:srgbClr val="0B1220"/>
-                </a:solidFill>
-                <a:latin typeface="Courier New"/>
-              </a:rPr>
-              <a:t>3</a:t>
-            </a:r>
-          </a:p>
-        </p:txBody>
-      </p:sp>
-      <p:sp>
-        <p:nvSpPr>
-          <p:cNvPr id="15" name="TextBox 14"/>
-          <p:cNvSpPr txBox="1"/>
-          <p:nvPr/>
-        </p:nvSpPr>
-        <p:spPr>
-          <a:xfrm>
-            <a:off x="8412480" y="3310128"/>
-            <a:ext cx="2999232" cy="411480"/>
-          </a:xfrm>
-          <a:prstGeom prst="rect">
-            <a:avLst/>
-          </a:prstGeom>
-          <a:noFill/>
-        </p:spPr>
-        <p:txBody>
-          <a:bodyPr wrap="square" anchor="t" lIns="0" rIns="0" tIns="0" bIns="0">
-            <a:spAutoFit/>
-          </a:bodyPr>
-          <a:lstStyle/>
-          <a:p>
-            <a:pPr algn="l">
-              <a:lnSpc>
-                <a:spcPct val="100000"/>
-              </a:lnSpc>
-              <a:spcAft>
-                <a:spcPts val="0"/>
-              </a:spcAft>
-            </a:pPr>
-            <a:r>
-              <a:rPr sz="1600" b="1" i="0">
-                <a:solidFill>
-                  <a:srgbClr val="EAF0F8"/>
-                </a:solidFill>
-                <a:latin typeface="Arial"/>
-              </a:rPr>
-              <a:t>Salary relief</a:t>
-            </a:r>
-          </a:p>
-        </p:txBody>
-      </p:sp>
-      <p:sp>
-        <p:nvSpPr>
-          <p:cNvPr id="16" name="TextBox 15"/>
-          <p:cNvSpPr txBox="1"/>
-          <p:nvPr/>
-        </p:nvSpPr>
-        <p:spPr>
-          <a:xfrm>
-            <a:off x="8412480" y="3767328"/>
-            <a:ext cx="2999232" cy="1097280"/>
-          </a:xfrm>
-          <a:prstGeom prst="rect">
-            <a:avLst/>
-          </a:prstGeom>
-          <a:noFill/>
-        </p:spPr>
-        <p:txBody>
-          <a:bodyPr wrap="square" anchor="t" lIns="0" rIns="0" tIns="0" bIns="0">
-            <a:spAutoFit/>
-          </a:bodyPr>
-          <a:lstStyle/>
-          <a:p>
-            <a:pPr algn="l">
-              <a:lnSpc>
-                <a:spcPct val="110000"/>
-              </a:lnSpc>
-              <a:spcAft>
-                <a:spcPts val="400"/>
-              </a:spcAft>
-            </a:pPr>
-            <a:r>
-              <a:rPr sz="1280" b="0" i="0">
-                <a:solidFill>
-                  <a:srgbClr val="93A0B6"/>
-                </a:solidFill>
-                <a:latin typeface="Arial"/>
-              </a:rPr>
-              <a:t>Attach Yoshida money where possible; free payroll for the 2027 window.</a:t>
-            </a:r>
-          </a:p>
-        </p:txBody>
-      </p:sp>
-      <p:sp>
-        <p:nvSpPr>
-          <p:cNvPr id="17" name="TextBox 16"/>
-          <p:cNvSpPr txBox="1"/>
-          <p:nvPr/>
-        </p:nvSpPr>
-        <p:spPr>
-          <a:xfrm>
-            <a:off x="566928" y="5257800"/>
-            <a:ext cx="11064240" cy="457200"/>
-          </a:xfrm>
-          <a:prstGeom prst="rect">
-            <a:avLst/>
-          </a:prstGeom>
-          <a:noFill/>
-        </p:spPr>
-        <p:txBody>
-          <a:bodyPr wrap="square" anchor="t" lIns="0" rIns="0" tIns="0" bIns="0">
-            <a:spAutoFit/>
-          </a:bodyPr>
-          <a:lstStyle/>
-          <a:p>
-            <a:pPr algn="l">
-              <a:lnSpc>
-                <a:spcPct val="100000"/>
-              </a:lnSpc>
-              <a:spcAft>
-                <a:spcPts val="0"/>
-              </a:spcAft>
-            </a:pPr>
-            <a:r>
-              <a:rPr sz="1400" b="1" i="1">
-                <a:solidFill>
-                  <a:srgbClr val="EAF0F8"/>
-                </a:solidFill>
-                <a:latin typeface="Arial"/>
-              </a:rPr>
-              <a:t>Keep the arms. Cash the outfield. </a:t>
-            </a:r>
-            <a:r>
-              <a:rPr sz="1400" b="0" i="1">
-                <a:solidFill>
-                  <a:srgbClr val="93A0B6"/>
-                </a:solidFill>
-                <a:latin typeface="Arial"/>
-              </a:rPr>
-              <a:t>Build the 2027 lineup, don't rent the 2026 one.</a:t>
-            </a:r>
-          </a:p>
-        </p:txBody>
-      </p:sp>
-      <p:sp>
-        <p:nvSpPr>
-          <p:cNvPr id="18" name="TextBox 17"/>
+              <a:t>The big-swing shape at half the price, and the infield hole filled. The pen fix is still open, 8 days left.</a:t>
+            </a:r>
+          </a:p>
+        </p:txBody>
+      </p:sp>
+      <p:sp>
+        <p:nvSpPr>
+          <p:cNvPr id="13" name="TextBox 12"/>
           <p:cNvSpPr txBox="1"/>
           <p:nvPr/>
         </p:nvSpPr>
@@ -7476,7 +7275,7 @@
                 </a:solidFill>
                 <a:latin typeface="Courier New"/>
               </a:rPr>
-              <a:t>// THE SEQUENCE</a:t>
+              <a:t>// THE WINTER PLAN</a:t>
             </a:r>
           </a:p>
         </p:txBody>
@@ -7518,21 +7317,111 @@
                 </a:solidFill>
                 <a:latin typeface="Arial"/>
               </a:rPr>
-              <a:t>Buy now, decide on Duran in the winter</a:t>
-            </a:r>
-          </a:p>
-        </p:txBody>
-      </p:sp>
-      <p:sp>
-        <p:nvSpPr>
-          <p:cNvPr id="4" name="Rounded Rectangle 3"/>
+              <a:t>Spend the pitching surplus on offense</a:t>
+            </a:r>
+          </a:p>
+        </p:txBody>
+      </p:sp>
+      <p:sp>
+        <p:nvSpPr>
+          <p:cNvPr id="4" name="TextBox 3"/>
+          <p:cNvSpPr txBox="1"/>
+          <p:nvPr/>
+        </p:nvSpPr>
+        <p:spPr>
+          <a:xfrm>
+            <a:off x="566928" y="1572768"/>
+            <a:ext cx="11064240" cy="640080"/>
+          </a:xfrm>
+          <a:prstGeom prst="rect">
+            <a:avLst/>
+          </a:prstGeom>
+          <a:noFill/>
+        </p:spPr>
+        <p:txBody>
+          <a:bodyPr wrap="square" anchor="t" lIns="0" rIns="0" tIns="0" bIns="0">
+            <a:spAutoFit/>
+          </a:bodyPr>
+          <a:lstStyle/>
+          <a:p>
+            <a:pPr algn="l">
+              <a:lnSpc>
+                <a:spcPct val="112000"/>
+              </a:lnSpc>
+              <a:spcAft>
+                <a:spcPts val="400"/>
+              </a:spcAft>
+            </a:pPr>
+            <a:r>
+              <a:rPr sz="1450" b="0" i="0">
+                <a:solidFill>
+                  <a:srgbClr val="D9E1EF"/>
+                </a:solidFill>
+                <a:latin typeface="Arial"/>
+              </a:rPr>
+              <a:t>If winter comes and Duran's rebound has shown up, this is what a deal should return. With a top-6 rotation (3.65 ERA) carrying the club, trading bats for arms is backwards, convert the outfield surplus into what's thin:</a:t>
+            </a:r>
+          </a:p>
+        </p:txBody>
+      </p:sp>
+      <p:sp>
+        <p:nvSpPr>
+          <p:cNvPr id="5" name="Rounded Rectangle 4"/>
           <p:cNvSpPr/>
           <p:nvPr/>
         </p:nvSpPr>
         <p:spPr>
           <a:xfrm>
-            <a:off x="640080" y="1801368"/>
-            <a:ext cx="457200" cy="457200"/>
+            <a:off x="566928" y="2468880"/>
+            <a:ext cx="3502152" cy="2514600"/>
+          </a:xfrm>
+          <a:prstGeom prst="roundRect">
+            <a:avLst>
+              <a:gd name="adj" fmla="val 6000"/>
+            </a:avLst>
+          </a:prstGeom>
+          <a:solidFill>
+            <a:srgbClr val="121E33"/>
+          </a:solidFill>
+          <a:ln w="12700">
+            <a:solidFill>
+              <a:srgbClr val="26334E"/>
+            </a:solidFill>
+          </a:ln>
+          <a:effectLst/>
+        </p:spPr>
+        <p:style>
+          <a:lnRef idx="1">
+            <a:schemeClr val="accent1"/>
+          </a:lnRef>
+          <a:fillRef idx="3">
+            <a:schemeClr val="accent1"/>
+          </a:fillRef>
+          <a:effectRef idx="2">
+            <a:schemeClr val="accent1"/>
+          </a:effectRef>
+          <a:fontRef idx="minor">
+            <a:schemeClr val="lt1"/>
+          </a:fontRef>
+        </p:style>
+        <p:txBody>
+          <a:bodyPr rtlCol="0" anchor="ctr"/>
+          <a:lstStyle/>
+          <a:p>
+            <a:pPr algn="ctr"/>
+          </a:p>
+        </p:txBody>
+      </p:sp>
+      <p:sp>
+        <p:nvSpPr>
+          <p:cNvPr id="6" name="Rounded Rectangle 5"/>
+          <p:cNvSpPr/>
+          <p:nvPr/>
+        </p:nvSpPr>
+        <p:spPr>
+          <a:xfrm>
+            <a:off x="841247" y="2724912"/>
+            <a:ext cx="384048" cy="384048"/>
           </a:xfrm>
           <a:prstGeom prst="roundRect">
             <a:avLst>
@@ -7540,7 +7429,7 @@
             </a:avLst>
           </a:prstGeom>
           <a:solidFill>
-            <a:srgbClr val="E8615A"/>
+            <a:srgbClr val="58C08D"/>
           </a:solidFill>
           <a:ln>
             <a:noFill/>
@@ -7567,7 +7456,7 @@
           <a:p>
             <a:pPr algn="ctr"/>
             <a:r>
-              <a:rPr sz="1800" b="1">
+              <a:rPr sz="1600" b="1">
                 <a:solidFill>
                   <a:srgbClr val="0B1220"/>
                 </a:solidFill>
@@ -7580,75 +7469,146 @@
       </p:sp>
       <p:sp>
         <p:nvSpPr>
-          <p:cNvPr id="5" name="TextBox 4"/>
-          <p:cNvSpPr txBox="1"/>
-          <p:nvPr/>
-        </p:nvSpPr>
-        <p:spPr>
-          <a:xfrm>
-            <a:off x="1280160" y="1783080"/>
-            <a:ext cx="6126480" cy="1005840"/>
-          </a:xfrm>
-          <a:prstGeom prst="rect">
-            <a:avLst/>
-          </a:prstGeom>
-          <a:noFill/>
-        </p:spPr>
-        <p:txBody>
-          <a:bodyPr wrap="square" anchor="t" lIns="0" rIns="0" tIns="0" bIns="0">
-            <a:spAutoFit/>
-          </a:bodyPr>
-          <a:lstStyle/>
-          <a:p>
-            <a:pPr algn="l">
-              <a:lnSpc>
-                <a:spcPct val="108000"/>
-              </a:lnSpc>
-              <a:spcAft>
-                <a:spcPts val="200"/>
-              </a:spcAft>
-            </a:pPr>
-            <a:r>
-              <a:rPr sz="1700" b="1" i="0">
+          <p:cNvPr id="7" name="TextBox 6"/>
+          <p:cNvSpPr txBox="1"/>
+          <p:nvPr/>
+        </p:nvSpPr>
+        <p:spPr>
+          <a:xfrm>
+            <a:off x="841247" y="3310128"/>
+            <a:ext cx="2999232" cy="411480"/>
+          </a:xfrm>
+          <a:prstGeom prst="rect">
+            <a:avLst/>
+          </a:prstGeom>
+          <a:noFill/>
+        </p:spPr>
+        <p:txBody>
+          <a:bodyPr wrap="square" anchor="t" lIns="0" rIns="0" tIns="0" bIns="0">
+            <a:spAutoFit/>
+          </a:bodyPr>
+          <a:lstStyle/>
+          <a:p>
+            <a:pPr algn="l">
+              <a:lnSpc>
+                <a:spcPct val="100000"/>
+              </a:lnSpc>
+              <a:spcAft>
+                <a:spcPts val="0"/>
+              </a:spcAft>
+            </a:pPr>
+            <a:r>
+              <a:rPr sz="1600" b="1" i="0">
                 <a:solidFill>
                   <a:srgbClr val="EAF0F8"/>
                 </a:solidFill>
                 <a:latin typeface="Arial"/>
               </a:rPr>
-              <a:t>At the deadline: buy targeted</a:t>
-            </a:r>
-          </a:p>
-          <a:p>
-            <a:pPr algn="l">
-              <a:lnSpc>
-                <a:spcPct val="108000"/>
-              </a:lnSpc>
-              <a:spcAft>
-                <a:spcPts val="200"/>
-              </a:spcAft>
-            </a:pPr>
-            <a:r>
-              <a:rPr sz="1350" b="0" i="0">
+              <a:t>Controllable bats</a:t>
+            </a:r>
+          </a:p>
+        </p:txBody>
+      </p:sp>
+      <p:sp>
+        <p:nvSpPr>
+          <p:cNvPr id="8" name="TextBox 7"/>
+          <p:cNvSpPr txBox="1"/>
+          <p:nvPr/>
+        </p:nvSpPr>
+        <p:spPr>
+          <a:xfrm>
+            <a:off x="841247" y="3767328"/>
+            <a:ext cx="2999232" cy="1097280"/>
+          </a:xfrm>
+          <a:prstGeom prst="rect">
+            <a:avLst/>
+          </a:prstGeom>
+          <a:noFill/>
+        </p:spPr>
+        <p:txBody>
+          <a:bodyPr wrap="square" anchor="t" lIns="0" rIns="0" tIns="0" bIns="0">
+            <a:spAutoFit/>
+          </a:bodyPr>
+          <a:lstStyle/>
+          <a:p>
+            <a:pPr algn="l">
+              <a:lnSpc>
+                <a:spcPct val="110000"/>
+              </a:lnSpc>
+              <a:spcAft>
+                <a:spcPts val="400"/>
+              </a:spcAft>
+            </a:pPr>
+            <a:r>
+              <a:rPr sz="1280" b="0" i="0">
                 <a:solidFill>
                   <a:srgbClr val="93A0B6"/>
                 </a:solidFill>
                 <a:latin typeface="Arial"/>
               </a:rPr>
-              <a:t>A controllable infield bat and a reliever, funded from the pitching surplus. Keep the vets, they're playoff innings now.</a:t>
-            </a:r>
-          </a:p>
-        </p:txBody>
-      </p:sp>
-      <p:sp>
-        <p:nvSpPr>
-          <p:cNvPr id="6" name="Rounded Rectangle 5"/>
+              <a:t>Young, cost-controlled position players to fix an inconsistent lineup and lengthen it around the core.</a:t>
+            </a:r>
+          </a:p>
+        </p:txBody>
+      </p:sp>
+      <p:sp>
+        <p:nvSpPr>
+          <p:cNvPr id="9" name="Rounded Rectangle 8"/>
           <p:cNvSpPr/>
           <p:nvPr/>
         </p:nvSpPr>
         <p:spPr>
           <a:xfrm>
-            <a:off x="640080" y="2971800"/>
-            <a:ext cx="457200" cy="457200"/>
+            <a:off x="4352544" y="2468880"/>
+            <a:ext cx="3502152" cy="2514600"/>
+          </a:xfrm>
+          <a:prstGeom prst="roundRect">
+            <a:avLst>
+              <a:gd name="adj" fmla="val 6000"/>
+            </a:avLst>
+          </a:prstGeom>
+          <a:solidFill>
+            <a:srgbClr val="121E33"/>
+          </a:solidFill>
+          <a:ln w="12700">
+            <a:solidFill>
+              <a:srgbClr val="26334E"/>
+            </a:solidFill>
+          </a:ln>
+          <a:effectLst/>
+        </p:spPr>
+        <p:style>
+          <a:lnRef idx="1">
+            <a:schemeClr val="accent1"/>
+          </a:lnRef>
+          <a:fillRef idx="3">
+            <a:schemeClr val="accent1"/>
+          </a:fillRef>
+          <a:effectRef idx="2">
+            <a:schemeClr val="accent1"/>
+          </a:effectRef>
+          <a:fontRef idx="minor">
+            <a:schemeClr val="lt1"/>
+          </a:fontRef>
+        </p:style>
+        <p:txBody>
+          <a:bodyPr rtlCol="0" anchor="ctr"/>
+          <a:lstStyle/>
+          <a:p>
+            <a:pPr algn="ctr"/>
+          </a:p>
+        </p:txBody>
+      </p:sp>
+      <p:sp>
+        <p:nvSpPr>
+          <p:cNvPr id="10" name="Rounded Rectangle 9"/>
+          <p:cNvSpPr/>
+          <p:nvPr/>
+        </p:nvSpPr>
+        <p:spPr>
+          <a:xfrm>
+            <a:off x="4626864" y="2724912"/>
+            <a:ext cx="384048" cy="384048"/>
           </a:xfrm>
           <a:prstGeom prst="roundRect">
             <a:avLst>
@@ -7656,7 +7616,7 @@
             </a:avLst>
           </a:prstGeom>
           <a:solidFill>
-            <a:srgbClr val="E8615A"/>
+            <a:srgbClr val="EAF0F8"/>
           </a:solidFill>
           <a:ln>
             <a:noFill/>
@@ -7683,7 +7643,7 @@
           <a:p>
             <a:pPr algn="ctr"/>
             <a:r>
-              <a:rPr sz="1800" b="1">
+              <a:rPr sz="1600" b="1">
                 <a:solidFill>
                   <a:srgbClr val="0B1220"/>
                 </a:solidFill>
@@ -7696,75 +7656,146 @@
       </p:sp>
       <p:sp>
         <p:nvSpPr>
-          <p:cNvPr id="7" name="TextBox 6"/>
-          <p:cNvSpPr txBox="1"/>
-          <p:nvPr/>
-        </p:nvSpPr>
-        <p:spPr>
-          <a:xfrm>
-            <a:off x="1280160" y="2953512"/>
-            <a:ext cx="6126480" cy="1005840"/>
-          </a:xfrm>
-          <a:prstGeom prst="rect">
-            <a:avLst/>
-          </a:prstGeom>
-          <a:noFill/>
-        </p:spPr>
-        <p:txBody>
-          <a:bodyPr wrap="square" anchor="t" lIns="0" rIns="0" tIns="0" bIns="0">
-            <a:spAutoFit/>
-          </a:bodyPr>
-          <a:lstStyle/>
-          <a:p>
-            <a:pPr algn="l">
-              <a:lnSpc>
-                <a:spcPct val="108000"/>
-              </a:lnSpc>
-              <a:spcAft>
-                <a:spcPts val="200"/>
-              </a:spcAft>
-            </a:pPr>
-            <a:r>
-              <a:rPr sz="1700" b="1" i="0">
+          <p:cNvPr id="11" name="TextBox 10"/>
+          <p:cNvSpPr txBox="1"/>
+          <p:nvPr/>
+        </p:nvSpPr>
+        <p:spPr>
+          <a:xfrm>
+            <a:off x="4626864" y="3310128"/>
+            <a:ext cx="2999232" cy="411480"/>
+          </a:xfrm>
+          <a:prstGeom prst="rect">
+            <a:avLst/>
+          </a:prstGeom>
+          <a:noFill/>
+        </p:spPr>
+        <p:txBody>
+          <a:bodyPr wrap="square" anchor="t" lIns="0" rIns="0" tIns="0" bIns="0">
+            <a:spAutoFit/>
+          </a:bodyPr>
+          <a:lstStyle/>
+          <a:p>
+            <a:pPr algn="l">
+              <a:lnSpc>
+                <a:spcPct val="100000"/>
+              </a:lnSpc>
+              <a:spcAft>
+                <a:spcPts val="0"/>
+              </a:spcAft>
+            </a:pPr>
+            <a:r>
+              <a:rPr sz="1600" b="1" i="0">
                 <a:solidFill>
                   <a:srgbClr val="EAF0F8"/>
                 </a:solidFill>
                 <a:latin typeface="Arial"/>
               </a:rPr>
-              <a:t>Hold Duran through August</a:t>
-            </a:r>
-          </a:p>
-          <a:p>
-            <a:pPr algn="l">
-              <a:lnSpc>
-                <a:spcPct val="108000"/>
-              </a:lnSpc>
-              <a:spcAft>
-                <a:spcPts val="200"/>
-              </a:spcAft>
-            </a:pPr>
-            <a:r>
-              <a:rPr sz="1350" b="0" i="0">
+              <a:t>Best talent / upside</a:t>
+            </a:r>
+          </a:p>
+        </p:txBody>
+      </p:sp>
+      <p:sp>
+        <p:nvSpPr>
+          <p:cNvPr id="12" name="TextBox 11"/>
+          <p:cNvSpPr txBox="1"/>
+          <p:nvPr/>
+        </p:nvSpPr>
+        <p:spPr>
+          <a:xfrm>
+            <a:off x="4626864" y="3767328"/>
+            <a:ext cx="2999232" cy="1097280"/>
+          </a:xfrm>
+          <a:prstGeom prst="rect">
+            <a:avLst/>
+          </a:prstGeom>
+          <a:noFill/>
+        </p:spPr>
+        <p:txBody>
+          <a:bodyPr wrap="square" anchor="t" lIns="0" rIns="0" tIns="0" bIns="0">
+            <a:spAutoFit/>
+          </a:bodyPr>
+          <a:lstStyle/>
+          <a:p>
+            <a:pPr algn="l">
+              <a:lnSpc>
+                <a:spcPct val="110000"/>
+              </a:lnSpc>
+              <a:spcAft>
+                <a:spcPts val="400"/>
+              </a:spcAft>
+            </a:pPr>
+            <a:r>
+              <a:rPr sz="1280" b="0" i="0">
                 <a:solidFill>
                   <a:srgbClr val="93A0B6"/>
                 </a:solidFill>
                 <a:latin typeface="Arial"/>
               </a:rPr>
-              <a:t>His value is at its nadir and his July contact quality (~.35 xwOBA) is already surging. Selling now cashes the slump.</a:t>
-            </a:r>
-          </a:p>
-        </p:txBody>
-      </p:sp>
-      <p:sp>
-        <p:nvSpPr>
-          <p:cNvPr id="8" name="Rounded Rectangle 7"/>
+              <a:t>In a retool you take the best player, not the positional patch, prospects and MLB-ready youth over rentals.</a:t>
+            </a:r>
+          </a:p>
+        </p:txBody>
+      </p:sp>
+      <p:sp>
+        <p:nvSpPr>
+          <p:cNvPr id="13" name="Rounded Rectangle 12"/>
           <p:cNvSpPr/>
           <p:nvPr/>
         </p:nvSpPr>
         <p:spPr>
           <a:xfrm>
-            <a:off x="640080" y="4142231"/>
-            <a:ext cx="457200" cy="457200"/>
+            <a:off x="8138159" y="2468880"/>
+            <a:ext cx="3502152" cy="2514600"/>
+          </a:xfrm>
+          <a:prstGeom prst="roundRect">
+            <a:avLst>
+              <a:gd name="adj" fmla="val 6000"/>
+            </a:avLst>
+          </a:prstGeom>
+          <a:solidFill>
+            <a:srgbClr val="121E33"/>
+          </a:solidFill>
+          <a:ln w="12700">
+            <a:solidFill>
+              <a:srgbClr val="26334E"/>
+            </a:solidFill>
+          </a:ln>
+          <a:effectLst/>
+        </p:spPr>
+        <p:style>
+          <a:lnRef idx="1">
+            <a:schemeClr val="accent1"/>
+          </a:lnRef>
+          <a:fillRef idx="3">
+            <a:schemeClr val="accent1"/>
+          </a:fillRef>
+          <a:effectRef idx="2">
+            <a:schemeClr val="accent1"/>
+          </a:effectRef>
+          <a:fontRef idx="minor">
+            <a:schemeClr val="lt1"/>
+          </a:fontRef>
+        </p:style>
+        <p:txBody>
+          <a:bodyPr rtlCol="0" anchor="ctr"/>
+          <a:lstStyle/>
+          <a:p>
+            <a:pPr algn="ctr"/>
+          </a:p>
+        </p:txBody>
+      </p:sp>
+      <p:sp>
+        <p:nvSpPr>
+          <p:cNvPr id="14" name="Rounded Rectangle 13"/>
+          <p:cNvSpPr/>
+          <p:nvPr/>
+        </p:nvSpPr>
+        <p:spPr>
+          <a:xfrm>
+            <a:off x="8412480" y="2724912"/>
+            <a:ext cx="384048" cy="384048"/>
           </a:xfrm>
           <a:prstGeom prst="roundRect">
             <a:avLst>
@@ -7772,7 +7803,7 @@
             </a:avLst>
           </a:prstGeom>
           <a:solidFill>
-            <a:srgbClr val="E8615A"/>
+            <a:srgbClr val="E3B14E"/>
           </a:solidFill>
           <a:ln>
             <a:noFill/>
@@ -7799,7 +7830,7 @@
           <a:p>
             <a:pPr algn="ctr"/>
             <a:r>
-              <a:rPr sz="1800" b="1">
+              <a:rPr sz="1600" b="1">
                 <a:solidFill>
                   <a:srgbClr val="0B1220"/>
                 </a:solidFill>
@@ -7812,121 +7843,98 @@
       </p:sp>
       <p:sp>
         <p:nvSpPr>
-          <p:cNvPr id="9" name="TextBox 8"/>
-          <p:cNvSpPr txBox="1"/>
-          <p:nvPr/>
-        </p:nvSpPr>
-        <p:spPr>
-          <a:xfrm>
-            <a:off x="1280160" y="4123944"/>
-            <a:ext cx="6126480" cy="1005840"/>
-          </a:xfrm>
-          <a:prstGeom prst="rect">
-            <a:avLst/>
-          </a:prstGeom>
-          <a:noFill/>
-        </p:spPr>
-        <p:txBody>
-          <a:bodyPr wrap="square" anchor="t" lIns="0" rIns="0" tIns="0" bIns="0">
-            <a:spAutoFit/>
-          </a:bodyPr>
-          <a:lstStyle/>
-          <a:p>
-            <a:pPr algn="l">
-              <a:lnSpc>
-                <a:spcPct val="108000"/>
-              </a:lnSpc>
-              <a:spcAft>
-                <a:spcPts val="200"/>
-              </a:spcAft>
-            </a:pPr>
-            <a:r>
-              <a:rPr sz="1700" b="1" i="0">
+          <p:cNvPr id="15" name="TextBox 14"/>
+          <p:cNvSpPr txBox="1"/>
+          <p:nvPr/>
+        </p:nvSpPr>
+        <p:spPr>
+          <a:xfrm>
+            <a:off x="8412480" y="3310128"/>
+            <a:ext cx="2999232" cy="411480"/>
+          </a:xfrm>
+          <a:prstGeom prst="rect">
+            <a:avLst/>
+          </a:prstGeom>
+          <a:noFill/>
+        </p:spPr>
+        <p:txBody>
+          <a:bodyPr wrap="square" anchor="t" lIns="0" rIns="0" tIns="0" bIns="0">
+            <a:spAutoFit/>
+          </a:bodyPr>
+          <a:lstStyle/>
+          <a:p>
+            <a:pPr algn="l">
+              <a:lnSpc>
+                <a:spcPct val="100000"/>
+              </a:lnSpc>
+              <a:spcAft>
+                <a:spcPts val="0"/>
+              </a:spcAft>
+            </a:pPr>
+            <a:r>
+              <a:rPr sz="1600" b="1" i="0">
                 <a:solidFill>
                   <a:srgbClr val="EAF0F8"/>
                 </a:solidFill>
                 <a:latin typeface="Arial"/>
               </a:rPr>
-              <a:t>Winter: re-price, then choose</a:t>
-            </a:r>
-          </a:p>
-          <a:p>
-            <a:pPr algn="l">
-              <a:lnSpc>
-                <a:spcPct val="108000"/>
-              </a:lnSpc>
-              <a:spcAft>
-                <a:spcPts val="200"/>
-              </a:spcAft>
-            </a:pPr>
-            <a:r>
-              <a:rPr sz="1350" b="0" i="0">
+              <a:t>Salary relief</a:t>
+            </a:r>
+          </a:p>
+        </p:txBody>
+      </p:sp>
+      <p:sp>
+        <p:nvSpPr>
+          <p:cNvPr id="16" name="TextBox 15"/>
+          <p:cNvSpPr txBox="1"/>
+          <p:nvPr/>
+        </p:nvSpPr>
+        <p:spPr>
+          <a:xfrm>
+            <a:off x="8412480" y="3767328"/>
+            <a:ext cx="2999232" cy="1097280"/>
+          </a:xfrm>
+          <a:prstGeom prst="rect">
+            <a:avLst/>
+          </a:prstGeom>
+          <a:noFill/>
+        </p:spPr>
+        <p:txBody>
+          <a:bodyPr wrap="square" anchor="t" lIns="0" rIns="0" tIns="0" bIns="0">
+            <a:spAutoFit/>
+          </a:bodyPr>
+          <a:lstStyle/>
+          <a:p>
+            <a:pPr algn="l">
+              <a:lnSpc>
+                <a:spcPct val="110000"/>
+              </a:lnSpc>
+              <a:spcAft>
+                <a:spcPts val="400"/>
+              </a:spcAft>
+            </a:pPr>
+            <a:r>
+              <a:rPr sz="1280" b="0" i="0">
                 <a:solidFill>
                   <a:srgbClr val="93A0B6"/>
                 </a:solidFill>
                 <a:latin typeface="Arial"/>
               </a:rPr>
-              <a:t>Anthony healthy, jam returns. Rebound confirmed → extend or trade at full price. Erosion persists → sell at market. Either way, the 2027 OF is Anthony / Rafaela / Abreu.</a:t>
-            </a:r>
-          </a:p>
-        </p:txBody>
-      </p:sp>
-      <p:sp>
-        <p:nvSpPr>
-          <p:cNvPr id="10" name="Rounded Rectangle 9"/>
-          <p:cNvSpPr/>
-          <p:nvPr/>
-        </p:nvSpPr>
-        <p:spPr>
-          <a:xfrm>
-            <a:off x="7818120" y="1783080"/>
-            <a:ext cx="3794760" cy="3337560"/>
-          </a:xfrm>
-          <a:prstGeom prst="roundRect">
-            <a:avLst>
-              <a:gd name="adj" fmla="val 6000"/>
-            </a:avLst>
-          </a:prstGeom>
-          <a:solidFill>
-            <a:srgbClr val="1A2740"/>
-          </a:solidFill>
-          <a:ln>
-            <a:noFill/>
-          </a:ln>
-          <a:effectLst/>
-        </p:spPr>
-        <p:style>
-          <a:lnRef idx="1">
-            <a:schemeClr val="accent1"/>
-          </a:lnRef>
-          <a:fillRef idx="3">
-            <a:schemeClr val="accent1"/>
-          </a:fillRef>
-          <a:effectRef idx="2">
-            <a:schemeClr val="accent1"/>
-          </a:effectRef>
-          <a:fontRef idx="minor">
-            <a:schemeClr val="lt1"/>
-          </a:fontRef>
-        </p:style>
-        <p:txBody>
-          <a:bodyPr rtlCol="0" anchor="ctr"/>
-          <a:lstStyle/>
-          <a:p>
-            <a:pPr algn="ctr"/>
-          </a:p>
-        </p:txBody>
-      </p:sp>
-      <p:sp>
-        <p:nvSpPr>
-          <p:cNvPr id="11" name="TextBox 10"/>
-          <p:cNvSpPr txBox="1"/>
-          <p:nvPr/>
-        </p:nvSpPr>
-        <p:spPr>
-          <a:xfrm>
-            <a:off x="8092440" y="2011680"/>
-            <a:ext cx="3291840" cy="365760"/>
+              <a:t>Attach Yoshida money where possible; free payroll for the 2027 window.</a:t>
+            </a:r>
+          </a:p>
+        </p:txBody>
+      </p:sp>
+      <p:sp>
+        <p:nvSpPr>
+          <p:cNvPr id="17" name="TextBox 16"/>
+          <p:cNvSpPr txBox="1"/>
+          <p:nvPr/>
+        </p:nvSpPr>
+        <p:spPr>
+          <a:xfrm>
+            <a:off x="566928" y="5257800"/>
+            <a:ext cx="11064240" cy="457200"/>
           </a:xfrm>
           <a:prstGeom prst="rect">
             <a:avLst/>
@@ -7948,203 +7956,29 @@
               </a:spcAft>
             </a:pPr>
             <a:r>
-              <a:rPr sz="1250" b="1" i="0">
-                <a:solidFill>
-                  <a:srgbClr val="C9D2E3"/>
-                </a:solidFill>
-                <a:latin typeface="Arial"/>
-              </a:rPr>
-              <a:t>THE RETURN</a:t>
-            </a:r>
-          </a:p>
-        </p:txBody>
-      </p:sp>
-      <p:sp>
-        <p:nvSpPr>
-          <p:cNvPr id="12" name="TextBox 11"/>
-          <p:cNvSpPr txBox="1"/>
-          <p:nvPr/>
-        </p:nvSpPr>
-        <p:spPr>
-          <a:xfrm>
-            <a:off x="8092440" y="2487168"/>
-            <a:ext cx="3291840" cy="914400"/>
-          </a:xfrm>
-          <a:prstGeom prst="rect">
-            <a:avLst/>
-          </a:prstGeom>
-          <a:noFill/>
-        </p:spPr>
-        <p:txBody>
-          <a:bodyPr wrap="square" anchor="t" lIns="0" rIns="0" tIns="0" bIns="0">
-            <a:spAutoFit/>
-          </a:bodyPr>
-          <a:lstStyle/>
-          <a:p>
-            <a:pPr algn="l">
-              <a:lnSpc>
-                <a:spcPct val="105000"/>
-              </a:lnSpc>
-              <a:spcAft>
-                <a:spcPts val="200"/>
-              </a:spcAft>
-            </a:pPr>
-            <a:r>
-              <a:rPr sz="1300" b="1" i="0">
-                <a:solidFill>
-                  <a:srgbClr val="F0B8BC"/>
-                </a:solidFill>
-                <a:latin typeface="Arial"/>
-              </a:rPr>
-              <a:t>Sell now (nadir)</a:t>
-            </a:r>
-          </a:p>
-          <a:p>
-            <a:pPr algn="l">
-              <a:lnSpc>
-                <a:spcPct val="105000"/>
-              </a:lnSpc>
-              <a:spcAft>
-                <a:spcPts val="200"/>
-              </a:spcAft>
-            </a:pPr>
-            <a:r>
-              <a:rPr sz="1400" b="0" i="0">
-                <a:solidFill>
-                  <a:srgbClr val="F4F7FC"/>
-                </a:solidFill>
-                <a:latin typeface="Arial"/>
-              </a:rPr>
-              <a:t>~$10–15M · a 45-FV bat</a:t>
-            </a:r>
-          </a:p>
-        </p:txBody>
-      </p:sp>
-      <p:sp>
-        <p:nvSpPr>
-          <p:cNvPr id="13" name="TextBox 12"/>
-          <p:cNvSpPr txBox="1"/>
-          <p:nvPr/>
-        </p:nvSpPr>
-        <p:spPr>
-          <a:xfrm>
-            <a:off x="8092440" y="3520440"/>
-            <a:ext cx="3291840" cy="1005840"/>
-          </a:xfrm>
-          <a:prstGeom prst="rect">
-            <a:avLst/>
-          </a:prstGeom>
-          <a:noFill/>
-        </p:spPr>
-        <p:txBody>
-          <a:bodyPr wrap="square" anchor="t" lIns="0" rIns="0" tIns="0" bIns="0">
-            <a:spAutoFit/>
-          </a:bodyPr>
-          <a:lstStyle/>
-          <a:p>
-            <a:pPr algn="l">
-              <a:lnSpc>
-                <a:spcPct val="105000"/>
-              </a:lnSpc>
-              <a:spcAft>
-                <a:spcPts val="200"/>
-              </a:spcAft>
-            </a:pPr>
-            <a:r>
-              <a:rPr sz="1300" b="1" i="0">
-                <a:solidFill>
-                  <a:srgbClr val="A9E5B5"/>
-                </a:solidFill>
-                <a:latin typeface="Arial"/>
-              </a:rPr>
-              <a:t>Sell after rebound</a:t>
-            </a:r>
-          </a:p>
-          <a:p>
-            <a:pPr algn="l">
-              <a:lnSpc>
-                <a:spcPct val="105000"/>
-              </a:lnSpc>
-              <a:spcAft>
-                <a:spcPts val="200"/>
-              </a:spcAft>
-            </a:pPr>
-            <a:r>
-              <a:rPr sz="1400" b="0" i="0">
-                <a:solidFill>
-                  <a:srgbClr val="F4F7FC"/>
-                </a:solidFill>
-                <a:latin typeface="Arial"/>
-              </a:rPr>
-              <a:t>~$28M · a 50-FV, top-100</a:t>
-            </a:r>
-          </a:p>
-          <a:p>
-            <a:pPr algn="l">
-              <a:lnSpc>
-                <a:spcPct val="105000"/>
-              </a:lnSpc>
-              <a:spcAft>
-                <a:spcPts val="200"/>
-              </a:spcAft>
-            </a:pPr>
-            <a:r>
-              <a:rPr sz="1400" b="0" i="0">
-                <a:solidFill>
-                  <a:srgbClr val="F4F7FC"/>
-                </a:solidFill>
-                <a:latin typeface="Arial"/>
-              </a:rPr>
-              <a:t>controllable talent</a:t>
-            </a:r>
-          </a:p>
-        </p:txBody>
-      </p:sp>
-      <p:sp>
-        <p:nvSpPr>
-          <p:cNvPr id="14" name="TextBox 13"/>
-          <p:cNvSpPr txBox="1"/>
-          <p:nvPr/>
-        </p:nvSpPr>
-        <p:spPr>
-          <a:xfrm>
-            <a:off x="8092440" y="4617720"/>
-            <a:ext cx="3291840" cy="457200"/>
-          </a:xfrm>
-          <a:prstGeom prst="rect">
-            <a:avLst/>
-          </a:prstGeom>
-          <a:noFill/>
-        </p:spPr>
-        <p:txBody>
-          <a:bodyPr wrap="square" anchor="t" lIns="0" rIns="0" tIns="0" bIns="0">
-            <a:spAutoFit/>
-          </a:bodyPr>
-          <a:lstStyle/>
-          <a:p>
-            <a:pPr algn="l">
-              <a:lnSpc>
-                <a:spcPct val="105000"/>
-              </a:lnSpc>
-              <a:spcAft>
-                <a:spcPts val="400"/>
-              </a:spcAft>
-            </a:pPr>
-            <a:r>
-              <a:rPr sz="1150" b="0" i="1">
-                <a:solidFill>
-                  <a:srgbClr val="C9D2E3"/>
-                </a:solidFill>
-                <a:latin typeface="Arial"/>
-              </a:rPr>
-              <a:t>One grade of return = the reason to wait.</a:t>
-            </a:r>
-          </a:p>
-        </p:txBody>
-      </p:sp>
-      <p:sp>
-        <p:nvSpPr>
-          <p:cNvPr id="15" name="TextBox 14"/>
+              <a:rPr sz="1400" b="1" i="1">
+                <a:solidFill>
+                  <a:srgbClr val="EAF0F8"/>
+                </a:solidFill>
+                <a:latin typeface="Arial"/>
+              </a:rPr>
+              <a:t>Keep the arms. Cash the outfield. </a:t>
+            </a:r>
+            <a:r>
+              <a:rPr sz="1400" b="0" i="1">
+                <a:solidFill>
+                  <a:srgbClr val="93A0B6"/>
+                </a:solidFill>
+                <a:latin typeface="Arial"/>
+              </a:rPr>
+              <a:t>Build the 2027 lineup, don't rent the 2026 one.</a:t>
+            </a:r>
+          </a:p>
+        </p:txBody>
+      </p:sp>
+      <p:sp>
+        <p:nvSpPr>
+          <p:cNvPr id="18" name="TextBox 17"/>
           <p:cNvSpPr txBox="1"/>
           <p:nvPr/>
         </p:nvSpPr>
@@ -8202,6 +8036,786 @@
 </file>
 
 <file path=ppt/slides/slide17.xml><?xml version="1.0" encoding="utf-8"?>
+<p:sld xmlns:a="http://schemas.openxmlformats.org/drawingml/2006/main" xmlns:p="http://schemas.openxmlformats.org/presentationml/2006/main" xmlns:r="http://schemas.openxmlformats.org/officeDocument/2006/relationships">
+  <p:cSld>
+    <p:bg>
+      <p:bgPr>
+        <a:solidFill>
+          <a:srgbClr val="0B1220"/>
+        </a:solidFill>
+        <a:effectLst/>
+      </p:bgPr>
+    </p:bg>
+    <p:spTree>
+      <p:nvGrpSpPr>
+        <p:cNvPr id="1" name=""/>
+        <p:cNvGrpSpPr/>
+        <p:nvPr/>
+      </p:nvGrpSpPr>
+      <p:grpSpPr/>
+      <p:sp>
+        <p:nvSpPr>
+          <p:cNvPr id="2" name="TextBox 1"/>
+          <p:cNvSpPr txBox="1"/>
+          <p:nvPr/>
+        </p:nvSpPr>
+        <p:spPr>
+          <a:xfrm>
+            <a:off x="566928" y="384048"/>
+            <a:ext cx="10058400" cy="274320"/>
+          </a:xfrm>
+          <a:prstGeom prst="rect">
+            <a:avLst/>
+          </a:prstGeom>
+          <a:noFill/>
+        </p:spPr>
+        <p:txBody>
+          <a:bodyPr wrap="square" anchor="t" lIns="0" rIns="0" tIns="0" bIns="0">
+            <a:spAutoFit/>
+          </a:bodyPr>
+          <a:lstStyle/>
+          <a:p>
+            <a:pPr algn="l">
+              <a:lnSpc>
+                <a:spcPct val="100000"/>
+              </a:lnSpc>
+              <a:spcAft>
+                <a:spcPts val="0"/>
+              </a:spcAft>
+            </a:pPr>
+            <a:r>
+              <a:rPr sz="1200" b="1" i="0">
+                <a:solidFill>
+                  <a:srgbClr val="E8615A"/>
+                </a:solidFill>
+                <a:latin typeface="Courier New"/>
+              </a:rPr>
+              <a:t>// THE SEQUENCE</a:t>
+            </a:r>
+          </a:p>
+        </p:txBody>
+      </p:sp>
+      <p:sp>
+        <p:nvSpPr>
+          <p:cNvPr id="3" name="TextBox 2"/>
+          <p:cNvSpPr txBox="1"/>
+          <p:nvPr/>
+        </p:nvSpPr>
+        <p:spPr>
+          <a:xfrm>
+            <a:off x="566928" y="658368"/>
+            <a:ext cx="11064240" cy="868680"/>
+          </a:xfrm>
+          <a:prstGeom prst="rect">
+            <a:avLst/>
+          </a:prstGeom>
+          <a:noFill/>
+        </p:spPr>
+        <p:txBody>
+          <a:bodyPr wrap="square" anchor="t" lIns="0" rIns="0" tIns="0" bIns="0">
+            <a:spAutoFit/>
+          </a:bodyPr>
+          <a:lstStyle/>
+          <a:p>
+            <a:pPr algn="l">
+              <a:lnSpc>
+                <a:spcPct val="100000"/>
+              </a:lnSpc>
+              <a:spcAft>
+                <a:spcPts val="0"/>
+              </a:spcAft>
+            </a:pPr>
+            <a:r>
+              <a:rPr sz="3000" b="1" i="0">
+                <a:solidFill>
+                  <a:srgbClr val="EAF0F8"/>
+                </a:solidFill>
+                <a:latin typeface="Arial"/>
+              </a:rPr>
+              <a:t>Buy now, decide on Duran in the winter</a:t>
+            </a:r>
+          </a:p>
+        </p:txBody>
+      </p:sp>
+      <p:sp>
+        <p:nvSpPr>
+          <p:cNvPr id="4" name="Rounded Rectangle 3"/>
+          <p:cNvSpPr/>
+          <p:nvPr/>
+        </p:nvSpPr>
+        <p:spPr>
+          <a:xfrm>
+            <a:off x="640080" y="1801368"/>
+            <a:ext cx="457200" cy="457200"/>
+          </a:xfrm>
+          <a:prstGeom prst="roundRect">
+            <a:avLst>
+              <a:gd name="adj" fmla="val 18000"/>
+            </a:avLst>
+          </a:prstGeom>
+          <a:solidFill>
+            <a:srgbClr val="E8615A"/>
+          </a:solidFill>
+          <a:ln>
+            <a:noFill/>
+          </a:ln>
+          <a:effectLst/>
+        </p:spPr>
+        <p:style>
+          <a:lnRef idx="1">
+            <a:schemeClr val="accent1"/>
+          </a:lnRef>
+          <a:fillRef idx="3">
+            <a:schemeClr val="accent1"/>
+          </a:fillRef>
+          <a:effectRef idx="2">
+            <a:schemeClr val="accent1"/>
+          </a:effectRef>
+          <a:fontRef idx="minor">
+            <a:schemeClr val="lt1"/>
+          </a:fontRef>
+        </p:style>
+        <p:txBody>
+          <a:bodyPr rtlCol="0" anchor="ctr" wrap="none"/>
+          <a:lstStyle/>
+          <a:p>
+            <a:pPr algn="ctr"/>
+            <a:r>
+              <a:rPr sz="1800" b="1">
+                <a:solidFill>
+                  <a:srgbClr val="0B1220"/>
+                </a:solidFill>
+                <a:latin typeface="Courier New"/>
+              </a:rPr>
+              <a:t>1</a:t>
+            </a:r>
+          </a:p>
+        </p:txBody>
+      </p:sp>
+      <p:sp>
+        <p:nvSpPr>
+          <p:cNvPr id="5" name="TextBox 4"/>
+          <p:cNvSpPr txBox="1"/>
+          <p:nvPr/>
+        </p:nvSpPr>
+        <p:spPr>
+          <a:xfrm>
+            <a:off x="1280160" y="1783080"/>
+            <a:ext cx="6126480" cy="1005840"/>
+          </a:xfrm>
+          <a:prstGeom prst="rect">
+            <a:avLst/>
+          </a:prstGeom>
+          <a:noFill/>
+        </p:spPr>
+        <p:txBody>
+          <a:bodyPr wrap="square" anchor="t" lIns="0" rIns="0" tIns="0" bIns="0">
+            <a:spAutoFit/>
+          </a:bodyPr>
+          <a:lstStyle/>
+          <a:p>
+            <a:pPr algn="l">
+              <a:lnSpc>
+                <a:spcPct val="108000"/>
+              </a:lnSpc>
+              <a:spcAft>
+                <a:spcPts val="200"/>
+              </a:spcAft>
+            </a:pPr>
+            <a:r>
+              <a:rPr sz="1700" b="1" i="0">
+                <a:solidFill>
+                  <a:srgbClr val="EAF0F8"/>
+                </a:solidFill>
+                <a:latin typeface="Arial"/>
+              </a:rPr>
+              <a:t>At the deadline: buy targeted</a:t>
+            </a:r>
+          </a:p>
+          <a:p>
+            <a:pPr algn="l">
+              <a:lnSpc>
+                <a:spcPct val="108000"/>
+              </a:lnSpc>
+              <a:spcAft>
+                <a:spcPts val="200"/>
+              </a:spcAft>
+            </a:pPr>
+            <a:r>
+              <a:rPr sz="1350" b="0" i="0">
+                <a:solidFill>
+                  <a:srgbClr val="93A0B6"/>
+                </a:solidFill>
+                <a:latin typeface="Arial"/>
+              </a:rPr>
+              <a:t>A controllable infield bat and a reliever, funded from the pitching surplus. Keep the vets, they're playoff innings now.</a:t>
+            </a:r>
+          </a:p>
+        </p:txBody>
+      </p:sp>
+      <p:sp>
+        <p:nvSpPr>
+          <p:cNvPr id="6" name="Rounded Rectangle 5"/>
+          <p:cNvSpPr/>
+          <p:nvPr/>
+        </p:nvSpPr>
+        <p:spPr>
+          <a:xfrm>
+            <a:off x="640080" y="2971800"/>
+            <a:ext cx="457200" cy="457200"/>
+          </a:xfrm>
+          <a:prstGeom prst="roundRect">
+            <a:avLst>
+              <a:gd name="adj" fmla="val 18000"/>
+            </a:avLst>
+          </a:prstGeom>
+          <a:solidFill>
+            <a:srgbClr val="E8615A"/>
+          </a:solidFill>
+          <a:ln>
+            <a:noFill/>
+          </a:ln>
+          <a:effectLst/>
+        </p:spPr>
+        <p:style>
+          <a:lnRef idx="1">
+            <a:schemeClr val="accent1"/>
+          </a:lnRef>
+          <a:fillRef idx="3">
+            <a:schemeClr val="accent1"/>
+          </a:fillRef>
+          <a:effectRef idx="2">
+            <a:schemeClr val="accent1"/>
+          </a:effectRef>
+          <a:fontRef idx="minor">
+            <a:schemeClr val="lt1"/>
+          </a:fontRef>
+        </p:style>
+        <p:txBody>
+          <a:bodyPr rtlCol="0" anchor="ctr" wrap="none"/>
+          <a:lstStyle/>
+          <a:p>
+            <a:pPr algn="ctr"/>
+            <a:r>
+              <a:rPr sz="1800" b="1">
+                <a:solidFill>
+                  <a:srgbClr val="0B1220"/>
+                </a:solidFill>
+                <a:latin typeface="Courier New"/>
+              </a:rPr>
+              <a:t>2</a:t>
+            </a:r>
+          </a:p>
+        </p:txBody>
+      </p:sp>
+      <p:sp>
+        <p:nvSpPr>
+          <p:cNvPr id="7" name="TextBox 6"/>
+          <p:cNvSpPr txBox="1"/>
+          <p:nvPr/>
+        </p:nvSpPr>
+        <p:spPr>
+          <a:xfrm>
+            <a:off x="1280160" y="2953512"/>
+            <a:ext cx="6126480" cy="1005840"/>
+          </a:xfrm>
+          <a:prstGeom prst="rect">
+            <a:avLst/>
+          </a:prstGeom>
+          <a:noFill/>
+        </p:spPr>
+        <p:txBody>
+          <a:bodyPr wrap="square" anchor="t" lIns="0" rIns="0" tIns="0" bIns="0">
+            <a:spAutoFit/>
+          </a:bodyPr>
+          <a:lstStyle/>
+          <a:p>
+            <a:pPr algn="l">
+              <a:lnSpc>
+                <a:spcPct val="108000"/>
+              </a:lnSpc>
+              <a:spcAft>
+                <a:spcPts val="200"/>
+              </a:spcAft>
+            </a:pPr>
+            <a:r>
+              <a:rPr sz="1700" b="1" i="0">
+                <a:solidFill>
+                  <a:srgbClr val="EAF0F8"/>
+                </a:solidFill>
+                <a:latin typeface="Arial"/>
+              </a:rPr>
+              <a:t>Hold Duran through August</a:t>
+            </a:r>
+          </a:p>
+          <a:p>
+            <a:pPr algn="l">
+              <a:lnSpc>
+                <a:spcPct val="108000"/>
+              </a:lnSpc>
+              <a:spcAft>
+                <a:spcPts val="200"/>
+              </a:spcAft>
+            </a:pPr>
+            <a:r>
+              <a:rPr sz="1350" b="0" i="0">
+                <a:solidFill>
+                  <a:srgbClr val="93A0B6"/>
+                </a:solidFill>
+                <a:latin typeface="Arial"/>
+              </a:rPr>
+              <a:t>His value is at its nadir and his July contact quality (~.35 xwOBA) is already surging. Selling now cashes the slump.</a:t>
+            </a:r>
+          </a:p>
+        </p:txBody>
+      </p:sp>
+      <p:sp>
+        <p:nvSpPr>
+          <p:cNvPr id="8" name="Rounded Rectangle 7"/>
+          <p:cNvSpPr/>
+          <p:nvPr/>
+        </p:nvSpPr>
+        <p:spPr>
+          <a:xfrm>
+            <a:off x="640080" y="4142231"/>
+            <a:ext cx="457200" cy="457200"/>
+          </a:xfrm>
+          <a:prstGeom prst="roundRect">
+            <a:avLst>
+              <a:gd name="adj" fmla="val 18000"/>
+            </a:avLst>
+          </a:prstGeom>
+          <a:solidFill>
+            <a:srgbClr val="E8615A"/>
+          </a:solidFill>
+          <a:ln>
+            <a:noFill/>
+          </a:ln>
+          <a:effectLst/>
+        </p:spPr>
+        <p:style>
+          <a:lnRef idx="1">
+            <a:schemeClr val="accent1"/>
+          </a:lnRef>
+          <a:fillRef idx="3">
+            <a:schemeClr val="accent1"/>
+          </a:fillRef>
+          <a:effectRef idx="2">
+            <a:schemeClr val="accent1"/>
+          </a:effectRef>
+          <a:fontRef idx="minor">
+            <a:schemeClr val="lt1"/>
+          </a:fontRef>
+        </p:style>
+        <p:txBody>
+          <a:bodyPr rtlCol="0" anchor="ctr" wrap="none"/>
+          <a:lstStyle/>
+          <a:p>
+            <a:pPr algn="ctr"/>
+            <a:r>
+              <a:rPr sz="1800" b="1">
+                <a:solidFill>
+                  <a:srgbClr val="0B1220"/>
+                </a:solidFill>
+                <a:latin typeface="Courier New"/>
+              </a:rPr>
+              <a:t>3</a:t>
+            </a:r>
+          </a:p>
+        </p:txBody>
+      </p:sp>
+      <p:sp>
+        <p:nvSpPr>
+          <p:cNvPr id="9" name="TextBox 8"/>
+          <p:cNvSpPr txBox="1"/>
+          <p:nvPr/>
+        </p:nvSpPr>
+        <p:spPr>
+          <a:xfrm>
+            <a:off x="1280160" y="4123944"/>
+            <a:ext cx="6126480" cy="1005840"/>
+          </a:xfrm>
+          <a:prstGeom prst="rect">
+            <a:avLst/>
+          </a:prstGeom>
+          <a:noFill/>
+        </p:spPr>
+        <p:txBody>
+          <a:bodyPr wrap="square" anchor="t" lIns="0" rIns="0" tIns="0" bIns="0">
+            <a:spAutoFit/>
+          </a:bodyPr>
+          <a:lstStyle/>
+          <a:p>
+            <a:pPr algn="l">
+              <a:lnSpc>
+                <a:spcPct val="108000"/>
+              </a:lnSpc>
+              <a:spcAft>
+                <a:spcPts val="200"/>
+              </a:spcAft>
+            </a:pPr>
+            <a:r>
+              <a:rPr sz="1700" b="1" i="0">
+                <a:solidFill>
+                  <a:srgbClr val="EAF0F8"/>
+                </a:solidFill>
+                <a:latin typeface="Arial"/>
+              </a:rPr>
+              <a:t>Winter: re-price, then choose</a:t>
+            </a:r>
+          </a:p>
+          <a:p>
+            <a:pPr algn="l">
+              <a:lnSpc>
+                <a:spcPct val="108000"/>
+              </a:lnSpc>
+              <a:spcAft>
+                <a:spcPts val="200"/>
+              </a:spcAft>
+            </a:pPr>
+            <a:r>
+              <a:rPr sz="1350" b="0" i="0">
+                <a:solidFill>
+                  <a:srgbClr val="93A0B6"/>
+                </a:solidFill>
+                <a:latin typeface="Arial"/>
+              </a:rPr>
+              <a:t>Anthony healthy, jam returns. Rebound confirmed → extend or trade at full price. Erosion persists → sell at market. Either way, the 2027 OF is Anthony / Rafaela / Abreu.</a:t>
+            </a:r>
+          </a:p>
+        </p:txBody>
+      </p:sp>
+      <p:sp>
+        <p:nvSpPr>
+          <p:cNvPr id="10" name="Rounded Rectangle 9"/>
+          <p:cNvSpPr/>
+          <p:nvPr/>
+        </p:nvSpPr>
+        <p:spPr>
+          <a:xfrm>
+            <a:off x="7818120" y="1783080"/>
+            <a:ext cx="3794760" cy="3337560"/>
+          </a:xfrm>
+          <a:prstGeom prst="roundRect">
+            <a:avLst>
+              <a:gd name="adj" fmla="val 6000"/>
+            </a:avLst>
+          </a:prstGeom>
+          <a:solidFill>
+            <a:srgbClr val="1A2740"/>
+          </a:solidFill>
+          <a:ln>
+            <a:noFill/>
+          </a:ln>
+          <a:effectLst/>
+        </p:spPr>
+        <p:style>
+          <a:lnRef idx="1">
+            <a:schemeClr val="accent1"/>
+          </a:lnRef>
+          <a:fillRef idx="3">
+            <a:schemeClr val="accent1"/>
+          </a:fillRef>
+          <a:effectRef idx="2">
+            <a:schemeClr val="accent1"/>
+          </a:effectRef>
+          <a:fontRef idx="minor">
+            <a:schemeClr val="lt1"/>
+          </a:fontRef>
+        </p:style>
+        <p:txBody>
+          <a:bodyPr rtlCol="0" anchor="ctr"/>
+          <a:lstStyle/>
+          <a:p>
+            <a:pPr algn="ctr"/>
+          </a:p>
+        </p:txBody>
+      </p:sp>
+      <p:sp>
+        <p:nvSpPr>
+          <p:cNvPr id="11" name="TextBox 10"/>
+          <p:cNvSpPr txBox="1"/>
+          <p:nvPr/>
+        </p:nvSpPr>
+        <p:spPr>
+          <a:xfrm>
+            <a:off x="8092440" y="2011680"/>
+            <a:ext cx="3291840" cy="365760"/>
+          </a:xfrm>
+          <a:prstGeom prst="rect">
+            <a:avLst/>
+          </a:prstGeom>
+          <a:noFill/>
+        </p:spPr>
+        <p:txBody>
+          <a:bodyPr wrap="square" anchor="t" lIns="0" rIns="0" tIns="0" bIns="0">
+            <a:spAutoFit/>
+          </a:bodyPr>
+          <a:lstStyle/>
+          <a:p>
+            <a:pPr algn="l">
+              <a:lnSpc>
+                <a:spcPct val="100000"/>
+              </a:lnSpc>
+              <a:spcAft>
+                <a:spcPts val="0"/>
+              </a:spcAft>
+            </a:pPr>
+            <a:r>
+              <a:rPr sz="1250" b="1" i="0">
+                <a:solidFill>
+                  <a:srgbClr val="C9D2E3"/>
+                </a:solidFill>
+                <a:latin typeface="Arial"/>
+              </a:rPr>
+              <a:t>THE RETURN</a:t>
+            </a:r>
+          </a:p>
+        </p:txBody>
+      </p:sp>
+      <p:sp>
+        <p:nvSpPr>
+          <p:cNvPr id="12" name="TextBox 11"/>
+          <p:cNvSpPr txBox="1"/>
+          <p:nvPr/>
+        </p:nvSpPr>
+        <p:spPr>
+          <a:xfrm>
+            <a:off x="8092440" y="2487168"/>
+            <a:ext cx="3291840" cy="914400"/>
+          </a:xfrm>
+          <a:prstGeom prst="rect">
+            <a:avLst/>
+          </a:prstGeom>
+          <a:noFill/>
+        </p:spPr>
+        <p:txBody>
+          <a:bodyPr wrap="square" anchor="t" lIns="0" rIns="0" tIns="0" bIns="0">
+            <a:spAutoFit/>
+          </a:bodyPr>
+          <a:lstStyle/>
+          <a:p>
+            <a:pPr algn="l">
+              <a:lnSpc>
+                <a:spcPct val="105000"/>
+              </a:lnSpc>
+              <a:spcAft>
+                <a:spcPts val="200"/>
+              </a:spcAft>
+            </a:pPr>
+            <a:r>
+              <a:rPr sz="1300" b="1" i="0">
+                <a:solidFill>
+                  <a:srgbClr val="F0B8BC"/>
+                </a:solidFill>
+                <a:latin typeface="Arial"/>
+              </a:rPr>
+              <a:t>Sell now (nadir)</a:t>
+            </a:r>
+          </a:p>
+          <a:p>
+            <a:pPr algn="l">
+              <a:lnSpc>
+                <a:spcPct val="105000"/>
+              </a:lnSpc>
+              <a:spcAft>
+                <a:spcPts val="200"/>
+              </a:spcAft>
+            </a:pPr>
+            <a:r>
+              <a:rPr sz="1400" b="0" i="0">
+                <a:solidFill>
+                  <a:srgbClr val="F4F7FC"/>
+                </a:solidFill>
+                <a:latin typeface="Arial"/>
+              </a:rPr>
+              <a:t>~$10–15M · a 45-FV bat</a:t>
+            </a:r>
+          </a:p>
+        </p:txBody>
+      </p:sp>
+      <p:sp>
+        <p:nvSpPr>
+          <p:cNvPr id="13" name="TextBox 12"/>
+          <p:cNvSpPr txBox="1"/>
+          <p:nvPr/>
+        </p:nvSpPr>
+        <p:spPr>
+          <a:xfrm>
+            <a:off x="8092440" y="3520440"/>
+            <a:ext cx="3291840" cy="1005840"/>
+          </a:xfrm>
+          <a:prstGeom prst="rect">
+            <a:avLst/>
+          </a:prstGeom>
+          <a:noFill/>
+        </p:spPr>
+        <p:txBody>
+          <a:bodyPr wrap="square" anchor="t" lIns="0" rIns="0" tIns="0" bIns="0">
+            <a:spAutoFit/>
+          </a:bodyPr>
+          <a:lstStyle/>
+          <a:p>
+            <a:pPr algn="l">
+              <a:lnSpc>
+                <a:spcPct val="105000"/>
+              </a:lnSpc>
+              <a:spcAft>
+                <a:spcPts val="200"/>
+              </a:spcAft>
+            </a:pPr>
+            <a:r>
+              <a:rPr sz="1300" b="1" i="0">
+                <a:solidFill>
+                  <a:srgbClr val="A9E5B5"/>
+                </a:solidFill>
+                <a:latin typeface="Arial"/>
+              </a:rPr>
+              <a:t>Sell after rebound</a:t>
+            </a:r>
+          </a:p>
+          <a:p>
+            <a:pPr algn="l">
+              <a:lnSpc>
+                <a:spcPct val="105000"/>
+              </a:lnSpc>
+              <a:spcAft>
+                <a:spcPts val="200"/>
+              </a:spcAft>
+            </a:pPr>
+            <a:r>
+              <a:rPr sz="1400" b="0" i="0">
+                <a:solidFill>
+                  <a:srgbClr val="F4F7FC"/>
+                </a:solidFill>
+                <a:latin typeface="Arial"/>
+              </a:rPr>
+              <a:t>~$28M · a 50-FV, top-100</a:t>
+            </a:r>
+          </a:p>
+          <a:p>
+            <a:pPr algn="l">
+              <a:lnSpc>
+                <a:spcPct val="105000"/>
+              </a:lnSpc>
+              <a:spcAft>
+                <a:spcPts val="200"/>
+              </a:spcAft>
+            </a:pPr>
+            <a:r>
+              <a:rPr sz="1400" b="0" i="0">
+                <a:solidFill>
+                  <a:srgbClr val="F4F7FC"/>
+                </a:solidFill>
+                <a:latin typeface="Arial"/>
+              </a:rPr>
+              <a:t>controllable talent</a:t>
+            </a:r>
+          </a:p>
+        </p:txBody>
+      </p:sp>
+      <p:sp>
+        <p:nvSpPr>
+          <p:cNvPr id="14" name="TextBox 13"/>
+          <p:cNvSpPr txBox="1"/>
+          <p:nvPr/>
+        </p:nvSpPr>
+        <p:spPr>
+          <a:xfrm>
+            <a:off x="8092440" y="4617720"/>
+            <a:ext cx="3291840" cy="457200"/>
+          </a:xfrm>
+          <a:prstGeom prst="rect">
+            <a:avLst/>
+          </a:prstGeom>
+          <a:noFill/>
+        </p:spPr>
+        <p:txBody>
+          <a:bodyPr wrap="square" anchor="t" lIns="0" rIns="0" tIns="0" bIns="0">
+            <a:spAutoFit/>
+          </a:bodyPr>
+          <a:lstStyle/>
+          <a:p>
+            <a:pPr algn="l">
+              <a:lnSpc>
+                <a:spcPct val="105000"/>
+              </a:lnSpc>
+              <a:spcAft>
+                <a:spcPts val="400"/>
+              </a:spcAft>
+            </a:pPr>
+            <a:r>
+              <a:rPr sz="1150" b="0" i="1">
+                <a:solidFill>
+                  <a:srgbClr val="C9D2E3"/>
+                </a:solidFill>
+                <a:latin typeface="Arial"/>
+              </a:rPr>
+              <a:t>One grade of return = the reason to wait.</a:t>
+            </a:r>
+          </a:p>
+        </p:txBody>
+      </p:sp>
+      <p:sp>
+        <p:nvSpPr>
+          <p:cNvPr id="15" name="TextBox 14"/>
+          <p:cNvSpPr txBox="1"/>
+          <p:nvPr/>
+        </p:nvSpPr>
+        <p:spPr>
+          <a:xfrm>
+            <a:off x="566928" y="6510528"/>
+            <a:ext cx="11064240" cy="274320"/>
+          </a:xfrm>
+          <a:prstGeom prst="rect">
+            <a:avLst/>
+          </a:prstGeom>
+          <a:noFill/>
+        </p:spPr>
+        <p:txBody>
+          <a:bodyPr wrap="square" anchor="t" lIns="0" rIns="0" tIns="0" bIns="0">
+            <a:spAutoFit/>
+          </a:bodyPr>
+          <a:lstStyle/>
+          <a:p>
+            <a:pPr algn="l">
+              <a:lnSpc>
+                <a:spcPct val="100000"/>
+              </a:lnSpc>
+              <a:spcAft>
+                <a:spcPts val="0"/>
+              </a:spcAft>
+            </a:pPr>
+            <a:r>
+              <a:rPr sz="800" b="1" i="0">
+                <a:solidFill>
+                  <a:srgbClr val="E8615A"/>
+                </a:solidFill>
+                <a:latin typeface="Courier New"/>
+              </a:rPr>
+              <a:t>BOS // OUTFIELD STRATEGY</a:t>
+            </a:r>
+            <a:r>
+              <a:rPr sz="800" b="0" i="0">
+                <a:solidFill>
+                  <a:srgbClr val="5E6B84"/>
+                </a:solidFill>
+                <a:latin typeface="Courier New"/>
+              </a:rPr>
+              <a:t>   STATCAST / FANGRAPHS / MLB STATS API / SPOTRAC · JULY 2026</a:t>
+            </a:r>
+          </a:p>
+        </p:txBody>
+      </p:sp>
+    </p:spTree>
+  </p:cSld>
+  <p:clrMapOvr>
+    <a:masterClrMapping/>
+  </p:clrMapOvr>
+</p:sld>
+</file>
+
+<file path=ppt/slides/slide18.xml><?xml version="1.0" encoding="utf-8"?>
 <p:sld xmlns:a="http://schemas.openxmlformats.org/drawingml/2006/main" xmlns:p="http://schemas.openxmlformats.org/presentationml/2006/main" xmlns:r="http://schemas.openxmlformats.org/officeDocument/2006/relationships">
   <p:cSld>
     <p:bg>

--- a/outputs/Red_Sox_Trade_Deadline.pptx
+++ b/outputs/Red_Sox_Trade_Deadline.pptx
@@ -4086,7 +4086,7 @@
         <p:spPr>
           <a:xfrm>
             <a:off x="365760" y="1600200"/>
-            <a:ext cx="7315200" cy="3546849"/>
+            <a:ext cx="7315200" cy="2776987"/>
           </a:xfrm>
           <a:prstGeom prst="rect">
             <a:avLst/>
@@ -4176,7 +4176,7 @@
                 </a:solidFill>
                 <a:latin typeface="Arial"/>
               </a:rPr>
-              <a:t>15 AAAA contributors</a:t>
+              <a:t>5 AAAA contributors on the roster</a:t>
             </a:r>
           </a:p>
           <a:p>
@@ -4195,7 +4195,7 @@
                 </a:solidFill>
                 <a:latin typeface="Arial"/>
               </a:rPr>
-              <a:t>Waiver claims, up-down arms and career minor-leaguers holding real roles, +3.4 WAR combined.</a:t>
+              <a:t>Waiver claims, up-down arms and career minor-leaguers holding real roles, +1.3 WAR combined.</a:t>
             </a:r>
           </a:p>
         </p:txBody>
@@ -4283,7 +4283,7 @@
                 </a:solidFill>
                 <a:latin typeface="Arial"/>
               </a:rPr>
-              <a:t>4 career bests, 4 rookies</a:t>
+              <a:t>1 career best, 2 rookies</a:t>
             </a:r>
           </a:p>
           <a:p>
@@ -4302,7 +4302,7 @@
                 </a:solidFill>
                 <a:latin typeface="Arial"/>
               </a:rPr>
-              <a:t>Most of the vets are beating every season they've ever had; the rookies have no baseline at all.</a:t>
+              <a:t>The vets are beating their own track records; the rookies have no baseline at all.</a:t>
             </a:r>
           </a:p>
         </p:txBody>

--- a/outputs/Red_Sox_Trade_Deadline.pptx
+++ b/outputs/Red_Sox_Trade_Deadline.pptx
@@ -4086,7 +4086,7 @@
         <p:spPr>
           <a:xfrm>
             <a:off x="365760" y="1600200"/>
-            <a:ext cx="7315200" cy="2776987"/>
+            <a:ext cx="7315200" cy="3257028"/>
           </a:xfrm>
           <a:prstGeom prst="rect">
             <a:avLst/>
@@ -4101,8 +4101,8 @@
         </p:nvSpPr>
         <p:spPr>
           <a:xfrm>
-            <a:off x="8001000" y="1773936"/>
-            <a:ext cx="146304" cy="146304"/>
+            <a:off x="8001000" y="1664208"/>
+            <a:ext cx="137160" cy="137160"/>
           </a:xfrm>
           <a:prstGeom prst="roundRect">
             <a:avLst>
@@ -4147,30 +4147,30 @@
         </p:nvSpPr>
         <p:spPr>
           <a:xfrm>
-            <a:off x="8293608" y="1737360"/>
-            <a:ext cx="3749039" cy="1097280"/>
-          </a:xfrm>
-          <a:prstGeom prst="rect">
-            <a:avLst/>
-          </a:prstGeom>
-          <a:noFill/>
-        </p:spPr>
-        <p:txBody>
-          <a:bodyPr wrap="square" anchor="t" lIns="0" rIns="0" tIns="0" bIns="0">
-            <a:spAutoFit/>
-          </a:bodyPr>
-          <a:lstStyle/>
-          <a:p>
-            <a:pPr algn="l">
-              <a:lnSpc>
-                <a:spcPct val="107000"/>
-              </a:lnSpc>
-              <a:spcAft>
-                <a:spcPts val="200"/>
-              </a:spcAft>
-            </a:pPr>
-            <a:r>
-              <a:rPr sz="1350" b="1" i="0">
+            <a:off x="8293608" y="1627632"/>
+            <a:ext cx="3749039" cy="1005840"/>
+          </a:xfrm>
+          <a:prstGeom prst="rect">
+            <a:avLst/>
+          </a:prstGeom>
+          <a:noFill/>
+        </p:spPr>
+        <p:txBody>
+          <a:bodyPr wrap="square" anchor="t" lIns="0" rIns="0" tIns="0" bIns="0">
+            <a:spAutoFit/>
+          </a:bodyPr>
+          <a:lstStyle/>
+          <a:p>
+            <a:pPr algn="l">
+              <a:lnSpc>
+                <a:spcPct val="105000"/>
+              </a:lnSpc>
+              <a:spcAft>
+                <a:spcPts val="100"/>
+              </a:spcAft>
+            </a:pPr>
+            <a:r>
+              <a:rPr sz="1250" b="1" i="0">
                 <a:solidFill>
                   <a:srgbClr val="EAF0F8"/>
                 </a:solidFill>
@@ -4182,14 +4182,14 @@
           <a:p>
             <a:pPr algn="l">
               <a:lnSpc>
-                <a:spcPct val="107000"/>
-              </a:lnSpc>
-              <a:spcAft>
-                <a:spcPts val="200"/>
-              </a:spcAft>
-            </a:pPr>
-            <a:r>
-              <a:rPr sz="1160" b="0" i="0">
+                <a:spcPct val="105000"/>
+              </a:lnSpc>
+              <a:spcAft>
+                <a:spcPts val="100"/>
+              </a:spcAft>
+            </a:pPr>
+            <a:r>
+              <a:rPr sz="1080" b="0" i="0">
                 <a:solidFill>
                   <a:srgbClr val="93A0B6"/>
                 </a:solidFill>
@@ -4208,8 +4208,8 @@
         </p:nvSpPr>
         <p:spPr>
           <a:xfrm>
-            <a:off x="8001000" y="2889504"/>
-            <a:ext cx="146304" cy="146304"/>
+            <a:off x="8001000" y="2633472"/>
+            <a:ext cx="137160" cy="137160"/>
           </a:xfrm>
           <a:prstGeom prst="roundRect">
             <a:avLst>
@@ -4254,30 +4254,30 @@
         </p:nvSpPr>
         <p:spPr>
           <a:xfrm>
-            <a:off x="8293608" y="2852928"/>
-            <a:ext cx="3749039" cy="1097280"/>
-          </a:xfrm>
-          <a:prstGeom prst="rect">
-            <a:avLst/>
-          </a:prstGeom>
-          <a:noFill/>
-        </p:spPr>
-        <p:txBody>
-          <a:bodyPr wrap="square" anchor="t" lIns="0" rIns="0" tIns="0" bIns="0">
-            <a:spAutoFit/>
-          </a:bodyPr>
-          <a:lstStyle/>
-          <a:p>
-            <a:pPr algn="l">
-              <a:lnSpc>
-                <a:spcPct val="107000"/>
-              </a:lnSpc>
-              <a:spcAft>
-                <a:spcPts val="200"/>
-              </a:spcAft>
-            </a:pPr>
-            <a:r>
-              <a:rPr sz="1350" b="1" i="0">
+            <a:off x="8293608" y="2596896"/>
+            <a:ext cx="3749039" cy="1005840"/>
+          </a:xfrm>
+          <a:prstGeom prst="rect">
+            <a:avLst/>
+          </a:prstGeom>
+          <a:noFill/>
+        </p:spPr>
+        <p:txBody>
+          <a:bodyPr wrap="square" anchor="t" lIns="0" rIns="0" tIns="0" bIns="0">
+            <a:spAutoFit/>
+          </a:bodyPr>
+          <a:lstStyle/>
+          <a:p>
+            <a:pPr algn="l">
+              <a:lnSpc>
+                <a:spcPct val="105000"/>
+              </a:lnSpc>
+              <a:spcAft>
+                <a:spcPts val="100"/>
+              </a:spcAft>
+            </a:pPr>
+            <a:r>
+              <a:rPr sz="1250" b="1" i="0">
                 <a:solidFill>
                   <a:srgbClr val="EAF0F8"/>
                 </a:solidFill>
@@ -4289,14 +4289,14 @@
           <a:p>
             <a:pPr algn="l">
               <a:lnSpc>
-                <a:spcPct val="107000"/>
-              </a:lnSpc>
-              <a:spcAft>
-                <a:spcPts val="200"/>
-              </a:spcAft>
-            </a:pPr>
-            <a:r>
-              <a:rPr sz="1160" b="0" i="0">
+                <a:spcPct val="105000"/>
+              </a:lnSpc>
+              <a:spcAft>
+                <a:spcPts val="100"/>
+              </a:spcAft>
+            </a:pPr>
+            <a:r>
+              <a:rPr sz="1080" b="0" i="0">
                 <a:solidFill>
                   <a:srgbClr val="93A0B6"/>
                 </a:solidFill>
@@ -4315,8 +4315,115 @@
         </p:nvSpPr>
         <p:spPr>
           <a:xfrm>
-            <a:off x="8001000" y="4005072"/>
-            <a:ext cx="146304" cy="146304"/>
+            <a:off x="8001000" y="3602736"/>
+            <a:ext cx="137160" cy="137160"/>
+          </a:xfrm>
+          <a:prstGeom prst="roundRect">
+            <a:avLst>
+              <a:gd name="adj" fmla="val 18000"/>
+            </a:avLst>
+          </a:prstGeom>
+          <a:solidFill>
+            <a:srgbClr val="5FB6D9"/>
+          </a:solidFill>
+          <a:ln>
+            <a:noFill/>
+          </a:ln>
+          <a:effectLst/>
+        </p:spPr>
+        <p:style>
+          <a:lnRef idx="1">
+            <a:schemeClr val="accent1"/>
+          </a:lnRef>
+          <a:fillRef idx="3">
+            <a:schemeClr val="accent1"/>
+          </a:fillRef>
+          <a:effectRef idx="2">
+            <a:schemeClr val="accent1"/>
+          </a:effectRef>
+          <a:fontRef idx="minor">
+            <a:schemeClr val="lt1"/>
+          </a:fontRef>
+        </p:style>
+        <p:txBody>
+          <a:bodyPr rtlCol="0" anchor="ctr"/>
+          <a:lstStyle/>
+          <a:p>
+            <a:pPr algn="ctr"/>
+          </a:p>
+        </p:txBody>
+      </p:sp>
+      <p:sp>
+        <p:nvSpPr>
+          <p:cNvPr id="10" name="TextBox 9"/>
+          <p:cNvSpPr txBox="1"/>
+          <p:nvPr/>
+        </p:nvSpPr>
+        <p:spPr>
+          <a:xfrm>
+            <a:off x="8293608" y="3566160"/>
+            <a:ext cx="3749039" cy="1005840"/>
+          </a:xfrm>
+          <a:prstGeom prst="rect">
+            <a:avLst/>
+          </a:prstGeom>
+          <a:noFill/>
+        </p:spPr>
+        <p:txBody>
+          <a:bodyPr wrap="square" anchor="t" lIns="0" rIns="0" tIns="0" bIns="0">
+            <a:spAutoFit/>
+          </a:bodyPr>
+          <a:lstStyle/>
+          <a:p>
+            <a:pPr algn="l">
+              <a:lnSpc>
+                <a:spcPct val="105000"/>
+              </a:lnSpc>
+              <a:spcAft>
+                <a:spcPts val="100"/>
+              </a:spcAft>
+            </a:pPr>
+            <a:r>
+              <a:rPr sz="1250" b="1" i="0">
+                <a:solidFill>
+                  <a:srgbClr val="EAF0F8"/>
+                </a:solidFill>
+                <a:latin typeface="Arial"/>
+              </a:rPr>
+              <a:t>The regulars are hot too</a:t>
+            </a:r>
+          </a:p>
+          <a:p>
+            <a:pPr algn="l">
+              <a:lnSpc>
+                <a:spcPct val="105000"/>
+              </a:lnSpc>
+              <a:spcAft>
+                <a:spcPts val="100"/>
+              </a:spcAft>
+            </a:pPr>
+            <a:r>
+              <a:rPr sz="1080" b="0" i="0">
+                <a:solidFill>
+                  <a:srgbClr val="93A0B6"/>
+                </a:solidFill>
+                <a:latin typeface="Arial"/>
+              </a:rPr>
+              <a:t>Same screen on the everyday lineup: Contreras +130 OPS pts, Rafaela +76 OPS pts. Expect good, not scorching, from here.</a:t>
+            </a:r>
+          </a:p>
+        </p:txBody>
+      </p:sp>
+      <p:sp>
+        <p:nvSpPr>
+          <p:cNvPr id="11" name="Rounded Rectangle 10"/>
+          <p:cNvSpPr/>
+          <p:nvPr/>
+        </p:nvSpPr>
+        <p:spPr>
+          <a:xfrm>
+            <a:off x="8001000" y="4572000"/>
+            <a:ext cx="137160" cy="137160"/>
           </a:xfrm>
           <a:prstGeom prst="roundRect">
             <a:avLst>
@@ -4355,36 +4462,36 @@
       </p:sp>
       <p:sp>
         <p:nvSpPr>
-          <p:cNvPr id="10" name="TextBox 9"/>
-          <p:cNvSpPr txBox="1"/>
-          <p:nvPr/>
-        </p:nvSpPr>
-        <p:spPr>
-          <a:xfrm>
-            <a:off x="8293608" y="3968496"/>
-            <a:ext cx="3749039" cy="1097280"/>
-          </a:xfrm>
-          <a:prstGeom prst="rect">
-            <a:avLst/>
-          </a:prstGeom>
-          <a:noFill/>
-        </p:spPr>
-        <p:txBody>
-          <a:bodyPr wrap="square" anchor="t" lIns="0" rIns="0" tIns="0" bIns="0">
-            <a:spAutoFit/>
-          </a:bodyPr>
-          <a:lstStyle/>
-          <a:p>
-            <a:pPr algn="l">
-              <a:lnSpc>
-                <a:spcPct val="107000"/>
-              </a:lnSpc>
-              <a:spcAft>
-                <a:spcPts val="200"/>
-              </a:spcAft>
-            </a:pPr>
-            <a:r>
-              <a:rPr sz="1350" b="1" i="0">
+          <p:cNvPr id="12" name="TextBox 11"/>
+          <p:cNvSpPr txBox="1"/>
+          <p:nvPr/>
+        </p:nvSpPr>
+        <p:spPr>
+          <a:xfrm>
+            <a:off x="8293608" y="4535424"/>
+            <a:ext cx="3749039" cy="1005840"/>
+          </a:xfrm>
+          <a:prstGeom prst="rect">
+            <a:avLst/>
+          </a:prstGeom>
+          <a:noFill/>
+        </p:spPr>
+        <p:txBody>
+          <a:bodyPr wrap="square" anchor="t" lIns="0" rIns="0" tIns="0" bIns="0">
+            <a:spAutoFit/>
+          </a:bodyPr>
+          <a:lstStyle/>
+          <a:p>
+            <a:pPr algn="l">
+              <a:lnSpc>
+                <a:spcPct val="105000"/>
+              </a:lnSpc>
+              <a:spcAft>
+                <a:spcPts val="100"/>
+              </a:spcAft>
+            </a:pPr>
+            <a:r>
+              <a:rPr sz="1250" b="1" i="0">
                 <a:solidFill>
                   <a:srgbClr val="EAF0F8"/>
                 </a:solidFill>
@@ -4396,34 +4503,34 @@
           <a:p>
             <a:pPr algn="l">
               <a:lnSpc>
-                <a:spcPct val="107000"/>
-              </a:lnSpc>
-              <a:spcAft>
-                <a:spcPts val="200"/>
-              </a:spcAft>
-            </a:pPr>
-            <a:r>
-              <a:rPr sz="1160" b="0" i="0">
+                <a:spcPct val="105000"/>
+              </a:lnSpc>
+              <a:spcAft>
+                <a:spcPts val="100"/>
+              </a:spcAft>
+            </a:pPr>
+            <a:r>
+              <a:rPr sz="1080" b="0" i="0">
                 <a:solidFill>
                   <a:srgbClr val="93A0B6"/>
                 </a:solidFill>
                 <a:latin typeface="Arial"/>
               </a:rPr>
-              <a:t>2016-25, 100 hitter and 198 reliever cases like these: the median journeyman kept only 39% of a career-best first half (fig. 20).</a:t>
-            </a:r>
-          </a:p>
-        </p:txBody>
-      </p:sp>
-      <p:sp>
-        <p:nvSpPr>
-          <p:cNvPr id="11" name="Rounded Rectangle 10"/>
+              <a:t>2016-25, 100 hitter and 198 reliever cases: the median journeyman kept only 39% of a career-best first half (fig. 20).</a:t>
+            </a:r>
+          </a:p>
+        </p:txBody>
+      </p:sp>
+      <p:sp>
+        <p:nvSpPr>
+          <p:cNvPr id="13" name="Rounded Rectangle 12"/>
           <p:cNvSpPr/>
           <p:nvPr/>
         </p:nvSpPr>
         <p:spPr>
           <a:xfrm>
-            <a:off x="8001000" y="5120640"/>
-            <a:ext cx="146304" cy="146304"/>
+            <a:off x="8001000" y="5541264"/>
+            <a:ext cx="137160" cy="137160"/>
           </a:xfrm>
           <a:prstGeom prst="roundRect">
             <a:avLst>
@@ -4462,36 +4569,36 @@
       </p:sp>
       <p:sp>
         <p:nvSpPr>
-          <p:cNvPr id="12" name="TextBox 11"/>
-          <p:cNvSpPr txBox="1"/>
-          <p:nvPr/>
-        </p:nvSpPr>
-        <p:spPr>
-          <a:xfrm>
-            <a:off x="8293608" y="5084064"/>
-            <a:ext cx="3749039" cy="1097280"/>
-          </a:xfrm>
-          <a:prstGeom prst="rect">
-            <a:avLst/>
-          </a:prstGeom>
-          <a:noFill/>
-        </p:spPr>
-        <p:txBody>
-          <a:bodyPr wrap="square" anchor="t" lIns="0" rIns="0" tIns="0" bIns="0">
-            <a:spAutoFit/>
-          </a:bodyPr>
-          <a:lstStyle/>
-          <a:p>
-            <a:pPr algn="l">
-              <a:lnSpc>
-                <a:spcPct val="107000"/>
-              </a:lnSpc>
-              <a:spcAft>
-                <a:spcPts val="200"/>
-              </a:spcAft>
-            </a:pPr>
-            <a:r>
-              <a:rPr sz="1350" b="1" i="0">
+          <p:cNvPr id="14" name="TextBox 13"/>
+          <p:cNvSpPr txBox="1"/>
+          <p:nvPr/>
+        </p:nvSpPr>
+        <p:spPr>
+          <a:xfrm>
+            <a:off x="8293608" y="5504688"/>
+            <a:ext cx="3749039" cy="1005840"/>
+          </a:xfrm>
+          <a:prstGeom prst="rect">
+            <a:avLst/>
+          </a:prstGeom>
+          <a:noFill/>
+        </p:spPr>
+        <p:txBody>
+          <a:bodyPr wrap="square" anchor="t" lIns="0" rIns="0" tIns="0" bIns="0">
+            <a:spAutoFit/>
+          </a:bodyPr>
+          <a:lstStyle/>
+          <a:p>
+            <a:pPr algn="l">
+              <a:lnSpc>
+                <a:spcPct val="105000"/>
+              </a:lnSpc>
+              <a:spcAft>
+                <a:spcPts val="100"/>
+              </a:spcAft>
+            </a:pPr>
+            <a:r>
+              <a:rPr sz="1250" b="1" i="0">
                 <a:solidFill>
                   <a:srgbClr val="EAF0F8"/>
                 </a:solidFill>
@@ -4503,14 +4610,14 @@
           <a:p>
             <a:pPr algn="l">
               <a:lnSpc>
-                <a:spcPct val="107000"/>
-              </a:lnSpc>
-              <a:spcAft>
-                <a:spcPts val="200"/>
-              </a:spcAft>
-            </a:pPr>
-            <a:r>
-              <a:rPr sz="1160" b="0" i="0">
+                <a:spcPct val="105000"/>
+              </a:lnSpc>
+              <a:spcAft>
+                <a:spcPts val="100"/>
+              </a:spcAft>
+            </a:pPr>
+            <a:r>
+              <a:rPr sz="1080" b="0" i="0">
                 <a:solidFill>
                   <a:srgbClr val="93A0B6"/>
                 </a:solidFill>
@@ -4523,7 +4630,7 @@
       </p:sp>
       <p:sp>
         <p:nvSpPr>
-          <p:cNvPr id="13" name="TextBox 12"/>
+          <p:cNvPr id="15" name="TextBox 14"/>
           <p:cNvSpPr txBox="1"/>
           <p:nvPr/>
         </p:nvSpPr>

--- a/outputs/Red_Sox_Trade_Deadline.pptx
+++ b/outputs/Red_Sox_Trade_Deadline.pptx
@@ -5419,7 +5419,7 @@
         <p:spPr>
           <a:xfrm>
             <a:off x="365760" y="1554480"/>
-            <a:ext cx="7315200" cy="3556000"/>
+            <a:ext cx="7315200" cy="3384148"/>
           </a:xfrm>
           <a:prstGeom prst="rect">
             <a:avLst/>

--- a/outputs/Red_Sox_Trade_Deadline.pptx
+++ b/outputs/Red_Sox_Trade_Deadline.pptx
@@ -22,7 +22,6 @@
     <p:sldId id="270" r:id="rId21"/>
     <p:sldId id="271" r:id="rId22"/>
     <p:sldId id="272" r:id="rId23"/>
-    <p:sldId id="273" r:id="rId24"/>
   </p:sldIdLst>
   <p:sldSz cx="12191695" cy="6858000" type="screen4x3"/>
   <p:notesSz cx="6858000" cy="9144000"/>
@@ -7382,7 +7381,7 @@
                 </a:solidFill>
                 <a:latin typeface="Courier New"/>
               </a:rPr>
-              <a:t>// THE WINTER PLAN</a:t>
+              <a:t>// THE TRADE, GRADED</a:t>
             </a:r>
           </a:p>
         </p:txBody>
@@ -7424,63 +7423,21 @@
                 </a:solidFill>
                 <a:latin typeface="Arial"/>
               </a:rPr>
-              <a:t>Spend the pitching surplus on offense</a:t>
-            </a:r>
-          </a:p>
-        </p:txBody>
-      </p:sp>
-      <p:sp>
-        <p:nvSpPr>
-          <p:cNvPr id="4" name="TextBox 3"/>
-          <p:cNvSpPr txBox="1"/>
-          <p:nvPr/>
-        </p:nvSpPr>
-        <p:spPr>
-          <a:xfrm>
-            <a:off x="566928" y="1572768"/>
-            <a:ext cx="11064240" cy="640080"/>
-          </a:xfrm>
-          <a:prstGeom prst="rect">
-            <a:avLst/>
-          </a:prstGeom>
-          <a:noFill/>
-        </p:spPr>
-        <p:txBody>
-          <a:bodyPr wrap="square" anchor="t" lIns="0" rIns="0" tIns="0" bIns="0">
-            <a:spAutoFit/>
-          </a:bodyPr>
-          <a:lstStyle/>
-          <a:p>
-            <a:pPr algn="l">
-              <a:lnSpc>
-                <a:spcPct val="112000"/>
-              </a:lnSpc>
-              <a:spcAft>
-                <a:spcPts val="400"/>
-              </a:spcAft>
-            </a:pPr>
-            <a:r>
-              <a:rPr sz="1450" b="0" i="0">
-                <a:solidFill>
-                  <a:srgbClr val="D9E1EF"/>
-                </a:solidFill>
-                <a:latin typeface="Arial"/>
-              </a:rPr>
-              <a:t>If winter comes and Duran's rebound has shown up, this is what a deal should return. With a top-6 rotation (3.65 ERA) carrying the club, trading bats for arms is backwards, convert the outfield surplus into what's thin:</a:t>
-            </a:r>
-          </a:p>
-        </p:txBody>
-      </p:sp>
-      <p:sp>
-        <p:nvSpPr>
-          <p:cNvPr id="5" name="Rounded Rectangle 4"/>
+              <a:t>Why Mead for Early wins for Boston</a:t>
+            </a:r>
+          </a:p>
+        </p:txBody>
+      </p:sp>
+      <p:sp>
+        <p:nvSpPr>
+          <p:cNvPr id="4" name="Rounded Rectangle 3"/>
           <p:cNvSpPr/>
           <p:nvPr/>
         </p:nvSpPr>
         <p:spPr>
           <a:xfrm>
-            <a:off x="566928" y="2468880"/>
-            <a:ext cx="3502152" cy="2514600"/>
+            <a:off x="566928" y="1691640"/>
+            <a:ext cx="5358384" cy="3291840"/>
           </a:xfrm>
           <a:prstGeom prst="roundRect">
             <a:avLst>
@@ -7521,14 +7478,56 @@
       </p:sp>
       <p:sp>
         <p:nvSpPr>
+          <p:cNvPr id="5" name="TextBox 4"/>
+          <p:cNvSpPr txBox="1"/>
+          <p:nvPr/>
+        </p:nvSpPr>
+        <p:spPr>
+          <a:xfrm>
+            <a:off x="859536" y="1920240"/>
+            <a:ext cx="4809744" cy="457200"/>
+          </a:xfrm>
+          <a:prstGeom prst="rect">
+            <a:avLst/>
+          </a:prstGeom>
+          <a:noFill/>
+        </p:spPr>
+        <p:txBody>
+          <a:bodyPr wrap="square" anchor="t" lIns="0" rIns="0" tIns="0" bIns="0">
+            <a:spAutoFit/>
+          </a:bodyPr>
+          <a:lstStyle/>
+          <a:p>
+            <a:pPr algn="l">
+              <a:lnSpc>
+                <a:spcPct val="100000"/>
+              </a:lnSpc>
+              <a:spcAft>
+                <a:spcPts val="0"/>
+              </a:spcAft>
+            </a:pPr>
+            <a:r>
+              <a:rPr sz="1700" b="1" i="0">
+                <a:solidFill>
+                  <a:srgbClr val="EAF0F8"/>
+                </a:solidFill>
+                <a:latin typeface="Arial"/>
+              </a:rPr>
+              <a:t>What they gave: Connelly Early</a:t>
+            </a:r>
+          </a:p>
+        </p:txBody>
+      </p:sp>
+      <p:sp>
+        <p:nvSpPr>
           <p:cNvPr id="6" name="Rounded Rectangle 5"/>
           <p:cNvSpPr/>
           <p:nvPr/>
         </p:nvSpPr>
         <p:spPr>
           <a:xfrm>
-            <a:off x="841247" y="2724912"/>
-            <a:ext cx="384048" cy="384048"/>
+            <a:off x="859536" y="2560320"/>
+            <a:ext cx="118872" cy="118872"/>
           </a:xfrm>
           <a:prstGeom prst="roundRect">
             <a:avLst>
@@ -7536,7 +7535,7 @@
             </a:avLst>
           </a:prstGeom>
           <a:solidFill>
-            <a:srgbClr val="58C08D"/>
+            <a:srgbClr val="E8615A"/>
           </a:solidFill>
           <a:ln>
             <a:noFill/>
@@ -7558,19 +7557,10 @@
           </a:fontRef>
         </p:style>
         <p:txBody>
-          <a:bodyPr rtlCol="0" anchor="ctr" wrap="none"/>
+          <a:bodyPr rtlCol="0" anchor="ctr"/>
           <a:lstStyle/>
           <a:p>
             <a:pPr algn="ctr"/>
-            <a:r>
-              <a:rPr sz="1600" b="1">
-                <a:solidFill>
-                  <a:srgbClr val="0B1220"/>
-                </a:solidFill>
-                <a:latin typeface="Courier New"/>
-              </a:rPr>
-              <a:t>1</a:t>
-            </a:r>
           </a:p>
         </p:txBody>
       </p:sp>
@@ -7582,92 +7572,156 @@
         </p:nvSpPr>
         <p:spPr>
           <a:xfrm>
-            <a:off x="841247" y="3310128"/>
-            <a:ext cx="2999232" cy="411480"/>
-          </a:xfrm>
-          <a:prstGeom prst="rect">
-            <a:avLst/>
-          </a:prstGeom>
-          <a:noFill/>
-        </p:spPr>
-        <p:txBody>
-          <a:bodyPr wrap="square" anchor="t" lIns="0" rIns="0" tIns="0" bIns="0">
-            <a:spAutoFit/>
-          </a:bodyPr>
-          <a:lstStyle/>
-          <a:p>
-            <a:pPr algn="l">
-              <a:lnSpc>
-                <a:spcPct val="100000"/>
-              </a:lnSpc>
-              <a:spcAft>
-                <a:spcPts val="0"/>
-              </a:spcAft>
-            </a:pPr>
-            <a:r>
-              <a:rPr sz="1600" b="1" i="0">
-                <a:solidFill>
-                  <a:srgbClr val="EAF0F8"/>
-                </a:solidFill>
-                <a:latin typeface="Arial"/>
-              </a:rPr>
-              <a:t>Controllable bats</a:t>
-            </a:r>
-          </a:p>
-        </p:txBody>
-      </p:sp>
-      <p:sp>
-        <p:nvSpPr>
-          <p:cNvPr id="8" name="TextBox 7"/>
-          <p:cNvSpPr txBox="1"/>
-          <p:nvPr/>
-        </p:nvSpPr>
-        <p:spPr>
-          <a:xfrm>
-            <a:off x="841247" y="3767328"/>
-            <a:ext cx="2999232" cy="1097280"/>
-          </a:xfrm>
-          <a:prstGeom prst="rect">
-            <a:avLst/>
-          </a:prstGeom>
-          <a:noFill/>
-        </p:spPr>
-        <p:txBody>
-          <a:bodyPr wrap="square" anchor="t" lIns="0" rIns="0" tIns="0" bIns="0">
-            <a:spAutoFit/>
-          </a:bodyPr>
-          <a:lstStyle/>
-          <a:p>
-            <a:pPr algn="l">
-              <a:lnSpc>
-                <a:spcPct val="110000"/>
+            <a:off x="1097280" y="2514600"/>
+            <a:ext cx="4489704" cy="1188720"/>
+          </a:xfrm>
+          <a:prstGeom prst="rect">
+            <a:avLst/>
+          </a:prstGeom>
+          <a:noFill/>
+        </p:spPr>
+        <p:txBody>
+          <a:bodyPr wrap="square" anchor="t" lIns="0" rIns="0" tIns="0" bIns="0">
+            <a:spAutoFit/>
+          </a:bodyPr>
+          <a:lstStyle/>
+          <a:p>
+            <a:pPr algn="l">
+              <a:lnSpc>
+                <a:spcPct val="109000"/>
               </a:lnSpc>
               <a:spcAft>
                 <a:spcPts val="400"/>
               </a:spcAft>
             </a:pPr>
             <a:r>
-              <a:rPr sz="1280" b="0" i="0">
+              <a:rPr sz="1300" b="1" i="0">
+                <a:solidFill>
+                  <a:srgbClr val="D9E1EF"/>
+                </a:solidFill>
+                <a:latin typeface="Arial"/>
+              </a:rPr>
+              <a:t>The ERA flattered him. </a:t>
+            </a:r>
+            <a:r>
+              <a:rPr sz="1220" b="0" i="0">
                 <a:solidFill>
                   <a:srgbClr val="93A0B6"/>
                 </a:solidFill>
                 <a:latin typeface="Arial"/>
               </a:rPr>
-              <a:t>Young, cost-controlled position players to fix an inconsistent lineup and lengthen it around the core.</a:t>
-            </a:r>
-          </a:p>
-        </p:txBody>
-      </p:sp>
-      <p:sp>
-        <p:nvSpPr>
-          <p:cNvPr id="9" name="Rounded Rectangle 8"/>
+              <a:t>3.44 ERA over a 4.61 FIP, a +1.17 gap, the most of any Boston starter. Sold at peak perception.</a:t>
+            </a:r>
+          </a:p>
+        </p:txBody>
+      </p:sp>
+      <p:sp>
+        <p:nvSpPr>
+          <p:cNvPr id="8" name="Rounded Rectangle 7"/>
           <p:cNvSpPr/>
           <p:nvPr/>
         </p:nvSpPr>
         <p:spPr>
           <a:xfrm>
-            <a:off x="4352544" y="2468880"/>
-            <a:ext cx="3502152" cy="2514600"/>
+            <a:off x="859536" y="3749039"/>
+            <a:ext cx="118872" cy="118872"/>
+          </a:xfrm>
+          <a:prstGeom prst="roundRect">
+            <a:avLst>
+              <a:gd name="adj" fmla="val 18000"/>
+            </a:avLst>
+          </a:prstGeom>
+          <a:solidFill>
+            <a:srgbClr val="E8615A"/>
+          </a:solidFill>
+          <a:ln>
+            <a:noFill/>
+          </a:ln>
+          <a:effectLst/>
+        </p:spPr>
+        <p:style>
+          <a:lnRef idx="1">
+            <a:schemeClr val="accent1"/>
+          </a:lnRef>
+          <a:fillRef idx="3">
+            <a:schemeClr val="accent1"/>
+          </a:fillRef>
+          <a:effectRef idx="2">
+            <a:schemeClr val="accent1"/>
+          </a:effectRef>
+          <a:fontRef idx="minor">
+            <a:schemeClr val="lt1"/>
+          </a:fontRef>
+        </p:style>
+        <p:txBody>
+          <a:bodyPr rtlCol="0" anchor="ctr"/>
+          <a:lstStyle/>
+          <a:p>
+            <a:pPr algn="ctr"/>
+          </a:p>
+        </p:txBody>
+      </p:sp>
+      <p:sp>
+        <p:nvSpPr>
+          <p:cNvPr id="9" name="TextBox 8"/>
+          <p:cNvSpPr txBox="1"/>
+          <p:nvPr/>
+        </p:nvSpPr>
+        <p:spPr>
+          <a:xfrm>
+            <a:off x="1097280" y="3703320"/>
+            <a:ext cx="4489704" cy="1188720"/>
+          </a:xfrm>
+          <a:prstGeom prst="rect">
+            <a:avLst/>
+          </a:prstGeom>
+          <a:noFill/>
+        </p:spPr>
+        <p:txBody>
+          <a:bodyPr wrap="square" anchor="t" lIns="0" rIns="0" tIns="0" bIns="0">
+            <a:spAutoFit/>
+          </a:bodyPr>
+          <a:lstStyle/>
+          <a:p>
+            <a:pPr algn="l">
+              <a:lnSpc>
+                <a:spcPct val="109000"/>
+              </a:lnSpc>
+              <a:spcAft>
+                <a:spcPts val="400"/>
+              </a:spcAft>
+            </a:pPr>
+            <a:r>
+              <a:rPr sz="1300" b="1" i="0">
+                <a:solidFill>
+                  <a:srgbClr val="D9E1EF"/>
+                </a:solidFill>
+                <a:latin typeface="Arial"/>
+              </a:rPr>
+              <a:t>The smallest frame in the pipeline. </a:t>
+            </a:r>
+            <a:r>
+              <a:rPr sz="1220" b="0" i="0">
+                <a:solidFill>
+                  <a:srgbClr val="93A0B6"/>
+                </a:solidFill>
+                <a:latin typeface="Arial"/>
+              </a:rPr>
+              <a:t>6' 3", 195 lbs. Durability risk the org's other arms don't carry.</a:t>
+            </a:r>
+          </a:p>
+        </p:txBody>
+      </p:sp>
+      <p:sp>
+        <p:nvSpPr>
+          <p:cNvPr id="10" name="Rounded Rectangle 9"/>
+          <p:cNvSpPr/>
+          <p:nvPr/>
+        </p:nvSpPr>
+        <p:spPr>
+          <a:xfrm>
+            <a:off x="6227064" y="1691640"/>
+            <a:ext cx="5358384" cy="3291840"/>
           </a:xfrm>
           <a:prstGeom prst="roundRect">
             <a:avLst>
@@ -7708,14 +7762,56 @@
       </p:sp>
       <p:sp>
         <p:nvSpPr>
-          <p:cNvPr id="10" name="Rounded Rectangle 9"/>
+          <p:cNvPr id="11" name="TextBox 10"/>
+          <p:cNvSpPr txBox="1"/>
+          <p:nvPr/>
+        </p:nvSpPr>
+        <p:spPr>
+          <a:xfrm>
+            <a:off x="6519672" y="1920240"/>
+            <a:ext cx="4809744" cy="457200"/>
+          </a:xfrm>
+          <a:prstGeom prst="rect">
+            <a:avLst/>
+          </a:prstGeom>
+          <a:noFill/>
+        </p:spPr>
+        <p:txBody>
+          <a:bodyPr wrap="square" anchor="t" lIns="0" rIns="0" tIns="0" bIns="0">
+            <a:spAutoFit/>
+          </a:bodyPr>
+          <a:lstStyle/>
+          <a:p>
+            <a:pPr algn="l">
+              <a:lnSpc>
+                <a:spcPct val="100000"/>
+              </a:lnSpc>
+              <a:spcAft>
+                <a:spcPts val="0"/>
+              </a:spcAft>
+            </a:pPr>
+            <a:r>
+              <a:rPr sz="1700" b="1" i="0">
+                <a:solidFill>
+                  <a:srgbClr val="EAF0F8"/>
+                </a:solidFill>
+                <a:latin typeface="Arial"/>
+              </a:rPr>
+              <a:t>What they got: Curtis Mead</a:t>
+            </a:r>
+          </a:p>
+        </p:txBody>
+      </p:sp>
+      <p:sp>
+        <p:nvSpPr>
+          <p:cNvPr id="12" name="Rounded Rectangle 11"/>
           <p:cNvSpPr/>
           <p:nvPr/>
         </p:nvSpPr>
         <p:spPr>
           <a:xfrm>
-            <a:off x="4626864" y="2724912"/>
-            <a:ext cx="384048" cy="384048"/>
+            <a:off x="6519672" y="2560320"/>
+            <a:ext cx="118872" cy="118872"/>
           </a:xfrm>
           <a:prstGeom prst="roundRect">
             <a:avLst>
@@ -7723,7 +7819,7 @@
             </a:avLst>
           </a:prstGeom>
           <a:solidFill>
-            <a:srgbClr val="EAF0F8"/>
+            <a:srgbClr val="58C08D"/>
           </a:solidFill>
           <a:ln>
             <a:noFill/>
@@ -7745,129 +7841,85 @@
           </a:fontRef>
         </p:style>
         <p:txBody>
-          <a:bodyPr rtlCol="0" anchor="ctr" wrap="none"/>
+          <a:bodyPr rtlCol="0" anchor="ctr"/>
           <a:lstStyle/>
           <a:p>
             <a:pPr algn="ctr"/>
-            <a:r>
-              <a:rPr sz="1600" b="1">
-                <a:solidFill>
-                  <a:srgbClr val="0B1220"/>
-                </a:solidFill>
-                <a:latin typeface="Courier New"/>
-              </a:rPr>
-              <a:t>2</a:t>
-            </a:r>
-          </a:p>
-        </p:txBody>
-      </p:sp>
-      <p:sp>
-        <p:nvSpPr>
-          <p:cNvPr id="11" name="TextBox 10"/>
-          <p:cNvSpPr txBox="1"/>
-          <p:nvPr/>
-        </p:nvSpPr>
-        <p:spPr>
-          <a:xfrm>
-            <a:off x="4626864" y="3310128"/>
-            <a:ext cx="2999232" cy="411480"/>
-          </a:xfrm>
-          <a:prstGeom prst="rect">
-            <a:avLst/>
-          </a:prstGeom>
-          <a:noFill/>
-        </p:spPr>
-        <p:txBody>
-          <a:bodyPr wrap="square" anchor="t" lIns="0" rIns="0" tIns="0" bIns="0">
-            <a:spAutoFit/>
-          </a:bodyPr>
-          <a:lstStyle/>
-          <a:p>
-            <a:pPr algn="l">
-              <a:lnSpc>
-                <a:spcPct val="100000"/>
-              </a:lnSpc>
-              <a:spcAft>
-                <a:spcPts val="0"/>
-              </a:spcAft>
-            </a:pPr>
-            <a:r>
-              <a:rPr sz="1600" b="1" i="0">
-                <a:solidFill>
-                  <a:srgbClr val="EAF0F8"/>
-                </a:solidFill>
-                <a:latin typeface="Arial"/>
-              </a:rPr>
-              <a:t>Best talent / upside</a:t>
-            </a:r>
-          </a:p>
-        </p:txBody>
-      </p:sp>
-      <p:sp>
-        <p:nvSpPr>
-          <p:cNvPr id="12" name="TextBox 11"/>
-          <p:cNvSpPr txBox="1"/>
-          <p:nvPr/>
-        </p:nvSpPr>
-        <p:spPr>
-          <a:xfrm>
-            <a:off x="4626864" y="3767328"/>
-            <a:ext cx="2999232" cy="1097280"/>
-          </a:xfrm>
-          <a:prstGeom prst="rect">
-            <a:avLst/>
-          </a:prstGeom>
-          <a:noFill/>
-        </p:spPr>
-        <p:txBody>
-          <a:bodyPr wrap="square" anchor="t" lIns="0" rIns="0" tIns="0" bIns="0">
-            <a:spAutoFit/>
-          </a:bodyPr>
-          <a:lstStyle/>
-          <a:p>
-            <a:pPr algn="l">
-              <a:lnSpc>
-                <a:spcPct val="110000"/>
+          </a:p>
+        </p:txBody>
+      </p:sp>
+      <p:sp>
+        <p:nvSpPr>
+          <p:cNvPr id="13" name="TextBox 12"/>
+          <p:cNvSpPr txBox="1"/>
+          <p:nvPr/>
+        </p:nvSpPr>
+        <p:spPr>
+          <a:xfrm>
+            <a:off x="6757416" y="2514600"/>
+            <a:ext cx="4489704" cy="1188720"/>
+          </a:xfrm>
+          <a:prstGeom prst="rect">
+            <a:avLst/>
+          </a:prstGeom>
+          <a:noFill/>
+        </p:spPr>
+        <p:txBody>
+          <a:bodyPr wrap="square" anchor="t" lIns="0" rIns="0" tIns="0" bIns="0">
+            <a:spAutoFit/>
+          </a:bodyPr>
+          <a:lstStyle/>
+          <a:p>
+            <a:pPr algn="l">
+              <a:lnSpc>
+                <a:spcPct val="109000"/>
               </a:lnSpc>
               <a:spcAft>
                 <a:spcPts val="400"/>
               </a:spcAft>
             </a:pPr>
             <a:r>
-              <a:rPr sz="1280" b="0" i="0">
+              <a:rPr sz="1300" b="1" i="0">
+                <a:solidFill>
+                  <a:srgbClr val="D9E1EF"/>
+                </a:solidFill>
+                <a:latin typeface="Arial"/>
+              </a:rPr>
+              <a:t>A controllable, earned bat. </a:t>
+            </a:r>
+            <a:r>
+              <a:rPr sz="1220" b="0" i="0">
                 <a:solidFill>
                   <a:srgbClr val="93A0B6"/>
                 </a:solidFill>
                 <a:latin typeface="Arial"/>
               </a:rPr>
-              <a:t>In a retool you take the best player, not the positional patch, prospects and MLB-ready youth over rentals.</a:t>
-            </a:r>
-          </a:p>
-        </p:txBody>
-      </p:sp>
-      <p:sp>
-        <p:nvSpPr>
-          <p:cNvPr id="13" name="Rounded Rectangle 12"/>
+              <a:t>134 wRC+ at 25, backed by a .359 xwOBA. Years of club control at the position the audit flagged.</a:t>
+            </a:r>
+          </a:p>
+        </p:txBody>
+      </p:sp>
+      <p:sp>
+        <p:nvSpPr>
+          <p:cNvPr id="14" name="Rounded Rectangle 13"/>
           <p:cNvSpPr/>
           <p:nvPr/>
         </p:nvSpPr>
         <p:spPr>
           <a:xfrm>
-            <a:off x="8138159" y="2468880"/>
-            <a:ext cx="3502152" cy="2514600"/>
+            <a:off x="6519672" y="3749039"/>
+            <a:ext cx="118872" cy="118872"/>
           </a:xfrm>
           <a:prstGeom prst="roundRect">
             <a:avLst>
-              <a:gd name="adj" fmla="val 6000"/>
+              <a:gd name="adj" fmla="val 18000"/>
             </a:avLst>
           </a:prstGeom>
           <a:solidFill>
-            <a:srgbClr val="121E33"/>
+            <a:srgbClr val="58C08D"/>
           </a:solidFill>
-          <a:ln w="12700">
-            <a:solidFill>
-              <a:srgbClr val="26334E"/>
-            </a:solidFill>
+          <a:ln>
+            <a:noFill/>
           </a:ln>
           <a:effectLst/>
         </p:spPr>
@@ -7895,97 +7947,51 @@
       </p:sp>
       <p:sp>
         <p:nvSpPr>
-          <p:cNvPr id="14" name="Rounded Rectangle 13"/>
-          <p:cNvSpPr/>
-          <p:nvPr/>
-        </p:nvSpPr>
-        <p:spPr>
-          <a:xfrm>
-            <a:off x="8412480" y="2724912"/>
-            <a:ext cx="384048" cy="384048"/>
-          </a:xfrm>
-          <a:prstGeom prst="roundRect">
-            <a:avLst>
-              <a:gd name="adj" fmla="val 18000"/>
-            </a:avLst>
-          </a:prstGeom>
-          <a:solidFill>
-            <a:srgbClr val="E3B14E"/>
-          </a:solidFill>
-          <a:ln>
-            <a:noFill/>
-          </a:ln>
-          <a:effectLst/>
-        </p:spPr>
-        <p:style>
-          <a:lnRef idx="1">
-            <a:schemeClr val="accent1"/>
-          </a:lnRef>
-          <a:fillRef idx="3">
-            <a:schemeClr val="accent1"/>
-          </a:fillRef>
-          <a:effectRef idx="2">
-            <a:schemeClr val="accent1"/>
-          </a:effectRef>
-          <a:fontRef idx="minor">
-            <a:schemeClr val="lt1"/>
-          </a:fontRef>
-        </p:style>
-        <p:txBody>
-          <a:bodyPr rtlCol="0" anchor="ctr" wrap="none"/>
-          <a:lstStyle/>
-          <a:p>
-            <a:pPr algn="ctr"/>
-            <a:r>
-              <a:rPr sz="1600" b="1">
-                <a:solidFill>
-                  <a:srgbClr val="0B1220"/>
-                </a:solidFill>
-                <a:latin typeface="Courier New"/>
-              </a:rPr>
-              <a:t>3</a:t>
-            </a:r>
-          </a:p>
-        </p:txBody>
-      </p:sp>
-      <p:sp>
-        <p:nvSpPr>
           <p:cNvPr id="15" name="TextBox 14"/>
           <p:cNvSpPr txBox="1"/>
           <p:nvPr/>
         </p:nvSpPr>
         <p:spPr>
           <a:xfrm>
-            <a:off x="8412480" y="3310128"/>
-            <a:ext cx="2999232" cy="411480"/>
-          </a:xfrm>
-          <a:prstGeom prst="rect">
-            <a:avLst/>
-          </a:prstGeom>
-          <a:noFill/>
-        </p:spPr>
-        <p:txBody>
-          <a:bodyPr wrap="square" anchor="t" lIns="0" rIns="0" tIns="0" bIns="0">
-            <a:spAutoFit/>
-          </a:bodyPr>
-          <a:lstStyle/>
-          <a:p>
-            <a:pPr algn="l">
-              <a:lnSpc>
-                <a:spcPct val="100000"/>
-              </a:lnSpc>
-              <a:spcAft>
-                <a:spcPts val="0"/>
-              </a:spcAft>
-            </a:pPr>
-            <a:r>
-              <a:rPr sz="1600" b="1" i="0">
-                <a:solidFill>
-                  <a:srgbClr val="EAF0F8"/>
-                </a:solidFill>
-                <a:latin typeface="Arial"/>
-              </a:rPr>
-              <a:t>Salary relief</a:t>
+            <a:off x="6757416" y="3703320"/>
+            <a:ext cx="4489704" cy="1188720"/>
+          </a:xfrm>
+          <a:prstGeom prst="rect">
+            <a:avLst/>
+          </a:prstGeom>
+          <a:noFill/>
+        </p:spPr>
+        <p:txBody>
+          <a:bodyPr wrap="square" anchor="t" lIns="0" rIns="0" tIns="0" bIns="0">
+            <a:spAutoFit/>
+          </a:bodyPr>
+          <a:lstStyle/>
+          <a:p>
+            <a:pPr algn="l">
+              <a:lnSpc>
+                <a:spcPct val="109000"/>
+              </a:lnSpc>
+              <a:spcAft>
+                <a:spcPts val="400"/>
+              </a:spcAft>
+            </a:pPr>
+            <a:r>
+              <a:rPr sz="1300" b="1" i="0">
+                <a:solidFill>
+                  <a:srgbClr val="D9E1EF"/>
+                </a:solidFill>
+                <a:latin typeface="Arial"/>
+              </a:rPr>
+              <a:t>Built for the park. </a:t>
+            </a:r>
+            <a:r>
+              <a:rPr sz="1220" b="0" i="0">
+                <a:solidFill>
+                  <a:srgbClr val="93A0B6"/>
+                </a:solidFill>
+                <a:latin typeface="Arial"/>
+              </a:rPr>
+              <a:t>23% pull-air rate (82nd percentile). RHB pull-air plays to the Monster.</a:t>
             </a:r>
           </a:p>
         </p:txBody>
@@ -7998,36 +8004,45 @@
         </p:nvSpPr>
         <p:spPr>
           <a:xfrm>
-            <a:off x="8412480" y="3767328"/>
-            <a:ext cx="2999232" cy="1097280"/>
-          </a:xfrm>
-          <a:prstGeom prst="rect">
-            <a:avLst/>
-          </a:prstGeom>
-          <a:noFill/>
-        </p:spPr>
-        <p:txBody>
-          <a:bodyPr wrap="square" anchor="t" lIns="0" rIns="0" tIns="0" bIns="0">
-            <a:spAutoFit/>
-          </a:bodyPr>
-          <a:lstStyle/>
-          <a:p>
-            <a:pPr algn="l">
-              <a:lnSpc>
-                <a:spcPct val="110000"/>
+            <a:off x="566928" y="5257800"/>
+            <a:ext cx="11064240" cy="914400"/>
+          </a:xfrm>
+          <a:prstGeom prst="rect">
+            <a:avLst/>
+          </a:prstGeom>
+          <a:noFill/>
+        </p:spPr>
+        <p:txBody>
+          <a:bodyPr wrap="square" anchor="t" lIns="0" rIns="0" tIns="0" bIns="0">
+            <a:spAutoFit/>
+          </a:bodyPr>
+          <a:lstStyle/>
+          <a:p>
+            <a:pPr algn="l">
+              <a:lnSpc>
+                <a:spcPct val="115000"/>
               </a:lnSpc>
               <a:spcAft>
                 <a:spcPts val="400"/>
               </a:spcAft>
             </a:pPr>
             <a:r>
-              <a:rPr sz="1280" b="0" i="0">
-                <a:solidFill>
-                  <a:srgbClr val="93A0B6"/>
-                </a:solidFill>
-                <a:latin typeface="Arial"/>
-              </a:rPr>
-              <a:t>Attach Yoshida money where possible; free payroll for the 2027 window.</a:t>
+              <a:rPr sz="1400" b="1" i="0">
+                <a:solidFill>
+                  <a:srgbClr val="E3B14E"/>
+                </a:solidFill>
+                <a:latin typeface="Arial"/>
+              </a:rPr>
+              <a:t>The factory keeps producing:  </a:t>
+            </a:r>
+            <a:r>
+              <a:rPr sz="1300" b="0" i="0">
+                <a:solidFill>
+                  <a:srgbClr val="D9E1EF"/>
+                </a:solidFill>
+                <a:latin typeface="Arial"/>
+              </a:rPr>
+              <a:t>Tolle (6' 6", 250 lbs, 3.31 ERA / 3.24 FIP) and Bennett (6' 6", 234 lbs, 2.58 / 3.12) are bigger, more durable and better by FIP. Boston develops arms; it bought the bat it could not grow.</a:t>
             </a:r>
           </a:p>
         </p:txBody>
@@ -8035,57 +8050,6 @@
       <p:sp>
         <p:nvSpPr>
           <p:cNvPr id="17" name="TextBox 16"/>
-          <p:cNvSpPr txBox="1"/>
-          <p:nvPr/>
-        </p:nvSpPr>
-        <p:spPr>
-          <a:xfrm>
-            <a:off x="566928" y="5257800"/>
-            <a:ext cx="11064240" cy="457200"/>
-          </a:xfrm>
-          <a:prstGeom prst="rect">
-            <a:avLst/>
-          </a:prstGeom>
-          <a:noFill/>
-        </p:spPr>
-        <p:txBody>
-          <a:bodyPr wrap="square" anchor="t" lIns="0" rIns="0" tIns="0" bIns="0">
-            <a:spAutoFit/>
-          </a:bodyPr>
-          <a:lstStyle/>
-          <a:p>
-            <a:pPr algn="l">
-              <a:lnSpc>
-                <a:spcPct val="100000"/>
-              </a:lnSpc>
-              <a:spcAft>
-                <a:spcPts val="0"/>
-              </a:spcAft>
-            </a:pPr>
-            <a:r>
-              <a:rPr sz="1400" b="1" i="1">
-                <a:solidFill>
-                  <a:srgbClr val="EAF0F8"/>
-                </a:solidFill>
-                <a:latin typeface="Arial"/>
-              </a:rPr>
-              <a:t>Keep the arms. Cash the outfield. </a:t>
-            </a:r>
-            <a:r>
-              <a:rPr sz="1400" b="0" i="1">
-                <a:solidFill>
-                  <a:srgbClr val="93A0B6"/>
-                </a:solidFill>
-                <a:latin typeface="Arial"/>
-              </a:rPr>
-              <a:t>Build the 2027 lineup, don't rent the 2026 one.</a:t>
-            </a:r>
-          </a:p>
-        </p:txBody>
-      </p:sp>
-      <p:sp>
-        <p:nvSpPr>
-          <p:cNvPr id="18" name="TextBox 17"/>
           <p:cNvSpPr txBox="1"/>
           <p:nvPr/>
         </p:nvSpPr>
@@ -8143,786 +8107,6 @@
 </file>
 
 <file path=ppt/slides/slide17.xml><?xml version="1.0" encoding="utf-8"?>
-<p:sld xmlns:a="http://schemas.openxmlformats.org/drawingml/2006/main" xmlns:p="http://schemas.openxmlformats.org/presentationml/2006/main" xmlns:r="http://schemas.openxmlformats.org/officeDocument/2006/relationships">
-  <p:cSld>
-    <p:bg>
-      <p:bgPr>
-        <a:solidFill>
-          <a:srgbClr val="0B1220"/>
-        </a:solidFill>
-        <a:effectLst/>
-      </p:bgPr>
-    </p:bg>
-    <p:spTree>
-      <p:nvGrpSpPr>
-        <p:cNvPr id="1" name=""/>
-        <p:cNvGrpSpPr/>
-        <p:nvPr/>
-      </p:nvGrpSpPr>
-      <p:grpSpPr/>
-      <p:sp>
-        <p:nvSpPr>
-          <p:cNvPr id="2" name="TextBox 1"/>
-          <p:cNvSpPr txBox="1"/>
-          <p:nvPr/>
-        </p:nvSpPr>
-        <p:spPr>
-          <a:xfrm>
-            <a:off x="566928" y="384048"/>
-            <a:ext cx="10058400" cy="274320"/>
-          </a:xfrm>
-          <a:prstGeom prst="rect">
-            <a:avLst/>
-          </a:prstGeom>
-          <a:noFill/>
-        </p:spPr>
-        <p:txBody>
-          <a:bodyPr wrap="square" anchor="t" lIns="0" rIns="0" tIns="0" bIns="0">
-            <a:spAutoFit/>
-          </a:bodyPr>
-          <a:lstStyle/>
-          <a:p>
-            <a:pPr algn="l">
-              <a:lnSpc>
-                <a:spcPct val="100000"/>
-              </a:lnSpc>
-              <a:spcAft>
-                <a:spcPts val="0"/>
-              </a:spcAft>
-            </a:pPr>
-            <a:r>
-              <a:rPr sz="1200" b="1" i="0">
-                <a:solidFill>
-                  <a:srgbClr val="E8615A"/>
-                </a:solidFill>
-                <a:latin typeface="Courier New"/>
-              </a:rPr>
-              <a:t>// THE SEQUENCE</a:t>
-            </a:r>
-          </a:p>
-        </p:txBody>
-      </p:sp>
-      <p:sp>
-        <p:nvSpPr>
-          <p:cNvPr id="3" name="TextBox 2"/>
-          <p:cNvSpPr txBox="1"/>
-          <p:nvPr/>
-        </p:nvSpPr>
-        <p:spPr>
-          <a:xfrm>
-            <a:off x="566928" y="658368"/>
-            <a:ext cx="11064240" cy="868680"/>
-          </a:xfrm>
-          <a:prstGeom prst="rect">
-            <a:avLst/>
-          </a:prstGeom>
-          <a:noFill/>
-        </p:spPr>
-        <p:txBody>
-          <a:bodyPr wrap="square" anchor="t" lIns="0" rIns="0" tIns="0" bIns="0">
-            <a:spAutoFit/>
-          </a:bodyPr>
-          <a:lstStyle/>
-          <a:p>
-            <a:pPr algn="l">
-              <a:lnSpc>
-                <a:spcPct val="100000"/>
-              </a:lnSpc>
-              <a:spcAft>
-                <a:spcPts val="0"/>
-              </a:spcAft>
-            </a:pPr>
-            <a:r>
-              <a:rPr sz="3000" b="1" i="0">
-                <a:solidFill>
-                  <a:srgbClr val="EAF0F8"/>
-                </a:solidFill>
-                <a:latin typeface="Arial"/>
-              </a:rPr>
-              <a:t>Buy now, decide on Duran in the winter</a:t>
-            </a:r>
-          </a:p>
-        </p:txBody>
-      </p:sp>
-      <p:sp>
-        <p:nvSpPr>
-          <p:cNvPr id="4" name="Rounded Rectangle 3"/>
-          <p:cNvSpPr/>
-          <p:nvPr/>
-        </p:nvSpPr>
-        <p:spPr>
-          <a:xfrm>
-            <a:off x="640080" y="1801368"/>
-            <a:ext cx="457200" cy="457200"/>
-          </a:xfrm>
-          <a:prstGeom prst="roundRect">
-            <a:avLst>
-              <a:gd name="adj" fmla="val 18000"/>
-            </a:avLst>
-          </a:prstGeom>
-          <a:solidFill>
-            <a:srgbClr val="E8615A"/>
-          </a:solidFill>
-          <a:ln>
-            <a:noFill/>
-          </a:ln>
-          <a:effectLst/>
-        </p:spPr>
-        <p:style>
-          <a:lnRef idx="1">
-            <a:schemeClr val="accent1"/>
-          </a:lnRef>
-          <a:fillRef idx="3">
-            <a:schemeClr val="accent1"/>
-          </a:fillRef>
-          <a:effectRef idx="2">
-            <a:schemeClr val="accent1"/>
-          </a:effectRef>
-          <a:fontRef idx="minor">
-            <a:schemeClr val="lt1"/>
-          </a:fontRef>
-        </p:style>
-        <p:txBody>
-          <a:bodyPr rtlCol="0" anchor="ctr" wrap="none"/>
-          <a:lstStyle/>
-          <a:p>
-            <a:pPr algn="ctr"/>
-            <a:r>
-              <a:rPr sz="1800" b="1">
-                <a:solidFill>
-                  <a:srgbClr val="0B1220"/>
-                </a:solidFill>
-                <a:latin typeface="Courier New"/>
-              </a:rPr>
-              <a:t>1</a:t>
-            </a:r>
-          </a:p>
-        </p:txBody>
-      </p:sp>
-      <p:sp>
-        <p:nvSpPr>
-          <p:cNvPr id="5" name="TextBox 4"/>
-          <p:cNvSpPr txBox="1"/>
-          <p:nvPr/>
-        </p:nvSpPr>
-        <p:spPr>
-          <a:xfrm>
-            <a:off x="1280160" y="1783080"/>
-            <a:ext cx="6126480" cy="1005840"/>
-          </a:xfrm>
-          <a:prstGeom prst="rect">
-            <a:avLst/>
-          </a:prstGeom>
-          <a:noFill/>
-        </p:spPr>
-        <p:txBody>
-          <a:bodyPr wrap="square" anchor="t" lIns="0" rIns="0" tIns="0" bIns="0">
-            <a:spAutoFit/>
-          </a:bodyPr>
-          <a:lstStyle/>
-          <a:p>
-            <a:pPr algn="l">
-              <a:lnSpc>
-                <a:spcPct val="108000"/>
-              </a:lnSpc>
-              <a:spcAft>
-                <a:spcPts val="200"/>
-              </a:spcAft>
-            </a:pPr>
-            <a:r>
-              <a:rPr sz="1700" b="1" i="0">
-                <a:solidFill>
-                  <a:srgbClr val="EAF0F8"/>
-                </a:solidFill>
-                <a:latin typeface="Arial"/>
-              </a:rPr>
-              <a:t>At the deadline: buy targeted</a:t>
-            </a:r>
-          </a:p>
-          <a:p>
-            <a:pPr algn="l">
-              <a:lnSpc>
-                <a:spcPct val="108000"/>
-              </a:lnSpc>
-              <a:spcAft>
-                <a:spcPts val="200"/>
-              </a:spcAft>
-            </a:pPr>
-            <a:r>
-              <a:rPr sz="1350" b="0" i="0">
-                <a:solidFill>
-                  <a:srgbClr val="93A0B6"/>
-                </a:solidFill>
-                <a:latin typeface="Arial"/>
-              </a:rPr>
-              <a:t>A controllable infield bat and a reliever, funded from the pitching surplus. Keep the vets, they're playoff innings now.</a:t>
-            </a:r>
-          </a:p>
-        </p:txBody>
-      </p:sp>
-      <p:sp>
-        <p:nvSpPr>
-          <p:cNvPr id="6" name="Rounded Rectangle 5"/>
-          <p:cNvSpPr/>
-          <p:nvPr/>
-        </p:nvSpPr>
-        <p:spPr>
-          <a:xfrm>
-            <a:off x="640080" y="2971800"/>
-            <a:ext cx="457200" cy="457200"/>
-          </a:xfrm>
-          <a:prstGeom prst="roundRect">
-            <a:avLst>
-              <a:gd name="adj" fmla="val 18000"/>
-            </a:avLst>
-          </a:prstGeom>
-          <a:solidFill>
-            <a:srgbClr val="E8615A"/>
-          </a:solidFill>
-          <a:ln>
-            <a:noFill/>
-          </a:ln>
-          <a:effectLst/>
-        </p:spPr>
-        <p:style>
-          <a:lnRef idx="1">
-            <a:schemeClr val="accent1"/>
-          </a:lnRef>
-          <a:fillRef idx="3">
-            <a:schemeClr val="accent1"/>
-          </a:fillRef>
-          <a:effectRef idx="2">
-            <a:schemeClr val="accent1"/>
-          </a:effectRef>
-          <a:fontRef idx="minor">
-            <a:schemeClr val="lt1"/>
-          </a:fontRef>
-        </p:style>
-        <p:txBody>
-          <a:bodyPr rtlCol="0" anchor="ctr" wrap="none"/>
-          <a:lstStyle/>
-          <a:p>
-            <a:pPr algn="ctr"/>
-            <a:r>
-              <a:rPr sz="1800" b="1">
-                <a:solidFill>
-                  <a:srgbClr val="0B1220"/>
-                </a:solidFill>
-                <a:latin typeface="Courier New"/>
-              </a:rPr>
-              <a:t>2</a:t>
-            </a:r>
-          </a:p>
-        </p:txBody>
-      </p:sp>
-      <p:sp>
-        <p:nvSpPr>
-          <p:cNvPr id="7" name="TextBox 6"/>
-          <p:cNvSpPr txBox="1"/>
-          <p:nvPr/>
-        </p:nvSpPr>
-        <p:spPr>
-          <a:xfrm>
-            <a:off x="1280160" y="2953512"/>
-            <a:ext cx="6126480" cy="1005840"/>
-          </a:xfrm>
-          <a:prstGeom prst="rect">
-            <a:avLst/>
-          </a:prstGeom>
-          <a:noFill/>
-        </p:spPr>
-        <p:txBody>
-          <a:bodyPr wrap="square" anchor="t" lIns="0" rIns="0" tIns="0" bIns="0">
-            <a:spAutoFit/>
-          </a:bodyPr>
-          <a:lstStyle/>
-          <a:p>
-            <a:pPr algn="l">
-              <a:lnSpc>
-                <a:spcPct val="108000"/>
-              </a:lnSpc>
-              <a:spcAft>
-                <a:spcPts val="200"/>
-              </a:spcAft>
-            </a:pPr>
-            <a:r>
-              <a:rPr sz="1700" b="1" i="0">
-                <a:solidFill>
-                  <a:srgbClr val="EAF0F8"/>
-                </a:solidFill>
-                <a:latin typeface="Arial"/>
-              </a:rPr>
-              <a:t>Hold Duran through August</a:t>
-            </a:r>
-          </a:p>
-          <a:p>
-            <a:pPr algn="l">
-              <a:lnSpc>
-                <a:spcPct val="108000"/>
-              </a:lnSpc>
-              <a:spcAft>
-                <a:spcPts val="200"/>
-              </a:spcAft>
-            </a:pPr>
-            <a:r>
-              <a:rPr sz="1350" b="0" i="0">
-                <a:solidFill>
-                  <a:srgbClr val="93A0B6"/>
-                </a:solidFill>
-                <a:latin typeface="Arial"/>
-              </a:rPr>
-              <a:t>His value is at its nadir and his July contact quality (~.35 xwOBA) is already surging. Selling now cashes the slump.</a:t>
-            </a:r>
-          </a:p>
-        </p:txBody>
-      </p:sp>
-      <p:sp>
-        <p:nvSpPr>
-          <p:cNvPr id="8" name="Rounded Rectangle 7"/>
-          <p:cNvSpPr/>
-          <p:nvPr/>
-        </p:nvSpPr>
-        <p:spPr>
-          <a:xfrm>
-            <a:off x="640080" y="4142231"/>
-            <a:ext cx="457200" cy="457200"/>
-          </a:xfrm>
-          <a:prstGeom prst="roundRect">
-            <a:avLst>
-              <a:gd name="adj" fmla="val 18000"/>
-            </a:avLst>
-          </a:prstGeom>
-          <a:solidFill>
-            <a:srgbClr val="E8615A"/>
-          </a:solidFill>
-          <a:ln>
-            <a:noFill/>
-          </a:ln>
-          <a:effectLst/>
-        </p:spPr>
-        <p:style>
-          <a:lnRef idx="1">
-            <a:schemeClr val="accent1"/>
-          </a:lnRef>
-          <a:fillRef idx="3">
-            <a:schemeClr val="accent1"/>
-          </a:fillRef>
-          <a:effectRef idx="2">
-            <a:schemeClr val="accent1"/>
-          </a:effectRef>
-          <a:fontRef idx="minor">
-            <a:schemeClr val="lt1"/>
-          </a:fontRef>
-        </p:style>
-        <p:txBody>
-          <a:bodyPr rtlCol="0" anchor="ctr" wrap="none"/>
-          <a:lstStyle/>
-          <a:p>
-            <a:pPr algn="ctr"/>
-            <a:r>
-              <a:rPr sz="1800" b="1">
-                <a:solidFill>
-                  <a:srgbClr val="0B1220"/>
-                </a:solidFill>
-                <a:latin typeface="Courier New"/>
-              </a:rPr>
-              <a:t>3</a:t>
-            </a:r>
-          </a:p>
-        </p:txBody>
-      </p:sp>
-      <p:sp>
-        <p:nvSpPr>
-          <p:cNvPr id="9" name="TextBox 8"/>
-          <p:cNvSpPr txBox="1"/>
-          <p:nvPr/>
-        </p:nvSpPr>
-        <p:spPr>
-          <a:xfrm>
-            <a:off x="1280160" y="4123944"/>
-            <a:ext cx="6126480" cy="1005840"/>
-          </a:xfrm>
-          <a:prstGeom prst="rect">
-            <a:avLst/>
-          </a:prstGeom>
-          <a:noFill/>
-        </p:spPr>
-        <p:txBody>
-          <a:bodyPr wrap="square" anchor="t" lIns="0" rIns="0" tIns="0" bIns="0">
-            <a:spAutoFit/>
-          </a:bodyPr>
-          <a:lstStyle/>
-          <a:p>
-            <a:pPr algn="l">
-              <a:lnSpc>
-                <a:spcPct val="108000"/>
-              </a:lnSpc>
-              <a:spcAft>
-                <a:spcPts val="200"/>
-              </a:spcAft>
-            </a:pPr>
-            <a:r>
-              <a:rPr sz="1700" b="1" i="0">
-                <a:solidFill>
-                  <a:srgbClr val="EAF0F8"/>
-                </a:solidFill>
-                <a:latin typeface="Arial"/>
-              </a:rPr>
-              <a:t>Winter: re-price, then choose</a:t>
-            </a:r>
-          </a:p>
-          <a:p>
-            <a:pPr algn="l">
-              <a:lnSpc>
-                <a:spcPct val="108000"/>
-              </a:lnSpc>
-              <a:spcAft>
-                <a:spcPts val="200"/>
-              </a:spcAft>
-            </a:pPr>
-            <a:r>
-              <a:rPr sz="1350" b="0" i="0">
-                <a:solidFill>
-                  <a:srgbClr val="93A0B6"/>
-                </a:solidFill>
-                <a:latin typeface="Arial"/>
-              </a:rPr>
-              <a:t>Anthony healthy, jam returns. Rebound confirmed → extend or trade at full price. Erosion persists → sell at market. Either way, the 2027 OF is Anthony / Rafaela / Abreu.</a:t>
-            </a:r>
-          </a:p>
-        </p:txBody>
-      </p:sp>
-      <p:sp>
-        <p:nvSpPr>
-          <p:cNvPr id="10" name="Rounded Rectangle 9"/>
-          <p:cNvSpPr/>
-          <p:nvPr/>
-        </p:nvSpPr>
-        <p:spPr>
-          <a:xfrm>
-            <a:off x="7818120" y="1783080"/>
-            <a:ext cx="3794760" cy="3337560"/>
-          </a:xfrm>
-          <a:prstGeom prst="roundRect">
-            <a:avLst>
-              <a:gd name="adj" fmla="val 6000"/>
-            </a:avLst>
-          </a:prstGeom>
-          <a:solidFill>
-            <a:srgbClr val="1A2740"/>
-          </a:solidFill>
-          <a:ln>
-            <a:noFill/>
-          </a:ln>
-          <a:effectLst/>
-        </p:spPr>
-        <p:style>
-          <a:lnRef idx="1">
-            <a:schemeClr val="accent1"/>
-          </a:lnRef>
-          <a:fillRef idx="3">
-            <a:schemeClr val="accent1"/>
-          </a:fillRef>
-          <a:effectRef idx="2">
-            <a:schemeClr val="accent1"/>
-          </a:effectRef>
-          <a:fontRef idx="minor">
-            <a:schemeClr val="lt1"/>
-          </a:fontRef>
-        </p:style>
-        <p:txBody>
-          <a:bodyPr rtlCol="0" anchor="ctr"/>
-          <a:lstStyle/>
-          <a:p>
-            <a:pPr algn="ctr"/>
-          </a:p>
-        </p:txBody>
-      </p:sp>
-      <p:sp>
-        <p:nvSpPr>
-          <p:cNvPr id="11" name="TextBox 10"/>
-          <p:cNvSpPr txBox="1"/>
-          <p:nvPr/>
-        </p:nvSpPr>
-        <p:spPr>
-          <a:xfrm>
-            <a:off x="8092440" y="2011680"/>
-            <a:ext cx="3291840" cy="365760"/>
-          </a:xfrm>
-          <a:prstGeom prst="rect">
-            <a:avLst/>
-          </a:prstGeom>
-          <a:noFill/>
-        </p:spPr>
-        <p:txBody>
-          <a:bodyPr wrap="square" anchor="t" lIns="0" rIns="0" tIns="0" bIns="0">
-            <a:spAutoFit/>
-          </a:bodyPr>
-          <a:lstStyle/>
-          <a:p>
-            <a:pPr algn="l">
-              <a:lnSpc>
-                <a:spcPct val="100000"/>
-              </a:lnSpc>
-              <a:spcAft>
-                <a:spcPts val="0"/>
-              </a:spcAft>
-            </a:pPr>
-            <a:r>
-              <a:rPr sz="1250" b="1" i="0">
-                <a:solidFill>
-                  <a:srgbClr val="C9D2E3"/>
-                </a:solidFill>
-                <a:latin typeface="Arial"/>
-              </a:rPr>
-              <a:t>THE RETURN</a:t>
-            </a:r>
-          </a:p>
-        </p:txBody>
-      </p:sp>
-      <p:sp>
-        <p:nvSpPr>
-          <p:cNvPr id="12" name="TextBox 11"/>
-          <p:cNvSpPr txBox="1"/>
-          <p:nvPr/>
-        </p:nvSpPr>
-        <p:spPr>
-          <a:xfrm>
-            <a:off x="8092440" y="2487168"/>
-            <a:ext cx="3291840" cy="914400"/>
-          </a:xfrm>
-          <a:prstGeom prst="rect">
-            <a:avLst/>
-          </a:prstGeom>
-          <a:noFill/>
-        </p:spPr>
-        <p:txBody>
-          <a:bodyPr wrap="square" anchor="t" lIns="0" rIns="0" tIns="0" bIns="0">
-            <a:spAutoFit/>
-          </a:bodyPr>
-          <a:lstStyle/>
-          <a:p>
-            <a:pPr algn="l">
-              <a:lnSpc>
-                <a:spcPct val="105000"/>
-              </a:lnSpc>
-              <a:spcAft>
-                <a:spcPts val="200"/>
-              </a:spcAft>
-            </a:pPr>
-            <a:r>
-              <a:rPr sz="1300" b="1" i="0">
-                <a:solidFill>
-                  <a:srgbClr val="F0B8BC"/>
-                </a:solidFill>
-                <a:latin typeface="Arial"/>
-              </a:rPr>
-              <a:t>Sell now (nadir)</a:t>
-            </a:r>
-          </a:p>
-          <a:p>
-            <a:pPr algn="l">
-              <a:lnSpc>
-                <a:spcPct val="105000"/>
-              </a:lnSpc>
-              <a:spcAft>
-                <a:spcPts val="200"/>
-              </a:spcAft>
-            </a:pPr>
-            <a:r>
-              <a:rPr sz="1400" b="0" i="0">
-                <a:solidFill>
-                  <a:srgbClr val="F4F7FC"/>
-                </a:solidFill>
-                <a:latin typeface="Arial"/>
-              </a:rPr>
-              <a:t>~$10–15M · a 45-FV bat</a:t>
-            </a:r>
-          </a:p>
-        </p:txBody>
-      </p:sp>
-      <p:sp>
-        <p:nvSpPr>
-          <p:cNvPr id="13" name="TextBox 12"/>
-          <p:cNvSpPr txBox="1"/>
-          <p:nvPr/>
-        </p:nvSpPr>
-        <p:spPr>
-          <a:xfrm>
-            <a:off x="8092440" y="3520440"/>
-            <a:ext cx="3291840" cy="1005840"/>
-          </a:xfrm>
-          <a:prstGeom prst="rect">
-            <a:avLst/>
-          </a:prstGeom>
-          <a:noFill/>
-        </p:spPr>
-        <p:txBody>
-          <a:bodyPr wrap="square" anchor="t" lIns="0" rIns="0" tIns="0" bIns="0">
-            <a:spAutoFit/>
-          </a:bodyPr>
-          <a:lstStyle/>
-          <a:p>
-            <a:pPr algn="l">
-              <a:lnSpc>
-                <a:spcPct val="105000"/>
-              </a:lnSpc>
-              <a:spcAft>
-                <a:spcPts val="200"/>
-              </a:spcAft>
-            </a:pPr>
-            <a:r>
-              <a:rPr sz="1300" b="1" i="0">
-                <a:solidFill>
-                  <a:srgbClr val="A9E5B5"/>
-                </a:solidFill>
-                <a:latin typeface="Arial"/>
-              </a:rPr>
-              <a:t>Sell after rebound</a:t>
-            </a:r>
-          </a:p>
-          <a:p>
-            <a:pPr algn="l">
-              <a:lnSpc>
-                <a:spcPct val="105000"/>
-              </a:lnSpc>
-              <a:spcAft>
-                <a:spcPts val="200"/>
-              </a:spcAft>
-            </a:pPr>
-            <a:r>
-              <a:rPr sz="1400" b="0" i="0">
-                <a:solidFill>
-                  <a:srgbClr val="F4F7FC"/>
-                </a:solidFill>
-                <a:latin typeface="Arial"/>
-              </a:rPr>
-              <a:t>~$28M · a 50-FV, top-100</a:t>
-            </a:r>
-          </a:p>
-          <a:p>
-            <a:pPr algn="l">
-              <a:lnSpc>
-                <a:spcPct val="105000"/>
-              </a:lnSpc>
-              <a:spcAft>
-                <a:spcPts val="200"/>
-              </a:spcAft>
-            </a:pPr>
-            <a:r>
-              <a:rPr sz="1400" b="0" i="0">
-                <a:solidFill>
-                  <a:srgbClr val="F4F7FC"/>
-                </a:solidFill>
-                <a:latin typeface="Arial"/>
-              </a:rPr>
-              <a:t>controllable talent</a:t>
-            </a:r>
-          </a:p>
-        </p:txBody>
-      </p:sp>
-      <p:sp>
-        <p:nvSpPr>
-          <p:cNvPr id="14" name="TextBox 13"/>
-          <p:cNvSpPr txBox="1"/>
-          <p:nvPr/>
-        </p:nvSpPr>
-        <p:spPr>
-          <a:xfrm>
-            <a:off x="8092440" y="4617720"/>
-            <a:ext cx="3291840" cy="457200"/>
-          </a:xfrm>
-          <a:prstGeom prst="rect">
-            <a:avLst/>
-          </a:prstGeom>
-          <a:noFill/>
-        </p:spPr>
-        <p:txBody>
-          <a:bodyPr wrap="square" anchor="t" lIns="0" rIns="0" tIns="0" bIns="0">
-            <a:spAutoFit/>
-          </a:bodyPr>
-          <a:lstStyle/>
-          <a:p>
-            <a:pPr algn="l">
-              <a:lnSpc>
-                <a:spcPct val="105000"/>
-              </a:lnSpc>
-              <a:spcAft>
-                <a:spcPts val="400"/>
-              </a:spcAft>
-            </a:pPr>
-            <a:r>
-              <a:rPr sz="1150" b="0" i="1">
-                <a:solidFill>
-                  <a:srgbClr val="C9D2E3"/>
-                </a:solidFill>
-                <a:latin typeface="Arial"/>
-              </a:rPr>
-              <a:t>One grade of return = the reason to wait.</a:t>
-            </a:r>
-          </a:p>
-        </p:txBody>
-      </p:sp>
-      <p:sp>
-        <p:nvSpPr>
-          <p:cNvPr id="15" name="TextBox 14"/>
-          <p:cNvSpPr txBox="1"/>
-          <p:nvPr/>
-        </p:nvSpPr>
-        <p:spPr>
-          <a:xfrm>
-            <a:off x="566928" y="6510528"/>
-            <a:ext cx="11064240" cy="274320"/>
-          </a:xfrm>
-          <a:prstGeom prst="rect">
-            <a:avLst/>
-          </a:prstGeom>
-          <a:noFill/>
-        </p:spPr>
-        <p:txBody>
-          <a:bodyPr wrap="square" anchor="t" lIns="0" rIns="0" tIns="0" bIns="0">
-            <a:spAutoFit/>
-          </a:bodyPr>
-          <a:lstStyle/>
-          <a:p>
-            <a:pPr algn="l">
-              <a:lnSpc>
-                <a:spcPct val="100000"/>
-              </a:lnSpc>
-              <a:spcAft>
-                <a:spcPts val="0"/>
-              </a:spcAft>
-            </a:pPr>
-            <a:r>
-              <a:rPr sz="800" b="1" i="0">
-                <a:solidFill>
-                  <a:srgbClr val="E8615A"/>
-                </a:solidFill>
-                <a:latin typeface="Courier New"/>
-              </a:rPr>
-              <a:t>BOS // OUTFIELD STRATEGY</a:t>
-            </a:r>
-            <a:r>
-              <a:rPr sz="800" b="0" i="0">
-                <a:solidFill>
-                  <a:srgbClr val="5E6B84"/>
-                </a:solidFill>
-                <a:latin typeface="Courier New"/>
-              </a:rPr>
-              <a:t>   STATCAST / FANGRAPHS / MLB STATS API / SPOTRAC · JULY 2026</a:t>
-            </a:r>
-          </a:p>
-        </p:txBody>
-      </p:sp>
-    </p:spTree>
-  </p:cSld>
-  <p:clrMapOvr>
-    <a:masterClrMapping/>
-  </p:clrMapOvr>
-</p:sld>
-</file>
-
-<file path=ppt/slides/slide18.xml><?xml version="1.0" encoding="utf-8"?>
 <p:sld xmlns:a="http://schemas.openxmlformats.org/drawingml/2006/main" xmlns:p="http://schemas.openxmlformats.org/presentationml/2006/main" xmlns:r="http://schemas.openxmlformats.org/officeDocument/2006/relationships">
   <p:cSld>
     <p:bg>

--- a/outputs/Red_Sox_Trade_Deadline.pptx
+++ b/outputs/Red_Sox_Trade_Deadline.pptx
@@ -5418,7 +5418,7 @@
         <p:spPr>
           <a:xfrm>
             <a:off x="365760" y="1554480"/>
-            <a:ext cx="7315200" cy="3384148"/>
+            <a:ext cx="7315200" cy="3444610"/>
           </a:xfrm>
           <a:prstGeom prst="rect">
             <a:avLst/>
@@ -7048,7 +7048,7 @@
                 </a:solidFill>
                 <a:latin typeface="Arial"/>
               </a:rPr>
-              <a:t>23% pull-air rate, 82nd percentile, with a .846 wOBA on pulled air balls. RHB pull-air plays to the Monster.</a:t>
+              <a:t>23% pull-air rate (82nd pctile). Replaying his Monster-zone contact as wall doubles takes him from a .376 wOBA to about .386 on a half-home schedule.</a:t>
             </a:r>
           </a:p>
         </p:txBody>

--- a/outputs/Red_Sox_Trade_Deadline.pptx
+++ b/outputs/Red_Sox_Trade_Deadline.pptx
@@ -5741,7 +5741,7 @@
                 </a:solidFill>
                 <a:latin typeface="Arial"/>
               </a:rPr>
-              <a:t>The adjusted model (pitcher/opponent/park controls) finds no significant catcher effect: -31 pts, 95% CI [-84, +21]. Nothing here for a trade to fix.</a:t>
+              <a:t>League catchers hit ~90 wRC+ and Wong beats that bar; the gap is all Narvaez's bat, and his value is the glove. The adjusted model agrees: -31 pts, CI [-84, +21], no significant catcher effect. A power bat would cost a top arm to fix a half-time problem.</a:t>
             </a:r>
           </a:p>
         </p:txBody>

--- a/outputs/Red_Sox_Trade_Deadline.pptx
+++ b/outputs/Red_Sox_Trade_Deadline.pptx
@@ -6166,7 +6166,7 @@
                 </a:solidFill>
                 <a:latin typeface="Arial"/>
               </a:rPr>
-              <a:t>2 · THE STABILIZER · IF THE PRICE HOLDS</a:t>
+              <a:t>2 · THE INNINGS · FILLS EARLY'S SLOT</a:t>
             </a:r>
           </a:p>
         </p:txBody>
@@ -6208,7 +6208,7 @@
                 </a:solidFill>
                 <a:latin typeface="Arial"/>
               </a:rPr>
-              <a:t>2B Luis Arraez (SFG)</a:t>
+              <a:t>RHP Michael Wacha (KCR)</a:t>
             </a:r>
           </a:p>
         </p:txBody>
@@ -6250,7 +6250,7 @@
                 </a:solidFill>
                 <a:latin typeface="Arial"/>
               </a:rPr>
-              <a:t>For Brayan Bello, the first deal that touches the active roster. Zero prospect cost; Arraez fills a patchwork platoon spot, not a hot regular's.</a:t>
+              <a:t>A 40 FV flier for a veteran back-end starter while Crochet and Sandoval build back. Buy-low alt: Gausman, whose FIP beats his ERA, the mirror of the Early sale.</a:t>
             </a:r>
           </a:p>
         </p:txBody>
@@ -6340,7 +6340,7 @@
                 </a:solidFill>
                 <a:latin typeface="Arial"/>
               </a:rPr>
-              <a:t>3 · THE BIG SWING · PROBABLY WAIT</a:t>
+              <a:t>3 · THE SHORTSTOP · PROBABLY WAIT</a:t>
             </a:r>
           </a:p>
         </p:txBody>
@@ -6598,7 +6598,7 @@
                 </a:solidFill>
                 <a:latin typeface="Arial"/>
               </a:rPr>
-              <a:t>The value math worked; the battery map is the veto. No August bat is worth resetting eight pitcher-catcher pairings on a staff carrying the season.</a:t>
+              <a:t>The battery map was the veto, and the market agreed: torn meniscus, 10-day IL on July 26. Boston was right not to pay for a catcher bat it never needed.</a:t>
             </a:r>
           </a:p>
         </p:txBody>

--- a/outputs/Red_Sox_Trade_Deadline.pptx
+++ b/outputs/Red_Sox_Trade_Deadline.pptx
@@ -6941,7 +6941,7 @@
                 </a:solidFill>
                 <a:latin typeface="Arial"/>
               </a:rPr>
-              <a:t>Curtis Mead (25) from Washington for Connelly Early: one surplus arm for a 134 wRC+ infield bat with years of club control.</a:t>
+              <a:t>Curtis Mead (25) from Washington for Connelly Early: one surplus arm for a former top-100 prospect at a 134 wRC+ with years of club control.</a:t>
             </a:r>
           </a:p>
         </p:txBody>
@@ -7894,7 +7894,7 @@
                 </a:solidFill>
                 <a:latin typeface="Arial"/>
               </a:rPr>
-              <a:t>134 wRC+ at 25, backed by a .359 xwOBA. Years of club control at the position the audit flagged.</a:t>
+              <a:t>Former top-100 prospect, 134 wRC+ at 25, backed by a .359 xwOBA. Years of club control at the position the audit flagged.</a:t>
             </a:r>
           </a:p>
         </p:txBody>

--- a/outputs/Red_Sox_Trade_Deadline.pptx
+++ b/outputs/Red_Sox_Trade_Deadline.pptx
@@ -4085,7 +4085,7 @@
         <p:spPr>
           <a:xfrm>
             <a:off x="365760" y="1600200"/>
-            <a:ext cx="7315200" cy="3257028"/>
+            <a:ext cx="7315200" cy="2434241"/>
           </a:xfrm>
           <a:prstGeom prst="rect">
             <a:avLst/>
@@ -4408,7 +4408,7 @@
                 </a:solidFill>
                 <a:latin typeface="Arial"/>
               </a:rPr>
-              <a:t>Same screen on the everyday lineup: Contreras +130 OPS pts, Rafaela +76 OPS pts. Expect good, not scorching, from here.</a:t>
+              <a:t>Same screen, lineup and rotation: Contreras +130 OPS pts, Rafaela +76 OPS pts; Gray and Suarez are also under their career ERAs. Expect good, not scorching, from here.</a:t>
             </a:r>
           </a:p>
         </p:txBody>

--- a/outputs/Red_Sox_Trade_Deadline.pptx
+++ b/outputs/Red_Sox_Trade_Deadline.pptx
@@ -3450,7 +3450,7 @@
                 </a:solidFill>
                 <a:latin typeface="Arial"/>
               </a:rPr>
-              <a:t>The roster's biggest hole is the Duran slump itself</a:t>
+              <a:t>Left Field Is A Black Hole In 2026</a:t>
             </a:r>
           </a:p>
         </p:txBody>
@@ -4063,7 +4063,7 @@
                 </a:solidFill>
                 <a:latin typeface="Arial"/>
               </a:rPr>
-              <a:t>Career years everywhere. Could mean regression</a:t>
+              <a:t>Regression Candidates</a:t>
             </a:r>
           </a:p>
         </p:txBody>
@@ -4783,7 +4783,7 @@
                 </a:solidFill>
                 <a:latin typeface="Arial"/>
               </a:rPr>
-              <a:t>Career-year first halves usually give it back</a:t>
+              <a:t>Career-year First Halves Usually Give Back</a:t>
             </a:r>
           </a:p>
         </p:txBody>
@@ -5902,7 +5902,7 @@
                 </a:solidFill>
                 <a:latin typeface="Arial"/>
               </a:rPr>
-              <a:t>Three trades that fit, and one walk-away</a:t>
+              <a:t>Possible Trades</a:t>
             </a:r>
           </a:p>
         </p:txBody>
@@ -6166,7 +6166,7 @@
                 </a:solidFill>
                 <a:latin typeface="Arial"/>
               </a:rPr>
-              <a:t>2 · THE INNINGS · FILLS EARLY'S SLOT</a:t>
+              <a:t>2 · MID LEVEL STARTER</a:t>
             </a:r>
           </a:p>
         </p:txBody>
@@ -6424,7 +6424,7 @@
                 </a:solidFill>
                 <a:latin typeface="Arial"/>
               </a:rPr>
-              <a:t>For Tolle + Bennett + a 45 FV: two arms out of a winning rotation midseason. Right for the franchise window, and still there in the winter. Controlled through 2029.</a:t>
+              <a:t>For Tolle / Bennett + a 45 FV: two arms out of a winning rotation midseason. Right for the franchise window, and still there in the winter. Blocks Mayer or Arias as well. Controlled through 2029.</a:t>
             </a:r>
           </a:p>
         </p:txBody>
@@ -6556,7 +6556,7 @@
                 </a:solidFill>
                 <a:latin typeface="Arial"/>
               </a:rPr>
-              <a:t>C Shea Langeliers (ATH)</a:t>
+              <a:t>C Shea Langeliers (ATH) / Hunter Goodman (COL)</a:t>
             </a:r>
           </a:p>
         </p:txBody>
@@ -6598,7 +6598,7 @@
                 </a:solidFill>
                 <a:latin typeface="Arial"/>
               </a:rPr>
-              <a:t>The battery map was the veto, and the market agreed: torn meniscus, 10-day IL on July 26. Boston was right not to pay for a catcher bat it never needed.</a:t>
+              <a:t>Not worth overpaying for either. Langeliers just hit the 10-day IL with a torn meniscus, so Goodman's price shoots through the roof. Boston was right not to pay for a catcher bat it never needed.</a:t>
             </a:r>
           </a:p>
         </p:txBody>
@@ -6810,7 +6810,7 @@
                 </a:solidFill>
                 <a:latin typeface="Arial"/>
               </a:rPr>
-              <a:t>They made one: Mead for Early</a:t>
+              <a:t>New Acquisition: Mead Breakdown</a:t>
             </a:r>
           </a:p>
         </p:txBody>
@@ -8132,7 +8132,7 @@
         </p:nvSpPr>
         <p:spPr>
           <a:xfrm>
-            <a:off x="566928" y="640080"/>
+            <a:off x="566928" y="566928"/>
             <a:ext cx="310896" cy="310896"/>
           </a:xfrm>
           <a:prstGeom prst="roundRect">
@@ -8178,7 +8178,7 @@
         </p:nvSpPr>
         <p:spPr>
           <a:xfrm>
-            <a:off x="960120" y="621792"/>
+            <a:off x="960120" y="548640"/>
             <a:ext cx="9144000" cy="365760"/>
           </a:xfrm>
           <a:prstGeom prst="rect">
@@ -8214,14 +8214,440 @@
       </p:sp>
       <p:sp>
         <p:nvSpPr>
-          <p:cNvPr id="4" name="Rounded Rectangle 3"/>
+          <p:cNvPr id="4" name="TextBox 3"/>
+          <p:cNvSpPr txBox="1"/>
+          <p:nvPr/>
+        </p:nvSpPr>
+        <p:spPr>
+          <a:xfrm>
+            <a:off x="566928" y="960120"/>
+            <a:ext cx="11064240" cy="822960"/>
+          </a:xfrm>
+          <a:prstGeom prst="rect">
+            <a:avLst/>
+          </a:prstGeom>
+          <a:noFill/>
+        </p:spPr>
+        <p:txBody>
+          <a:bodyPr wrap="square" anchor="t" lIns="0" rIns="0" tIns="0" bIns="0">
+            <a:spAutoFit/>
+          </a:bodyPr>
+          <a:lstStyle/>
+          <a:p>
+            <a:pPr algn="l">
+              <a:lnSpc>
+                <a:spcPct val="100000"/>
+              </a:lnSpc>
+              <a:spcAft>
+                <a:spcPts val="0"/>
+              </a:spcAft>
+            </a:pPr>
+            <a:r>
+              <a:rPr sz="4000" b="1" i="0">
+                <a:solidFill>
+                  <a:srgbClr val="F4F7FC"/>
+                </a:solidFill>
+                <a:latin typeface="Arial"/>
+              </a:rPr>
+              <a:t>What I'd Do Before August 3</a:t>
+            </a:r>
+          </a:p>
+        </p:txBody>
+      </p:sp>
+      <p:sp>
+        <p:nvSpPr>
+          <p:cNvPr id="5" name="Rounded Rectangle 4"/>
           <p:cNvSpPr/>
           <p:nvPr/>
         </p:nvSpPr>
         <p:spPr>
           <a:xfrm>
-            <a:off x="640080" y="1837943"/>
-            <a:ext cx="164592" cy="164592"/>
+            <a:off x="566928" y="1874519"/>
+            <a:ext cx="11064240" cy="1371600"/>
+          </a:xfrm>
+          <a:prstGeom prst="roundRect">
+            <a:avLst>
+              <a:gd name="adj" fmla="val 6000"/>
+            </a:avLst>
+          </a:prstGeom>
+          <a:solidFill>
+            <a:srgbClr val="121E33"/>
+          </a:solidFill>
+          <a:ln w="12700">
+            <a:solidFill>
+              <a:srgbClr val="26334E"/>
+            </a:solidFill>
+          </a:ln>
+          <a:effectLst/>
+        </p:spPr>
+        <p:style>
+          <a:lnRef idx="1">
+            <a:schemeClr val="accent1"/>
+          </a:lnRef>
+          <a:fillRef idx="3">
+            <a:schemeClr val="accent1"/>
+          </a:fillRef>
+          <a:effectRef idx="2">
+            <a:schemeClr val="accent1"/>
+          </a:effectRef>
+          <a:fontRef idx="minor">
+            <a:schemeClr val="lt1"/>
+          </a:fontRef>
+        </p:style>
+        <p:txBody>
+          <a:bodyPr rtlCol="0" anchor="ctr"/>
+          <a:lstStyle/>
+          <a:p>
+            <a:pPr algn="ctr"/>
+          </a:p>
+        </p:txBody>
+      </p:sp>
+      <p:sp>
+        <p:nvSpPr>
+          <p:cNvPr id="6" name="TextBox 5"/>
+          <p:cNvSpPr txBox="1"/>
+          <p:nvPr/>
+        </p:nvSpPr>
+        <p:spPr>
+          <a:xfrm>
+            <a:off x="868680" y="2057400"/>
+            <a:ext cx="2606040" cy="640080"/>
+          </a:xfrm>
+          <a:prstGeom prst="rect">
+            <a:avLst/>
+          </a:prstGeom>
+          <a:noFill/>
+        </p:spPr>
+        <p:txBody>
+          <a:bodyPr wrap="square" anchor="t" lIns="0" rIns="0" tIns="0" bIns="0">
+            <a:spAutoFit/>
+          </a:bodyPr>
+          <a:lstStyle/>
+          <a:p>
+            <a:pPr algn="l">
+              <a:lnSpc>
+                <a:spcPct val="100000"/>
+              </a:lnSpc>
+              <a:spcAft>
+                <a:spcPts val="0"/>
+              </a:spcAft>
+            </a:pPr>
+            <a:r>
+              <a:rPr sz="3400" b="1" i="0">
+                <a:solidFill>
+                  <a:srgbClr val="E8615A"/>
+                </a:solidFill>
+                <a:latin typeface="Courier New"/>
+              </a:rPr>
+              <a:t>77%</a:t>
+            </a:r>
+          </a:p>
+        </p:txBody>
+      </p:sp>
+      <p:sp>
+        <p:nvSpPr>
+          <p:cNvPr id="7" name="TextBox 6"/>
+          <p:cNvSpPr txBox="1"/>
+          <p:nvPr/>
+        </p:nvSpPr>
+        <p:spPr>
+          <a:xfrm>
+            <a:off x="868680" y="2761488"/>
+            <a:ext cx="2606040" cy="365760"/>
+          </a:xfrm>
+          <a:prstGeom prst="rect">
+            <a:avLst/>
+          </a:prstGeom>
+          <a:noFill/>
+        </p:spPr>
+        <p:txBody>
+          <a:bodyPr wrap="square" anchor="t" lIns="0" rIns="0" tIns="0" bIns="0">
+            <a:spAutoFit/>
+          </a:bodyPr>
+          <a:lstStyle/>
+          <a:p>
+            <a:pPr algn="l">
+              <a:lnSpc>
+                <a:spcPct val="100000"/>
+              </a:lnSpc>
+              <a:spcAft>
+                <a:spcPts val="0"/>
+              </a:spcAft>
+            </a:pPr>
+            <a:r>
+              <a:rPr sz="950" b="1" i="0">
+                <a:solidFill>
+                  <a:srgbClr val="8C97AC"/>
+                </a:solidFill>
+                <a:latin typeface="Courier New"/>
+              </a:rPr>
+              <a:t>PLAYOFF ODDS</a:t>
+            </a:r>
+          </a:p>
+        </p:txBody>
+      </p:sp>
+      <p:sp>
+        <p:nvSpPr>
+          <p:cNvPr id="8" name="TextBox 7"/>
+          <p:cNvSpPr txBox="1"/>
+          <p:nvPr/>
+        </p:nvSpPr>
+        <p:spPr>
+          <a:xfrm>
+            <a:off x="3675888" y="2057400"/>
+            <a:ext cx="2606040" cy="640080"/>
+          </a:xfrm>
+          <a:prstGeom prst="rect">
+            <a:avLst/>
+          </a:prstGeom>
+          <a:noFill/>
+        </p:spPr>
+        <p:txBody>
+          <a:bodyPr wrap="square" anchor="t" lIns="0" rIns="0" tIns="0" bIns="0">
+            <a:spAutoFit/>
+          </a:bodyPr>
+          <a:lstStyle/>
+          <a:p>
+            <a:pPr algn="l">
+              <a:lnSpc>
+                <a:spcPct val="100000"/>
+              </a:lnSpc>
+              <a:spcAft>
+                <a:spcPts val="0"/>
+              </a:spcAft>
+            </a:pPr>
+            <a:r>
+              <a:rPr sz="3400" b="1" i="0">
+                <a:solidFill>
+                  <a:srgbClr val="F4F7FC"/>
+                </a:solidFill>
+                <a:latin typeface="Courier New"/>
+              </a:rPr>
+              <a:t>+41</a:t>
+            </a:r>
+          </a:p>
+        </p:txBody>
+      </p:sp>
+      <p:sp>
+        <p:nvSpPr>
+          <p:cNvPr id="9" name="TextBox 8"/>
+          <p:cNvSpPr txBox="1"/>
+          <p:nvPr/>
+        </p:nvSpPr>
+        <p:spPr>
+          <a:xfrm>
+            <a:off x="3675888" y="2761488"/>
+            <a:ext cx="2606040" cy="365760"/>
+          </a:xfrm>
+          <a:prstGeom prst="rect">
+            <a:avLst/>
+          </a:prstGeom>
+          <a:noFill/>
+        </p:spPr>
+        <p:txBody>
+          <a:bodyPr wrap="square" anchor="t" lIns="0" rIns="0" tIns="0" bIns="0">
+            <a:spAutoFit/>
+          </a:bodyPr>
+          <a:lstStyle/>
+          <a:p>
+            <a:pPr algn="l">
+              <a:lnSpc>
+                <a:spcPct val="100000"/>
+              </a:lnSpc>
+              <a:spcAft>
+                <a:spcPts val="0"/>
+              </a:spcAft>
+            </a:pPr>
+            <a:r>
+              <a:rPr sz="950" b="1" i="0">
+                <a:solidFill>
+                  <a:srgbClr val="8C97AC"/>
+                </a:solidFill>
+                <a:latin typeface="Courier New"/>
+              </a:rPr>
+              <a:t>RUN DIFF</a:t>
+            </a:r>
+          </a:p>
+        </p:txBody>
+      </p:sp>
+      <p:sp>
+        <p:nvSpPr>
+          <p:cNvPr id="10" name="TextBox 9"/>
+          <p:cNvSpPr txBox="1"/>
+          <p:nvPr/>
+        </p:nvSpPr>
+        <p:spPr>
+          <a:xfrm>
+            <a:off x="6483096" y="2057400"/>
+            <a:ext cx="2606040" cy="640080"/>
+          </a:xfrm>
+          <a:prstGeom prst="rect">
+            <a:avLst/>
+          </a:prstGeom>
+          <a:noFill/>
+        </p:spPr>
+        <p:txBody>
+          <a:bodyPr wrap="square" anchor="t" lIns="0" rIns="0" tIns="0" bIns="0">
+            <a:spAutoFit/>
+          </a:bodyPr>
+          <a:lstStyle/>
+          <a:p>
+            <a:pPr algn="l">
+              <a:lnSpc>
+                <a:spcPct val="100000"/>
+              </a:lnSpc>
+              <a:spcAft>
+                <a:spcPts val="0"/>
+              </a:spcAft>
+            </a:pPr>
+            <a:r>
+              <a:rPr sz="3400" b="1" i="0">
+                <a:solidFill>
+                  <a:srgbClr val="F4F7FC"/>
+                </a:solidFill>
+                <a:latin typeface="Courier New"/>
+              </a:rPr>
+              <a:t>8</a:t>
+            </a:r>
+          </a:p>
+        </p:txBody>
+      </p:sp>
+      <p:sp>
+        <p:nvSpPr>
+          <p:cNvPr id="11" name="TextBox 10"/>
+          <p:cNvSpPr txBox="1"/>
+          <p:nvPr/>
+        </p:nvSpPr>
+        <p:spPr>
+          <a:xfrm>
+            <a:off x="6483096" y="2761488"/>
+            <a:ext cx="2606040" cy="365760"/>
+          </a:xfrm>
+          <a:prstGeom prst="rect">
+            <a:avLst/>
+          </a:prstGeom>
+          <a:noFill/>
+        </p:spPr>
+        <p:txBody>
+          <a:bodyPr wrap="square" anchor="t" lIns="0" rIns="0" tIns="0" bIns="0">
+            <a:spAutoFit/>
+          </a:bodyPr>
+          <a:lstStyle/>
+          <a:p>
+            <a:pPr algn="l">
+              <a:lnSpc>
+                <a:spcPct val="100000"/>
+              </a:lnSpc>
+              <a:spcAft>
+                <a:spcPts val="0"/>
+              </a:spcAft>
+            </a:pPr>
+            <a:r>
+              <a:rPr sz="950" b="1" i="0">
+                <a:solidFill>
+                  <a:srgbClr val="8C97AC"/>
+                </a:solidFill>
+                <a:latin typeface="Courier New"/>
+              </a:rPr>
+              <a:t>DAYS LEFT</a:t>
+            </a:r>
+          </a:p>
+        </p:txBody>
+      </p:sp>
+      <p:sp>
+        <p:nvSpPr>
+          <p:cNvPr id="12" name="TextBox 11"/>
+          <p:cNvSpPr txBox="1"/>
+          <p:nvPr/>
+        </p:nvSpPr>
+        <p:spPr>
+          <a:xfrm>
+            <a:off x="9290304" y="2057400"/>
+            <a:ext cx="2606040" cy="640080"/>
+          </a:xfrm>
+          <a:prstGeom prst="rect">
+            <a:avLst/>
+          </a:prstGeom>
+          <a:noFill/>
+        </p:spPr>
+        <p:txBody>
+          <a:bodyPr wrap="square" anchor="t" lIns="0" rIns="0" tIns="0" bIns="0">
+            <a:spAutoFit/>
+          </a:bodyPr>
+          <a:lstStyle/>
+          <a:p>
+            <a:pPr algn="l">
+              <a:lnSpc>
+                <a:spcPct val="100000"/>
+              </a:lnSpc>
+              <a:spcAft>
+                <a:spcPts val="0"/>
+              </a:spcAft>
+            </a:pPr>
+            <a:r>
+              <a:rPr sz="3400" b="1" i="0">
+                <a:solidFill>
+                  <a:srgbClr val="F4F7FC"/>
+                </a:solidFill>
+                <a:latin typeface="Courier New"/>
+              </a:rPr>
+              <a:t>39%</a:t>
+            </a:r>
+          </a:p>
+        </p:txBody>
+      </p:sp>
+      <p:sp>
+        <p:nvSpPr>
+          <p:cNvPr id="13" name="TextBox 12"/>
+          <p:cNvSpPr txBox="1"/>
+          <p:nvPr/>
+        </p:nvSpPr>
+        <p:spPr>
+          <a:xfrm>
+            <a:off x="9290304" y="2761488"/>
+            <a:ext cx="2606040" cy="365760"/>
+          </a:xfrm>
+          <a:prstGeom prst="rect">
+            <a:avLst/>
+          </a:prstGeom>
+          <a:noFill/>
+        </p:spPr>
+        <p:txBody>
+          <a:bodyPr wrap="square" anchor="t" lIns="0" rIns="0" tIns="0" bIns="0">
+            <a:spAutoFit/>
+          </a:bodyPr>
+          <a:lstStyle/>
+          <a:p>
+            <a:pPr algn="l">
+              <a:lnSpc>
+                <a:spcPct val="100000"/>
+              </a:lnSpc>
+              <a:spcAft>
+                <a:spcPts val="0"/>
+              </a:spcAft>
+            </a:pPr>
+            <a:r>
+              <a:rPr sz="950" b="1" i="0">
+                <a:solidFill>
+                  <a:srgbClr val="8C97AC"/>
+                </a:solidFill>
+                <a:latin typeface="Courier New"/>
+              </a:rPr>
+              <a:t>OF A CAREER-BEST HALF SURVIVES, HISTORICALLY</a:t>
+            </a:r>
+          </a:p>
+        </p:txBody>
+      </p:sp>
+      <p:sp>
+        <p:nvSpPr>
+          <p:cNvPr id="14" name="Rounded Rectangle 13"/>
+          <p:cNvSpPr/>
+          <p:nvPr/>
+        </p:nvSpPr>
+        <p:spPr>
+          <a:xfrm>
+            <a:off x="640080" y="3630168"/>
+            <a:ext cx="384048" cy="384048"/>
           </a:xfrm>
           <a:prstGeom prst="roundRect">
             <a:avLst>
@@ -8251,23 +8677,32 @@
           </a:fontRef>
         </p:style>
         <p:txBody>
-          <a:bodyPr rtlCol="0" anchor="ctr"/>
+          <a:bodyPr rtlCol="0" anchor="ctr" wrap="none"/>
           <a:lstStyle/>
           <a:p>
             <a:pPr algn="ctr"/>
-          </a:p>
-        </p:txBody>
-      </p:sp>
-      <p:sp>
-        <p:nvSpPr>
-          <p:cNvPr id="5" name="TextBox 4"/>
-          <p:cNvSpPr txBox="1"/>
-          <p:nvPr/>
-        </p:nvSpPr>
-        <p:spPr>
-          <a:xfrm>
-            <a:off x="960120" y="1783080"/>
-            <a:ext cx="10424160" cy="914400"/>
+            <a:r>
+              <a:rPr sz="1600" b="1">
+                <a:solidFill>
+                  <a:srgbClr val="0B1220"/>
+                </a:solidFill>
+                <a:latin typeface="Courier New"/>
+              </a:rPr>
+              <a:t>1</a:t>
+            </a:r>
+          </a:p>
+        </p:txBody>
+      </p:sp>
+      <p:sp>
+        <p:nvSpPr>
+          <p:cNvPr id="15" name="TextBox 14"/>
+          <p:cNvSpPr txBox="1"/>
+          <p:nvPr/>
+        </p:nvSpPr>
+        <p:spPr>
+          <a:xfrm>
+            <a:off x="1234440" y="3593592"/>
+            <a:ext cx="10241280" cy="914400"/>
           </a:xfrm>
           <a:prstGeom prst="rect">
             <a:avLst/>
@@ -8289,36 +8724,36 @@
               </a:spcAft>
             </a:pPr>
             <a:r>
-              <a:rPr sz="2100" b="1" i="0">
+              <a:rPr sz="1850" b="1" i="0">
                 <a:solidFill>
                   <a:srgbClr val="F4F7FC"/>
                 </a:solidFill>
                 <a:latin typeface="Arial"/>
               </a:rPr>
-              <a:t>Play the hand.  </a:t>
-            </a:r>
-            <a:r>
-              <a:rPr sz="1500" b="0" i="0">
+              <a:t>Finish the shopping: a reliever and innings.  </a:t>
+            </a:r>
+            <a:r>
+              <a:rPr sz="1350" b="0" i="0">
                 <a:solidFill>
                   <a:srgbClr val="CDD4E2"/>
                 </a:solidFill>
                 <a:latin typeface="Arial"/>
               </a:rPr>
-              <a:t>77% playoff odds, +41 run differential, a wild card in hand, buy small (a reliever first), keep the vets, and let the record keep catching up to the process.</a:t>
-            </a:r>
-          </a:p>
-        </p:txBody>
-      </p:sp>
-      <p:sp>
-        <p:nvSpPr>
-          <p:cNvPr id="6" name="Rounded Rectangle 5"/>
+              <a:t>A Weaver-class arm for prospects and a Wacha-class starter for a flier. Nobody in the room loses a job; two quiet wins get covered.</a:t>
+            </a:r>
+          </a:p>
+        </p:txBody>
+      </p:sp>
+      <p:sp>
+        <p:nvSpPr>
+          <p:cNvPr id="16" name="Rounded Rectangle 15"/>
           <p:cNvSpPr/>
           <p:nvPr/>
         </p:nvSpPr>
         <p:spPr>
           <a:xfrm>
-            <a:off x="640080" y="3072384"/>
-            <a:ext cx="164592" cy="164592"/>
+            <a:off x="640080" y="4526279"/>
+            <a:ext cx="384048" cy="384048"/>
           </a:xfrm>
           <a:prstGeom prst="roundRect">
             <a:avLst>
@@ -8348,23 +8783,32 @@
           </a:fontRef>
         </p:style>
         <p:txBody>
-          <a:bodyPr rtlCol="0" anchor="ctr"/>
+          <a:bodyPr rtlCol="0" anchor="ctr" wrap="none"/>
           <a:lstStyle/>
           <a:p>
             <a:pPr algn="ctr"/>
-          </a:p>
-        </p:txBody>
-      </p:sp>
-      <p:sp>
-        <p:nvSpPr>
-          <p:cNvPr id="7" name="TextBox 6"/>
-          <p:cNvSpPr txBox="1"/>
-          <p:nvPr/>
-        </p:nvSpPr>
-        <p:spPr>
-          <a:xfrm>
-            <a:off x="960120" y="3017520"/>
-            <a:ext cx="10424160" cy="914400"/>
+            <a:r>
+              <a:rPr sz="1600" b="1">
+                <a:solidFill>
+                  <a:srgbClr val="0B1220"/>
+                </a:solidFill>
+                <a:latin typeface="Courier New"/>
+              </a:rPr>
+              <a:t>2</a:t>
+            </a:r>
+          </a:p>
+        </p:txBody>
+      </p:sp>
+      <p:sp>
+        <p:nvSpPr>
+          <p:cNvPr id="17" name="TextBox 16"/>
+          <p:cNvSpPr txBox="1"/>
+          <p:nvPr/>
+        </p:nvSpPr>
+        <p:spPr>
+          <a:xfrm>
+            <a:off x="1234440" y="4489704"/>
+            <a:ext cx="10241280" cy="914400"/>
           </a:xfrm>
           <a:prstGeom prst="rect">
             <a:avLst/>
@@ -8386,36 +8830,36 @@
               </a:spcAft>
             </a:pPr>
             <a:r>
-              <a:rPr sz="2100" b="1" i="0">
+              <a:rPr sz="1850" b="1" i="0">
                 <a:solidFill>
                   <a:srgbClr val="F4F7FC"/>
                 </a:solidFill>
                 <a:latin typeface="Arial"/>
               </a:rPr>
-              <a:t>Cash the surplus, not the slump.  </a:t>
-            </a:r>
-            <a:r>
-              <a:rPr sz="1500" b="0" i="0">
+              <a:t>Trust the diagnosis, not the heater.  </a:t>
+            </a:r>
+            <a:r>
+              <a:rPr sz="1350" b="0" i="0">
                 <a:solidFill>
                   <a:srgbClr val="CDD4E2"/>
                 </a:solidFill>
                 <a:latin typeface="Arial"/>
               </a:rPr>
-              <a:t>Hold Duran through the deadline; re-price him in winter, extend or trade the 2025 player, never the unlucky 2026 one.</a:t>
-            </a:r>
-          </a:p>
-        </p:txBody>
-      </p:sp>
-      <p:sp>
-        <p:nvSpPr>
-          <p:cNvPr id="8" name="Rounded Rectangle 7"/>
+              <a:t>The regression watch says plan for the fade. Mead, the returning injured bats, and Duran's own regression are the real September lineup.</a:t>
+            </a:r>
+          </a:p>
+        </p:txBody>
+      </p:sp>
+      <p:sp>
+        <p:nvSpPr>
+          <p:cNvPr id="18" name="Rounded Rectangle 17"/>
           <p:cNvSpPr/>
           <p:nvPr/>
         </p:nvSpPr>
         <p:spPr>
           <a:xfrm>
-            <a:off x="640080" y="4306824"/>
-            <a:ext cx="164592" cy="164592"/>
+            <a:off x="640080" y="5422392"/>
+            <a:ext cx="384048" cy="384048"/>
           </a:xfrm>
           <a:prstGeom prst="roundRect">
             <a:avLst>
@@ -8445,23 +8889,32 @@
           </a:fontRef>
         </p:style>
         <p:txBody>
-          <a:bodyPr rtlCol="0" anchor="ctr"/>
+          <a:bodyPr rtlCol="0" anchor="ctr" wrap="none"/>
           <a:lstStyle/>
           <a:p>
             <a:pPr algn="ctr"/>
-          </a:p>
-        </p:txBody>
-      </p:sp>
-      <p:sp>
-        <p:nvSpPr>
-          <p:cNvPr id="9" name="TextBox 8"/>
-          <p:cNvSpPr txBox="1"/>
-          <p:nvPr/>
-        </p:nvSpPr>
-        <p:spPr>
-          <a:xfrm>
-            <a:off x="960120" y="4251960"/>
-            <a:ext cx="10424160" cy="914400"/>
+            <a:r>
+              <a:rPr sz="1600" b="1">
+                <a:solidFill>
+                  <a:srgbClr val="0B1220"/>
+                </a:solidFill>
+                <a:latin typeface="Courier New"/>
+              </a:rPr>
+              <a:t>3</a:t>
+            </a:r>
+          </a:p>
+        </p:txBody>
+      </p:sp>
+      <p:sp>
+        <p:nvSpPr>
+          <p:cNvPr id="19" name="TextBox 18"/>
+          <p:cNvSpPr txBox="1"/>
+          <p:nvPr/>
+        </p:nvSpPr>
+        <p:spPr>
+          <a:xfrm>
+            <a:off x="1234440" y="5385816"/>
+            <a:ext cx="10241280" cy="914400"/>
           </a:xfrm>
           <a:prstGeom prst="rect">
             <a:avLst/>
@@ -8483,73 +8936,73 @@
               </a:spcAft>
             </a:pPr>
             <a:r>
-              <a:rPr sz="2100" b="1" i="0">
+              <a:rPr sz="1850" b="1" i="0">
                 <a:solidFill>
                   <a:srgbClr val="F4F7FC"/>
                 </a:solidFill>
                 <a:latin typeface="Arial"/>
               </a:rPr>
-              <a:t>Stop fighting the Yoshida deal.  </a:t>
-            </a:r>
-            <a:r>
-              <a:rPr sz="1500" b="0" i="0">
+              <a:t>Hold Duran. Decide in the winter.  </a:t>
+            </a:r>
+            <a:r>
+              <a:rPr sz="1350" b="0" i="0">
                 <a:solidFill>
                   <a:srgbClr val="CDD4E2"/>
                 </a:solidFill>
                 <a:latin typeface="Arial"/>
               </a:rPr>
-              <a:t>The bat is back to average or better; absorb the contract and let it expire.</a:t>
-            </a:r>
-          </a:p>
-        </p:txBody>
-      </p:sp>
-      <p:sp>
-        <p:nvSpPr>
-          <p:cNvPr id="10" name="TextBox 9"/>
-          <p:cNvSpPr txBox="1"/>
-          <p:nvPr/>
-        </p:nvSpPr>
-        <p:spPr>
-          <a:xfrm>
-            <a:off x="960120" y="5623560"/>
-            <a:ext cx="10424160" cy="731520"/>
-          </a:xfrm>
-          <a:prstGeom prst="rect">
-            <a:avLst/>
-          </a:prstGeom>
-          <a:noFill/>
-        </p:spPr>
-        <p:txBody>
-          <a:bodyPr wrap="square" anchor="t" lIns="0" rIns="0" tIns="0" bIns="0">
-            <a:spAutoFit/>
-          </a:bodyPr>
-          <a:lstStyle/>
-          <a:p>
-            <a:pPr algn="l">
-              <a:lnSpc>
-                <a:spcPct val="112000"/>
-              </a:lnSpc>
-              <a:spcAft>
-                <a:spcPts val="400"/>
-              </a:spcAft>
-            </a:pPr>
-            <a:r>
-              <a:rPr sz="1250" b="1" i="0">
+              <a:t>His value is at rock bottom while the underlying numbers say rebound. Buyers read xstats too; nobody pays 2024 prices in August 2026.</a:t>
+            </a:r>
+          </a:p>
+        </p:txBody>
+      </p:sp>
+      <p:sp>
+        <p:nvSpPr>
+          <p:cNvPr id="20" name="TextBox 19"/>
+          <p:cNvSpPr txBox="1"/>
+          <p:nvPr/>
+        </p:nvSpPr>
+        <p:spPr>
+          <a:xfrm>
+            <a:off x="566928" y="6263640"/>
+            <a:ext cx="11064240" cy="365760"/>
+          </a:xfrm>
+          <a:prstGeom prst="rect">
+            <a:avLst/>
+          </a:prstGeom>
+          <a:noFill/>
+        </p:spPr>
+        <p:txBody>
+          <a:bodyPr wrap="square" anchor="t" lIns="0" rIns="0" tIns="0" bIns="0">
+            <a:spAutoFit/>
+          </a:bodyPr>
+          <a:lstStyle/>
+          <a:p>
+            <a:pPr algn="l">
+              <a:lnSpc>
+                <a:spcPct val="100000"/>
+              </a:lnSpc>
+              <a:spcAft>
+                <a:spcPts val="0"/>
+              </a:spcAft>
+            </a:pPr>
+            <a:r>
+              <a:rPr sz="1150" b="0" i="1">
                 <a:solidFill>
                   <a:srgbClr val="9AA6BC"/>
                 </a:solidFill>
                 <a:latin typeface="Arial"/>
               </a:rPr>
-              <a:t>Confidence: </a:t>
-            </a:r>
-            <a:r>
-              <a:rPr sz="1250" b="0" i="1">
-                <a:solidFill>
-                  <a:srgbClr val="9AA6BC"/>
-                </a:solidFill>
-                <a:latin typeface="Arial"/>
-              </a:rPr>
-              <a:t>high that 2024 shouldn't be the anchor and pitching is a strength; the open question is how much of 2026's skill dip (chase, whiff, hard-hit are all worse) persists, the one thing to watch before selling.</a:t>
+              <a:t>Every number on these slides regenerates from live data. Predictions frozen July 4, graded in October, flattering or not.  </a:t>
+            </a:r>
+            <a:r>
+              <a:rPr sz="1150" b="1" i="0">
+                <a:solidFill>
+                  <a:srgbClr val="E8615A"/>
+                </a:solidFill>
+                <a:latin typeface="Courier New"/>
+              </a:rPr>
+              <a:t>justinloo12.github.io/red-sox-trade-deadline-thoughts</a:t>
             </a:r>
           </a:p>
         </p:txBody>
@@ -8659,7 +9112,7 @@
                 </a:solidFill>
                 <a:latin typeface="Arial"/>
               </a:rPr>
-              <a:t>A contender by run differential</a:t>
+              <a:t>Red Sox Are Back From The Dead</a:t>
             </a:r>
           </a:p>
         </p:txBody>
@@ -9411,7 +9864,7 @@
                 </a:solidFill>
                 <a:latin typeface="Arial"/>
               </a:rPr>
-              <a:t>Buy, but keep it small</a:t>
+              <a:t>Buy, Nibble At The Edges</a:t>
             </a:r>
           </a:p>
         </p:txBody>
@@ -9917,7 +10370,7 @@
                 </a:solidFill>
                 <a:latin typeface="Arial"/>
               </a:rPr>
-              <a:t>The young, cheap, controllable outfield core</a:t>
+              <a:t>Young, Controllable Outfield Core</a:t>
             </a:r>
           </a:p>
         </p:txBody>
@@ -11875,7 +12328,7 @@
                 </a:solidFill>
                 <a:latin typeface="Arial"/>
               </a:rPr>
-              <a:t>Duran's 2026 is unlucky</a:t>
+              <a:t>Duran's 2026 Is Unlucky</a:t>
             </a:r>
           </a:p>
         </p:txBody>
@@ -12530,7 +12983,7 @@
                 </a:solidFill>
                 <a:latin typeface="Arial"/>
               </a:rPr>
-              <a:t>The rebound is likely for Duran</a:t>
+              <a:t>Duran Will Be Back</a:t>
             </a:r>
           </a:p>
         </p:txBody>
@@ -13008,7 +13461,7 @@
                 </a:solidFill>
                 <a:latin typeface="Arial"/>
               </a:rPr>
-              <a:t>Swing Stats</a:t>
+              <a:t>Duran Swing Stats</a:t>
             </a:r>
           </a:p>
         </p:txBody>
@@ -13616,7 +14069,7 @@
                 </a:solidFill>
                 <a:latin typeface="Arial"/>
               </a:rPr>
-              <a:t>Aging doesn't explain the drop</a:t>
+              <a:t>Aging Not A Factor For Jarren</a:t>
             </a:r>
           </a:p>
         </p:txBody>

--- a/outputs/Red_Sox_Trade_Deadline.pptx
+++ b/outputs/Red_Sox_Trade_Deadline.pptx
@@ -8339,7 +8339,7 @@
                 </a:solidFill>
                 <a:latin typeface="Courier New"/>
               </a:rPr>
-              <a:t>77%</a:t>
+              <a:t>78%</a:t>
             </a:r>
           </a:p>
         </p:txBody>
@@ -8993,7 +8993,7 @@
                 </a:solidFill>
                 <a:latin typeface="Arial"/>
               </a:rPr>
-              <a:t>Every number on these slides regenerates from live data. Predictions frozen July 4, graded in October, flattering or not.  </a:t>
+              <a:t>Every number on these slides regenerates from live data. Predictions frozen July 4 and July 26, graded in October, flattering or not.  </a:t>
             </a:r>
             <a:r>
               <a:rPr sz="1150" b="1" i="0">
@@ -9550,7 +9550,7 @@
                 </a:solidFill>
                 <a:latin typeface="Arial"/>
               </a:rPr>
-              <a:t>77%</a:t>
+              <a:t>78%</a:t>
             </a:r>
           </a:p>
         </p:txBody>
